--- a/docs/submissions/EdgeGuard_Interim_Report.pptx
+++ b/docs/submissions/EdgeGuard_Interim_Report.pptx
@@ -19,9 +19,11 @@
     <p:sldId id="267" r:id="rId13"/>
     <p:sldId id="268" r:id="rId14"/>
     <p:sldId id="269" r:id="rId15"/>
+    <p:sldId id="270" r:id="rId16"/>
+    <p:sldId id="271" r:id="rId17"/>
   </p:sldIdLst>
   <p:notesMasterIdLst>
-    <p:notesMasterId r:id="rId16"/>
+    <p:notesMasterId r:id="rId18"/>
   </p:notesMasterIdLst>
   <p:sldSz cx="12192000" cy="6858000"/>
   <p:notesSz cx="6858000" cy="12192000"/>
@@ -120,34 +122,36 @@
   <p:extLst>
     <p:ext uri="{521415D9-36F7-43E2-AB2F-B90AF26B5E84}">
       <p14:sectionLst xmlns:p14="http://schemas.microsoft.com/office/powerpoint/2010/main">
-        <p14:section name="Introduction" id="{e7409ed7-ee39-a691-08cf-59225172582d}">
+        <p14:section name="Introduction" id="{0ed821e7-1c1a-71f1-d2b0-4db05531ac2e}">
           <p14:sldIdLst>
             <p14:sldId id="256"/>
             <p14:sldId id="257"/>
           </p14:sldIdLst>
         </p14:section>
-        <p14:section name="Use case" id="{909df9f3-9b05-85ca-e0d3-cdc83ae0e570}">
+        <p14:section name="Use case" id="{a568a412-942f-5242-435d-16a7c4ea2011}">
           <p14:sldIdLst>
             <p14:sldId id="258"/>
             <p14:sldId id="259"/>
             <p14:sldId id="260"/>
           </p14:sldIdLst>
         </p14:section>
-        <p14:section name="Architecture" id="{7d2c8bb5-2f7a-0bcf-b943-4b62483b14d8}">
+        <p14:section name="Architecture" id="{93568bcc-abda-86f6-8699-cc0498c7a657}">
           <p14:sldIdLst>
             <p14:sldId id="261"/>
             <p14:sldId id="262"/>
             <p14:sldId id="263"/>
             <p14:sldId id="264"/>
+            <p14:sldId id="265"/>
           </p14:sldIdLst>
         </p14:section>
-        <p14:section name="Status and plan" id="{9e571ee1-c98d-30ff-498b-2e9f22310162}">
+        <p14:section name="Status and plan" id="{c57fa3dc-2eae-fd5a-a37b-ddb0b4a43977}">
           <p14:sldIdLst>
-            <p14:sldId id="265"/>
             <p14:sldId id="266"/>
             <p14:sldId id="267"/>
             <p14:sldId id="268"/>
             <p14:sldId id="269"/>
+            <p14:sldId id="270"/>
+            <p14:sldId id="271"/>
           </p14:sldIdLst>
         </p14:section>
       </p14:sectionLst>
@@ -642,7 +646,7 @@
           <a:p>
             <a:r>
               <a:rPr lang="en-US" dirty="0"/>
-              <a:t>What already works, with evidence. Numbers are from closed-loop simulation against our own first version.</a:t>
+              <a:t>Six steps from a position to a confirmed cue, all through oneM2M resources and subscriptions. If the MEC app goes silent, devices degrade gracefully to local decisions.</a:t>
             </a:r>
             <a:endParaRPr lang="en-US" dirty="0"/>
           </a:p>
@@ -730,7 +734,7 @@
           <a:p>
             <a:r>
               <a:rPr lang="en-US" dirty="0"/>
-              <a:t>Five milestones to the November 20 code freeze, ordered by rubric impact. Hardware, user study and communication work run in parallel from Nov 10.</a:t>
+              <a:t>What already works, with evidence. Numbers are from closed-loop simulation against our own first version.</a:t>
             </a:r>
             <a:endParaRPr lang="en-US" dirty="0"/>
           </a:p>
@@ -818,7 +822,7 @@
           <a:p>
             <a:r>
               <a:rPr lang="en-US" dirty="0"/>
-              <a:t>Each milestone names its deliverables, the rubric criteria it targets, and an acceptance check we can demonstrate.</a:t>
+              <a:t>Four items from the original plan are already built and verified in CI: the SDT data model, CSE handover, federated learning and the AI safety agent.</a:t>
             </a:r>
             <a:endParaRPr lang="en-US" dirty="0"/>
           </a:p>
@@ -906,7 +910,7 @@
           <a:p>
             <a:r>
               <a:rPr lang="en-US" dirty="0"/>
-              <a:t>Main risks and how we contain them.</a:t>
+              <a:t>Five milestones to the November 20 code freeze, ordered by rubric impact. Hardware, user study and communication work run in parallel from Nov 10.</a:t>
             </a:r>
             <a:endParaRPr lang="en-US" dirty="0"/>
           </a:p>
@@ -994,7 +998,7 @@
           <a:p>
             <a:r>
               <a:rPr lang="en-US" dirty="0"/>
-              <a:t>Thank you.</a:t>
+              <a:t>Each milestone names its deliverables, the rubric criteria it targets, and an acceptance check we can demonstrate.</a:t>
             </a:r>
             <a:endParaRPr lang="en-US" dirty="0"/>
           </a:p>
@@ -1018,6 +1022,182 @@
             <a:fld id="{F7021451-1387-4CA6-816F-3879F97B5CBC}" type="slidenum">
               <a:rPr lang="en-US"/>
               <a:t>14</a:t>
+            </a:fld>
+            <a:endParaRPr lang="en-US"/>
+          </a:p>
+        </p:txBody>
+      </p:sp>
+    </p:spTree>
+    <p:extLst>
+      <p:ext uri="{BB962C8B-B14F-4D97-AF65-F5344CB8AC3E}">
+        <p14:creationId xmlns:p14="http://schemas.microsoft.com/office/powerpoint/2010/main" val="1024086991"/>
+      </p:ext>
+    </p:extLst>
+  </p:cSld>
+  <p:clrMapOvr>
+    <a:masterClrMapping/>
+  </p:clrMapOvr>
+</p:notes>
+</file>
+
+<file path=ppt/notesSlides/notesSlide15.xml><?xml version="1.0" encoding="utf-8"?>
+<p:notes xmlns:a="http://schemas.openxmlformats.org/drawingml/2006/main" xmlns:r="http://schemas.openxmlformats.org/officeDocument/2006/relationships" xmlns:p="http://schemas.openxmlformats.org/presentationml/2006/main">
+  <p:cSld>
+    <p:spTree>
+      <p:nvGrpSpPr>
+        <p:cNvPr id="1" name=""/>
+        <p:cNvGrpSpPr/>
+        <p:nvPr/>
+      </p:nvGrpSpPr>
+      <p:grpSpPr>
+        <a:xfrm>
+          <a:off x="0" y="0"/>
+          <a:ext cx="0" cy="0"/>
+          <a:chOff x="0" y="0"/>
+          <a:chExt cx="0" cy="0"/>
+        </a:xfrm>
+      </p:grpSpPr>
+      <p:sp>
+        <p:nvSpPr>
+          <p:cNvPr id="2" name="Slide Image Placeholder 1"/>
+          <p:cNvSpPr>
+            <a:spLocks noGrp="1" noRot="1" noChangeAspect="1"/>
+          </p:cNvSpPr>
+          <p:nvPr>
+            <p:ph type="sldImg"/>
+          </p:nvPr>
+        </p:nvSpPr>
+        <p:spPr/>
+      </p:sp>
+      <p:sp>
+        <p:nvSpPr>
+          <p:cNvPr id="3" name="Notes Placeholder 2"/>
+          <p:cNvSpPr>
+            <a:spLocks noGrp="1"/>
+          </p:cNvSpPr>
+          <p:nvPr>
+            <p:ph type="body" idx="1"/>
+          </p:nvPr>
+        </p:nvSpPr>
+        <p:spPr/>
+        <p:txBody>
+          <a:bodyPr/>
+          <a:lstStyle/>
+          <a:p>
+            <a:r>
+              <a:rPr lang="en-US" dirty="0"/>
+              <a:t>Main risks and how we contain them.</a:t>
+            </a:r>
+            <a:endParaRPr lang="en-US" dirty="0"/>
+          </a:p>
+        </p:txBody>
+      </p:sp>
+      <p:sp>
+        <p:nvSpPr>
+          <p:cNvPr id="4" name="Slide Number Placeholder 3"/>
+          <p:cNvSpPr>
+            <a:spLocks noGrp="1"/>
+          </p:cNvSpPr>
+          <p:nvPr>
+            <p:ph type="sldNum" sz="quarter" idx="10"/>
+          </p:nvPr>
+        </p:nvSpPr>
+        <p:spPr/>
+        <p:txBody>
+          <a:bodyPr/>
+          <a:lstStyle/>
+          <a:p>
+            <a:fld id="{F7021451-1387-4CA6-816F-3879F97B5CBC}" type="slidenum">
+              <a:rPr lang="en-US"/>
+              <a:t>15</a:t>
+            </a:fld>
+            <a:endParaRPr lang="en-US"/>
+          </a:p>
+        </p:txBody>
+      </p:sp>
+    </p:spTree>
+    <p:extLst>
+      <p:ext uri="{BB962C8B-B14F-4D97-AF65-F5344CB8AC3E}">
+        <p14:creationId xmlns:p14="http://schemas.microsoft.com/office/powerpoint/2010/main" val="1024086991"/>
+      </p:ext>
+    </p:extLst>
+  </p:cSld>
+  <p:clrMapOvr>
+    <a:masterClrMapping/>
+  </p:clrMapOvr>
+</p:notes>
+</file>
+
+<file path=ppt/notesSlides/notesSlide16.xml><?xml version="1.0" encoding="utf-8"?>
+<p:notes xmlns:a="http://schemas.openxmlformats.org/drawingml/2006/main" xmlns:r="http://schemas.openxmlformats.org/officeDocument/2006/relationships" xmlns:p="http://schemas.openxmlformats.org/presentationml/2006/main">
+  <p:cSld>
+    <p:spTree>
+      <p:nvGrpSpPr>
+        <p:cNvPr id="1" name=""/>
+        <p:cNvGrpSpPr/>
+        <p:nvPr/>
+      </p:nvGrpSpPr>
+      <p:grpSpPr>
+        <a:xfrm>
+          <a:off x="0" y="0"/>
+          <a:ext cx="0" cy="0"/>
+          <a:chOff x="0" y="0"/>
+          <a:chExt cx="0" cy="0"/>
+        </a:xfrm>
+      </p:grpSpPr>
+      <p:sp>
+        <p:nvSpPr>
+          <p:cNvPr id="2" name="Slide Image Placeholder 1"/>
+          <p:cNvSpPr>
+            <a:spLocks noGrp="1" noRot="1" noChangeAspect="1"/>
+          </p:cNvSpPr>
+          <p:nvPr>
+            <p:ph type="sldImg"/>
+          </p:nvPr>
+        </p:nvSpPr>
+        <p:spPr/>
+      </p:sp>
+      <p:sp>
+        <p:nvSpPr>
+          <p:cNvPr id="3" name="Notes Placeholder 2"/>
+          <p:cNvSpPr>
+            <a:spLocks noGrp="1"/>
+          </p:cNvSpPr>
+          <p:nvPr>
+            <p:ph type="body" idx="1"/>
+          </p:nvPr>
+        </p:nvSpPr>
+        <p:spPr/>
+        <p:txBody>
+          <a:bodyPr/>
+          <a:lstStyle/>
+          <a:p>
+            <a:r>
+              <a:rPr lang="en-US" dirty="0"/>
+              <a:t>Thank you.</a:t>
+            </a:r>
+            <a:endParaRPr lang="en-US" dirty="0"/>
+          </a:p>
+        </p:txBody>
+      </p:sp>
+      <p:sp>
+        <p:nvSpPr>
+          <p:cNvPr id="4" name="Slide Number Placeholder 3"/>
+          <p:cNvSpPr>
+            <a:spLocks noGrp="1"/>
+          </p:cNvSpPr>
+          <p:nvPr>
+            <p:ph type="sldNum" sz="quarter" idx="10"/>
+          </p:nvPr>
+        </p:nvSpPr>
+        <p:spPr/>
+        <p:txBody>
+          <a:bodyPr/>
+          <a:lstStyle/>
+          <a:p>
+            <a:fld id="{F7021451-1387-4CA6-816F-3879F97B5CBC}" type="slidenum">
+              <a:rPr lang="en-US"/>
+              <a:t>16</a:t>
             </a:fld>
             <a:endParaRPr lang="en-US"/>
           </a:p>
@@ -1522,7 +1702,7 @@
           <a:p>
             <a:r>
               <a:rPr lang="en-US" dirty="0"/>
-              <a:t>Each device registers its own AE with its own ACP. The MEC app's decisions are oneM2M resources in its own AE, so any oneM2M app can subscribe. Planned additions target the rubric: FlexContainer, discovery, group, pollingChannel, announcement.</a:t>
+              <a:t>Each warehouse zone has its own MEC host with an MN-CSE and the EdgeGuard MEC app. The MN-CSEs register with the IN-CSE over Mcc. Devices hand over between zones; the IN-CSE keeps their home records, the federated learning coordinator and the AI safety agent.</a:t>
             </a:r>
             <a:endParaRPr lang="en-US" dirty="0"/>
           </a:p>
@@ -1610,7 +1790,7 @@
           <a:p>
             <a:r>
               <a:rPr lang="en-US" dirty="0"/>
-              <a:t>MEC services reach the application through oneM2M via the MEC-IPE. The MEC app is deployed on AdvantEDGE with a custom warehouse scenario and connected to the public ETSI MEC Sandbox.</a:t>
+              <a:t>Each device registers its own AE with its own ACP. The MEC app's decisions are oneM2M resources in its own AE, so any oneM2M app can subscribe. Planned additions target the rubric: FlexContainer, discovery, group, pollingChannel, announcement.</a:t>
             </a:r>
             <a:endParaRPr lang="en-US" dirty="0"/>
           </a:p>
@@ -1698,7 +1878,7 @@
           <a:p>
             <a:r>
               <a:rPr lang="en-US" dirty="0"/>
-              <a:t>Six steps from a position to a confirmed cue, all through oneM2M resources and subscriptions. If the MEC app goes silent, devices degrade gracefully to local decisions.</a:t>
+              <a:t>MEC services reach the application through oneM2M via the MEC-IPE. The MEC app is deployed on AdvantEDGE with a custom warehouse scenario and connected to the public ETSI MEC Sandbox.</a:t>
             </a:r>
             <a:endParaRPr lang="en-US" dirty="0"/>
           </a:p>
@@ -2763,46 +2943,47 @@
                   <a:schemeClr val="tx2"/>
                 </a:solidFill>
               </a:rPr>
-              <a:t>Status today: working end to end</a:t>
+              <a:t>End-to-end flow: from a position to a cue</a:t>
             </a:r>
             <a:endParaRPr lang="en-US" sz="3000" dirty="0"/>
           </a:p>
         </p:txBody>
       </p:sp>
-      <p:pic>
-        <p:nvPicPr>
-          <p:cNvPr id="3" name="done icon 0" descr="preencoded.png">    </p:cNvPr>
-          <p:cNvPicPr>
-            <a:picLocks noChangeAspect="1"/>
-          </p:cNvPicPr>
-          <p:nvPr/>
-        </p:nvPicPr>
-        <p:blipFill>
-          <a:blip r:embed="rId1"/>
-          <a:stretch>
-            <a:fillRect/>
-          </a:stretch>
-        </p:blipFill>
-        <p:spPr>
-          <a:xfrm>
-            <a:off x="548640" y="1399032"/>
-            <a:ext cx="329184" cy="329184"/>
-          </a:xfrm>
-          <a:prstGeom prst="rect">
-            <a:avLst/>
-          </a:prstGeom>
-        </p:spPr>
-      </p:pic>
-      <p:sp>
-        <p:nvSpPr>
-          <p:cNvPr id="4" name="done item 0"/>
+      <p:sp>
+        <p:nvSpPr>
+          <p:cNvPr id="3" name="step dot 1"/>
+          <p:cNvSpPr/>
+          <p:nvPr/>
+        </p:nvSpPr>
+        <p:spPr>
+          <a:xfrm>
+            <a:off x="1143000" y="1417320"/>
+            <a:ext cx="548640" cy="548640"/>
+          </a:xfrm>
+          <a:prstGeom prst="ellipse">
+            <a:avLst/>
+          </a:prstGeom>
+          <a:solidFill>
+            <a:schemeClr val="tx2"/>
+          </a:solidFill>
+          <a:ln w="12700">
+            <a:solidFill>
+              <a:schemeClr val="tx2"/>
+            </a:solidFill>
+            <a:prstDash val="solid"/>
+          </a:ln>
+        </p:spPr>
+      </p:sp>
+      <p:sp>
+        <p:nvSpPr>
+          <p:cNvPr id="4" name="step num 1"/>
           <p:cNvSpPr txBox="1"/>
           <p:nvPr/>
         </p:nvSpPr>
         <p:spPr>
           <a:xfrm>
-            <a:off x="1005840" y="1325880"/>
-            <a:ext cx="5120640" cy="594360"/>
+            <a:off x="1143000" y="1417320"/>
+            <a:ext cx="548640" cy="548640"/>
           </a:xfrm>
           <a:prstGeom prst="rect">
             <a:avLst/>
@@ -2814,55 +2995,151 @@
           <a:bodyPr wrap="square" lIns="0" tIns="0" rIns="0" bIns="0" rtlCol="0" anchor="ctr"/>
           <a:lstStyle/>
           <a:p>
-            <a:pPr indent="0" marL="0">
-              <a:buNone/>
-            </a:pPr>
-            <a:r>
-              <a:rPr lang="en-US" sz="1400" dirty="0">
+            <a:pPr algn="ctr" indent="0" marL="0">
+              <a:buNone/>
+            </a:pPr>
+            <a:r>
+              <a:rPr lang="en-US" sz="1600" b="1" dirty="0">
+                <a:solidFill>
+                  <a:schemeClr val="bg1"/>
+                </a:solidFill>
+              </a:rPr>
+              <a:t>1</a:t>
+            </a:r>
+            <a:endParaRPr lang="en-US" sz="1600" dirty="0"/>
+          </a:p>
+        </p:txBody>
+      </p:sp>
+      <p:sp>
+        <p:nvSpPr>
+          <p:cNvPr id="5" name="step link 1"/>
+          <p:cNvSpPr/>
+          <p:nvPr/>
+        </p:nvSpPr>
+        <p:spPr>
+          <a:xfrm>
+            <a:off x="1783080" y="1691640"/>
+            <a:ext cx="1600200" cy="0"/>
+          </a:xfrm>
+          <a:prstGeom prst="line">
+            <a:avLst/>
+          </a:prstGeom>
+          <a:noFill/>
+          <a:ln w="19050">
+            <a:solidFill>
+              <a:srgbClr val="C9D0D8"/>
+            </a:solidFill>
+            <a:prstDash val="solid"/>
+          </a:ln>
+        </p:spPr>
+      </p:sp>
+      <p:sp>
+        <p:nvSpPr>
+          <p:cNvPr id="6" name="step head 1"/>
+          <p:cNvSpPr txBox="1"/>
+          <p:nvPr/>
+        </p:nvSpPr>
+        <p:spPr>
+          <a:xfrm>
+            <a:off x="548640" y="2148840"/>
+            <a:ext cx="1737360" cy="365760"/>
+          </a:xfrm>
+          <a:prstGeom prst="rect">
+            <a:avLst/>
+          </a:prstGeom>
+          <a:noFill/>
+          <a:ln/>
+        </p:spPr>
+        <p:txBody>
+          <a:bodyPr wrap="square" lIns="0" tIns="0" rIns="0" bIns="0" rtlCol="0" anchor="ctr"/>
+          <a:lstStyle/>
+          <a:p>
+            <a:pPr algn="ctr" indent="0" marL="0">
+              <a:buNone/>
+            </a:pPr>
+            <a:r>
+              <a:rPr lang="en-US" sz="1600" b="1" dirty="0">
+                <a:solidFill>
+                  <a:schemeClr val="tx2"/>
+                </a:solidFill>
+              </a:rPr>
+              <a:t>Sense</a:t>
+            </a:r>
+            <a:endParaRPr lang="en-US" sz="1600" dirty="0"/>
+          </a:p>
+        </p:txBody>
+      </p:sp>
+      <p:sp>
+        <p:nvSpPr>
+          <p:cNvPr id="7" name="step body 1"/>
+          <p:cNvSpPr txBox="1"/>
+          <p:nvPr/>
+        </p:nvSpPr>
+        <p:spPr>
+          <a:xfrm>
+            <a:off x="548640" y="2560320"/>
+            <a:ext cx="1737360" cy="1005840"/>
+          </a:xfrm>
+          <a:prstGeom prst="rect">
+            <a:avLst/>
+          </a:prstGeom>
+          <a:noFill/>
+          <a:ln/>
+        </p:spPr>
+        <p:txBody>
+          <a:bodyPr wrap="square" lIns="0" tIns="0" rIns="0" bIns="0" rtlCol="0" anchor="t"/>
+          <a:lstStyle/>
+          <a:p>
+            <a:pPr algn="ctr" indent="0" marL="0">
+              <a:buNone/>
+            </a:pPr>
+            <a:r>
+              <a:rPr lang="en-US" sz="1300" dirty="0">
                 <a:solidFill>
                   <a:schemeClr val="tx1"/>
                 </a:solidFill>
               </a:rPr>
-              <a:t>Per-device AEs and ACPs on Mobius 3.0.1 and ACME; access checks in CI (8/8)</a:t>
-            </a:r>
-            <a:endParaRPr lang="en-US" sz="1400" dirty="0"/>
-          </a:p>
-        </p:txBody>
-      </p:sp>
-      <p:pic>
-        <p:nvPicPr>
-          <p:cNvPr id="5" name="done icon 1" descr="preencoded.png">    </p:cNvPr>
-          <p:cNvPicPr>
-            <a:picLocks noChangeAspect="1"/>
-          </p:cNvPicPr>
-          <p:nvPr/>
-        </p:nvPicPr>
-        <p:blipFill>
-          <a:blip r:embed="rId2"/>
-          <a:stretch>
-            <a:fillRect/>
-          </a:stretch>
-        </p:blipFill>
-        <p:spPr>
-          <a:xfrm>
-            <a:off x="548640" y="2148840"/>
-            <a:ext cx="329184" cy="329184"/>
-          </a:xfrm>
-          <a:prstGeom prst="rect">
-            <a:avLst/>
-          </a:prstGeom>
-        </p:spPr>
-      </p:pic>
-      <p:sp>
-        <p:nvSpPr>
-          <p:cNvPr id="6" name="done item 1"/>
+              <a:t>Tag / module updates its kinematics flexContainer</a:t>
+            </a:r>
+            <a:endParaRPr lang="en-US" sz="1300" dirty="0"/>
+          </a:p>
+        </p:txBody>
+      </p:sp>
+      <p:sp>
+        <p:nvSpPr>
+          <p:cNvPr id="8" name="step dot 2"/>
+          <p:cNvSpPr/>
+          <p:nvPr/>
+        </p:nvSpPr>
+        <p:spPr>
+          <a:xfrm>
+            <a:off x="3017520" y="1417320"/>
+            <a:ext cx="548640" cy="548640"/>
+          </a:xfrm>
+          <a:prstGeom prst="ellipse">
+            <a:avLst/>
+          </a:prstGeom>
+          <a:solidFill>
+            <a:schemeClr val="tx2"/>
+          </a:solidFill>
+          <a:ln w="12700">
+            <a:solidFill>
+              <a:schemeClr val="tx2"/>
+            </a:solidFill>
+            <a:prstDash val="solid"/>
+          </a:ln>
+        </p:spPr>
+      </p:sp>
+      <p:sp>
+        <p:nvSpPr>
+          <p:cNvPr id="9" name="step num 2"/>
           <p:cNvSpPr txBox="1"/>
           <p:nvPr/>
         </p:nvSpPr>
         <p:spPr>
           <a:xfrm>
-            <a:off x="1005840" y="2075688"/>
-            <a:ext cx="5120640" cy="594360"/>
+            <a:off x="3017520" y="1417320"/>
+            <a:ext cx="548640" cy="548640"/>
           </a:xfrm>
           <a:prstGeom prst="rect">
             <a:avLst/>
@@ -2874,55 +3151,151 @@
           <a:bodyPr wrap="square" lIns="0" tIns="0" rIns="0" bIns="0" rtlCol="0" anchor="ctr"/>
           <a:lstStyle/>
           <a:p>
-            <a:pPr indent="0" marL="0">
-              <a:buNone/>
-            </a:pPr>
-            <a:r>
-              <a:rPr lang="en-US" sz="1400" dirty="0">
+            <a:pPr algn="ctr" indent="0" marL="0">
+              <a:buNone/>
+            </a:pPr>
+            <a:r>
+              <a:rPr lang="en-US" sz="1600" b="1" dirty="0">
+                <a:solidFill>
+                  <a:schemeClr val="bg1"/>
+                </a:solidFill>
+              </a:rPr>
+              <a:t>2</a:t>
+            </a:r>
+            <a:endParaRPr lang="en-US" sz="1600" dirty="0"/>
+          </a:p>
+        </p:txBody>
+      </p:sp>
+      <p:sp>
+        <p:nvSpPr>
+          <p:cNvPr id="10" name="step link 2"/>
+          <p:cNvSpPr/>
+          <p:nvPr/>
+        </p:nvSpPr>
+        <p:spPr>
+          <a:xfrm>
+            <a:off x="3657600" y="1691640"/>
+            <a:ext cx="1600200" cy="0"/>
+          </a:xfrm>
+          <a:prstGeom prst="line">
+            <a:avLst/>
+          </a:prstGeom>
+          <a:noFill/>
+          <a:ln w="19050">
+            <a:solidFill>
+              <a:srgbClr val="C9D0D8"/>
+            </a:solidFill>
+            <a:prstDash val="solid"/>
+          </a:ln>
+        </p:spPr>
+      </p:sp>
+      <p:sp>
+        <p:nvSpPr>
+          <p:cNvPr id="11" name="step head 2"/>
+          <p:cNvSpPr txBox="1"/>
+          <p:nvPr/>
+        </p:nvSpPr>
+        <p:spPr>
+          <a:xfrm>
+            <a:off x="2423160" y="2148840"/>
+            <a:ext cx="1737360" cy="365760"/>
+          </a:xfrm>
+          <a:prstGeom prst="rect">
+            <a:avLst/>
+          </a:prstGeom>
+          <a:noFill/>
+          <a:ln/>
+        </p:spPr>
+        <p:txBody>
+          <a:bodyPr wrap="square" lIns="0" tIns="0" rIns="0" bIns="0" rtlCol="0" anchor="ctr"/>
+          <a:lstStyle/>
+          <a:p>
+            <a:pPr algn="ctr" indent="0" marL="0">
+              <a:buNone/>
+            </a:pPr>
+            <a:r>
+              <a:rPr lang="en-US" sz="1600" b="1" dirty="0">
+                <a:solidFill>
+                  <a:schemeClr val="tx2"/>
+                </a:solidFill>
+              </a:rPr>
+              <a:t>Notify</a:t>
+            </a:r>
+            <a:endParaRPr lang="en-US" sz="1600" dirty="0"/>
+          </a:p>
+        </p:txBody>
+      </p:sp>
+      <p:sp>
+        <p:nvSpPr>
+          <p:cNvPr id="12" name="step body 2"/>
+          <p:cNvSpPr txBox="1"/>
+          <p:nvPr/>
+        </p:nvSpPr>
+        <p:spPr>
+          <a:xfrm>
+            <a:off x="2423160" y="2560320"/>
+            <a:ext cx="1737360" cy="1005840"/>
+          </a:xfrm>
+          <a:prstGeom prst="rect">
+            <a:avLst/>
+          </a:prstGeom>
+          <a:noFill/>
+          <a:ln/>
+        </p:spPr>
+        <p:txBody>
+          <a:bodyPr wrap="square" lIns="0" tIns="0" rIns="0" bIns="0" rtlCol="0" anchor="t"/>
+          <a:lstStyle/>
+          <a:p>
+            <a:pPr algn="ctr" indent="0" marL="0">
+              <a:buNone/>
+            </a:pPr>
+            <a:r>
+              <a:rPr lang="en-US" sz="1300" dirty="0">
                 <a:solidFill>
                   <a:schemeClr val="tx1"/>
                 </a:solidFill>
               </a:rPr>
-              <a:t>MN-CSE ↔ IN-CSE registration (Mcc); 7 interoperability issues documented</a:t>
-            </a:r>
-            <a:endParaRPr lang="en-US" sz="1400" dirty="0"/>
-          </a:p>
-        </p:txBody>
-      </p:sp>
-      <p:pic>
-        <p:nvPicPr>
-          <p:cNvPr id="7" name="done icon 2" descr="preencoded.png">    </p:cNvPr>
-          <p:cNvPicPr>
-            <a:picLocks noChangeAspect="1"/>
-          </p:cNvPicPr>
-          <p:nvPr/>
-        </p:nvPicPr>
-        <p:blipFill>
-          <a:blip r:embed="rId3"/>
-          <a:stretch>
-            <a:fillRect/>
-          </a:stretch>
-        </p:blipFill>
-        <p:spPr>
-          <a:xfrm>
-            <a:off x="548640" y="2898648"/>
-            <a:ext cx="329184" cy="329184"/>
-          </a:xfrm>
-          <a:prstGeom prst="rect">
-            <a:avLst/>
-          </a:prstGeom>
-        </p:spPr>
-      </p:pic>
-      <p:sp>
-        <p:nvSpPr>
-          <p:cNvPr id="8" name="done item 2"/>
+              <a:t>zone MN-CSE notifies the MEC app (subscription)</a:t>
+            </a:r>
+            <a:endParaRPr lang="en-US" sz="1300" dirty="0"/>
+          </a:p>
+        </p:txBody>
+      </p:sp>
+      <p:sp>
+        <p:nvSpPr>
+          <p:cNvPr id="13" name="step dot 3"/>
+          <p:cNvSpPr/>
+          <p:nvPr/>
+        </p:nvSpPr>
+        <p:spPr>
+          <a:xfrm>
+            <a:off x="4892040" y="1417320"/>
+            <a:ext cx="548640" cy="548640"/>
+          </a:xfrm>
+          <a:prstGeom prst="ellipse">
+            <a:avLst/>
+          </a:prstGeom>
+          <a:solidFill>
+            <a:schemeClr val="tx2"/>
+          </a:solidFill>
+          <a:ln w="12700">
+            <a:solidFill>
+              <a:schemeClr val="tx2"/>
+            </a:solidFill>
+            <a:prstDash val="solid"/>
+          </a:ln>
+        </p:spPr>
+      </p:sp>
+      <p:sp>
+        <p:nvSpPr>
+          <p:cNvPr id="14" name="step num 3"/>
           <p:cNvSpPr txBox="1"/>
           <p:nvPr/>
         </p:nvSpPr>
         <p:spPr>
           <a:xfrm>
-            <a:off x="1005840" y="2825496"/>
-            <a:ext cx="5120640" cy="594360"/>
+            <a:off x="4892040" y="1417320"/>
+            <a:ext cx="548640" cy="548640"/>
           </a:xfrm>
           <a:prstGeom prst="rect">
             <a:avLst/>
@@ -2934,55 +3307,151 @@
           <a:bodyPr wrap="square" lIns="0" tIns="0" rIns="0" bIns="0" rtlCol="0" anchor="ctr"/>
           <a:lstStyle/>
           <a:p>
-            <a:pPr indent="0" marL="0">
-              <a:buNone/>
-            </a:pPr>
-            <a:r>
-              <a:rPr lang="en-US" sz="1400" dirty="0">
+            <a:pPr algn="ctr" indent="0" marL="0">
+              <a:buNone/>
+            </a:pPr>
+            <a:r>
+              <a:rPr lang="en-US" sz="1600" b="1" dirty="0">
+                <a:solidFill>
+                  <a:schemeClr val="bg1"/>
+                </a:solidFill>
+              </a:rPr>
+              <a:t>3</a:t>
+            </a:r>
+            <a:endParaRPr lang="en-US" sz="1600" dirty="0"/>
+          </a:p>
+        </p:txBody>
+      </p:sp>
+      <p:sp>
+        <p:nvSpPr>
+          <p:cNvPr id="15" name="step link 3"/>
+          <p:cNvSpPr/>
+          <p:nvPr/>
+        </p:nvSpPr>
+        <p:spPr>
+          <a:xfrm>
+            <a:off x="5532120" y="1691640"/>
+            <a:ext cx="1600200" cy="0"/>
+          </a:xfrm>
+          <a:prstGeom prst="line">
+            <a:avLst/>
+          </a:prstGeom>
+          <a:noFill/>
+          <a:ln w="19050">
+            <a:solidFill>
+              <a:srgbClr val="C9D0D8"/>
+            </a:solidFill>
+            <a:prstDash val="solid"/>
+          </a:ln>
+        </p:spPr>
+      </p:sp>
+      <p:sp>
+        <p:nvSpPr>
+          <p:cNvPr id="16" name="step head 3"/>
+          <p:cNvSpPr txBox="1"/>
+          <p:nvPr/>
+        </p:nvSpPr>
+        <p:spPr>
+          <a:xfrm>
+            <a:off x="4297680" y="2148840"/>
+            <a:ext cx="1737360" cy="365760"/>
+          </a:xfrm>
+          <a:prstGeom prst="rect">
+            <a:avLst/>
+          </a:prstGeom>
+          <a:noFill/>
+          <a:ln/>
+        </p:spPr>
+        <p:txBody>
+          <a:bodyPr wrap="square" lIns="0" tIns="0" rIns="0" bIns="0" rtlCol="0" anchor="ctr"/>
+          <a:lstStyle/>
+          <a:p>
+            <a:pPr algn="ctr" indent="0" marL="0">
+              <a:buNone/>
+            </a:pPr>
+            <a:r>
+              <a:rPr lang="en-US" sz="1600" b="1" dirty="0">
+                <a:solidFill>
+                  <a:schemeClr val="tx2"/>
+                </a:solidFill>
+              </a:rPr>
+              <a:t>Predict</a:t>
+            </a:r>
+            <a:endParaRPr lang="en-US" sz="1600" dirty="0"/>
+          </a:p>
+        </p:txBody>
+      </p:sp>
+      <p:sp>
+        <p:nvSpPr>
+          <p:cNvPr id="17" name="step body 3"/>
+          <p:cNvSpPr txBox="1"/>
+          <p:nvPr/>
+        </p:nvSpPr>
+        <p:spPr>
+          <a:xfrm>
+            <a:off x="4297680" y="2560320"/>
+            <a:ext cx="1737360" cy="1005840"/>
+          </a:xfrm>
+          <a:prstGeom prst="rect">
+            <a:avLst/>
+          </a:prstGeom>
+          <a:noFill/>
+          <a:ln/>
+        </p:spPr>
+        <p:txBody>
+          <a:bodyPr wrap="square" lIns="0" tIns="0" rIns="0" bIns="0" rtlCol="0" anchor="t"/>
+          <a:lstStyle/>
+          <a:p>
+            <a:pPr algn="ctr" indent="0" marL="0">
+              <a:buNone/>
+            </a:pPr>
+            <a:r>
+              <a:rPr lang="en-US" sz="1300" dirty="0">
                 <a:solidFill>
                   <a:schemeClr val="tx1"/>
                 </a:solidFill>
               </a:rPr>
-              <a:t>MEC app with HA, monitoring, near-miss analysis, dashboard, phone tag</a:t>
-            </a:r>
-            <a:endParaRPr lang="en-US" sz="1400" dirty="0"/>
-          </a:p>
-        </p:txBody>
-      </p:sp>
-      <p:pic>
-        <p:nvPicPr>
-          <p:cNvPr id="9" name="done icon 3" descr="preencoded.png">    </p:cNvPr>
-          <p:cNvPicPr>
-            <a:picLocks noChangeAspect="1"/>
-          </p:cNvPicPr>
-          <p:nvPr/>
-        </p:nvPicPr>
-        <p:blipFill>
-          <a:blip r:embed="rId4"/>
-          <a:stretch>
-            <a:fillRect/>
-          </a:stretch>
-        </p:blipFill>
-        <p:spPr>
-          <a:xfrm>
-            <a:off x="548640" y="3648456"/>
-            <a:ext cx="329184" cy="329184"/>
-          </a:xfrm>
-          <a:prstGeom prst="rect">
-            <a:avLst/>
-          </a:prstGeom>
-        </p:spPr>
-      </p:pic>
-      <p:sp>
-        <p:nvSpPr>
-          <p:cNvPr id="10" name="done item 3"/>
+              <a:t>Kalman tracking, forklift turn model or shared route</a:t>
+            </a:r>
+            <a:endParaRPr lang="en-US" sz="1300" dirty="0"/>
+          </a:p>
+        </p:txBody>
+      </p:sp>
+      <p:sp>
+        <p:nvSpPr>
+          <p:cNvPr id="18" name="step dot 4"/>
+          <p:cNvSpPr/>
+          <p:nvPr/>
+        </p:nvSpPr>
+        <p:spPr>
+          <a:xfrm>
+            <a:off x="6766560" y="1417320"/>
+            <a:ext cx="548640" cy="548640"/>
+          </a:xfrm>
+          <a:prstGeom prst="ellipse">
+            <a:avLst/>
+          </a:prstGeom>
+          <a:solidFill>
+            <a:schemeClr val="tx2"/>
+          </a:solidFill>
+          <a:ln w="12700">
+            <a:solidFill>
+              <a:schemeClr val="tx2"/>
+            </a:solidFill>
+            <a:prstDash val="solid"/>
+          </a:ln>
+        </p:spPr>
+      </p:sp>
+      <p:sp>
+        <p:nvSpPr>
+          <p:cNvPr id="19" name="step num 4"/>
           <p:cNvSpPr txBox="1"/>
           <p:nvPr/>
         </p:nvSpPr>
         <p:spPr>
           <a:xfrm>
-            <a:off x="1005840" y="3575304"/>
-            <a:ext cx="5120640" cy="594360"/>
+            <a:off x="6766560" y="1417320"/>
+            <a:ext cx="548640" cy="548640"/>
           </a:xfrm>
           <a:prstGeom prst="rect">
             <a:avLst/>
@@ -2994,55 +3463,151 @@
           <a:bodyPr wrap="square" lIns="0" tIns="0" rIns="0" bIns="0" rtlCol="0" anchor="ctr"/>
           <a:lstStyle/>
           <a:p>
-            <a:pPr indent="0" marL="0">
-              <a:buNone/>
-            </a:pPr>
-            <a:r>
-              <a:rPr lang="en-US" sz="1400" dirty="0">
+            <a:pPr algn="ctr" indent="0" marL="0">
+              <a:buNone/>
+            </a:pPr>
+            <a:r>
+              <a:rPr lang="en-US" sz="1600" b="1" dirty="0">
+                <a:solidFill>
+                  <a:schemeClr val="bg1"/>
+                </a:solidFill>
+              </a:rPr>
+              <a:t>4</a:t>
+            </a:r>
+            <a:endParaRPr lang="en-US" sz="1600" dirty="0"/>
+          </a:p>
+        </p:txBody>
+      </p:sp>
+      <p:sp>
+        <p:nvSpPr>
+          <p:cNvPr id="20" name="step link 4"/>
+          <p:cNvSpPr/>
+          <p:nvPr/>
+        </p:nvSpPr>
+        <p:spPr>
+          <a:xfrm>
+            <a:off x="7406640" y="1691640"/>
+            <a:ext cx="1600200" cy="0"/>
+          </a:xfrm>
+          <a:prstGeom prst="line">
+            <a:avLst/>
+          </a:prstGeom>
+          <a:noFill/>
+          <a:ln w="19050">
+            <a:solidFill>
+              <a:srgbClr val="C9D0D8"/>
+            </a:solidFill>
+            <a:prstDash val="solid"/>
+          </a:ln>
+        </p:spPr>
+      </p:sp>
+      <p:sp>
+        <p:nvSpPr>
+          <p:cNvPr id="21" name="step head 4"/>
+          <p:cNvSpPr txBox="1"/>
+          <p:nvPr/>
+        </p:nvSpPr>
+        <p:spPr>
+          <a:xfrm>
+            <a:off x="6172200" y="2148840"/>
+            <a:ext cx="1737360" cy="365760"/>
+          </a:xfrm>
+          <a:prstGeom prst="rect">
+            <a:avLst/>
+          </a:prstGeom>
+          <a:noFill/>
+          <a:ln/>
+        </p:spPr>
+        <p:txBody>
+          <a:bodyPr wrap="square" lIns="0" tIns="0" rIns="0" bIns="0" rtlCol="0" anchor="ctr"/>
+          <a:lstStyle/>
+          <a:p>
+            <a:pPr algn="ctr" indent="0" marL="0">
+              <a:buNone/>
+            </a:pPr>
+            <a:r>
+              <a:rPr lang="en-US" sz="1600" b="1" dirty="0">
+                <a:solidFill>
+                  <a:schemeClr val="tx2"/>
+                </a:solidFill>
+              </a:rPr>
+              <a:t>Decide</a:t>
+            </a:r>
+            <a:endParaRPr lang="en-US" sz="1600" dirty="0"/>
+          </a:p>
+        </p:txBody>
+      </p:sp>
+      <p:sp>
+        <p:nvSpPr>
+          <p:cNvPr id="22" name="step body 4"/>
+          <p:cNvSpPr txBox="1"/>
+          <p:nvPr/>
+        </p:nvSpPr>
+        <p:spPr>
+          <a:xfrm>
+            <a:off x="6172200" y="2560320"/>
+            <a:ext cx="1737360" cy="1005840"/>
+          </a:xfrm>
+          <a:prstGeom prst="rect">
+            <a:avLst/>
+          </a:prstGeom>
+          <a:noFill/>
+          <a:ln/>
+        </p:spPr>
+        <p:txBody>
+          <a:bodyPr wrap="square" lIns="0" tIns="0" rIns="0" bIns="0" rtlCol="0" anchor="t"/>
+          <a:lstStyle/>
+          <a:p>
+            <a:pPr algn="ctr" indent="0" marL="0">
+              <a:buNone/>
+            </a:pPr>
+            <a:r>
+              <a:rPr lang="en-US" sz="1300" dirty="0">
                 <a:solidFill>
                   <a:schemeClr val="tx1"/>
                 </a:solidFill>
               </a:rPr>
-              <a:t>ETSI MEC Sandbox connected; AdvantEDGE warehouse scenario</a:t>
-            </a:r>
-            <a:endParaRPr lang="en-US" sz="1400" dirty="0"/>
-          </a:p>
-        </p:txBody>
-      </p:sp>
-      <p:pic>
-        <p:nvPicPr>
-          <p:cNvPr id="11" name="done icon 4" descr="preencoded.png">    </p:cNvPr>
-          <p:cNvPicPr>
-            <a:picLocks noChangeAspect="1"/>
-          </p:cNvPicPr>
-          <p:nvPr/>
-        </p:nvPicPr>
-        <p:blipFill>
-          <a:blip r:embed="rId5"/>
-          <a:stretch>
-            <a:fillRect/>
-          </a:stretch>
-        </p:blipFill>
-        <p:spPr>
-          <a:xfrm>
-            <a:off x="548640" y="4398264"/>
-            <a:ext cx="329184" cy="329184"/>
-          </a:xfrm>
-          <a:prstGeom prst="rect">
-            <a:avLst/>
-          </a:prstGeom>
-        </p:spPr>
-      </p:pic>
-      <p:sp>
-        <p:nvSpPr>
-          <p:cNvPr id="12" name="done item 4"/>
+              <a:t>Collision course: LOS rate + closest approach</a:t>
+            </a:r>
+            <a:endParaRPr lang="en-US" sz="1300" dirty="0"/>
+          </a:p>
+        </p:txBody>
+      </p:sp>
+      <p:sp>
+        <p:nvSpPr>
+          <p:cNvPr id="23" name="step dot 5"/>
+          <p:cNvSpPr/>
+          <p:nvPr/>
+        </p:nvSpPr>
+        <p:spPr>
+          <a:xfrm>
+            <a:off x="8641080" y="1417320"/>
+            <a:ext cx="548640" cy="548640"/>
+          </a:xfrm>
+          <a:prstGeom prst="ellipse">
+            <a:avLst/>
+          </a:prstGeom>
+          <a:solidFill>
+            <a:schemeClr val="accent1"/>
+          </a:solidFill>
+          <a:ln w="12700">
+            <a:solidFill>
+              <a:schemeClr val="accent1"/>
+            </a:solidFill>
+            <a:prstDash val="solid"/>
+          </a:ln>
+        </p:spPr>
+      </p:sp>
+      <p:sp>
+        <p:nvSpPr>
+          <p:cNvPr id="24" name="step num 5"/>
           <p:cNvSpPr txBox="1"/>
           <p:nvPr/>
         </p:nvSpPr>
         <p:spPr>
           <a:xfrm>
-            <a:off x="1005840" y="4325112"/>
-            <a:ext cx="5120640" cy="594360"/>
+            <a:off x="8641080" y="1417320"/>
+            <a:ext cx="548640" cy="548640"/>
           </a:xfrm>
           <a:prstGeom prst="rect">
             <a:avLst/>
@@ -3054,55 +3619,151 @@
           <a:bodyPr wrap="square" lIns="0" tIns="0" rIns="0" bIns="0" rtlCol="0" anchor="ctr"/>
           <a:lstStyle/>
           <a:p>
-            <a:pPr indent="0" marL="0">
-              <a:buNone/>
-            </a:pPr>
-            <a:r>
-              <a:rPr lang="en-US" sz="1400" dirty="0">
+            <a:pPr algn="ctr" indent="0" marL="0">
+              <a:buNone/>
+            </a:pPr>
+            <a:r>
+              <a:rPr lang="en-US" sz="1600" b="1" dirty="0">
+                <a:solidFill>
+                  <a:schemeClr val="tx2"/>
+                </a:solidFill>
+              </a:rPr>
+              <a:t>5</a:t>
+            </a:r>
+            <a:endParaRPr lang="en-US" sz="1600" dirty="0"/>
+          </a:p>
+        </p:txBody>
+      </p:sp>
+      <p:sp>
+        <p:nvSpPr>
+          <p:cNvPr id="25" name="step link 5"/>
+          <p:cNvSpPr/>
+          <p:nvPr/>
+        </p:nvSpPr>
+        <p:spPr>
+          <a:xfrm>
+            <a:off x="9281160" y="1691640"/>
+            <a:ext cx="1600200" cy="0"/>
+          </a:xfrm>
+          <a:prstGeom prst="line">
+            <a:avLst/>
+          </a:prstGeom>
+          <a:noFill/>
+          <a:ln w="19050">
+            <a:solidFill>
+              <a:srgbClr val="C9D0D8"/>
+            </a:solidFill>
+            <a:prstDash val="solid"/>
+          </a:ln>
+        </p:spPr>
+      </p:sp>
+      <p:sp>
+        <p:nvSpPr>
+          <p:cNvPr id="26" name="step head 5"/>
+          <p:cNvSpPr txBox="1"/>
+          <p:nvPr/>
+        </p:nvSpPr>
+        <p:spPr>
+          <a:xfrm>
+            <a:off x="8046720" y="2148840"/>
+            <a:ext cx="1737360" cy="365760"/>
+          </a:xfrm>
+          <a:prstGeom prst="rect">
+            <a:avLst/>
+          </a:prstGeom>
+          <a:noFill/>
+          <a:ln/>
+        </p:spPr>
+        <p:txBody>
+          <a:bodyPr wrap="square" lIns="0" tIns="0" rIns="0" bIns="0" rtlCol="0" anchor="ctr"/>
+          <a:lstStyle/>
+          <a:p>
+            <a:pPr algn="ctr" indent="0" marL="0">
+              <a:buNone/>
+            </a:pPr>
+            <a:r>
+              <a:rPr lang="en-US" sz="1600" b="1" dirty="0">
+                <a:solidFill>
+                  <a:schemeClr val="tx2"/>
+                </a:solidFill>
+              </a:rPr>
+              <a:t>Cue</a:t>
+            </a:r>
+            <a:endParaRPr lang="en-US" sz="1600" dirty="0"/>
+          </a:p>
+        </p:txBody>
+      </p:sp>
+      <p:sp>
+        <p:nvSpPr>
+          <p:cNvPr id="27" name="step body 5"/>
+          <p:cNvSpPr txBox="1"/>
+          <p:nvPr/>
+        </p:nvSpPr>
+        <p:spPr>
+          <a:xfrm>
+            <a:off x="8046720" y="2560320"/>
+            <a:ext cx="1737360" cy="1005840"/>
+          </a:xfrm>
+          <a:prstGeom prst="rect">
+            <a:avLst/>
+          </a:prstGeom>
+          <a:noFill/>
+          <a:ln/>
+        </p:spPr>
+        <p:txBody>
+          <a:bodyPr wrap="square" lIns="0" tIns="0" rIns="0" bIns="0" rtlCol="0" anchor="t"/>
+          <a:lstStyle/>
+          <a:p>
+            <a:pPr algn="ctr" indent="0" marL="0">
+              <a:buNone/>
+            </a:pPr>
+            <a:r>
+              <a:rPr lang="en-US" sz="1300" dirty="0">
                 <a:solidFill>
                   <a:schemeClr val="tx1"/>
                 </a:solidFill>
               </a:rPr>
-              <a:t>ESP32 firmware for tag and forklift module, run unmodified against a real CSE in CI (6/6)</a:t>
-            </a:r>
-            <a:endParaRPr lang="en-US" sz="1400" dirty="0"/>
-          </a:p>
-        </p:txBody>
-      </p:sp>
-      <p:pic>
-        <p:nvPicPr>
-          <p:cNvPr id="13" name="done icon 5" descr="preencoded.png">    </p:cNvPr>
-          <p:cNvPicPr>
-            <a:picLocks noChangeAspect="1"/>
-          </p:cNvPicPr>
-          <p:nvPr/>
-        </p:nvPicPr>
-        <p:blipFill>
-          <a:blip r:embed="rId6"/>
-          <a:stretch>
-            <a:fillRect/>
-          </a:stretch>
-        </p:blipFill>
-        <p:spPr>
-          <a:xfrm>
-            <a:off x="548640" y="5148072"/>
-            <a:ext cx="329184" cy="329184"/>
-          </a:xfrm>
-          <a:prstGeom prst="rect">
-            <a:avLst/>
-          </a:prstGeom>
-        </p:spPr>
-      </p:pic>
-      <p:sp>
-        <p:nvSpPr>
-          <p:cNvPr id="14" name="done item 5"/>
+              <a:t>Alert CIN → tag WAIT / STEP ASIDE / GO, forklift limit</a:t>
+            </a:r>
+            <a:endParaRPr lang="en-US" sz="1300" dirty="0"/>
+          </a:p>
+        </p:txBody>
+      </p:sp>
+      <p:sp>
+        <p:nvSpPr>
+          <p:cNvPr id="28" name="step dot 6"/>
+          <p:cNvSpPr/>
+          <p:nvPr/>
+        </p:nvSpPr>
+        <p:spPr>
+          <a:xfrm>
+            <a:off x="10515600" y="1417320"/>
+            <a:ext cx="548640" cy="548640"/>
+          </a:xfrm>
+          <a:prstGeom prst="ellipse">
+            <a:avLst/>
+          </a:prstGeom>
+          <a:solidFill>
+            <a:schemeClr val="tx2"/>
+          </a:solidFill>
+          <a:ln w="12700">
+            <a:solidFill>
+              <a:schemeClr val="tx2"/>
+            </a:solidFill>
+            <a:prstDash val="solid"/>
+          </a:ln>
+        </p:spPr>
+      </p:sp>
+      <p:sp>
+        <p:nvSpPr>
+          <p:cNvPr id="29" name="step num 6"/>
           <p:cNvSpPr txBox="1"/>
           <p:nvPr/>
         </p:nvSpPr>
         <p:spPr>
           <a:xfrm>
-            <a:off x="1005840" y="5074920"/>
-            <a:ext cx="5120640" cy="594360"/>
+            <a:off x="10515600" y="1417320"/>
+            <a:ext cx="548640" cy="548640"/>
           </a:xfrm>
           <a:prstGeom prst="rect">
             <a:avLst/>
@@ -3114,35 +3775,107 @@
           <a:bodyPr wrap="square" lIns="0" tIns="0" rIns="0" bIns="0" rtlCol="0" anchor="ctr"/>
           <a:lstStyle/>
           <a:p>
-            <a:pPr indent="0" marL="0">
-              <a:buNone/>
-            </a:pPr>
-            <a:r>
-              <a:rPr lang="en-US" sz="1400" dirty="0">
+            <a:pPr algn="ctr" indent="0" marL="0">
+              <a:buNone/>
+            </a:pPr>
+            <a:r>
+              <a:rPr lang="en-US" sz="1600" b="1" dirty="0">
+                <a:solidFill>
+                  <a:schemeClr val="bg1"/>
+                </a:solidFill>
+              </a:rPr>
+              <a:t>6</a:t>
+            </a:r>
+            <a:endParaRPr lang="en-US" sz="1600" dirty="0"/>
+          </a:p>
+        </p:txBody>
+      </p:sp>
+      <p:sp>
+        <p:nvSpPr>
+          <p:cNvPr id="30" name="step head 6"/>
+          <p:cNvSpPr txBox="1"/>
+          <p:nvPr/>
+        </p:nvSpPr>
+        <p:spPr>
+          <a:xfrm>
+            <a:off x="9921240" y="2148840"/>
+            <a:ext cx="1737360" cy="365760"/>
+          </a:xfrm>
+          <a:prstGeom prst="rect">
+            <a:avLst/>
+          </a:prstGeom>
+          <a:noFill/>
+          <a:ln/>
+        </p:spPr>
+        <p:txBody>
+          <a:bodyPr wrap="square" lIns="0" tIns="0" rIns="0" bIns="0" rtlCol="0" anchor="ctr"/>
+          <a:lstStyle/>
+          <a:p>
+            <a:pPr algn="ctr" indent="0" marL="0">
+              <a:buNone/>
+            </a:pPr>
+            <a:r>
+              <a:rPr lang="en-US" sz="1600" b="1" dirty="0">
+                <a:solidFill>
+                  <a:schemeClr val="tx2"/>
+                </a:solidFill>
+              </a:rPr>
+              <a:t>Confirm</a:t>
+            </a:r>
+            <a:endParaRPr lang="en-US" sz="1600" dirty="0"/>
+          </a:p>
+        </p:txBody>
+      </p:sp>
+      <p:sp>
+        <p:nvSpPr>
+          <p:cNvPr id="31" name="step body 6"/>
+          <p:cNvSpPr txBox="1"/>
+          <p:nvPr/>
+        </p:nvSpPr>
+        <p:spPr>
+          <a:xfrm>
+            <a:off x="9921240" y="2560320"/>
+            <a:ext cx="1737360" cy="1005840"/>
+          </a:xfrm>
+          <a:prstGeom prst="rect">
+            <a:avLst/>
+          </a:prstGeom>
+          <a:noFill/>
+          <a:ln/>
+        </p:spPr>
+        <p:txBody>
+          <a:bodyPr wrap="square" lIns="0" tIns="0" rIns="0" bIns="0" rtlCol="0" anchor="t"/>
+          <a:lstStyle/>
+          <a:p>
+            <a:pPr algn="ctr" indent="0" marL="0">
+              <a:buNone/>
+            </a:pPr>
+            <a:r>
+              <a:rPr lang="en-US" sz="1300" dirty="0">
                 <a:solidFill>
                   <a:schemeClr val="tx1"/>
                 </a:solidFill>
               </a:rPr>
-              <a:t>Live demo and videos; README and 11 documents in English</a:t>
-            </a:r>
-            <a:endParaRPr lang="en-US" sz="1400" dirty="0"/>
-          </a:p>
-        </p:txBody>
-      </p:sp>
-      <p:sp>
-        <p:nvSpPr>
-          <p:cNvPr id="15" name="result 0"/>
+              <a:t>Device reports its cue / speed limit in its twin</a:t>
+            </a:r>
+            <a:endParaRPr lang="en-US" sz="1300" dirty="0"/>
+          </a:p>
+        </p:txBody>
+      </p:sp>
+      <p:sp>
+        <p:nvSpPr>
+          <p:cNvPr id="32" name="kpi 0"/>
           <p:cNvSpPr/>
           <p:nvPr/>
         </p:nvSpPr>
         <p:spPr>
           <a:xfrm>
-            <a:off x="6583680" y="1325880"/>
-            <a:ext cx="5029200" cy="1325880"/>
+            <a:off x="548640" y="3931920"/>
+            <a:ext cx="3566160" cy="1371600"/>
           </a:xfrm>
           <a:prstGeom prst="roundRect">
             <a:avLst>
-              <a:gd name="adj" fmla="val 5517"/>
+              <a:gd name="adj" fmla="val 5333"/>
             </a:avLst>
           </a:prstGeom>
           <a:solidFill>
@@ -3158,14 +3891,14 @@
       </p:sp>
       <p:sp>
         <p:nvSpPr>
-          <p:cNvPr id="16" name="result number 0"/>
+          <p:cNvPr id="33" name="kpi number 0"/>
           <p:cNvSpPr txBox="1"/>
           <p:nvPr/>
         </p:nvSpPr>
         <p:spPr>
           <a:xfrm>
-            <a:off x="6858000" y="1463040"/>
-            <a:ext cx="4480560" cy="594360"/>
+            <a:off x="822960" y="4069080"/>
+            <a:ext cx="3017520" cy="594360"/>
           </a:xfrm>
           <a:prstGeom prst="rect">
             <a:avLst/>
@@ -3183,13 +3916,13 @@
             <a:r>
               <a:rPr lang="en-US" sz="3000" b="1" dirty="0">
                 <a:solidFill>
-                  <a:schemeClr val="tx2"/>
+                  <a:schemeClr val="accent2"/>
                 </a:solidFill>
                 <a:latin typeface="Arial" pitchFamily="34" charset="0"/>
                 <a:ea typeface="Arial" pitchFamily="34" charset="-122"/>
                 <a:cs typeface="Arial" pitchFamily="34" charset="-120"/>
               </a:rPr>
-              <a:t>100 → 4</a:t>
+              <a:t>25 ms</a:t>
             </a:r>
             <a:endParaRPr lang="en-US" sz="3000" dirty="0"/>
           </a:p>
@@ -3197,14 +3930,14 @@
       </p:sp>
       <p:sp>
         <p:nvSpPr>
-          <p:cNvPr id="17" name="result label 0"/>
+          <p:cNvPr id="34" name="kpi label 0"/>
           <p:cNvSpPr txBox="1"/>
           <p:nvPr/>
         </p:nvSpPr>
         <p:spPr>
           <a:xfrm>
-            <a:off x="6858000" y="2057400"/>
-            <a:ext cx="4480560" cy="457200"/>
+            <a:off x="822960" y="4663440"/>
+            <a:ext cx="3017520" cy="548640"/>
           </a:xfrm>
           <a:prstGeom prst="rect">
             <a:avLst/>
@@ -3213,7 +3946,7 @@
           <a:ln/>
         </p:spPr>
         <p:txBody>
-          <a:bodyPr wrap="square" lIns="0" tIns="0" rIns="0" bIns="0" rtlCol="0" anchor="ctr"/>
+          <a:bodyPr wrap="square" lIns="0" tIns="0" rIns="0" bIns="0" rtlCol="0" anchor="t"/>
           <a:lstStyle/>
           <a:p>
             <a:pPr indent="0" marL="0">
@@ -3222,10 +3955,10 @@
             <a:r>
               <a:rPr lang="en-US" sz="1300" dirty="0">
                 <a:solidFill>
-                  <a:schemeClr val="accent6"/>
-                </a:solidFill>
-              </a:rPr>
-              <a:t>collisions, many-to-many site (8 workers, 4 forklifts, 750 conflicts)</a:t>
+                  <a:schemeClr val="tx1"/>
+                </a:solidFill>
+              </a:rPr>
+              <a:t>median alert latency on the edge (cloud only: 85 ms)</a:t>
             </a:r>
             <a:endParaRPr lang="en-US" sz="1300" dirty="0"/>
           </a:p>
@@ -3233,18 +3966,18 @@
       </p:sp>
       <p:sp>
         <p:nvSpPr>
-          <p:cNvPr id="18" name="result 1"/>
+          <p:cNvPr id="35" name="kpi 1"/>
           <p:cNvSpPr/>
           <p:nvPr/>
         </p:nvSpPr>
         <p:spPr>
           <a:xfrm>
-            <a:off x="6583680" y="2834640"/>
-            <a:ext cx="5029200" cy="1325880"/>
+            <a:off x="4297680" y="3931920"/>
+            <a:ext cx="3566160" cy="1371600"/>
           </a:xfrm>
           <a:prstGeom prst="roundRect">
             <a:avLst>
-              <a:gd name="adj" fmla="val 5517"/>
+              <a:gd name="adj" fmla="val 5333"/>
             </a:avLst>
           </a:prstGeom>
           <a:solidFill>
@@ -3260,14 +3993,14 @@
       </p:sp>
       <p:sp>
         <p:nvSpPr>
-          <p:cNvPr id="19" name="result number 1"/>
+          <p:cNvPr id="36" name="kpi number 1"/>
           <p:cNvSpPr txBox="1"/>
           <p:nvPr/>
         </p:nvSpPr>
         <p:spPr>
           <a:xfrm>
-            <a:off x="6858000" y="2971800"/>
-            <a:ext cx="4480560" cy="594360"/>
+            <a:off x="4572000" y="4069080"/>
+            <a:ext cx="3017520" cy="594360"/>
           </a:xfrm>
           <a:prstGeom prst="rect">
             <a:avLst/>
@@ -3285,13 +4018,13 @@
             <a:r>
               <a:rPr lang="en-US" sz="3000" b="1" dirty="0">
                 <a:solidFill>
-                  <a:schemeClr val="tx2"/>
+                  <a:schemeClr val="accent2"/>
                 </a:solidFill>
                 <a:latin typeface="Arial" pitchFamily="34" charset="0"/>
                 <a:ea typeface="Arial" pitchFamily="34" charset="-122"/>
                 <a:cs typeface="Arial" pitchFamily="34" charset="-120"/>
               </a:rPr>
-              <a:t>61.7 → 86.0 %</a:t>
+              <a:t>2.4 s</a:t>
             </a:r>
             <a:endParaRPr lang="en-US" sz="3000" dirty="0"/>
           </a:p>
@@ -3299,14 +4032,14 @@
       </p:sp>
       <p:sp>
         <p:nvSpPr>
-          <p:cNvPr id="20" name="result label 1"/>
+          <p:cNvPr id="37" name="kpi label 1"/>
           <p:cNvSpPr txBox="1"/>
           <p:nvPr/>
         </p:nvSpPr>
         <p:spPr>
           <a:xfrm>
-            <a:off x="6858000" y="3566160"/>
-            <a:ext cx="4480560" cy="457200"/>
+            <a:off x="4572000" y="4663440"/>
+            <a:ext cx="3017520" cy="548640"/>
           </a:xfrm>
           <a:prstGeom prst="rect">
             <a:avLst/>
@@ -3315,7 +4048,7 @@
           <a:ln/>
         </p:spPr>
         <p:txBody>
-          <a:bodyPr wrap="square" lIns="0" tIns="0" rIns="0" bIns="0" rtlCol="0" anchor="ctr"/>
+          <a:bodyPr wrap="square" lIns="0" tIns="0" rIns="0" bIns="0" rtlCol="0" anchor="t"/>
           <a:lstStyle/>
           <a:p>
             <a:pPr indent="0" marL="0">
@@ -3324,10 +4057,10 @@
             <a:r>
               <a:rPr lang="en-US" sz="1300" dirty="0">
                 <a:solidFill>
-                  <a:schemeClr val="accent6"/>
-                </a:solidFill>
-              </a:rPr>
-              <a:t>forklift throughput on the same site</a:t>
+                  <a:schemeClr val="tx1"/>
+                </a:solidFill>
+              </a:rPr>
+              <a:t>median warning lead time; 100 % detected ≥ 1 s before contact</a:t>
             </a:r>
             <a:endParaRPr lang="en-US" sz="1300" dirty="0"/>
           </a:p>
@@ -3335,18 +4068,18 @@
       </p:sp>
       <p:sp>
         <p:nvSpPr>
-          <p:cNvPr id="21" name="result 2"/>
+          <p:cNvPr id="38" name="kpi 2"/>
           <p:cNvSpPr/>
           <p:nvPr/>
         </p:nvSpPr>
         <p:spPr>
           <a:xfrm>
-            <a:off x="6583680" y="4343400"/>
-            <a:ext cx="5029200" cy="1325880"/>
+            <a:off x="8046720" y="3931920"/>
+            <a:ext cx="3566160" cy="1371600"/>
           </a:xfrm>
           <a:prstGeom prst="roundRect">
             <a:avLst>
-              <a:gd name="adj" fmla="val 5517"/>
+              <a:gd name="adj" fmla="val 5333"/>
             </a:avLst>
           </a:prstGeom>
           <a:solidFill>
@@ -3362,14 +4095,14 @@
       </p:sp>
       <p:sp>
         <p:nvSpPr>
-          <p:cNvPr id="22" name="result number 2"/>
+          <p:cNvPr id="39" name="kpi number 2"/>
           <p:cNvSpPr txBox="1"/>
           <p:nvPr/>
         </p:nvSpPr>
         <p:spPr>
           <a:xfrm>
-            <a:off x="6858000" y="4480560"/>
-            <a:ext cx="4480560" cy="594360"/>
+            <a:off x="8321040" y="4069080"/>
+            <a:ext cx="3017520" cy="594360"/>
           </a:xfrm>
           <a:prstGeom prst="rect">
             <a:avLst/>
@@ -3387,13 +4120,13 @@
             <a:r>
               <a:rPr lang="en-US" sz="3000" b="1" dirty="0">
                 <a:solidFill>
-                  <a:schemeClr val="tx2"/>
+                  <a:schemeClr val="accent2"/>
                 </a:solidFill>
                 <a:latin typeface="Arial" pitchFamily="34" charset="0"/>
                 <a:ea typeface="Arial" pitchFamily="34" charset="-122"/>
                 <a:cs typeface="Arial" pitchFamily="34" charset="-120"/>
               </a:rPr>
-              <a:t>180 → 2</a:t>
+              <a:t>0.73 s</a:t>
             </a:r>
             <a:endParaRPr lang="en-US" sz="3000" dirty="0"/>
           </a:p>
@@ -3401,14 +4134,14 @@
       </p:sp>
       <p:sp>
         <p:nvSpPr>
-          <p:cNvPr id="23" name="result label 2"/>
+          <p:cNvPr id="40" name="kpi label 2"/>
           <p:cNvSpPr txBox="1"/>
           <p:nvPr/>
         </p:nvSpPr>
         <p:spPr>
           <a:xfrm>
-            <a:off x="6858000" y="5074920"/>
-            <a:ext cx="4480560" cy="457200"/>
+            <a:off x="8321040" y="4663440"/>
+            <a:ext cx="3017520" cy="548640"/>
           </a:xfrm>
           <a:prstGeom prst="rect">
             <a:avLst/>
@@ -3417,7 +4150,7 @@
           <a:ln/>
         </p:spPr>
         <p:txBody>
-          <a:bodyPr wrap="square" lIns="0" tIns="0" rIns="0" bIns="0" rtlCol="0" anchor="ctr"/>
+          <a:bodyPr wrap="square" lIns="0" tIns="0" rIns="0" bIns="0" rtlCol="0" anchor="t"/>
           <a:lstStyle/>
           <a:p>
             <a:pPr indent="0" marL="0">
@@ -3426,10 +4159,10 @@
             <a:r>
               <a:rPr lang="en-US" sz="1300" dirty="0">
                 <a:solidFill>
-                  <a:schemeClr val="accent6"/>
-                </a:solidFill>
-              </a:rPr>
-              <a:t>collisions during a total network outage</a:t>
+                  <a:schemeClr val="tx1"/>
+                </a:solidFill>
+              </a:rPr>
+              <a:t>standby MEC app takeover</a:t>
             </a:r>
             <a:endParaRPr lang="en-US" sz="1300" dirty="0"/>
           </a:p>
@@ -3437,14 +4170,14 @@
       </p:sp>
       <p:sp>
         <p:nvSpPr>
-          <p:cNvPr id="24" name="result note"/>
+          <p:cNvPr id="41" name="failure path"/>
           <p:cNvSpPr txBox="1"/>
           <p:nvPr/>
         </p:nvSpPr>
         <p:spPr>
           <a:xfrm>
-            <a:off x="6583680" y="5897880"/>
-            <a:ext cx="5029200" cy="320040"/>
+            <a:off x="548640" y="5532120"/>
+            <a:ext cx="11064240" cy="640080"/>
           </a:xfrm>
           <a:prstGeom prst="rect">
             <a:avLst/>
@@ -3453,21 +4186,32 @@
           <a:ln/>
         </p:spPr>
         <p:txBody>
-          <a:bodyPr wrap="square" lIns="0" tIns="0" rIns="0" bIns="0" rtlCol="0" anchor="ctr"/>
+          <a:bodyPr wrap="square" lIns="0" tIns="0" rIns="0" bIns="0" rtlCol="0" anchor="t"/>
           <a:lstStyle/>
           <a:p>
             <a:pPr indent="0" marL="0">
               <a:buNone/>
             </a:pPr>
             <a:r>
-              <a:rPr lang="en-US" sz="1100" dirty="0">
-                <a:solidFill>
-                  <a:schemeClr val="accent6"/>
-                </a:solidFill>
-              </a:rPr>
-              <a:t>Closed-loop simulation; baseline = our v1.0 vibration-only alert, same simulator.</a:t>
-            </a:r>
-            <a:endParaRPr lang="en-US" sz="1100" dirty="0"/>
+              <a:rPr lang="en-US" sz="1400" b="1" dirty="0">
+                <a:solidFill>
+                  <a:schemeClr val="accent3"/>
+                </a:solidFill>
+              </a:rPr>
+              <a:t>Failure path: </a:t>
+            </a:r>
+            <a:pPr indent="0" marL="0">
+              <a:buNone/>
+            </a:pPr>
+            <a:r>
+              <a:rPr lang="en-US" sz="1400" dirty="0">
+                <a:solidFill>
+                  <a:schemeClr val="tx1"/>
+                </a:solidFill>
+              </a:rPr>
+              <a:t>no heartbeat from the MEC app for 2 s → devices switch to UWB ranging and D2D state exchange; neighbours relay alerts to devices in coverage holes; stop only when nothing else is known.</a:t>
+            </a:r>
+            <a:endParaRPr lang="en-US" sz="1400" dirty="0"/>
           </a:p>
         </p:txBody>
       </p:sp>
@@ -3573,30 +4317,394 @@
                   <a:schemeClr val="tx2"/>
                 </a:solidFill>
               </a:rPr>
-              <a:t>Development plan: Oct 12 – Nov 25</a:t>
+              <a:t>Status today: working end to end</a:t>
             </a:r>
             <a:endParaRPr lang="en-US" sz="3000" dirty="0"/>
           </a:p>
         </p:txBody>
       </p:sp>
-      <p:sp>
-        <p:nvSpPr>
-          <p:cNvPr id="3" name="week line 0"/>
+      <p:pic>
+        <p:nvPicPr>
+          <p:cNvPr id="3" name="done icon 0" descr="preencoded.png">    </p:cNvPr>
+          <p:cNvPicPr>
+            <a:picLocks noChangeAspect="1"/>
+          </p:cNvPicPr>
+          <p:nvPr/>
+        </p:nvPicPr>
+        <p:blipFill>
+          <a:blip r:embed="rId1"/>
+          <a:stretch>
+            <a:fillRect/>
+          </a:stretch>
+        </p:blipFill>
+        <p:spPr>
+          <a:xfrm>
+            <a:off x="548640" y="1399032"/>
+            <a:ext cx="329184" cy="329184"/>
+          </a:xfrm>
+          <a:prstGeom prst="rect">
+            <a:avLst/>
+          </a:prstGeom>
+        </p:spPr>
+      </p:pic>
+      <p:sp>
+        <p:nvSpPr>
+          <p:cNvPr id="4" name="done item 0"/>
+          <p:cNvSpPr txBox="1"/>
+          <p:nvPr/>
+        </p:nvSpPr>
+        <p:spPr>
+          <a:xfrm>
+            <a:off x="1005840" y="1325880"/>
+            <a:ext cx="5120640" cy="594360"/>
+          </a:xfrm>
+          <a:prstGeom prst="rect">
+            <a:avLst/>
+          </a:prstGeom>
+          <a:noFill/>
+          <a:ln/>
+        </p:spPr>
+        <p:txBody>
+          <a:bodyPr wrap="square" lIns="0" tIns="0" rIns="0" bIns="0" rtlCol="0" anchor="ctr"/>
+          <a:lstStyle/>
+          <a:p>
+            <a:pPr indent="0" marL="0">
+              <a:buNone/>
+            </a:pPr>
+            <a:r>
+              <a:rPr lang="en-US" sz="1400" dirty="0">
+                <a:solidFill>
+                  <a:schemeClr val="tx1"/>
+                </a:solidFill>
+              </a:rPr>
+              <a:t>Per-device AEs and ACPs (CREATE limited to subscriptions); access checks in CI</a:t>
+            </a:r>
+            <a:endParaRPr lang="en-US" sz="1400" dirty="0"/>
+          </a:p>
+        </p:txBody>
+      </p:sp>
+      <p:pic>
+        <p:nvPicPr>
+          <p:cNvPr id="5" name="done icon 1" descr="preencoded.png">    </p:cNvPr>
+          <p:cNvPicPr>
+            <a:picLocks noChangeAspect="1"/>
+          </p:cNvPicPr>
+          <p:nvPr/>
+        </p:nvPicPr>
+        <p:blipFill>
+          <a:blip r:embed="rId2"/>
+          <a:stretch>
+            <a:fillRect/>
+          </a:stretch>
+        </p:blipFill>
+        <p:spPr>
+          <a:xfrm>
+            <a:off x="548640" y="2148840"/>
+            <a:ext cx="329184" cy="329184"/>
+          </a:xfrm>
+          <a:prstGeom prst="rect">
+            <a:avLst/>
+          </a:prstGeom>
+        </p:spPr>
+      </p:pic>
+      <p:sp>
+        <p:nvSpPr>
+          <p:cNvPr id="6" name="done item 1"/>
+          <p:cNvSpPr txBox="1"/>
+          <p:nvPr/>
+        </p:nvSpPr>
+        <p:spPr>
+          <a:xfrm>
+            <a:off x="1005840" y="2075688"/>
+            <a:ext cx="5120640" cy="594360"/>
+          </a:xfrm>
+          <a:prstGeom prst="rect">
+            <a:avLst/>
+          </a:prstGeom>
+          <a:noFill/>
+          <a:ln/>
+        </p:spPr>
+        <p:txBody>
+          <a:bodyPr wrap="square" lIns="0" tIns="0" rIns="0" bIns="0" rtlCol="0" anchor="ctr"/>
+          <a:lstStyle/>
+          <a:p>
+            <a:pPr indent="0" marL="0">
+              <a:buNone/>
+            </a:pPr>
+            <a:r>
+              <a:rPr lang="en-US" sz="1400" dirty="0">
+                <a:solidFill>
+                  <a:schemeClr val="tx1"/>
+                </a:solidFill>
+              </a:rPr>
+              <a:t>SDT flexContainer twins, labels, discovery onboarding, SAREF semantic query</a:t>
+            </a:r>
+            <a:endParaRPr lang="en-US" sz="1400" dirty="0"/>
+          </a:p>
+        </p:txBody>
+      </p:sp>
+      <p:pic>
+        <p:nvPicPr>
+          <p:cNvPr id="7" name="done icon 2" descr="preencoded.png">    </p:cNvPr>
+          <p:cNvPicPr>
+            <a:picLocks noChangeAspect="1"/>
+          </p:cNvPicPr>
+          <p:nvPr/>
+        </p:nvPicPr>
+        <p:blipFill>
+          <a:blip r:embed="rId3"/>
+          <a:stretch>
+            <a:fillRect/>
+          </a:stretch>
+        </p:blipFill>
+        <p:spPr>
+          <a:xfrm>
+            <a:off x="548640" y="2898648"/>
+            <a:ext cx="329184" cy="329184"/>
+          </a:xfrm>
+          <a:prstGeom prst="rect">
+            <a:avLst/>
+          </a:prstGeom>
+        </p:spPr>
+      </p:pic>
+      <p:sp>
+        <p:nvSpPr>
+          <p:cNvPr id="8" name="done item 2"/>
+          <p:cNvSpPr txBox="1"/>
+          <p:nvPr/>
+        </p:nvSpPr>
+        <p:spPr>
+          <a:xfrm>
+            <a:off x="1005840" y="2825496"/>
+            <a:ext cx="5120640" cy="594360"/>
+          </a:xfrm>
+          <a:prstGeom prst="rect">
+            <a:avLst/>
+          </a:prstGeom>
+          <a:noFill/>
+          <a:ln/>
+        </p:spPr>
+        <p:txBody>
+          <a:bodyPr wrap="square" lIns="0" tIns="0" rIns="0" bIns="0" rtlCol="0" anchor="ctr"/>
+          <a:lstStyle/>
+          <a:p>
+            <a:pPr indent="0" marL="0">
+              <a:buNone/>
+            </a:pPr>
+            <a:r>
+              <a:rPr lang="en-US" sz="1400" dirty="0">
+                <a:solidFill>
+                  <a:schemeClr val="tx1"/>
+                </a:solidFill>
+              </a:rPr>
+              <a:t>CSE handover between zone MN-CSEs with announcement and home records</a:t>
+            </a:r>
+            <a:endParaRPr lang="en-US" sz="1400" dirty="0"/>
+          </a:p>
+        </p:txBody>
+      </p:sp>
+      <p:pic>
+        <p:nvPicPr>
+          <p:cNvPr id="9" name="done icon 3" descr="preencoded.png">    </p:cNvPr>
+          <p:cNvPicPr>
+            <a:picLocks noChangeAspect="1"/>
+          </p:cNvPicPr>
+          <p:nvPr/>
+        </p:nvPicPr>
+        <p:blipFill>
+          <a:blip r:embed="rId4"/>
+          <a:stretch>
+            <a:fillRect/>
+          </a:stretch>
+        </p:blipFill>
+        <p:spPr>
+          <a:xfrm>
+            <a:off x="548640" y="3648456"/>
+            <a:ext cx="329184" cy="329184"/>
+          </a:xfrm>
+          <a:prstGeom prst="rect">
+            <a:avLst/>
+          </a:prstGeom>
+        </p:spPr>
+      </p:pic>
+      <p:sp>
+        <p:nvSpPr>
+          <p:cNvPr id="10" name="done item 3"/>
+          <p:cNvSpPr txBox="1"/>
+          <p:nvPr/>
+        </p:nvSpPr>
+        <p:spPr>
+          <a:xfrm>
+            <a:off x="1005840" y="3575304"/>
+            <a:ext cx="5120640" cy="594360"/>
+          </a:xfrm>
+          <a:prstGeom prst="rect">
+            <a:avLst/>
+          </a:prstGeom>
+          <a:noFill/>
+          <a:ln/>
+        </p:spPr>
+        <p:txBody>
+          <a:bodyPr wrap="square" lIns="0" tIns="0" rIns="0" bIns="0" rtlCol="0" anchor="ctr"/>
+          <a:lstStyle/>
+          <a:p>
+            <a:pPr indent="0" marL="0">
+              <a:buNone/>
+            </a:pPr>
+            <a:r>
+              <a:rPr lang="en-US" sz="1400" dirty="0">
+                <a:solidFill>
+                  <a:schemeClr val="tx1"/>
+                </a:solidFill>
+              </a:rPr>
+              <a:t>Federated learning through oneM2M; AI safety agent over 4 MCP servers</a:t>
+            </a:r>
+            <a:endParaRPr lang="en-US" sz="1400" dirty="0"/>
+          </a:p>
+        </p:txBody>
+      </p:sp>
+      <p:pic>
+        <p:nvPicPr>
+          <p:cNvPr id="11" name="done icon 4" descr="preencoded.png">    </p:cNvPr>
+          <p:cNvPicPr>
+            <a:picLocks noChangeAspect="1"/>
+          </p:cNvPicPr>
+          <p:nvPr/>
+        </p:nvPicPr>
+        <p:blipFill>
+          <a:blip r:embed="rId5"/>
+          <a:stretch>
+            <a:fillRect/>
+          </a:stretch>
+        </p:blipFill>
+        <p:spPr>
+          <a:xfrm>
+            <a:off x="548640" y="4398264"/>
+            <a:ext cx="329184" cy="329184"/>
+          </a:xfrm>
+          <a:prstGeom prst="rect">
+            <a:avLst/>
+          </a:prstGeom>
+        </p:spPr>
+      </p:pic>
+      <p:sp>
+        <p:nvSpPr>
+          <p:cNvPr id="12" name="done item 4"/>
+          <p:cNvSpPr txBox="1"/>
+          <p:nvPr/>
+        </p:nvSpPr>
+        <p:spPr>
+          <a:xfrm>
+            <a:off x="1005840" y="4325112"/>
+            <a:ext cx="5120640" cy="594360"/>
+          </a:xfrm>
+          <a:prstGeom prst="rect">
+            <a:avLst/>
+          </a:prstGeom>
+          <a:noFill/>
+          <a:ln/>
+        </p:spPr>
+        <p:txBody>
+          <a:bodyPr wrap="square" lIns="0" tIns="0" rIns="0" bIns="0" rtlCol="0" anchor="ctr"/>
+          <a:lstStyle/>
+          <a:p>
+            <a:pPr indent="0" marL="0">
+              <a:buNone/>
+            </a:pPr>
+            <a:r>
+              <a:rPr lang="en-US" sz="1400" dirty="0">
+                <a:solidFill>
+                  <a:schemeClr val="tx1"/>
+                </a:solidFill>
+              </a:rPr>
+              <a:t>ETSI MEC Sandbox and AdvantEDGE; MEC app with HA, monitoring, dashboard</a:t>
+            </a:r>
+            <a:endParaRPr lang="en-US" sz="1400" dirty="0"/>
+          </a:p>
+        </p:txBody>
+      </p:sp>
+      <p:pic>
+        <p:nvPicPr>
+          <p:cNvPr id="13" name="done icon 5" descr="preencoded.png">    </p:cNvPr>
+          <p:cNvPicPr>
+            <a:picLocks noChangeAspect="1"/>
+          </p:cNvPicPr>
+          <p:nvPr/>
+        </p:nvPicPr>
+        <p:blipFill>
+          <a:blip r:embed="rId6"/>
+          <a:stretch>
+            <a:fillRect/>
+          </a:stretch>
+        </p:blipFill>
+        <p:spPr>
+          <a:xfrm>
+            <a:off x="548640" y="5148072"/>
+            <a:ext cx="329184" cy="329184"/>
+          </a:xfrm>
+          <a:prstGeom prst="rect">
+            <a:avLst/>
+          </a:prstGeom>
+        </p:spPr>
+      </p:pic>
+      <p:sp>
+        <p:nvSpPr>
+          <p:cNvPr id="14" name="done item 5"/>
+          <p:cNvSpPr txBox="1"/>
+          <p:nvPr/>
+        </p:nvSpPr>
+        <p:spPr>
+          <a:xfrm>
+            <a:off x="1005840" y="5074920"/>
+            <a:ext cx="5120640" cy="594360"/>
+          </a:xfrm>
+          <a:prstGeom prst="rect">
+            <a:avLst/>
+          </a:prstGeom>
+          <a:noFill/>
+          <a:ln/>
+        </p:spPr>
+        <p:txBody>
+          <a:bodyPr wrap="square" lIns="0" tIns="0" rIns="0" bIns="0" rtlCol="0" anchor="ctr"/>
+          <a:lstStyle/>
+          <a:p>
+            <a:pPr indent="0" marL="0">
+              <a:buNone/>
+            </a:pPr>
+            <a:r>
+              <a:rPr lang="en-US" sz="1400" dirty="0">
+                <a:solidFill>
+                  <a:schemeClr val="tx1"/>
+                </a:solidFill>
+              </a:rPr>
+              <a:t>ESP32 firmware run unmodified against a real CSE in CI; hackster.io draft</a:t>
+            </a:r>
+            <a:endParaRPr lang="en-US" sz="1400" dirty="0"/>
+          </a:p>
+        </p:txBody>
+      </p:sp>
+      <p:sp>
+        <p:nvSpPr>
+          <p:cNvPr id="15" name="result 0"/>
           <p:cNvSpPr/>
           <p:nvPr/>
         </p:nvSpPr>
         <p:spPr>
           <a:xfrm>
-            <a:off x="3566160" y="1600200"/>
-            <a:ext cx="0" cy="4069080"/>
-          </a:xfrm>
-          <a:prstGeom prst="line">
-            <a:avLst/>
-          </a:prstGeom>
-          <a:noFill/>
-          <a:ln w="9525">
+            <a:off x="6583680" y="1325880"/>
+            <a:ext cx="5029200" cy="1325880"/>
+          </a:xfrm>
+          <a:prstGeom prst="roundRect">
+            <a:avLst>
+              <a:gd name="adj" fmla="val 5517"/>
+            </a:avLst>
+          </a:prstGeom>
+          <a:solidFill>
+            <a:schemeClr val="bg2"/>
+          </a:solidFill>
+          <a:ln w="12700">
             <a:solidFill>
-              <a:srgbClr val="D5DAE0"/>
+              <a:schemeClr val="bg2"/>
             </a:solidFill>
             <a:prstDash val="solid"/>
           </a:ln>
@@ -3604,14 +4712,14 @@
       </p:sp>
       <p:sp>
         <p:nvSpPr>
-          <p:cNvPr id="4" name="week label 0"/>
+          <p:cNvPr id="16" name="result number 0"/>
           <p:cNvSpPr txBox="1"/>
           <p:nvPr/>
         </p:nvSpPr>
         <p:spPr>
           <a:xfrm>
-            <a:off x="3200400" y="1234440"/>
-            <a:ext cx="731520" cy="274320"/>
+            <a:off x="6858000" y="1463040"/>
+            <a:ext cx="4480560" cy="594360"/>
           </a:xfrm>
           <a:prstGeom prst="rect">
             <a:avLst/>
@@ -3623,39 +4731,82 @@
           <a:bodyPr wrap="square" lIns="0" tIns="0" rIns="0" bIns="0" rtlCol="0" anchor="ctr"/>
           <a:lstStyle/>
           <a:p>
-            <a:pPr algn="ctr" indent="0" marL="0">
-              <a:buNone/>
-            </a:pPr>
-            <a:r>
-              <a:rPr lang="en-US" sz="1100" dirty="0">
+            <a:pPr indent="0" marL="0">
+              <a:buNone/>
+            </a:pPr>
+            <a:r>
+              <a:rPr lang="en-US" sz="3000" b="1" dirty="0">
+                <a:solidFill>
+                  <a:schemeClr val="tx2"/>
+                </a:solidFill>
+                <a:latin typeface="Arial" pitchFamily="34" charset="0"/>
+                <a:ea typeface="Arial" pitchFamily="34" charset="-122"/>
+                <a:cs typeface="Arial" pitchFamily="34" charset="-120"/>
+              </a:rPr>
+              <a:t>100 → 4</a:t>
+            </a:r>
+            <a:endParaRPr lang="en-US" sz="3000" dirty="0"/>
+          </a:p>
+        </p:txBody>
+      </p:sp>
+      <p:sp>
+        <p:nvSpPr>
+          <p:cNvPr id="17" name="result label 0"/>
+          <p:cNvSpPr txBox="1"/>
+          <p:nvPr/>
+        </p:nvSpPr>
+        <p:spPr>
+          <a:xfrm>
+            <a:off x="6858000" y="2057400"/>
+            <a:ext cx="4480560" cy="457200"/>
+          </a:xfrm>
+          <a:prstGeom prst="rect">
+            <a:avLst/>
+          </a:prstGeom>
+          <a:noFill/>
+          <a:ln/>
+        </p:spPr>
+        <p:txBody>
+          <a:bodyPr wrap="square" lIns="0" tIns="0" rIns="0" bIns="0" rtlCol="0" anchor="ctr"/>
+          <a:lstStyle/>
+          <a:p>
+            <a:pPr indent="0" marL="0">
+              <a:buNone/>
+            </a:pPr>
+            <a:r>
+              <a:rPr lang="en-US" sz="1300" dirty="0">
                 <a:solidFill>
                   <a:schemeClr val="accent6"/>
                 </a:solidFill>
               </a:rPr>
-              <a:t>Oct 12</a:t>
-            </a:r>
-            <a:endParaRPr lang="en-US" sz="1100" dirty="0"/>
-          </a:p>
-        </p:txBody>
-      </p:sp>
-      <p:sp>
-        <p:nvSpPr>
-          <p:cNvPr id="5" name="week line 1"/>
+              <a:t>collisions, many-to-many site (8 workers, 4 forklifts, 750 conflicts)</a:t>
+            </a:r>
+            <a:endParaRPr lang="en-US" sz="1300" dirty="0"/>
+          </a:p>
+        </p:txBody>
+      </p:sp>
+      <p:sp>
+        <p:nvSpPr>
+          <p:cNvPr id="18" name="result 1"/>
           <p:cNvSpPr/>
           <p:nvPr/>
         </p:nvSpPr>
         <p:spPr>
           <a:xfrm>
-            <a:off x="4817872" y="1600200"/>
-            <a:ext cx="0" cy="4069080"/>
-          </a:xfrm>
-          <a:prstGeom prst="line">
-            <a:avLst/>
-          </a:prstGeom>
-          <a:noFill/>
-          <a:ln w="9525">
+            <a:off x="6583680" y="2834640"/>
+            <a:ext cx="5029200" cy="1325880"/>
+          </a:xfrm>
+          <a:prstGeom prst="roundRect">
+            <a:avLst>
+              <a:gd name="adj" fmla="val 5517"/>
+            </a:avLst>
+          </a:prstGeom>
+          <a:solidFill>
+            <a:schemeClr val="bg2"/>
+          </a:solidFill>
+          <a:ln w="12700">
             <a:solidFill>
-              <a:srgbClr val="D5DAE0"/>
+              <a:schemeClr val="bg2"/>
             </a:solidFill>
             <a:prstDash val="solid"/>
           </a:ln>
@@ -3663,14 +4814,14 @@
       </p:sp>
       <p:sp>
         <p:nvSpPr>
-          <p:cNvPr id="6" name="week label 1"/>
+          <p:cNvPr id="19" name="result number 1"/>
           <p:cNvSpPr txBox="1"/>
           <p:nvPr/>
         </p:nvSpPr>
         <p:spPr>
           <a:xfrm>
-            <a:off x="4452112" y="1234440"/>
-            <a:ext cx="731520" cy="274320"/>
+            <a:off x="6858000" y="2971800"/>
+            <a:ext cx="4480560" cy="594360"/>
           </a:xfrm>
           <a:prstGeom prst="rect">
             <a:avLst/>
@@ -3682,39 +4833,82 @@
           <a:bodyPr wrap="square" lIns="0" tIns="0" rIns="0" bIns="0" rtlCol="0" anchor="ctr"/>
           <a:lstStyle/>
           <a:p>
-            <a:pPr algn="ctr" indent="0" marL="0">
-              <a:buNone/>
-            </a:pPr>
-            <a:r>
-              <a:rPr lang="en-US" sz="1100" dirty="0">
+            <a:pPr indent="0" marL="0">
+              <a:buNone/>
+            </a:pPr>
+            <a:r>
+              <a:rPr lang="en-US" sz="3000" b="1" dirty="0">
+                <a:solidFill>
+                  <a:schemeClr val="tx2"/>
+                </a:solidFill>
+                <a:latin typeface="Arial" pitchFamily="34" charset="0"/>
+                <a:ea typeface="Arial" pitchFamily="34" charset="-122"/>
+                <a:cs typeface="Arial" pitchFamily="34" charset="-120"/>
+              </a:rPr>
+              <a:t>61.7 → 86.0 %</a:t>
+            </a:r>
+            <a:endParaRPr lang="en-US" sz="3000" dirty="0"/>
+          </a:p>
+        </p:txBody>
+      </p:sp>
+      <p:sp>
+        <p:nvSpPr>
+          <p:cNvPr id="20" name="result label 1"/>
+          <p:cNvSpPr txBox="1"/>
+          <p:nvPr/>
+        </p:nvSpPr>
+        <p:spPr>
+          <a:xfrm>
+            <a:off x="6858000" y="3566160"/>
+            <a:ext cx="4480560" cy="457200"/>
+          </a:xfrm>
+          <a:prstGeom prst="rect">
+            <a:avLst/>
+          </a:prstGeom>
+          <a:noFill/>
+          <a:ln/>
+        </p:spPr>
+        <p:txBody>
+          <a:bodyPr wrap="square" lIns="0" tIns="0" rIns="0" bIns="0" rtlCol="0" anchor="ctr"/>
+          <a:lstStyle/>
+          <a:p>
+            <a:pPr indent="0" marL="0">
+              <a:buNone/>
+            </a:pPr>
+            <a:r>
+              <a:rPr lang="en-US" sz="1300" dirty="0">
                 <a:solidFill>
                   <a:schemeClr val="accent6"/>
                 </a:solidFill>
               </a:rPr>
-              <a:t>Oct 19</a:t>
-            </a:r>
-            <a:endParaRPr lang="en-US" sz="1100" dirty="0"/>
-          </a:p>
-        </p:txBody>
-      </p:sp>
-      <p:sp>
-        <p:nvSpPr>
-          <p:cNvPr id="7" name="week line 2"/>
+              <a:t>forklift throughput on the same site</a:t>
+            </a:r>
+            <a:endParaRPr lang="en-US" sz="1300" dirty="0"/>
+          </a:p>
+        </p:txBody>
+      </p:sp>
+      <p:sp>
+        <p:nvSpPr>
+          <p:cNvPr id="21" name="result 2"/>
           <p:cNvSpPr/>
           <p:nvPr/>
         </p:nvSpPr>
         <p:spPr>
           <a:xfrm>
-            <a:off x="6069584" y="1600200"/>
-            <a:ext cx="0" cy="4069080"/>
-          </a:xfrm>
-          <a:prstGeom prst="line">
-            <a:avLst/>
-          </a:prstGeom>
-          <a:noFill/>
-          <a:ln w="9525">
+            <a:off x="6583680" y="4343400"/>
+            <a:ext cx="5029200" cy="1325880"/>
+          </a:xfrm>
+          <a:prstGeom prst="roundRect">
+            <a:avLst>
+              <a:gd name="adj" fmla="val 5517"/>
+            </a:avLst>
+          </a:prstGeom>
+          <a:solidFill>
+            <a:schemeClr val="bg2"/>
+          </a:solidFill>
+          <a:ln w="12700">
             <a:solidFill>
-              <a:srgbClr val="D5DAE0"/>
+              <a:schemeClr val="bg2"/>
             </a:solidFill>
             <a:prstDash val="solid"/>
           </a:ln>
@@ -3722,14 +4916,14 @@
       </p:sp>
       <p:sp>
         <p:nvSpPr>
-          <p:cNvPr id="8" name="week label 2"/>
+          <p:cNvPr id="22" name="result number 2"/>
           <p:cNvSpPr txBox="1"/>
           <p:nvPr/>
         </p:nvSpPr>
         <p:spPr>
           <a:xfrm>
-            <a:off x="5703824" y="1234440"/>
-            <a:ext cx="731520" cy="274320"/>
+            <a:off x="6858000" y="4480560"/>
+            <a:ext cx="4480560" cy="594360"/>
           </a:xfrm>
           <a:prstGeom prst="rect">
             <a:avLst/>
@@ -3741,7 +4935,82 @@
           <a:bodyPr wrap="square" lIns="0" tIns="0" rIns="0" bIns="0" rtlCol="0" anchor="ctr"/>
           <a:lstStyle/>
           <a:p>
-            <a:pPr algn="ctr" indent="0" marL="0">
+            <a:pPr indent="0" marL="0">
+              <a:buNone/>
+            </a:pPr>
+            <a:r>
+              <a:rPr lang="en-US" sz="3000" b="1" dirty="0">
+                <a:solidFill>
+                  <a:schemeClr val="tx2"/>
+                </a:solidFill>
+                <a:latin typeface="Arial" pitchFamily="34" charset="0"/>
+                <a:ea typeface="Arial" pitchFamily="34" charset="-122"/>
+                <a:cs typeface="Arial" pitchFamily="34" charset="-120"/>
+              </a:rPr>
+              <a:t>180 → 2</a:t>
+            </a:r>
+            <a:endParaRPr lang="en-US" sz="3000" dirty="0"/>
+          </a:p>
+        </p:txBody>
+      </p:sp>
+      <p:sp>
+        <p:nvSpPr>
+          <p:cNvPr id="23" name="result label 2"/>
+          <p:cNvSpPr txBox="1"/>
+          <p:nvPr/>
+        </p:nvSpPr>
+        <p:spPr>
+          <a:xfrm>
+            <a:off x="6858000" y="5074920"/>
+            <a:ext cx="4480560" cy="457200"/>
+          </a:xfrm>
+          <a:prstGeom prst="rect">
+            <a:avLst/>
+          </a:prstGeom>
+          <a:noFill/>
+          <a:ln/>
+        </p:spPr>
+        <p:txBody>
+          <a:bodyPr wrap="square" lIns="0" tIns="0" rIns="0" bIns="0" rtlCol="0" anchor="ctr"/>
+          <a:lstStyle/>
+          <a:p>
+            <a:pPr indent="0" marL="0">
+              <a:buNone/>
+            </a:pPr>
+            <a:r>
+              <a:rPr lang="en-US" sz="1300" dirty="0">
+                <a:solidFill>
+                  <a:schemeClr val="accent6"/>
+                </a:solidFill>
+              </a:rPr>
+              <a:t>collisions during a total network outage</a:t>
+            </a:r>
+            <a:endParaRPr lang="en-US" sz="1300" dirty="0"/>
+          </a:p>
+        </p:txBody>
+      </p:sp>
+      <p:sp>
+        <p:nvSpPr>
+          <p:cNvPr id="24" name="result note"/>
+          <p:cNvSpPr txBox="1"/>
+          <p:nvPr/>
+        </p:nvSpPr>
+        <p:spPr>
+          <a:xfrm>
+            <a:off x="6583680" y="5897880"/>
+            <a:ext cx="5029200" cy="320040"/>
+          </a:xfrm>
+          <a:prstGeom prst="rect">
+            <a:avLst/>
+          </a:prstGeom>
+          <a:noFill/>
+          <a:ln/>
+        </p:spPr>
+        <p:txBody>
+          <a:bodyPr wrap="square" lIns="0" tIns="0" rIns="0" bIns="0" rtlCol="0" anchor="ctr"/>
+          <a:lstStyle/>
+          <a:p>
+            <a:pPr indent="0" marL="0">
               <a:buNone/>
             </a:pPr>
             <a:r>
@@ -3750,775 +5019,7 @@
                   <a:schemeClr val="accent6"/>
                 </a:solidFill>
               </a:rPr>
-              <a:t>Oct 26</a:t>
-            </a:r>
-            <a:endParaRPr lang="en-US" sz="1100" dirty="0"/>
-          </a:p>
-        </p:txBody>
-      </p:sp>
-      <p:sp>
-        <p:nvSpPr>
-          <p:cNvPr id="9" name="week line 3"/>
-          <p:cNvSpPr/>
-          <p:nvPr/>
-        </p:nvSpPr>
-        <p:spPr>
-          <a:xfrm>
-            <a:off x="7321296" y="1600200"/>
-            <a:ext cx="0" cy="4069080"/>
-          </a:xfrm>
-          <a:prstGeom prst="line">
-            <a:avLst/>
-          </a:prstGeom>
-          <a:noFill/>
-          <a:ln w="9525">
-            <a:solidFill>
-              <a:srgbClr val="D5DAE0"/>
-            </a:solidFill>
-            <a:prstDash val="solid"/>
-          </a:ln>
-        </p:spPr>
-      </p:sp>
-      <p:sp>
-        <p:nvSpPr>
-          <p:cNvPr id="10" name="week label 3"/>
-          <p:cNvSpPr txBox="1"/>
-          <p:nvPr/>
-        </p:nvSpPr>
-        <p:spPr>
-          <a:xfrm>
-            <a:off x="6955536" y="1234440"/>
-            <a:ext cx="731520" cy="274320"/>
-          </a:xfrm>
-          <a:prstGeom prst="rect">
-            <a:avLst/>
-          </a:prstGeom>
-          <a:noFill/>
-          <a:ln/>
-        </p:spPr>
-        <p:txBody>
-          <a:bodyPr wrap="square" lIns="0" tIns="0" rIns="0" bIns="0" rtlCol="0" anchor="ctr"/>
-          <a:lstStyle/>
-          <a:p>
-            <a:pPr algn="ctr" indent="0" marL="0">
-              <a:buNone/>
-            </a:pPr>
-            <a:r>
-              <a:rPr lang="en-US" sz="1100" dirty="0">
-                <a:solidFill>
-                  <a:schemeClr val="accent6"/>
-                </a:solidFill>
-              </a:rPr>
-              <a:t>Nov 2</a:t>
-            </a:r>
-            <a:endParaRPr lang="en-US" sz="1100" dirty="0"/>
-          </a:p>
-        </p:txBody>
-      </p:sp>
-      <p:sp>
-        <p:nvSpPr>
-          <p:cNvPr id="11" name="week line 4"/>
-          <p:cNvSpPr/>
-          <p:nvPr/>
-        </p:nvSpPr>
-        <p:spPr>
-          <a:xfrm>
-            <a:off x="8573008" y="1600200"/>
-            <a:ext cx="0" cy="4069080"/>
-          </a:xfrm>
-          <a:prstGeom prst="line">
-            <a:avLst/>
-          </a:prstGeom>
-          <a:noFill/>
-          <a:ln w="9525">
-            <a:solidFill>
-              <a:srgbClr val="D5DAE0"/>
-            </a:solidFill>
-            <a:prstDash val="solid"/>
-          </a:ln>
-        </p:spPr>
-      </p:sp>
-      <p:sp>
-        <p:nvSpPr>
-          <p:cNvPr id="12" name="week label 4"/>
-          <p:cNvSpPr txBox="1"/>
-          <p:nvPr/>
-        </p:nvSpPr>
-        <p:spPr>
-          <a:xfrm>
-            <a:off x="8207248" y="1234440"/>
-            <a:ext cx="731520" cy="274320"/>
-          </a:xfrm>
-          <a:prstGeom prst="rect">
-            <a:avLst/>
-          </a:prstGeom>
-          <a:noFill/>
-          <a:ln/>
-        </p:spPr>
-        <p:txBody>
-          <a:bodyPr wrap="square" lIns="0" tIns="0" rIns="0" bIns="0" rtlCol="0" anchor="ctr"/>
-          <a:lstStyle/>
-          <a:p>
-            <a:pPr algn="ctr" indent="0" marL="0">
-              <a:buNone/>
-            </a:pPr>
-            <a:r>
-              <a:rPr lang="en-US" sz="1100" dirty="0">
-                <a:solidFill>
-                  <a:schemeClr val="accent6"/>
-                </a:solidFill>
-              </a:rPr>
-              <a:t>Nov 9</a:t>
-            </a:r>
-            <a:endParaRPr lang="en-US" sz="1100" dirty="0"/>
-          </a:p>
-        </p:txBody>
-      </p:sp>
-      <p:sp>
-        <p:nvSpPr>
-          <p:cNvPr id="13" name="week line 5"/>
-          <p:cNvSpPr/>
-          <p:nvPr/>
-        </p:nvSpPr>
-        <p:spPr>
-          <a:xfrm>
-            <a:off x="9824720" y="1600200"/>
-            <a:ext cx="0" cy="4069080"/>
-          </a:xfrm>
-          <a:prstGeom prst="line">
-            <a:avLst/>
-          </a:prstGeom>
-          <a:noFill/>
-          <a:ln w="9525">
-            <a:solidFill>
-              <a:srgbClr val="D5DAE0"/>
-            </a:solidFill>
-            <a:prstDash val="solid"/>
-          </a:ln>
-        </p:spPr>
-      </p:sp>
-      <p:sp>
-        <p:nvSpPr>
-          <p:cNvPr id="14" name="week label 5"/>
-          <p:cNvSpPr txBox="1"/>
-          <p:nvPr/>
-        </p:nvSpPr>
-        <p:spPr>
-          <a:xfrm>
-            <a:off x="9458960" y="1234440"/>
-            <a:ext cx="731520" cy="274320"/>
-          </a:xfrm>
-          <a:prstGeom prst="rect">
-            <a:avLst/>
-          </a:prstGeom>
-          <a:noFill/>
-          <a:ln/>
-        </p:spPr>
-        <p:txBody>
-          <a:bodyPr wrap="square" lIns="0" tIns="0" rIns="0" bIns="0" rtlCol="0" anchor="ctr"/>
-          <a:lstStyle/>
-          <a:p>
-            <a:pPr algn="ctr" indent="0" marL="0">
-              <a:buNone/>
-            </a:pPr>
-            <a:r>
-              <a:rPr lang="en-US" sz="1100" dirty="0">
-                <a:solidFill>
-                  <a:schemeClr val="accent6"/>
-                </a:solidFill>
-              </a:rPr>
-              <a:t>Nov 16</a:t>
-            </a:r>
-            <a:endParaRPr lang="en-US" sz="1100" dirty="0"/>
-          </a:p>
-        </p:txBody>
-      </p:sp>
-      <p:sp>
-        <p:nvSpPr>
-          <p:cNvPr id="15" name="week line 6"/>
-          <p:cNvSpPr/>
-          <p:nvPr/>
-        </p:nvSpPr>
-        <p:spPr>
-          <a:xfrm>
-            <a:off x="11076432" y="1600200"/>
-            <a:ext cx="0" cy="4069080"/>
-          </a:xfrm>
-          <a:prstGeom prst="line">
-            <a:avLst/>
-          </a:prstGeom>
-          <a:noFill/>
-          <a:ln w="9525">
-            <a:solidFill>
-              <a:srgbClr val="D5DAE0"/>
-            </a:solidFill>
-            <a:prstDash val="solid"/>
-          </a:ln>
-        </p:spPr>
-      </p:sp>
-      <p:sp>
-        <p:nvSpPr>
-          <p:cNvPr id="16" name="week label 6"/>
-          <p:cNvSpPr txBox="1"/>
-          <p:nvPr/>
-        </p:nvSpPr>
-        <p:spPr>
-          <a:xfrm>
-            <a:off x="10710672" y="1234440"/>
-            <a:ext cx="731520" cy="274320"/>
-          </a:xfrm>
-          <a:prstGeom prst="rect">
-            <a:avLst/>
-          </a:prstGeom>
-          <a:noFill/>
-          <a:ln/>
-        </p:spPr>
-        <p:txBody>
-          <a:bodyPr wrap="square" lIns="0" tIns="0" rIns="0" bIns="0" rtlCol="0" anchor="ctr"/>
-          <a:lstStyle/>
-          <a:p>
-            <a:pPr algn="ctr" indent="0" marL="0">
-              <a:buNone/>
-            </a:pPr>
-            <a:r>
-              <a:rPr lang="en-US" sz="1100" dirty="0">
-                <a:solidFill>
-                  <a:schemeClr val="accent6"/>
-                </a:solidFill>
-              </a:rPr>
-              <a:t>Nov 23</a:t>
-            </a:r>
-            <a:endParaRPr lang="en-US" sz="1100" dirty="0"/>
-          </a:p>
-        </p:txBody>
-      </p:sp>
-      <p:sp>
-        <p:nvSpPr>
-          <p:cNvPr id="17" name="bar label 0"/>
-          <p:cNvSpPr txBox="1"/>
-          <p:nvPr/>
-        </p:nvSpPr>
-        <p:spPr>
-          <a:xfrm>
-            <a:off x="548640" y="1737360"/>
-            <a:ext cx="2926080" cy="502920"/>
-          </a:xfrm>
-          <a:prstGeom prst="rect">
-            <a:avLst/>
-          </a:prstGeom>
-          <a:noFill/>
-          <a:ln/>
-        </p:spPr>
-        <p:txBody>
-          <a:bodyPr wrap="square" lIns="0" tIns="0" rIns="0" bIns="0" rtlCol="0" anchor="ctr"/>
-          <a:lstStyle/>
-          <a:p>
-            <a:pPr indent="0" marL="0">
-              <a:buNone/>
-            </a:pPr>
-            <a:r>
-              <a:rPr lang="en-US" sz="1200" dirty="0">
-                <a:solidFill>
-                  <a:schemeClr val="tx1"/>
-                </a:solidFill>
-              </a:rPr>
-              <a:t>M1  Interim report, FlexContainer data model, discovery</a:t>
-            </a:r>
-            <a:endParaRPr lang="en-US" sz="1200" dirty="0"/>
-          </a:p>
-        </p:txBody>
-      </p:sp>
-      <p:sp>
-        <p:nvSpPr>
-          <p:cNvPr id="18" name="bar 0"/>
-          <p:cNvSpPr/>
-          <p:nvPr/>
-        </p:nvSpPr>
-        <p:spPr>
-          <a:xfrm>
-            <a:off x="3566160" y="1828800"/>
-            <a:ext cx="1609344" cy="329184"/>
-          </a:xfrm>
-          <a:prstGeom prst="roundRect">
-            <a:avLst>
-              <a:gd name="adj" fmla="val 16667"/>
-            </a:avLst>
-          </a:prstGeom>
-          <a:solidFill>
-            <a:schemeClr val="accent2"/>
-          </a:solidFill>
-          <a:ln w="12700">
-            <a:solidFill>
-              <a:schemeClr val="accent2"/>
-            </a:solidFill>
-            <a:prstDash val="solid"/>
-          </a:ln>
-        </p:spPr>
-      </p:sp>
-      <p:sp>
-        <p:nvSpPr>
-          <p:cNvPr id="19" name="bar label 1"/>
-          <p:cNvSpPr txBox="1"/>
-          <p:nvPr/>
-        </p:nvSpPr>
-        <p:spPr>
-          <a:xfrm>
-            <a:off x="548640" y="2395728"/>
-            <a:ext cx="2926080" cy="502920"/>
-          </a:xfrm>
-          <a:prstGeom prst="rect">
-            <a:avLst/>
-          </a:prstGeom>
-          <a:noFill/>
-          <a:ln/>
-        </p:spPr>
-        <p:txBody>
-          <a:bodyPr wrap="square" lIns="0" tIns="0" rIns="0" bIns="0" rtlCol="0" anchor="ctr"/>
-          <a:lstStyle/>
-          <a:p>
-            <a:pPr indent="0" marL="0">
-              <a:buNone/>
-            </a:pPr>
-            <a:r>
-              <a:rPr lang="en-US" sz="1200" dirty="0">
-                <a:solidFill>
-                  <a:schemeClr val="tx1"/>
-                </a:solidFill>
-              </a:rPr>
-              <a:t>M2  group, pollingChannel, announcement, MQTT, TLS</a:t>
-            </a:r>
-            <a:endParaRPr lang="en-US" sz="1200" dirty="0"/>
-          </a:p>
-        </p:txBody>
-      </p:sp>
-      <p:sp>
-        <p:nvSpPr>
-          <p:cNvPr id="20" name="bar 1"/>
-          <p:cNvSpPr/>
-          <p:nvPr/>
-        </p:nvSpPr>
-        <p:spPr>
-          <a:xfrm>
-            <a:off x="5175504" y="2487168"/>
-            <a:ext cx="1966976" cy="329184"/>
-          </a:xfrm>
-          <a:prstGeom prst="roundRect">
-            <a:avLst>
-              <a:gd name="adj" fmla="val 16667"/>
-            </a:avLst>
-          </a:prstGeom>
-          <a:solidFill>
-            <a:schemeClr val="accent2"/>
-          </a:solidFill>
-          <a:ln w="12700">
-            <a:solidFill>
-              <a:schemeClr val="accent2"/>
-            </a:solidFill>
-            <a:prstDash val="solid"/>
-          </a:ln>
-        </p:spPr>
-      </p:sp>
-      <p:sp>
-        <p:nvSpPr>
-          <p:cNvPr id="21" name="bar label 2"/>
-          <p:cNvSpPr txBox="1"/>
-          <p:nvPr/>
-        </p:nvSpPr>
-        <p:spPr>
-          <a:xfrm>
-            <a:off x="548640" y="3054096"/>
-            <a:ext cx="2926080" cy="502920"/>
-          </a:xfrm>
-          <a:prstGeom prst="rect">
-            <a:avLst/>
-          </a:prstGeom>
-          <a:noFill/>
-          <a:ln/>
-        </p:spPr>
-        <p:txBody>
-          <a:bodyPr wrap="square" lIns="0" tIns="0" rIns="0" bIns="0" rtlCol="0" anchor="ctr"/>
-          <a:lstStyle/>
-          <a:p>
-            <a:pPr indent="0" marL="0">
-              <a:buNone/>
-            </a:pPr>
-            <a:r>
-              <a:rPr lang="en-US" sz="1200" dirty="0">
-                <a:solidFill>
-                  <a:schemeClr val="tx1"/>
-                </a:solidFill>
-              </a:rPr>
-              <a:t>M3  CSE handover between MEC zones, geofencing, multi-host</a:t>
-            </a:r>
-            <a:endParaRPr lang="en-US" sz="1200" dirty="0"/>
-          </a:p>
-        </p:txBody>
-      </p:sp>
-      <p:sp>
-        <p:nvSpPr>
-          <p:cNvPr id="22" name="bar 2"/>
-          <p:cNvSpPr/>
-          <p:nvPr/>
-        </p:nvSpPr>
-        <p:spPr>
-          <a:xfrm>
-            <a:off x="7142480" y="3145536"/>
-            <a:ext cx="1788160" cy="329184"/>
-          </a:xfrm>
-          <a:prstGeom prst="roundRect">
-            <a:avLst>
-              <a:gd name="adj" fmla="val 16667"/>
-            </a:avLst>
-          </a:prstGeom>
-          <a:solidFill>
-            <a:schemeClr val="accent4"/>
-          </a:solidFill>
-          <a:ln w="12700">
-            <a:solidFill>
-              <a:schemeClr val="accent4"/>
-            </a:solidFill>
-            <a:prstDash val="solid"/>
-          </a:ln>
-        </p:spPr>
-      </p:sp>
-      <p:sp>
-        <p:nvSpPr>
-          <p:cNvPr id="23" name="bar label 3"/>
-          <p:cNvSpPr txBox="1"/>
-          <p:nvPr/>
-        </p:nvSpPr>
-        <p:spPr>
-          <a:xfrm>
-            <a:off x="548640" y="3712464"/>
-            <a:ext cx="2926080" cy="502920"/>
-          </a:xfrm>
-          <a:prstGeom prst="rect">
-            <a:avLst/>
-          </a:prstGeom>
-          <a:noFill/>
-          <a:ln/>
-        </p:spPr>
-        <p:txBody>
-          <a:bodyPr wrap="square" lIns="0" tIns="0" rIns="0" bIns="0" rtlCol="0" anchor="ctr"/>
-          <a:lstStyle/>
-          <a:p>
-            <a:pPr indent="0" marL="0">
-              <a:buNone/>
-            </a:pPr>
-            <a:r>
-              <a:rPr lang="en-US" sz="1200" dirty="0">
-                <a:solidFill>
-                  <a:schemeClr val="tx1"/>
-                </a:solidFill>
-              </a:rPr>
-              <a:t>M4  MCP safety agent (FL as stretch goal)</a:t>
-            </a:r>
-            <a:endParaRPr lang="en-US" sz="1200" dirty="0"/>
-          </a:p>
-        </p:txBody>
-      </p:sp>
-      <p:sp>
-        <p:nvSpPr>
-          <p:cNvPr id="24" name="bar 3"/>
-          <p:cNvSpPr/>
-          <p:nvPr/>
-        </p:nvSpPr>
-        <p:spPr>
-          <a:xfrm>
-            <a:off x="8930640" y="3803904"/>
-            <a:ext cx="1251712" cy="329184"/>
-          </a:xfrm>
-          <a:prstGeom prst="roundRect">
-            <a:avLst>
-              <a:gd name="adj" fmla="val 16667"/>
-            </a:avLst>
-          </a:prstGeom>
-          <a:solidFill>
-            <a:schemeClr val="accent5"/>
-          </a:solidFill>
-          <a:ln w="12700">
-            <a:solidFill>
-              <a:schemeClr val="accent5"/>
-            </a:solidFill>
-            <a:prstDash val="solid"/>
-          </a:ln>
-        </p:spPr>
-      </p:sp>
-      <p:sp>
-        <p:nvSpPr>
-          <p:cNvPr id="25" name="bar label 4"/>
-          <p:cNvSpPr txBox="1"/>
-          <p:nvPr/>
-        </p:nvSpPr>
-        <p:spPr>
-          <a:xfrm>
-            <a:off x="548640" y="4370832"/>
-            <a:ext cx="2926080" cy="502920"/>
-          </a:xfrm>
-          <a:prstGeom prst="rect">
-            <a:avLst/>
-          </a:prstGeom>
-          <a:noFill/>
-          <a:ln/>
-        </p:spPr>
-        <p:txBody>
-          <a:bodyPr wrap="square" lIns="0" tIns="0" rIns="0" bIns="0" rtlCol="0" anchor="ctr"/>
-          <a:lstStyle/>
-          <a:p>
-            <a:pPr indent="0" marL="0">
-              <a:buNone/>
-            </a:pPr>
-            <a:r>
-              <a:rPr lang="en-US" sz="1200" dirty="0">
-                <a:solidFill>
-                  <a:schemeClr val="tx1"/>
-                </a:solidFill>
-              </a:rPr>
-              <a:t>M5  ESP32 boards, user study, article, video, public repo</a:t>
-            </a:r>
-            <a:endParaRPr lang="en-US" sz="1200" dirty="0"/>
-          </a:p>
-        </p:txBody>
-      </p:sp>
-      <p:sp>
-        <p:nvSpPr>
-          <p:cNvPr id="26" name="bar 4"/>
-          <p:cNvSpPr/>
-          <p:nvPr/>
-        </p:nvSpPr>
-        <p:spPr>
-          <a:xfrm>
-            <a:off x="8751824" y="4462272"/>
-            <a:ext cx="1966976" cy="329184"/>
-          </a:xfrm>
-          <a:prstGeom prst="roundRect">
-            <a:avLst>
-              <a:gd name="adj" fmla="val 16667"/>
-            </a:avLst>
-          </a:prstGeom>
-          <a:solidFill>
-            <a:schemeClr val="accent3"/>
-          </a:solidFill>
-          <a:ln w="12700">
-            <a:solidFill>
-              <a:schemeClr val="accent3"/>
-            </a:solidFill>
-            <a:prstDash val="solid"/>
-          </a:ln>
-        </p:spPr>
-      </p:sp>
-      <p:sp>
-        <p:nvSpPr>
-          <p:cNvPr id="27" name="bar label 5"/>
-          <p:cNvSpPr txBox="1"/>
-          <p:nvPr/>
-        </p:nvSpPr>
-        <p:spPr>
-          <a:xfrm>
-            <a:off x="548640" y="5029200"/>
-            <a:ext cx="2926080" cy="502920"/>
-          </a:xfrm>
-          <a:prstGeom prst="rect">
-            <a:avLst/>
-          </a:prstGeom>
-          <a:noFill/>
-          <a:ln/>
-        </p:spPr>
-        <p:txBody>
-          <a:bodyPr wrap="square" lIns="0" tIns="0" rIns="0" bIns="0" rtlCol="0" anchor="ctr"/>
-          <a:lstStyle/>
-          <a:p>
-            <a:pPr indent="0" marL="0">
-              <a:buNone/>
-            </a:pPr>
-            <a:r>
-              <a:rPr lang="en-US" sz="1200" dirty="0">
-                <a:solidFill>
-                  <a:schemeClr val="tx1"/>
-                </a:solidFill>
-              </a:rPr>
-              <a:t>Finals</a:t>
-            </a:r>
-            <a:endParaRPr lang="en-US" sz="1200" dirty="0"/>
-          </a:p>
-        </p:txBody>
-      </p:sp>
-      <p:sp>
-        <p:nvSpPr>
-          <p:cNvPr id="28" name="bar 5"/>
-          <p:cNvSpPr/>
-          <p:nvPr/>
-        </p:nvSpPr>
-        <p:spPr>
-          <a:xfrm>
-            <a:off x="11076432" y="5120640"/>
-            <a:ext cx="536448" cy="329184"/>
-          </a:xfrm>
-          <a:prstGeom prst="roundRect">
-            <a:avLst>
-              <a:gd name="adj" fmla="val 16667"/>
-            </a:avLst>
-          </a:prstGeom>
-          <a:solidFill>
-            <a:schemeClr val="tx2"/>
-          </a:solidFill>
-          <a:ln w="12700">
-            <a:solidFill>
-              <a:schemeClr val="tx2"/>
-            </a:solidFill>
-            <a:prstDash val="solid"/>
-          </a:ln>
-        </p:spPr>
-      </p:sp>
-      <p:sp>
-        <p:nvSpPr>
-          <p:cNvPr id="29" name="deadline 0"/>
-          <p:cNvSpPr/>
-          <p:nvPr/>
-        </p:nvSpPr>
-        <p:spPr>
-          <a:xfrm>
-            <a:off x="5175504" y="1600200"/>
-            <a:ext cx="0" cy="4069080"/>
-          </a:xfrm>
-          <a:prstGeom prst="line">
-            <a:avLst/>
-          </a:prstGeom>
-          <a:noFill/>
-          <a:ln w="19050">
-            <a:solidFill>
-              <a:schemeClr val="accent3"/>
-            </a:solidFill>
-            <a:prstDash val="dash"/>
-          </a:ln>
-        </p:spPr>
-      </p:sp>
-      <p:sp>
-        <p:nvSpPr>
-          <p:cNvPr id="30" name="deadline label 0"/>
-          <p:cNvSpPr txBox="1"/>
-          <p:nvPr/>
-        </p:nvSpPr>
-        <p:spPr>
-          <a:xfrm>
-            <a:off x="4352544" y="5715000"/>
-            <a:ext cx="1645920" cy="274320"/>
-          </a:xfrm>
-          <a:prstGeom prst="rect">
-            <a:avLst/>
-          </a:prstGeom>
-          <a:noFill/>
-          <a:ln/>
-        </p:spPr>
-        <p:txBody>
-          <a:bodyPr wrap="square" lIns="0" tIns="0" rIns="0" bIns="0" rtlCol="0" anchor="ctr"/>
-          <a:lstStyle/>
-          <a:p>
-            <a:pPr algn="ctr" indent="0" marL="0">
-              <a:buNone/>
-            </a:pPr>
-            <a:r>
-              <a:rPr lang="en-US" sz="1100" b="1" dirty="0">
-                <a:solidFill>
-                  <a:schemeClr val="accent3"/>
-                </a:solidFill>
-              </a:rPr>
-              <a:t>Oct 20 interim</a:t>
-            </a:r>
-            <a:endParaRPr lang="en-US" sz="1100" dirty="0"/>
-          </a:p>
-        </p:txBody>
-      </p:sp>
-      <p:sp>
-        <p:nvSpPr>
-          <p:cNvPr id="31" name="deadline 1"/>
-          <p:cNvSpPr/>
-          <p:nvPr/>
-        </p:nvSpPr>
-        <p:spPr>
-          <a:xfrm>
-            <a:off x="10718800" y="1600200"/>
-            <a:ext cx="0" cy="4069080"/>
-          </a:xfrm>
-          <a:prstGeom prst="line">
-            <a:avLst/>
-          </a:prstGeom>
-          <a:noFill/>
-          <a:ln w="19050">
-            <a:solidFill>
-              <a:schemeClr val="accent3"/>
-            </a:solidFill>
-            <a:prstDash val="dash"/>
-          </a:ln>
-        </p:spPr>
-      </p:sp>
-      <p:sp>
-        <p:nvSpPr>
-          <p:cNvPr id="32" name="deadline label 1"/>
-          <p:cNvSpPr txBox="1"/>
-          <p:nvPr/>
-        </p:nvSpPr>
-        <p:spPr>
-          <a:xfrm>
-            <a:off x="9895840" y="5715000"/>
-            <a:ext cx="1645920" cy="274320"/>
-          </a:xfrm>
-          <a:prstGeom prst="rect">
-            <a:avLst/>
-          </a:prstGeom>
-          <a:noFill/>
-          <a:ln/>
-        </p:spPr>
-        <p:txBody>
-          <a:bodyPr wrap="square" lIns="0" tIns="0" rIns="0" bIns="0" rtlCol="0" anchor="ctr"/>
-          <a:lstStyle/>
-          <a:p>
-            <a:pPr algn="ctr" indent="0" marL="0">
-              <a:buNone/>
-            </a:pPr>
-            <a:r>
-              <a:rPr lang="en-US" sz="1100" b="1" dirty="0">
-                <a:solidFill>
-                  <a:schemeClr val="accent3"/>
-                </a:solidFill>
-              </a:rPr>
-              <a:t>Nov 20 code freeze</a:t>
-            </a:r>
-            <a:endParaRPr lang="en-US" sz="1100" dirty="0"/>
-          </a:p>
-        </p:txBody>
-      </p:sp>
-      <p:sp>
-        <p:nvSpPr>
-          <p:cNvPr id="33" name="legend"/>
-          <p:cNvSpPr txBox="1"/>
-          <p:nvPr/>
-        </p:nvSpPr>
-        <p:spPr>
-          <a:xfrm>
-            <a:off x="548640" y="6035040"/>
-            <a:ext cx="11064240" cy="274320"/>
-          </a:xfrm>
-          <a:prstGeom prst="rect">
-            <a:avLst/>
-          </a:prstGeom>
-          <a:noFill/>
-          <a:ln/>
-        </p:spPr>
-        <p:txBody>
-          <a:bodyPr wrap="square" lIns="0" tIns="0" rIns="0" bIns="0" rtlCol="0" anchor="ctr"/>
-          <a:lstStyle/>
-          <a:p>
-            <a:pPr indent="0" marL="0">
-              <a:buNone/>
-            </a:pPr>
-            <a:r>
-              <a:rPr lang="en-US" sz="1100" dirty="0">
-                <a:solidFill>
-                  <a:schemeClr val="accent6"/>
-                </a:solidFill>
-              </a:rPr>
-              <a:t>Blue: oneM2M depth  ·  Orange: MEC and continuity  ·  Green: AI agent  ·  Red: demo and communication</a:t>
+              <a:t>Closed-loop simulation; baseline = our v1.0 vibration-only alert, same simulator.</a:t>
             </a:r>
             <a:endParaRPr lang="en-US" sz="1100" dirty="0"/>
           </a:p>
@@ -4626,6 +5127,1707 @@
                   <a:schemeClr val="tx2"/>
                 </a:solidFill>
               </a:rPr>
+              <a:t>Built ahead of plan: measured in CI on every commit</a:t>
+            </a:r>
+            <a:endParaRPr lang="en-US" sz="3000" dirty="0"/>
+          </a:p>
+        </p:txBody>
+      </p:sp>
+      <p:sp>
+        <p:nvSpPr>
+          <p:cNvPr id="3" name="ahead card Data model"/>
+          <p:cNvSpPr/>
+          <p:nvPr/>
+        </p:nvSpPr>
+        <p:spPr>
+          <a:xfrm>
+            <a:off x="548640" y="1325880"/>
+            <a:ext cx="5440680" cy="2286000"/>
+          </a:xfrm>
+          <a:prstGeom prst="roundRect">
+            <a:avLst>
+              <a:gd name="adj" fmla="val 3200"/>
+            </a:avLst>
+          </a:prstGeom>
+          <a:solidFill>
+            <a:schemeClr val="bg2"/>
+          </a:solidFill>
+          <a:ln w="12700">
+            <a:solidFill>
+              <a:schemeClr val="bg2"/>
+            </a:solidFill>
+            <a:prstDash val="solid"/>
+          </a:ln>
+        </p:spPr>
+      </p:sp>
+      <p:sp>
+        <p:nvSpPr>
+          <p:cNvPr id="4" name="ahead head Data model"/>
+          <p:cNvSpPr txBox="1"/>
+          <p:nvPr/>
+        </p:nvSpPr>
+        <p:spPr>
+          <a:xfrm>
+            <a:off x="822960" y="1554480"/>
+            <a:ext cx="4892040" cy="411480"/>
+          </a:xfrm>
+          <a:prstGeom prst="rect">
+            <a:avLst/>
+          </a:prstGeom>
+          <a:noFill/>
+          <a:ln/>
+        </p:spPr>
+        <p:txBody>
+          <a:bodyPr wrap="square" lIns="0" tIns="0" rIns="0" bIns="0" rtlCol="0" anchor="ctr"/>
+          <a:lstStyle/>
+          <a:p>
+            <a:pPr indent="0" marL="0">
+              <a:buNone/>
+            </a:pPr>
+            <a:r>
+              <a:rPr lang="en-US" sz="2000" b="1" dirty="0">
+                <a:solidFill>
+                  <a:schemeClr val="tx2"/>
+                </a:solidFill>
+              </a:rPr>
+              <a:t>Data model</a:t>
+            </a:r>
+            <a:endParaRPr lang="en-US" sz="2000" dirty="0"/>
+          </a:p>
+        </p:txBody>
+      </p:sp>
+      <p:sp>
+        <p:nvSpPr>
+          <p:cNvPr id="5" name="ahead body Data model"/>
+          <p:cNvSpPr txBox="1"/>
+          <p:nvPr/>
+        </p:nvSpPr>
+        <p:spPr>
+          <a:xfrm>
+            <a:off x="822960" y="2057400"/>
+            <a:ext cx="4892040" cy="868680"/>
+          </a:xfrm>
+          <a:prstGeom prst="rect">
+            <a:avLst/>
+          </a:prstGeom>
+          <a:noFill/>
+          <a:ln/>
+        </p:spPr>
+        <p:txBody>
+          <a:bodyPr wrap="square" lIns="0" tIns="0" rIns="0" bIns="0" rtlCol="0" anchor="t"/>
+          <a:lstStyle/>
+          <a:p>
+            <a:pPr indent="0" marL="0">
+              <a:buNone/>
+            </a:pPr>
+            <a:r>
+              <a:rPr lang="en-US" sz="1400" dirty="0">
+                <a:solidFill>
+                  <a:schemeClr val="tx1"/>
+                </a:solidFill>
+              </a:rPr>
+              <a:t>SDT flexContainer twins (own domain + standard cod:bat), labels, SAREF semantic query</a:t>
+            </a:r>
+            <a:endParaRPr lang="en-US" sz="1400" dirty="0"/>
+          </a:p>
+        </p:txBody>
+      </p:sp>
+      <p:sp>
+        <p:nvSpPr>
+          <p:cNvPr id="6" name="ahead metric Data model"/>
+          <p:cNvSpPr txBox="1"/>
+          <p:nvPr/>
+        </p:nvSpPr>
+        <p:spPr>
+          <a:xfrm>
+            <a:off x="822960" y="2971800"/>
+            <a:ext cx="4892040" cy="457200"/>
+          </a:xfrm>
+          <a:prstGeom prst="rect">
+            <a:avLst/>
+          </a:prstGeom>
+          <a:noFill/>
+          <a:ln/>
+        </p:spPr>
+        <p:txBody>
+          <a:bodyPr wrap="square" lIns="0" tIns="0" rIns="0" bIns="0" rtlCol="0" anchor="t"/>
+          <a:lstStyle/>
+          <a:p>
+            <a:pPr indent="0" marL="0">
+              <a:buNone/>
+            </a:pPr>
+            <a:r>
+              <a:rPr lang="en-US" sz="1400" b="1" dirty="0">
+                <a:solidFill>
+                  <a:schemeClr val="accent2"/>
+                </a:solidFill>
+              </a:rPr>
+              <a:t>self-registered device onboarded in ≈ 9 s · 6/6 checks</a:t>
+            </a:r>
+            <a:endParaRPr lang="en-US" sz="1400" dirty="0"/>
+          </a:p>
+        </p:txBody>
+      </p:sp>
+      <p:sp>
+        <p:nvSpPr>
+          <p:cNvPr id="7" name="ahead card CSE handover"/>
+          <p:cNvSpPr/>
+          <p:nvPr/>
+        </p:nvSpPr>
+        <p:spPr>
+          <a:xfrm>
+            <a:off x="6172200" y="1325880"/>
+            <a:ext cx="5440680" cy="2286000"/>
+          </a:xfrm>
+          <a:prstGeom prst="roundRect">
+            <a:avLst>
+              <a:gd name="adj" fmla="val 3200"/>
+            </a:avLst>
+          </a:prstGeom>
+          <a:solidFill>
+            <a:schemeClr val="bg2"/>
+          </a:solidFill>
+          <a:ln w="12700">
+            <a:solidFill>
+              <a:schemeClr val="bg2"/>
+            </a:solidFill>
+            <a:prstDash val="solid"/>
+          </a:ln>
+        </p:spPr>
+      </p:sp>
+      <p:sp>
+        <p:nvSpPr>
+          <p:cNvPr id="8" name="ahead head CSE handover"/>
+          <p:cNvSpPr txBox="1"/>
+          <p:nvPr/>
+        </p:nvSpPr>
+        <p:spPr>
+          <a:xfrm>
+            <a:off x="6446520" y="1554480"/>
+            <a:ext cx="4892040" cy="411480"/>
+          </a:xfrm>
+          <a:prstGeom prst="rect">
+            <a:avLst/>
+          </a:prstGeom>
+          <a:noFill/>
+          <a:ln/>
+        </p:spPr>
+        <p:txBody>
+          <a:bodyPr wrap="square" lIns="0" tIns="0" rIns="0" bIns="0" rtlCol="0" anchor="ctr"/>
+          <a:lstStyle/>
+          <a:p>
+            <a:pPr indent="0" marL="0">
+              <a:buNone/>
+            </a:pPr>
+            <a:r>
+              <a:rPr lang="en-US" sz="2000" b="1" dirty="0">
+                <a:solidFill>
+                  <a:schemeClr val="tx2"/>
+                </a:solidFill>
+              </a:rPr>
+              <a:t>CSE handover</a:t>
+            </a:r>
+            <a:endParaRPr lang="en-US" sz="2000" dirty="0"/>
+          </a:p>
+        </p:txBody>
+      </p:sp>
+      <p:sp>
+        <p:nvSpPr>
+          <p:cNvPr id="9" name="ahead body CSE handover"/>
+          <p:cNvSpPr txBox="1"/>
+          <p:nvPr/>
+        </p:nvSpPr>
+        <p:spPr>
+          <a:xfrm>
+            <a:off x="6446520" y="2057400"/>
+            <a:ext cx="4892040" cy="868680"/>
+          </a:xfrm>
+          <a:prstGeom prst="rect">
+            <a:avLst/>
+          </a:prstGeom>
+          <a:noFill/>
+          <a:ln/>
+        </p:spPr>
+        <p:txBody>
+          <a:bodyPr wrap="square" lIns="0" tIns="0" rIns="0" bIns="0" rtlCol="0" anchor="t"/>
+          <a:lstStyle/>
+          <a:p>
+            <a:pPr indent="0" marL="0">
+              <a:buNone/>
+            </a:pPr>
+            <a:r>
+              <a:rPr lang="en-US" sz="1400" dirty="0">
+                <a:solidFill>
+                  <a:schemeClr val="tx1"/>
+                </a:solidFill>
+              </a:rPr>
+              <a:t>forklift AE moves between zone MN-CSEs with state, ACP, subscriptions; announcement + home record</a:t>
+            </a:r>
+            <a:endParaRPr lang="en-US" sz="1400" dirty="0"/>
+          </a:p>
+        </p:txBody>
+      </p:sp>
+      <p:sp>
+        <p:nvSpPr>
+          <p:cNvPr id="10" name="ahead metric CSE handover"/>
+          <p:cNvSpPr txBox="1"/>
+          <p:nvPr/>
+        </p:nvSpPr>
+        <p:spPr>
+          <a:xfrm>
+            <a:off x="6446520" y="2971800"/>
+            <a:ext cx="4892040" cy="457200"/>
+          </a:xfrm>
+          <a:prstGeom prst="rect">
+            <a:avLst/>
+          </a:prstGeom>
+          <a:noFill/>
+          <a:ln/>
+        </p:spPr>
+        <p:txBody>
+          <a:bodyPr wrap="square" lIns="0" tIns="0" rIns="0" bIns="0" rtlCol="0" anchor="t"/>
+          <a:lstStyle/>
+          <a:p>
+            <a:pPr indent="0" marL="0">
+              <a:buNone/>
+            </a:pPr>
+            <a:r>
+              <a:rPr lang="en-US" sz="1400" b="1" dirty="0">
+                <a:solidFill>
+                  <a:schemeClr val="accent2"/>
+                </a:solidFill>
+              </a:rPr>
+              <a:t>3–9 ms interruption, 0 samples lost · failover ≈ 0.3 s</a:t>
+            </a:r>
+            <a:endParaRPr lang="en-US" sz="1400" dirty="0"/>
+          </a:p>
+        </p:txBody>
+      </p:sp>
+      <p:sp>
+        <p:nvSpPr>
+          <p:cNvPr id="11" name="ahead card Federated learning"/>
+          <p:cNvSpPr/>
+          <p:nvPr/>
+        </p:nvSpPr>
+        <p:spPr>
+          <a:xfrm>
+            <a:off x="548640" y="3794760"/>
+            <a:ext cx="5440680" cy="2286000"/>
+          </a:xfrm>
+          <a:prstGeom prst="roundRect">
+            <a:avLst>
+              <a:gd name="adj" fmla="val 3200"/>
+            </a:avLst>
+          </a:prstGeom>
+          <a:solidFill>
+            <a:schemeClr val="bg2"/>
+          </a:solidFill>
+          <a:ln w="12700">
+            <a:solidFill>
+              <a:schemeClr val="bg2"/>
+            </a:solidFill>
+            <a:prstDash val="solid"/>
+          </a:ln>
+        </p:spPr>
+      </p:sp>
+      <p:sp>
+        <p:nvSpPr>
+          <p:cNvPr id="12" name="ahead head Federated learning"/>
+          <p:cNvSpPr txBox="1"/>
+          <p:nvPr/>
+        </p:nvSpPr>
+        <p:spPr>
+          <a:xfrm>
+            <a:off x="822960" y="4023360"/>
+            <a:ext cx="4892040" cy="411480"/>
+          </a:xfrm>
+          <a:prstGeom prst="rect">
+            <a:avLst/>
+          </a:prstGeom>
+          <a:noFill/>
+          <a:ln/>
+        </p:spPr>
+        <p:txBody>
+          <a:bodyPr wrap="square" lIns="0" tIns="0" rIns="0" bIns="0" rtlCol="0" anchor="ctr"/>
+          <a:lstStyle/>
+          <a:p>
+            <a:pPr indent="0" marL="0">
+              <a:buNone/>
+            </a:pPr>
+            <a:r>
+              <a:rPr lang="en-US" sz="2000" b="1" dirty="0">
+                <a:solidFill>
+                  <a:schemeClr val="tx2"/>
+                </a:solidFill>
+              </a:rPr>
+              <a:t>Federated learning</a:t>
+            </a:r>
+            <a:endParaRPr lang="en-US" sz="2000" dirty="0"/>
+          </a:p>
+        </p:txBody>
+      </p:sp>
+      <p:sp>
+        <p:nvSpPr>
+          <p:cNvPr id="13" name="ahead body Federated learning"/>
+          <p:cNvSpPr txBox="1"/>
+          <p:nvPr/>
+        </p:nvSpPr>
+        <p:spPr>
+          <a:xfrm>
+            <a:off x="822960" y="4526280"/>
+            <a:ext cx="4892040" cy="868680"/>
+          </a:xfrm>
+          <a:prstGeom prst="rect">
+            <a:avLst/>
+          </a:prstGeom>
+          <a:noFill/>
+          <a:ln/>
+        </p:spPr>
+        <p:txBody>
+          <a:bodyPr wrap="square" lIns="0" tIns="0" rIns="0" bIns="0" rtlCol="0" anchor="t"/>
+          <a:lstStyle/>
+          <a:p>
+            <a:pPr indent="0" marL="0">
+              <a:buNone/>
+            </a:pPr>
+            <a:r>
+              <a:rPr lang="en-US" sz="1400" dirty="0">
+                <a:solidFill>
+                  <a:schemeClr val="tx1"/>
+                </a:solidFill>
+              </a:rPr>
+              <a:t>TR-0084 roles as oneM2M resources: task, participants, rounds, model lineage; dropout, late join</a:t>
+            </a:r>
+            <a:endParaRPr lang="en-US" sz="1400" dirty="0"/>
+          </a:p>
+        </p:txBody>
+      </p:sp>
+      <p:sp>
+        <p:nvSpPr>
+          <p:cNvPr id="14" name="ahead metric Federated learning"/>
+          <p:cNvSpPr txBox="1"/>
+          <p:nvPr/>
+        </p:nvSpPr>
+        <p:spPr>
+          <a:xfrm>
+            <a:off x="822960" y="5440680"/>
+            <a:ext cx="4892040" cy="457200"/>
+          </a:xfrm>
+          <a:prstGeom prst="rect">
+            <a:avLst/>
+          </a:prstGeom>
+          <a:noFill/>
+          <a:ln/>
+        </p:spPr>
+        <p:txBody>
+          <a:bodyPr wrap="square" lIns="0" tIns="0" rIns="0" bIns="0" rtlCol="0" anchor="t"/>
+          <a:lstStyle/>
+          <a:p>
+            <a:pPr indent="0" marL="0">
+              <a:buNone/>
+            </a:pPr>
+            <a:r>
+              <a:rPr lang="en-US" sz="1400" b="1" dirty="0">
+                <a:solidFill>
+                  <a:schemeClr val="accent2"/>
+                </a:solidFill>
+              </a:rPr>
+              <a:t>2 s prediction error 0.604 → 0.486 m · 8/8 checks</a:t>
+            </a:r>
+            <a:endParaRPr lang="en-US" sz="1400" dirty="0"/>
+          </a:p>
+        </p:txBody>
+      </p:sp>
+      <p:sp>
+        <p:nvSpPr>
+          <p:cNvPr id="15" name="ahead card AI safety agent"/>
+          <p:cNvSpPr/>
+          <p:nvPr/>
+        </p:nvSpPr>
+        <p:spPr>
+          <a:xfrm>
+            <a:off x="6172200" y="3794760"/>
+            <a:ext cx="5440680" cy="2286000"/>
+          </a:xfrm>
+          <a:prstGeom prst="roundRect">
+            <a:avLst>
+              <a:gd name="adj" fmla="val 3200"/>
+            </a:avLst>
+          </a:prstGeom>
+          <a:solidFill>
+            <a:schemeClr val="bg2"/>
+          </a:solidFill>
+          <a:ln w="12700">
+            <a:solidFill>
+              <a:schemeClr val="bg2"/>
+            </a:solidFill>
+            <a:prstDash val="solid"/>
+          </a:ln>
+        </p:spPr>
+      </p:sp>
+      <p:sp>
+        <p:nvSpPr>
+          <p:cNvPr id="16" name="ahead head AI safety agent"/>
+          <p:cNvSpPr txBox="1"/>
+          <p:nvPr/>
+        </p:nvSpPr>
+        <p:spPr>
+          <a:xfrm>
+            <a:off x="6446520" y="4023360"/>
+            <a:ext cx="4892040" cy="411480"/>
+          </a:xfrm>
+          <a:prstGeom prst="rect">
+            <a:avLst/>
+          </a:prstGeom>
+          <a:noFill/>
+          <a:ln/>
+        </p:spPr>
+        <p:txBody>
+          <a:bodyPr wrap="square" lIns="0" tIns="0" rIns="0" bIns="0" rtlCol="0" anchor="ctr"/>
+          <a:lstStyle/>
+          <a:p>
+            <a:pPr indent="0" marL="0">
+              <a:buNone/>
+            </a:pPr>
+            <a:r>
+              <a:rPr lang="en-US" sz="2000" b="1" dirty="0">
+                <a:solidFill>
+                  <a:schemeClr val="tx2"/>
+                </a:solidFill>
+              </a:rPr>
+              <a:t>AI safety agent</a:t>
+            </a:r>
+            <a:endParaRPr lang="en-US" sz="2000" dirty="0"/>
+          </a:p>
+        </p:txBody>
+      </p:sp>
+      <p:sp>
+        <p:nvSpPr>
+          <p:cNvPr id="17" name="ahead body AI safety agent"/>
+          <p:cNvSpPr txBox="1"/>
+          <p:nvPr/>
+        </p:nvSpPr>
+        <p:spPr>
+          <a:xfrm>
+            <a:off x="6446520" y="4526280"/>
+            <a:ext cx="4892040" cy="868680"/>
+          </a:xfrm>
+          <a:prstGeom prst="rect">
+            <a:avLst/>
+          </a:prstGeom>
+          <a:noFill/>
+          <a:ln/>
+        </p:spPr>
+        <p:txBody>
+          <a:bodyPr wrap="square" lIns="0" tIns="0" rIns="0" bIns="0" rtlCol="0" anchor="t"/>
+          <a:lstStyle/>
+          <a:p>
+            <a:pPr indent="0" marL="0">
+              <a:buNone/>
+            </a:pPr>
+            <a:r>
+              <a:rPr lang="en-US" sz="1400" dirty="0">
+                <a:solidFill>
+                  <a:schemeClr val="tx1"/>
+                </a:solidFill>
+              </a:rPr>
+              <a:t>MCP servers for IN-CSE, zone A, zone B and ETSI MEC; state in oneM2M; routing to the serving CSE</a:t>
+            </a:r>
+            <a:endParaRPr lang="en-US" sz="1400" dirty="0"/>
+          </a:p>
+        </p:txBody>
+      </p:sp>
+      <p:sp>
+        <p:nvSpPr>
+          <p:cNvPr id="18" name="ahead metric AI safety agent"/>
+          <p:cNvSpPr txBox="1"/>
+          <p:nvPr/>
+        </p:nvSpPr>
+        <p:spPr>
+          <a:xfrm>
+            <a:off x="6446520" y="5440680"/>
+            <a:ext cx="4892040" cy="457200"/>
+          </a:xfrm>
+          <a:prstGeom prst="rect">
+            <a:avLst/>
+          </a:prstGeom>
+          <a:noFill/>
+          <a:ln/>
+        </p:spPr>
+        <p:txBody>
+          <a:bodyPr wrap="square" lIns="0" tIns="0" rIns="0" bIns="0" rtlCol="0" anchor="t"/>
+          <a:lstStyle/>
+          <a:p>
+            <a:pPr indent="0" marL="0">
+              <a:buNone/>
+            </a:pPr>
+            <a:r>
+              <a:rPr lang="en-US" sz="1400" b="1" dirty="0">
+                <a:solidFill>
+                  <a:schemeClr val="accent2"/>
+                </a:solidFill>
+              </a:rPr>
+              <a:t>shift report in 16 tool calls, validated · 9/9 checks</a:t>
+            </a:r>
+            <a:endParaRPr lang="en-US" sz="1400" dirty="0"/>
+          </a:p>
+        </p:txBody>
+      </p:sp>
+      <p:sp>
+        <p:nvSpPr>
+          <p:cNvPr id="25" name="Slide Number Placeholder 0"/>
+          <p:cNvSpPr>
+            <a:spLocks noGrp="1"/>
+          </p:cNvSpPr>
+          <p:nvPr>
+            <p:ph type="sldNum" sz="quarter" idx="4294967295"/>
+          </p:nvPr>
+        </p:nvSpPr>
+        <p:spPr>
+          <a:xfrm>
+            <a:off x="11155680" y="6400800"/>
+            <a:ext cx="457200" cy="274320"/>
+          </a:xfrm>
+          <a:prstGeom prst="rect">
+            <a:avLst/>
+          </a:prstGeom>
+          <a:extLst>
+            <a:ext uri="{C572A759-6A51-4108-AA02-DFA0A04FC94B}">
+              <ma14:wrappingTextBoxFlag xmlns:ma14="http://schemas.microsoft.com/office/mac/drawingml/2011/main" val="0"/>
+            </a:ext>
+          </a:extLst>
+        </p:spPr>
+        <p:txBody>
+          <a:bodyPr/>
+          <a:lstStyle>
+            <a:lvl1pPr>
+              <a:defRPr sz="1000">
+                <a:solidFill>
+                  <a:schemeClr val="accent6"/>
+                </a:solidFill>
+              </a:defRPr>
+            </a:lvl1pPr>
+          </a:lstStyle>
+          <a:p>
+            <a:pPr algn="r"/>
+            <a:fld id="{F7021451-1387-4CA6-816F-3879F97B5CBC}" type="slidenum">
+              <a:rPr b="0" lang="en-US"/>
+              <a:t>12</a:t>
+            </a:fld>
+            <a:endParaRPr lang="en-US"/>
+          </a:p>
+        </p:txBody>
+      </p:sp>
+    </p:spTree>
+  </p:cSld>
+  <p:clrMapOvr>
+    <a:masterClrMapping/>
+  </p:clrMapOvr>
+</p:sld>
+</file>
+
+<file path=ppt/slides/slide13.xml><?xml version="1.0" encoding="utf-8"?>
+<p:sld xmlns:a="http://schemas.openxmlformats.org/drawingml/2006/main" xmlns:r="http://schemas.openxmlformats.org/officeDocument/2006/relationships" xmlns:p="http://schemas.openxmlformats.org/presentationml/2006/main">
+  <p:cSld name="Slide 13">
+    <p:spTree>
+      <p:nvGrpSpPr>
+        <p:cNvPr id="1" name=""/>
+        <p:cNvGrpSpPr/>
+        <p:nvPr/>
+      </p:nvGrpSpPr>
+      <p:grpSpPr>
+        <a:xfrm>
+          <a:off x="0" y="0"/>
+          <a:ext cx="0" cy="0"/>
+          <a:chOff x="0" y="0"/>
+          <a:chExt cx="0" cy="0"/>
+        </a:xfrm>
+      </p:grpSpPr>
+      <p:sp>
+        <p:nvSpPr>
+          <p:cNvPr id="2" name="Text 0"/>
+          <p:cNvSpPr/>
+          <p:nvPr>
+            <p:ph idx="100" type="title" hasCustomPrompt="1"/>
+          </p:nvPr>
+        </p:nvSpPr>
+        <p:spPr>
+          <a:xfrm>
+            <a:off x="548640" y="320040"/>
+            <a:ext cx="11064240" cy="731520"/>
+          </a:xfrm>
+          <a:prstGeom prst="rect">
+            <a:avLst/>
+          </a:prstGeom>
+          <a:noFill/>
+          <a:ln/>
+        </p:spPr>
+        <p:txBody>
+          <a:bodyPr wrap="square" lIns="0" tIns="0" rIns="0" bIns="0" rtlCol="0" anchor="ctr"/>
+          <a:lstStyle/>
+          <a:p>
+            <a:pPr algn="l" indent="0" marL="0">
+              <a:buNone/>
+            </a:pPr>
+            <a:r>
+              <a:rPr lang="en-US" sz="3000" b="1" dirty="0">
+                <a:solidFill>
+                  <a:schemeClr val="tx2"/>
+                </a:solidFill>
+              </a:rPr>
+              <a:t>Development plan: Oct 12 – Nov 25</a:t>
+            </a:r>
+            <a:endParaRPr lang="en-US" sz="3000" dirty="0"/>
+          </a:p>
+        </p:txBody>
+      </p:sp>
+      <p:sp>
+        <p:nvSpPr>
+          <p:cNvPr id="3" name="week line 0"/>
+          <p:cNvSpPr/>
+          <p:nvPr/>
+        </p:nvSpPr>
+        <p:spPr>
+          <a:xfrm>
+            <a:off x="3566160" y="1600200"/>
+            <a:ext cx="0" cy="4069080"/>
+          </a:xfrm>
+          <a:prstGeom prst="line">
+            <a:avLst/>
+          </a:prstGeom>
+          <a:noFill/>
+          <a:ln w="9525">
+            <a:solidFill>
+              <a:srgbClr val="D5DAE0"/>
+            </a:solidFill>
+            <a:prstDash val="solid"/>
+          </a:ln>
+        </p:spPr>
+      </p:sp>
+      <p:sp>
+        <p:nvSpPr>
+          <p:cNvPr id="4" name="week label 0"/>
+          <p:cNvSpPr txBox="1"/>
+          <p:nvPr/>
+        </p:nvSpPr>
+        <p:spPr>
+          <a:xfrm>
+            <a:off x="3200400" y="1234440"/>
+            <a:ext cx="731520" cy="274320"/>
+          </a:xfrm>
+          <a:prstGeom prst="rect">
+            <a:avLst/>
+          </a:prstGeom>
+          <a:noFill/>
+          <a:ln/>
+        </p:spPr>
+        <p:txBody>
+          <a:bodyPr wrap="square" lIns="0" tIns="0" rIns="0" bIns="0" rtlCol="0" anchor="ctr"/>
+          <a:lstStyle/>
+          <a:p>
+            <a:pPr algn="ctr" indent="0" marL="0">
+              <a:buNone/>
+            </a:pPr>
+            <a:r>
+              <a:rPr lang="en-US" sz="1100" dirty="0">
+                <a:solidFill>
+                  <a:schemeClr val="accent6"/>
+                </a:solidFill>
+              </a:rPr>
+              <a:t>Oct 12</a:t>
+            </a:r>
+            <a:endParaRPr lang="en-US" sz="1100" dirty="0"/>
+          </a:p>
+        </p:txBody>
+      </p:sp>
+      <p:sp>
+        <p:nvSpPr>
+          <p:cNvPr id="5" name="week line 1"/>
+          <p:cNvSpPr/>
+          <p:nvPr/>
+        </p:nvSpPr>
+        <p:spPr>
+          <a:xfrm>
+            <a:off x="4817872" y="1600200"/>
+            <a:ext cx="0" cy="4069080"/>
+          </a:xfrm>
+          <a:prstGeom prst="line">
+            <a:avLst/>
+          </a:prstGeom>
+          <a:noFill/>
+          <a:ln w="9525">
+            <a:solidFill>
+              <a:srgbClr val="D5DAE0"/>
+            </a:solidFill>
+            <a:prstDash val="solid"/>
+          </a:ln>
+        </p:spPr>
+      </p:sp>
+      <p:sp>
+        <p:nvSpPr>
+          <p:cNvPr id="6" name="week label 1"/>
+          <p:cNvSpPr txBox="1"/>
+          <p:nvPr/>
+        </p:nvSpPr>
+        <p:spPr>
+          <a:xfrm>
+            <a:off x="4452112" y="1234440"/>
+            <a:ext cx="731520" cy="274320"/>
+          </a:xfrm>
+          <a:prstGeom prst="rect">
+            <a:avLst/>
+          </a:prstGeom>
+          <a:noFill/>
+          <a:ln/>
+        </p:spPr>
+        <p:txBody>
+          <a:bodyPr wrap="square" lIns="0" tIns="0" rIns="0" bIns="0" rtlCol="0" anchor="ctr"/>
+          <a:lstStyle/>
+          <a:p>
+            <a:pPr algn="ctr" indent="0" marL="0">
+              <a:buNone/>
+            </a:pPr>
+            <a:r>
+              <a:rPr lang="en-US" sz="1100" dirty="0">
+                <a:solidFill>
+                  <a:schemeClr val="accent6"/>
+                </a:solidFill>
+              </a:rPr>
+              <a:t>Oct 19</a:t>
+            </a:r>
+            <a:endParaRPr lang="en-US" sz="1100" dirty="0"/>
+          </a:p>
+        </p:txBody>
+      </p:sp>
+      <p:sp>
+        <p:nvSpPr>
+          <p:cNvPr id="7" name="week line 2"/>
+          <p:cNvSpPr/>
+          <p:nvPr/>
+        </p:nvSpPr>
+        <p:spPr>
+          <a:xfrm>
+            <a:off x="6069584" y="1600200"/>
+            <a:ext cx="0" cy="4069080"/>
+          </a:xfrm>
+          <a:prstGeom prst="line">
+            <a:avLst/>
+          </a:prstGeom>
+          <a:noFill/>
+          <a:ln w="9525">
+            <a:solidFill>
+              <a:srgbClr val="D5DAE0"/>
+            </a:solidFill>
+            <a:prstDash val="solid"/>
+          </a:ln>
+        </p:spPr>
+      </p:sp>
+      <p:sp>
+        <p:nvSpPr>
+          <p:cNvPr id="8" name="week label 2"/>
+          <p:cNvSpPr txBox="1"/>
+          <p:nvPr/>
+        </p:nvSpPr>
+        <p:spPr>
+          <a:xfrm>
+            <a:off x="5703824" y="1234440"/>
+            <a:ext cx="731520" cy="274320"/>
+          </a:xfrm>
+          <a:prstGeom prst="rect">
+            <a:avLst/>
+          </a:prstGeom>
+          <a:noFill/>
+          <a:ln/>
+        </p:spPr>
+        <p:txBody>
+          <a:bodyPr wrap="square" lIns="0" tIns="0" rIns="0" bIns="0" rtlCol="0" anchor="ctr"/>
+          <a:lstStyle/>
+          <a:p>
+            <a:pPr algn="ctr" indent="0" marL="0">
+              <a:buNone/>
+            </a:pPr>
+            <a:r>
+              <a:rPr lang="en-US" sz="1100" dirty="0">
+                <a:solidFill>
+                  <a:schemeClr val="accent6"/>
+                </a:solidFill>
+              </a:rPr>
+              <a:t>Oct 26</a:t>
+            </a:r>
+            <a:endParaRPr lang="en-US" sz="1100" dirty="0"/>
+          </a:p>
+        </p:txBody>
+      </p:sp>
+      <p:sp>
+        <p:nvSpPr>
+          <p:cNvPr id="9" name="week line 3"/>
+          <p:cNvSpPr/>
+          <p:nvPr/>
+        </p:nvSpPr>
+        <p:spPr>
+          <a:xfrm>
+            <a:off x="7321296" y="1600200"/>
+            <a:ext cx="0" cy="4069080"/>
+          </a:xfrm>
+          <a:prstGeom prst="line">
+            <a:avLst/>
+          </a:prstGeom>
+          <a:noFill/>
+          <a:ln w="9525">
+            <a:solidFill>
+              <a:srgbClr val="D5DAE0"/>
+            </a:solidFill>
+            <a:prstDash val="solid"/>
+          </a:ln>
+        </p:spPr>
+      </p:sp>
+      <p:sp>
+        <p:nvSpPr>
+          <p:cNvPr id="10" name="week label 3"/>
+          <p:cNvSpPr txBox="1"/>
+          <p:nvPr/>
+        </p:nvSpPr>
+        <p:spPr>
+          <a:xfrm>
+            <a:off x="6955536" y="1234440"/>
+            <a:ext cx="731520" cy="274320"/>
+          </a:xfrm>
+          <a:prstGeom prst="rect">
+            <a:avLst/>
+          </a:prstGeom>
+          <a:noFill/>
+          <a:ln/>
+        </p:spPr>
+        <p:txBody>
+          <a:bodyPr wrap="square" lIns="0" tIns="0" rIns="0" bIns="0" rtlCol="0" anchor="ctr"/>
+          <a:lstStyle/>
+          <a:p>
+            <a:pPr algn="ctr" indent="0" marL="0">
+              <a:buNone/>
+            </a:pPr>
+            <a:r>
+              <a:rPr lang="en-US" sz="1100" dirty="0">
+                <a:solidFill>
+                  <a:schemeClr val="accent6"/>
+                </a:solidFill>
+              </a:rPr>
+              <a:t>Nov 2</a:t>
+            </a:r>
+            <a:endParaRPr lang="en-US" sz="1100" dirty="0"/>
+          </a:p>
+        </p:txBody>
+      </p:sp>
+      <p:sp>
+        <p:nvSpPr>
+          <p:cNvPr id="11" name="week line 4"/>
+          <p:cNvSpPr/>
+          <p:nvPr/>
+        </p:nvSpPr>
+        <p:spPr>
+          <a:xfrm>
+            <a:off x="8573008" y="1600200"/>
+            <a:ext cx="0" cy="4069080"/>
+          </a:xfrm>
+          <a:prstGeom prst="line">
+            <a:avLst/>
+          </a:prstGeom>
+          <a:noFill/>
+          <a:ln w="9525">
+            <a:solidFill>
+              <a:srgbClr val="D5DAE0"/>
+            </a:solidFill>
+            <a:prstDash val="solid"/>
+          </a:ln>
+        </p:spPr>
+      </p:sp>
+      <p:sp>
+        <p:nvSpPr>
+          <p:cNvPr id="12" name="week label 4"/>
+          <p:cNvSpPr txBox="1"/>
+          <p:nvPr/>
+        </p:nvSpPr>
+        <p:spPr>
+          <a:xfrm>
+            <a:off x="8207248" y="1234440"/>
+            <a:ext cx="731520" cy="274320"/>
+          </a:xfrm>
+          <a:prstGeom prst="rect">
+            <a:avLst/>
+          </a:prstGeom>
+          <a:noFill/>
+          <a:ln/>
+        </p:spPr>
+        <p:txBody>
+          <a:bodyPr wrap="square" lIns="0" tIns="0" rIns="0" bIns="0" rtlCol="0" anchor="ctr"/>
+          <a:lstStyle/>
+          <a:p>
+            <a:pPr algn="ctr" indent="0" marL="0">
+              <a:buNone/>
+            </a:pPr>
+            <a:r>
+              <a:rPr lang="en-US" sz="1100" dirty="0">
+                <a:solidFill>
+                  <a:schemeClr val="accent6"/>
+                </a:solidFill>
+              </a:rPr>
+              <a:t>Nov 9</a:t>
+            </a:r>
+            <a:endParaRPr lang="en-US" sz="1100" dirty="0"/>
+          </a:p>
+        </p:txBody>
+      </p:sp>
+      <p:sp>
+        <p:nvSpPr>
+          <p:cNvPr id="13" name="week line 5"/>
+          <p:cNvSpPr/>
+          <p:nvPr/>
+        </p:nvSpPr>
+        <p:spPr>
+          <a:xfrm>
+            <a:off x="9824720" y="1600200"/>
+            <a:ext cx="0" cy="4069080"/>
+          </a:xfrm>
+          <a:prstGeom prst="line">
+            <a:avLst/>
+          </a:prstGeom>
+          <a:noFill/>
+          <a:ln w="9525">
+            <a:solidFill>
+              <a:srgbClr val="D5DAE0"/>
+            </a:solidFill>
+            <a:prstDash val="solid"/>
+          </a:ln>
+        </p:spPr>
+      </p:sp>
+      <p:sp>
+        <p:nvSpPr>
+          <p:cNvPr id="14" name="week label 5"/>
+          <p:cNvSpPr txBox="1"/>
+          <p:nvPr/>
+        </p:nvSpPr>
+        <p:spPr>
+          <a:xfrm>
+            <a:off x="9458960" y="1234440"/>
+            <a:ext cx="731520" cy="274320"/>
+          </a:xfrm>
+          <a:prstGeom prst="rect">
+            <a:avLst/>
+          </a:prstGeom>
+          <a:noFill/>
+          <a:ln/>
+        </p:spPr>
+        <p:txBody>
+          <a:bodyPr wrap="square" lIns="0" tIns="0" rIns="0" bIns="0" rtlCol="0" anchor="ctr"/>
+          <a:lstStyle/>
+          <a:p>
+            <a:pPr algn="ctr" indent="0" marL="0">
+              <a:buNone/>
+            </a:pPr>
+            <a:r>
+              <a:rPr lang="en-US" sz="1100" dirty="0">
+                <a:solidFill>
+                  <a:schemeClr val="accent6"/>
+                </a:solidFill>
+              </a:rPr>
+              <a:t>Nov 16</a:t>
+            </a:r>
+            <a:endParaRPr lang="en-US" sz="1100" dirty="0"/>
+          </a:p>
+        </p:txBody>
+      </p:sp>
+      <p:sp>
+        <p:nvSpPr>
+          <p:cNvPr id="15" name="week line 6"/>
+          <p:cNvSpPr/>
+          <p:nvPr/>
+        </p:nvSpPr>
+        <p:spPr>
+          <a:xfrm>
+            <a:off x="11076432" y="1600200"/>
+            <a:ext cx="0" cy="4069080"/>
+          </a:xfrm>
+          <a:prstGeom prst="line">
+            <a:avLst/>
+          </a:prstGeom>
+          <a:noFill/>
+          <a:ln w="9525">
+            <a:solidFill>
+              <a:srgbClr val="D5DAE0"/>
+            </a:solidFill>
+            <a:prstDash val="solid"/>
+          </a:ln>
+        </p:spPr>
+      </p:sp>
+      <p:sp>
+        <p:nvSpPr>
+          <p:cNvPr id="16" name="week label 6"/>
+          <p:cNvSpPr txBox="1"/>
+          <p:nvPr/>
+        </p:nvSpPr>
+        <p:spPr>
+          <a:xfrm>
+            <a:off x="10710672" y="1234440"/>
+            <a:ext cx="731520" cy="274320"/>
+          </a:xfrm>
+          <a:prstGeom prst="rect">
+            <a:avLst/>
+          </a:prstGeom>
+          <a:noFill/>
+          <a:ln/>
+        </p:spPr>
+        <p:txBody>
+          <a:bodyPr wrap="square" lIns="0" tIns="0" rIns="0" bIns="0" rtlCol="0" anchor="ctr"/>
+          <a:lstStyle/>
+          <a:p>
+            <a:pPr algn="ctr" indent="0" marL="0">
+              <a:buNone/>
+            </a:pPr>
+            <a:r>
+              <a:rPr lang="en-US" sz="1100" dirty="0">
+                <a:solidFill>
+                  <a:schemeClr val="accent6"/>
+                </a:solidFill>
+              </a:rPr>
+              <a:t>Nov 23</a:t>
+            </a:r>
+            <a:endParaRPr lang="en-US" sz="1100" dirty="0"/>
+          </a:p>
+        </p:txBody>
+      </p:sp>
+      <p:sp>
+        <p:nvSpPr>
+          <p:cNvPr id="17" name="bar label 0"/>
+          <p:cNvSpPr txBox="1"/>
+          <p:nvPr/>
+        </p:nvSpPr>
+        <p:spPr>
+          <a:xfrm>
+            <a:off x="548640" y="1737360"/>
+            <a:ext cx="2926080" cy="502920"/>
+          </a:xfrm>
+          <a:prstGeom prst="rect">
+            <a:avLst/>
+          </a:prstGeom>
+          <a:noFill/>
+          <a:ln/>
+        </p:spPr>
+        <p:txBody>
+          <a:bodyPr wrap="square" lIns="0" tIns="0" rIns="0" bIns="0" rtlCol="0" anchor="ctr"/>
+          <a:lstStyle/>
+          <a:p>
+            <a:pPr indent="0" marL="0">
+              <a:buNone/>
+            </a:pPr>
+            <a:r>
+              <a:rPr lang="en-US" sz="1200" dirty="0">
+                <a:solidFill>
+                  <a:schemeClr val="tx1"/>
+                </a:solidFill>
+              </a:rPr>
+              <a:t>Done: data model, CSE handover, FL, MCP agent</a:t>
+            </a:r>
+            <a:endParaRPr lang="en-US" sz="1200" dirty="0"/>
+          </a:p>
+        </p:txBody>
+      </p:sp>
+      <p:sp>
+        <p:nvSpPr>
+          <p:cNvPr id="18" name="bar 0"/>
+          <p:cNvSpPr/>
+          <p:nvPr/>
+        </p:nvSpPr>
+        <p:spPr>
+          <a:xfrm>
+            <a:off x="3566160" y="1828800"/>
+            <a:ext cx="178816" cy="329184"/>
+          </a:xfrm>
+          <a:prstGeom prst="roundRect">
+            <a:avLst>
+              <a:gd name="adj" fmla="val 30682"/>
+            </a:avLst>
+          </a:prstGeom>
+          <a:solidFill>
+            <a:schemeClr val="accent6"/>
+          </a:solidFill>
+          <a:ln w="12700">
+            <a:solidFill>
+              <a:schemeClr val="accent6"/>
+            </a:solidFill>
+            <a:prstDash val="solid"/>
+          </a:ln>
+        </p:spPr>
+      </p:sp>
+      <p:sp>
+        <p:nvSpPr>
+          <p:cNvPr id="19" name="bar label 1"/>
+          <p:cNvSpPr txBox="1"/>
+          <p:nvPr/>
+        </p:nvSpPr>
+        <p:spPr>
+          <a:xfrm>
+            <a:off x="548640" y="2395728"/>
+            <a:ext cx="2926080" cy="502920"/>
+          </a:xfrm>
+          <a:prstGeom prst="rect">
+            <a:avLst/>
+          </a:prstGeom>
+          <a:noFill/>
+          <a:ln/>
+        </p:spPr>
+        <p:txBody>
+          <a:bodyPr wrap="square" lIns="0" tIns="0" rIns="0" bIns="0" rtlCol="0" anchor="ctr"/>
+          <a:lstStyle/>
+          <a:p>
+            <a:pPr indent="0" marL="0">
+              <a:buNone/>
+            </a:pPr>
+            <a:r>
+              <a:rPr lang="en-US" sz="1200" dirty="0">
+                <a:solidFill>
+                  <a:schemeClr val="tx1"/>
+                </a:solidFill>
+              </a:rPr>
+              <a:t>M2  group, pollingChannel, MQTT for devices, TLS</a:t>
+            </a:r>
+            <a:endParaRPr lang="en-US" sz="1200" dirty="0"/>
+          </a:p>
+        </p:txBody>
+      </p:sp>
+      <p:sp>
+        <p:nvSpPr>
+          <p:cNvPr id="20" name="bar 1"/>
+          <p:cNvSpPr/>
+          <p:nvPr/>
+        </p:nvSpPr>
+        <p:spPr>
+          <a:xfrm>
+            <a:off x="5175504" y="2487168"/>
+            <a:ext cx="1966976" cy="329184"/>
+          </a:xfrm>
+          <a:prstGeom prst="roundRect">
+            <a:avLst>
+              <a:gd name="adj" fmla="val 16667"/>
+            </a:avLst>
+          </a:prstGeom>
+          <a:solidFill>
+            <a:schemeClr val="accent2"/>
+          </a:solidFill>
+          <a:ln w="12700">
+            <a:solidFill>
+              <a:schemeClr val="accent2"/>
+            </a:solidFill>
+            <a:prstDash val="solid"/>
+          </a:ln>
+        </p:spPr>
+      </p:sp>
+      <p:sp>
+        <p:nvSpPr>
+          <p:cNvPr id="21" name="bar label 2"/>
+          <p:cNvSpPr txBox="1"/>
+          <p:nvPr/>
+        </p:nvSpPr>
+        <p:spPr>
+          <a:xfrm>
+            <a:off x="548640" y="3054096"/>
+            <a:ext cx="2926080" cy="502920"/>
+          </a:xfrm>
+          <a:prstGeom prst="rect">
+            <a:avLst/>
+          </a:prstGeom>
+          <a:noFill/>
+          <a:ln/>
+        </p:spPr>
+        <p:txBody>
+          <a:bodyPr wrap="square" lIns="0" tIns="0" rIns="0" bIns="0" rtlCol="0" anchor="ctr"/>
+          <a:lstStyle/>
+          <a:p>
+            <a:pPr indent="0" marL="0">
+              <a:buNone/>
+            </a:pPr>
+            <a:r>
+              <a:rPr lang="en-US" sz="1200" dirty="0">
+                <a:solidFill>
+                  <a:schemeClr val="tx1"/>
+                </a:solidFill>
+              </a:rPr>
+              <a:t>M3  MEC Location zones: geofencing, handover trigger, multi-host</a:t>
+            </a:r>
+            <a:endParaRPr lang="en-US" sz="1200" dirty="0"/>
+          </a:p>
+        </p:txBody>
+      </p:sp>
+      <p:sp>
+        <p:nvSpPr>
+          <p:cNvPr id="22" name="bar 2"/>
+          <p:cNvSpPr/>
+          <p:nvPr/>
+        </p:nvSpPr>
+        <p:spPr>
+          <a:xfrm>
+            <a:off x="7142480" y="3145536"/>
+            <a:ext cx="1788160" cy="329184"/>
+          </a:xfrm>
+          <a:prstGeom prst="roundRect">
+            <a:avLst>
+              <a:gd name="adj" fmla="val 16667"/>
+            </a:avLst>
+          </a:prstGeom>
+          <a:solidFill>
+            <a:schemeClr val="accent4"/>
+          </a:solidFill>
+          <a:ln w="12700">
+            <a:solidFill>
+              <a:schemeClr val="accent4"/>
+            </a:solidFill>
+            <a:prstDash val="solid"/>
+          </a:ln>
+        </p:spPr>
+      </p:sp>
+      <p:sp>
+        <p:nvSpPr>
+          <p:cNvPr id="23" name="bar label 3"/>
+          <p:cNvSpPr txBox="1"/>
+          <p:nvPr/>
+        </p:nvSpPr>
+        <p:spPr>
+          <a:xfrm>
+            <a:off x="548640" y="3712464"/>
+            <a:ext cx="2926080" cy="502920"/>
+          </a:xfrm>
+          <a:prstGeom prst="rect">
+            <a:avLst/>
+          </a:prstGeom>
+          <a:noFill/>
+          <a:ln/>
+        </p:spPr>
+        <p:txBody>
+          <a:bodyPr wrap="square" lIns="0" tIns="0" rIns="0" bIns="0" rtlCol="0" anchor="ctr"/>
+          <a:lstStyle/>
+          <a:p>
+            <a:pPr indent="0" marL="0">
+              <a:buNone/>
+            </a:pPr>
+            <a:r>
+              <a:rPr lang="en-US" sz="1200" dirty="0">
+                <a:solidFill>
+                  <a:schemeClr val="tx1"/>
+                </a:solidFill>
+              </a:rPr>
+              <a:t>M4  Agent and FL polish; FL model used by the risk engine</a:t>
+            </a:r>
+            <a:endParaRPr lang="en-US" sz="1200" dirty="0"/>
+          </a:p>
+        </p:txBody>
+      </p:sp>
+      <p:sp>
+        <p:nvSpPr>
+          <p:cNvPr id="24" name="bar 3"/>
+          <p:cNvSpPr/>
+          <p:nvPr/>
+        </p:nvSpPr>
+        <p:spPr>
+          <a:xfrm>
+            <a:off x="8036560" y="3803904"/>
+            <a:ext cx="2145792" cy="329184"/>
+          </a:xfrm>
+          <a:prstGeom prst="roundRect">
+            <a:avLst>
+              <a:gd name="adj" fmla="val 16667"/>
+            </a:avLst>
+          </a:prstGeom>
+          <a:solidFill>
+            <a:schemeClr val="accent5"/>
+          </a:solidFill>
+          <a:ln w="12700">
+            <a:solidFill>
+              <a:schemeClr val="accent5"/>
+            </a:solidFill>
+            <a:prstDash val="solid"/>
+          </a:ln>
+        </p:spPr>
+      </p:sp>
+      <p:sp>
+        <p:nvSpPr>
+          <p:cNvPr id="25" name="bar label 4"/>
+          <p:cNvSpPr txBox="1"/>
+          <p:nvPr/>
+        </p:nvSpPr>
+        <p:spPr>
+          <a:xfrm>
+            <a:off x="548640" y="4370832"/>
+            <a:ext cx="2926080" cy="502920"/>
+          </a:xfrm>
+          <a:prstGeom prst="rect">
+            <a:avLst/>
+          </a:prstGeom>
+          <a:noFill/>
+          <a:ln/>
+        </p:spPr>
+        <p:txBody>
+          <a:bodyPr wrap="square" lIns="0" tIns="0" rIns="0" bIns="0" rtlCol="0" anchor="ctr"/>
+          <a:lstStyle/>
+          <a:p>
+            <a:pPr indent="0" marL="0">
+              <a:buNone/>
+            </a:pPr>
+            <a:r>
+              <a:rPr lang="en-US" sz="1200" dirty="0">
+                <a:solidFill>
+                  <a:schemeClr val="tx1"/>
+                </a:solidFill>
+              </a:rPr>
+              <a:t>M5  ESP32 boards, user study, article, video, public repo</a:t>
+            </a:r>
+            <a:endParaRPr lang="en-US" sz="1200" dirty="0"/>
+          </a:p>
+        </p:txBody>
+      </p:sp>
+      <p:sp>
+        <p:nvSpPr>
+          <p:cNvPr id="26" name="bar 4"/>
+          <p:cNvSpPr/>
+          <p:nvPr/>
+        </p:nvSpPr>
+        <p:spPr>
+          <a:xfrm>
+            <a:off x="8751824" y="4462272"/>
+            <a:ext cx="1966976" cy="329184"/>
+          </a:xfrm>
+          <a:prstGeom prst="roundRect">
+            <a:avLst>
+              <a:gd name="adj" fmla="val 16667"/>
+            </a:avLst>
+          </a:prstGeom>
+          <a:solidFill>
+            <a:schemeClr val="accent3"/>
+          </a:solidFill>
+          <a:ln w="12700">
+            <a:solidFill>
+              <a:schemeClr val="accent3"/>
+            </a:solidFill>
+            <a:prstDash val="solid"/>
+          </a:ln>
+        </p:spPr>
+      </p:sp>
+      <p:sp>
+        <p:nvSpPr>
+          <p:cNvPr id="27" name="bar label 5"/>
+          <p:cNvSpPr txBox="1"/>
+          <p:nvPr/>
+        </p:nvSpPr>
+        <p:spPr>
+          <a:xfrm>
+            <a:off x="548640" y="5029200"/>
+            <a:ext cx="2926080" cy="502920"/>
+          </a:xfrm>
+          <a:prstGeom prst="rect">
+            <a:avLst/>
+          </a:prstGeom>
+          <a:noFill/>
+          <a:ln/>
+        </p:spPr>
+        <p:txBody>
+          <a:bodyPr wrap="square" lIns="0" tIns="0" rIns="0" bIns="0" rtlCol="0" anchor="ctr"/>
+          <a:lstStyle/>
+          <a:p>
+            <a:pPr indent="0" marL="0">
+              <a:buNone/>
+            </a:pPr>
+            <a:r>
+              <a:rPr lang="en-US" sz="1200" dirty="0">
+                <a:solidFill>
+                  <a:schemeClr val="tx1"/>
+                </a:solidFill>
+              </a:rPr>
+              <a:t>Finals</a:t>
+            </a:r>
+            <a:endParaRPr lang="en-US" sz="1200" dirty="0"/>
+          </a:p>
+        </p:txBody>
+      </p:sp>
+      <p:sp>
+        <p:nvSpPr>
+          <p:cNvPr id="28" name="bar 5"/>
+          <p:cNvSpPr/>
+          <p:nvPr/>
+        </p:nvSpPr>
+        <p:spPr>
+          <a:xfrm>
+            <a:off x="11076432" y="5120640"/>
+            <a:ext cx="536448" cy="329184"/>
+          </a:xfrm>
+          <a:prstGeom prst="roundRect">
+            <a:avLst>
+              <a:gd name="adj" fmla="val 16667"/>
+            </a:avLst>
+          </a:prstGeom>
+          <a:solidFill>
+            <a:schemeClr val="tx2"/>
+          </a:solidFill>
+          <a:ln w="12700">
+            <a:solidFill>
+              <a:schemeClr val="tx2"/>
+            </a:solidFill>
+            <a:prstDash val="solid"/>
+          </a:ln>
+        </p:spPr>
+      </p:sp>
+      <p:sp>
+        <p:nvSpPr>
+          <p:cNvPr id="29" name="deadline 0"/>
+          <p:cNvSpPr/>
+          <p:nvPr/>
+        </p:nvSpPr>
+        <p:spPr>
+          <a:xfrm>
+            <a:off x="5175504" y="1600200"/>
+            <a:ext cx="0" cy="4069080"/>
+          </a:xfrm>
+          <a:prstGeom prst="line">
+            <a:avLst/>
+          </a:prstGeom>
+          <a:noFill/>
+          <a:ln w="19050">
+            <a:solidFill>
+              <a:schemeClr val="accent3"/>
+            </a:solidFill>
+            <a:prstDash val="dash"/>
+          </a:ln>
+        </p:spPr>
+      </p:sp>
+      <p:sp>
+        <p:nvSpPr>
+          <p:cNvPr id="30" name="deadline label 0"/>
+          <p:cNvSpPr txBox="1"/>
+          <p:nvPr/>
+        </p:nvSpPr>
+        <p:spPr>
+          <a:xfrm>
+            <a:off x="4352544" y="5715000"/>
+            <a:ext cx="1645920" cy="274320"/>
+          </a:xfrm>
+          <a:prstGeom prst="rect">
+            <a:avLst/>
+          </a:prstGeom>
+          <a:noFill/>
+          <a:ln/>
+        </p:spPr>
+        <p:txBody>
+          <a:bodyPr wrap="square" lIns="0" tIns="0" rIns="0" bIns="0" rtlCol="0" anchor="ctr"/>
+          <a:lstStyle/>
+          <a:p>
+            <a:pPr algn="ctr" indent="0" marL="0">
+              <a:buNone/>
+            </a:pPr>
+            <a:r>
+              <a:rPr lang="en-US" sz="1100" b="1" dirty="0">
+                <a:solidFill>
+                  <a:schemeClr val="accent3"/>
+                </a:solidFill>
+              </a:rPr>
+              <a:t>Oct 20 interim</a:t>
+            </a:r>
+            <a:endParaRPr lang="en-US" sz="1100" dirty="0"/>
+          </a:p>
+        </p:txBody>
+      </p:sp>
+      <p:sp>
+        <p:nvSpPr>
+          <p:cNvPr id="31" name="deadline 1"/>
+          <p:cNvSpPr/>
+          <p:nvPr/>
+        </p:nvSpPr>
+        <p:spPr>
+          <a:xfrm>
+            <a:off x="10718800" y="1600200"/>
+            <a:ext cx="0" cy="4069080"/>
+          </a:xfrm>
+          <a:prstGeom prst="line">
+            <a:avLst/>
+          </a:prstGeom>
+          <a:noFill/>
+          <a:ln w="19050">
+            <a:solidFill>
+              <a:schemeClr val="accent3"/>
+            </a:solidFill>
+            <a:prstDash val="dash"/>
+          </a:ln>
+        </p:spPr>
+      </p:sp>
+      <p:sp>
+        <p:nvSpPr>
+          <p:cNvPr id="32" name="deadline label 1"/>
+          <p:cNvSpPr txBox="1"/>
+          <p:nvPr/>
+        </p:nvSpPr>
+        <p:spPr>
+          <a:xfrm>
+            <a:off x="9895840" y="5715000"/>
+            <a:ext cx="1645920" cy="274320"/>
+          </a:xfrm>
+          <a:prstGeom prst="rect">
+            <a:avLst/>
+          </a:prstGeom>
+          <a:noFill/>
+          <a:ln/>
+        </p:spPr>
+        <p:txBody>
+          <a:bodyPr wrap="square" lIns="0" tIns="0" rIns="0" bIns="0" rtlCol="0" anchor="ctr"/>
+          <a:lstStyle/>
+          <a:p>
+            <a:pPr algn="ctr" indent="0" marL="0">
+              <a:buNone/>
+            </a:pPr>
+            <a:r>
+              <a:rPr lang="en-US" sz="1100" b="1" dirty="0">
+                <a:solidFill>
+                  <a:schemeClr val="accent3"/>
+                </a:solidFill>
+              </a:rPr>
+              <a:t>Nov 20 code freeze</a:t>
+            </a:r>
+            <a:endParaRPr lang="en-US" sz="1100" dirty="0"/>
+          </a:p>
+        </p:txBody>
+      </p:sp>
+      <p:sp>
+        <p:nvSpPr>
+          <p:cNvPr id="33" name="legend"/>
+          <p:cNvSpPr txBox="1"/>
+          <p:nvPr/>
+        </p:nvSpPr>
+        <p:spPr>
+          <a:xfrm>
+            <a:off x="548640" y="6035040"/>
+            <a:ext cx="11064240" cy="274320"/>
+          </a:xfrm>
+          <a:prstGeom prst="rect">
+            <a:avLst/>
+          </a:prstGeom>
+          <a:noFill/>
+          <a:ln/>
+        </p:spPr>
+        <p:txBody>
+          <a:bodyPr wrap="square" lIns="0" tIns="0" rIns="0" bIns="0" rtlCol="0" anchor="ctr"/>
+          <a:lstStyle/>
+          <a:p>
+            <a:pPr indent="0" marL="0">
+              <a:buNone/>
+            </a:pPr>
+            <a:r>
+              <a:rPr lang="en-US" sz="1100" dirty="0">
+                <a:solidFill>
+                  <a:schemeClr val="accent6"/>
+                </a:solidFill>
+              </a:rPr>
+              <a:t>Built ahead of plan (Oct 11): SDT data model, CSE handover, federated learning, AI agent  ·  Blue: oneM2M depth  ·  Orange: MEC  ·  Green: AI  ·  Red: demo and communication</a:t>
+            </a:r>
+            <a:endParaRPr lang="en-US" sz="1100" dirty="0"/>
+          </a:p>
+        </p:txBody>
+      </p:sp>
+      <p:sp>
+        <p:nvSpPr>
+          <p:cNvPr id="25" name="Slide Number Placeholder 0"/>
+          <p:cNvSpPr>
+            <a:spLocks noGrp="1"/>
+          </p:cNvSpPr>
+          <p:nvPr>
+            <p:ph type="sldNum" sz="quarter" idx="4294967295"/>
+          </p:nvPr>
+        </p:nvSpPr>
+        <p:spPr>
+          <a:xfrm>
+            <a:off x="11155680" y="6400800"/>
+            <a:ext cx="457200" cy="274320"/>
+          </a:xfrm>
+          <a:prstGeom prst="rect">
+            <a:avLst/>
+          </a:prstGeom>
+          <a:extLst>
+            <a:ext uri="{C572A759-6A51-4108-AA02-DFA0A04FC94B}">
+              <ma14:wrappingTextBoxFlag xmlns:ma14="http://schemas.microsoft.com/office/mac/drawingml/2011/main" val="0"/>
+            </a:ext>
+          </a:extLst>
+        </p:spPr>
+        <p:txBody>
+          <a:bodyPr/>
+          <a:lstStyle>
+            <a:lvl1pPr>
+              <a:defRPr sz="1000">
+                <a:solidFill>
+                  <a:schemeClr val="accent6"/>
+                </a:solidFill>
+              </a:defRPr>
+            </a:lvl1pPr>
+          </a:lstStyle>
+          <a:p>
+            <a:pPr algn="r"/>
+            <a:fld id="{F7021451-1387-4CA6-816F-3879F97B5CBC}" type="slidenum">
+              <a:rPr b="0" lang="en-US"/>
+              <a:t>13</a:t>
+            </a:fld>
+            <a:endParaRPr lang="en-US"/>
+          </a:p>
+        </p:txBody>
+      </p:sp>
+    </p:spTree>
+  </p:cSld>
+  <p:clrMapOvr>
+    <a:masterClrMapping/>
+  </p:clrMapOvr>
+</p:sld>
+</file>
+
+<file path=ppt/slides/slide14.xml><?xml version="1.0" encoding="utf-8"?>
+<p:sld xmlns:a="http://schemas.openxmlformats.org/drawingml/2006/main" xmlns:r="http://schemas.openxmlformats.org/officeDocument/2006/relationships" xmlns:p="http://schemas.openxmlformats.org/presentationml/2006/main">
+  <p:cSld name="Slide 14">
+    <p:spTree>
+      <p:nvGrpSpPr>
+        <p:cNvPr id="1" name=""/>
+        <p:cNvGrpSpPr/>
+        <p:nvPr/>
+      </p:nvGrpSpPr>
+      <p:grpSpPr>
+        <a:xfrm>
+          <a:off x="0" y="0"/>
+          <a:ext cx="0" cy="0"/>
+          <a:chOff x="0" y="0"/>
+          <a:chExt cx="0" cy="0"/>
+        </a:xfrm>
+      </p:grpSpPr>
+      <p:sp>
+        <p:nvSpPr>
+          <p:cNvPr id="2" name="Text 0"/>
+          <p:cNvSpPr/>
+          <p:nvPr>
+            <p:ph idx="100" type="title" hasCustomPrompt="1"/>
+          </p:nvPr>
+        </p:nvSpPr>
+        <p:spPr>
+          <a:xfrm>
+            <a:off x="548640" y="320040"/>
+            <a:ext cx="11064240" cy="731520"/>
+          </a:xfrm>
+          <a:prstGeom prst="rect">
+            <a:avLst/>
+          </a:prstGeom>
+          <a:noFill/>
+          <a:ln/>
+        </p:spPr>
+        <p:txBody>
+          <a:bodyPr wrap="square" lIns="0" tIns="0" rIns="0" bIns="0" rtlCol="0" anchor="ctr"/>
+          <a:lstStyle/>
+          <a:p>
+            <a:pPr algn="l" indent="0" marL="0">
+              <a:buNone/>
+            </a:pPr>
+            <a:r>
+              <a:rPr lang="en-US" sz="3000" b="1" dirty="0">
+                <a:solidFill>
+                  <a:schemeClr val="tx2"/>
+                </a:solidFill>
+              </a:rPr>
               <a:t>Milestones, rubric criteria and acceptance checks</a:t>
             </a:r>
             <a:endParaRPr lang="en-US" sz="3000" dirty="0"/>
@@ -4634,7 +6836,7 @@
       </p:sp>
       <p:graphicFrame>
         <p:nvGraphicFramePr>
-          <p:cNvPr id="13" name="milestone table"/>
+          <p:cNvPr id="15" name="milestone table"/>
           <p:cNvGraphicFramePr>
             <a:graphicFrameLocks noGrp="1"/>
           </p:cNvGraphicFramePr>
@@ -4921,7 +7123,7 @@
                             <a:schemeClr val="tx1"/>
                           </a:solidFill>
                         </a:rPr>
-                        <a:t>M1 · Oct 20</a:t>
+                        <a:t>Done · Oct 11</a:t>
                       </a:r>
                       <a:endParaRPr lang="en-US" sz="1200" dirty="0"/>
                     </a:p>
@@ -4979,7 +7181,7 @@
                             <a:schemeClr val="tx1"/>
                           </a:solidFill>
                         </a:rPr>
-                        <a:t>Interim report; device state as FlexContainers with labels; MEC app discovers devices by label</a:t>
+                        <a:t>SDT flexContainers + SAREF; CSE handover (3–9 ms, 0 lost); FL through oneM2M (2 s error 0.60 → 0.49 m); safety agent over 4 MCP servers</a:t>
                       </a:r>
                       <a:endParaRPr lang="en-US" sz="1200" dirty="0"/>
                     </a:p>
@@ -5037,7 +7239,7 @@
                             <a:schemeClr val="tx1"/>
                           </a:solidFill>
                         </a:rPr>
-                        <a:t>Data interoperability, Article</a:t>
+                        <a:t>Data interop., CSE handover, FL, AI agents</a:t>
                       </a:r>
                       <a:endParaRPr lang="en-US" sz="1200" dirty="0"/>
                     </a:p>
@@ -5095,7 +7297,7 @@
                             <a:schemeClr val="tx1"/>
                           </a:solidFill>
                         </a:rPr>
-                        <a:t>Devices onboard without config; CI test passes</a:t>
+                        <a:t>CI: check_sdt 6/6, handover 10/10 + 8/8, FL 8/8, agent 9/9</a:t>
                       </a:r>
                       <a:endParaRPr lang="en-US" sz="1200" dirty="0"/>
                     </a:p>
@@ -5213,7 +7415,7 @@
                             <a:schemeClr val="tx1"/>
                           </a:solidFill>
                         </a:rPr>
-                        <a:t>&lt;group&gt; fan-out of alerts per zone; &lt;pollingChannel&gt; for tags; near misses announced to IN-CSE; MQTT for devices, HTTP for apps; TLS</a:t>
+                        <a:t>&lt;group&gt; fan-out of alerts per zone; &lt;pollingChannel&gt; for tags; MQTT for devices, HTTP for apps; TLS</a:t>
                       </a:r>
                       <a:endParaRPr lang="en-US" sz="1200" dirty="0"/>
                     </a:p>
@@ -5447,7 +7649,7 @@
                             <a:schemeClr val="tx1"/>
                           </a:solidFill>
                         </a:rPr>
-                        <a:t>Forklift AE hands over between two zone MN-CSEs, triggered by MEC Location; subscriptions rebuilt; geofence events</a:t>
+                        <a:t>MEC Location zone subscriptions → geofence events in oneM2M and handover trigger; bidirectional MEC–oneM2M; multi-host</a:t>
                       </a:r>
                       <a:endParaRPr lang="en-US" sz="1200" dirty="0"/>
                     </a:p>
@@ -5505,7 +7707,7 @@
                             <a:schemeClr val="tx1"/>
                           </a:solidFill>
                         </a:rPr>
-                        <a:t>CSE handover, Geolocation, MEC services, Deployment</a:t>
+                        <a:t>Geolocation, MEC services, Deployment</a:t>
                       </a:r>
                       <a:endParaRPr lang="en-US" sz="1200" dirty="0"/>
                     </a:p>
@@ -5563,7 +7765,7 @@
                             <a:schemeClr val="tx1"/>
                           </a:solidFill>
                         </a:rPr>
-                        <a:t>Interruption and data loss measured in a scripted run</a:t>
+                        <a:t>Zone event triggers a handover in a scripted run</a:t>
                       </a:r>
                       <a:endParaRPr lang="en-US" sz="1200" dirty="0"/>
                     </a:p>
@@ -5681,7 +7883,7 @@
                             <a:schemeClr val="tx1"/>
                           </a:solidFill>
                         </a:rPr>
-                        <a:t>MCP server for oneM2M + safety agent: queries near misses, explains alerts, proposes changes; FL of the trajectory model (stretch)</a:t>
+                        <a:t>Learned worker-motion model delivered to the MEC apps; agent questions with Claude</a:t>
                       </a:r>
                       <a:endParaRPr lang="en-US" sz="1200" dirty="0"/>
                     </a:p>
@@ -5739,7 +7941,7 @@
                             <a:schemeClr val="tx1"/>
                           </a:solidFill>
                         </a:rPr>
-                        <a:t>AI agents and MCP, Federated learning</a:t>
+                        <a:t>Federated learning, AI agents</a:t>
                       </a:r>
                       <a:endParaRPr lang="en-US" sz="1200" dirty="0"/>
                     </a:p>
@@ -5797,7 +7999,7 @@
                             <a:schemeClr val="tx1"/>
                           </a:solidFill>
                         </a:rPr>
-                        <a:t>Agent completes a multi-step report task with validation</a:t>
+                        <a:t>Risk engine uses the federated model; agent answers validated</a:t>
                       </a:r>
                       <a:endParaRPr lang="en-US" sz="1200" dirty="0"/>
                     </a:p>
@@ -6119,7 +8321,7 @@
             <a:pPr algn="r"/>
             <a:fld id="{F7021451-1387-4CA6-816F-3879F97B5CBC}" type="slidenum">
               <a:rPr b="0" lang="en-US"/>
-              <a:t>12</a:t>
+              <a:t>14</a:t>
             </a:fld>
             <a:endParaRPr lang="en-US"/>
           </a:p>
@@ -6133,9 +8335,9 @@
 </p:sld>
 </file>
 
-<file path=ppt/slides/slide13.xml><?xml version="1.0" encoding="utf-8"?>
+<file path=ppt/slides/slide15.xml><?xml version="1.0" encoding="utf-8"?>
 <p:sld xmlns:a="http://schemas.openxmlformats.org/drawingml/2006/main" xmlns:r="http://schemas.openxmlformats.org/officeDocument/2006/relationships" xmlns:p="http://schemas.openxmlformats.org/presentationml/2006/main">
-  <p:cSld name="Slide 13">
+  <p:cSld name="Slide 15">
     <p:spTree>
       <p:nvGrpSpPr>
         <p:cNvPr id="1" name=""/>
@@ -6722,7 +8924,7 @@
             <a:pPr algn="r"/>
             <a:fld id="{F7021451-1387-4CA6-816F-3879F97B5CBC}" type="slidenum">
               <a:rPr b="0" lang="en-US"/>
-              <a:t>13</a:t>
+              <a:t>15</a:t>
             </a:fld>
             <a:endParaRPr lang="en-US"/>
           </a:p>
@@ -6736,9 +8938,9 @@
 </p:sld>
 </file>
 
-<file path=ppt/slides/slide14.xml><?xml version="1.0" encoding="utf-8"?>
+<file path=ppt/slides/slide16.xml><?xml version="1.0" encoding="utf-8"?>
 <p:sld xmlns:a="http://schemas.openxmlformats.org/drawingml/2006/main" xmlns:r="http://schemas.openxmlformats.org/officeDocument/2006/relationships" xmlns:p="http://schemas.openxmlformats.org/presentationml/2006/main">
-  <p:cSld name="Slide 14">
+  <p:cSld name="Slide 16">
     <p:spTree>
       <p:nvGrpSpPr>
         <p:cNvPr id="1" name=""/>
@@ -7272,7 +9474,7 @@
                   <a:schemeClr val="tx1"/>
                 </a:solidFill>
               </a:rPr>
-              <a:t>Working end to end on Mobius and ACME, ETSI MEC Sandbox connected, unmodified ESP32 firmware tested against a real CSE in CI. Simulation: collisions 100 → 4 on a many-to-many site.</a:t>
+              <a:t>Working end to end on Mobius and ACME. Already built: SDT flexContainer data model with SAREF semantics, CSE handover between zone MN-CSEs (3–9 ms interruption), federated learning through oneM2M, an AI safety agent over MCP. Collisions 100 → 4 in simulation.</a:t>
             </a:r>
             <a:endParaRPr lang="en-US" sz="1500" dirty="0"/>
           </a:p>
@@ -7371,7 +9573,7 @@
                   <a:schemeClr val="tx1"/>
                 </a:solidFill>
               </a:rPr>
-              <a:t>Close the rubric gaps: FlexContainer data model and discovery, group / pollingChannel / announcement, MQTT for devices, CSE handover between MEC zones, an MCP-based safety agent, and the hackster.io article and video.</a:t>
+              <a:t>group and pollingChannel, MQTT for devices and TLS; MEC Location zone events for geofencing and handover; multi-host deployment; ESP32 board demo, user study, hackster.io article, final video, public repository.</a:t>
             </a:r>
             <a:endParaRPr lang="en-US" sz="1500" dirty="0"/>
           </a:p>
@@ -9686,7 +11888,7 @@
                           <a:ea typeface="Calibri" pitchFamily="34" charset="-122"/>
                           <a:cs typeface="Calibri" pitchFamily="34" charset="-120"/>
                         </a:rPr>
-                        <a:t>Active-standby MEC app (0.73 s), device D2D fallback; CSE handover planned</a:t>
+                        <a:t>CSE handover between zone MN-CSEs (3–9 ms, 0 lost), active-standby MEC app (0.73 s), D2D fallback</a:t>
                       </a:r>
                       <a:endParaRPr lang="en-US" sz="1400" dirty="0">
                         <a:latin typeface="Calibri" charset="0"/>
@@ -9883,7 +12085,7 @@
                           <a:ea typeface="Calibri" pitchFamily="34" charset="-122"/>
                           <a:cs typeface="Calibri" pitchFamily="34" charset="-120"/>
                         </a:rPr>
-                        <a:t>MEC app deployed on AdvantEDGE and the ETSI MEC Sandbox; multi-host planned</a:t>
+                        <a:t>MEC app per zone MEC host; AdvantEDGE and the ETSI MEC Sandbox; multi-host orchestration next</a:t>
                       </a:r>
                       <a:endParaRPr lang="en-US" sz="1400" dirty="0">
                         <a:latin typeface="Calibri" charset="0"/>
@@ -11938,6 +14140,138 @@
                   <a:schemeClr val="tx2"/>
                 </a:solidFill>
               </a:rPr>
+              <a:t>Zones, cloud and continuity: the full picture</a:t>
+            </a:r>
+            <a:endParaRPr lang="en-US" sz="3000" dirty="0"/>
+          </a:p>
+        </p:txBody>
+      </p:sp>
+      <p:pic>
+        <p:nvPicPr>
+          <p:cNvPr id="3" name="architecture diagram" descr="EdgeGuard architecture: zone MEC hosts with MN-CSEs and MEC apps, IN-CSE with home records, federated learning coordinator and AI agent, field devices with D2D fallback">    </p:cNvPr>
+          <p:cNvPicPr>
+            <a:picLocks noChangeAspect="1"/>
+          </p:cNvPicPr>
+          <p:nvPr/>
+        </p:nvPicPr>
+        <p:blipFill>
+          <a:blip r:embed="rId1"/>
+          <a:stretch>
+            <a:fillRect/>
+          </a:stretch>
+        </p:blipFill>
+        <p:spPr>
+          <a:xfrm>
+            <a:off x="1527048" y="1188720"/>
+            <a:ext cx="9144000" cy="5143500"/>
+          </a:xfrm>
+          <a:prstGeom prst="rect">
+            <a:avLst/>
+          </a:prstGeom>
+        </p:spPr>
+      </p:pic>
+      <p:sp>
+        <p:nvSpPr>
+          <p:cNvPr id="25" name="Slide Number Placeholder 0"/>
+          <p:cNvSpPr>
+            <a:spLocks noGrp="1"/>
+          </p:cNvSpPr>
+          <p:nvPr>
+            <p:ph type="sldNum" sz="quarter" idx="4294967295"/>
+          </p:nvPr>
+        </p:nvSpPr>
+        <p:spPr>
+          <a:xfrm>
+            <a:off x="11155680" y="6400800"/>
+            <a:ext cx="457200" cy="274320"/>
+          </a:xfrm>
+          <a:prstGeom prst="rect">
+            <a:avLst/>
+          </a:prstGeom>
+          <a:extLst>
+            <a:ext uri="{C572A759-6A51-4108-AA02-DFA0A04FC94B}">
+              <ma14:wrappingTextBoxFlag xmlns:ma14="http://schemas.microsoft.com/office/mac/drawingml/2011/main" val="0"/>
+            </a:ext>
+          </a:extLst>
+        </p:spPr>
+        <p:txBody>
+          <a:bodyPr/>
+          <a:lstStyle>
+            <a:lvl1pPr>
+              <a:defRPr sz="1000">
+                <a:solidFill>
+                  <a:schemeClr val="accent6"/>
+                </a:solidFill>
+              </a:defRPr>
+            </a:lvl1pPr>
+          </a:lstStyle>
+          <a:p>
+            <a:pPr algn="r"/>
+            <a:fld id="{F7021451-1387-4CA6-816F-3879F97B5CBC}" type="slidenum">
+              <a:rPr b="0" lang="en-US"/>
+              <a:t>7</a:t>
+            </a:fld>
+            <a:endParaRPr lang="en-US"/>
+          </a:p>
+        </p:txBody>
+      </p:sp>
+    </p:spTree>
+  </p:cSld>
+  <p:clrMapOvr>
+    <a:masterClrMapping/>
+  </p:clrMapOvr>
+</p:sld>
+</file>
+
+<file path=ppt/slides/slide8.xml><?xml version="1.0" encoding="utf-8"?>
+<p:sld xmlns:a="http://schemas.openxmlformats.org/drawingml/2006/main" xmlns:r="http://schemas.openxmlformats.org/officeDocument/2006/relationships" xmlns:p="http://schemas.openxmlformats.org/presentationml/2006/main">
+  <p:cSld name="Slide 8">
+    <p:spTree>
+      <p:nvGrpSpPr>
+        <p:cNvPr id="1" name=""/>
+        <p:cNvGrpSpPr/>
+        <p:nvPr/>
+      </p:nvGrpSpPr>
+      <p:grpSpPr>
+        <a:xfrm>
+          <a:off x="0" y="0"/>
+          <a:ext cx="0" cy="0"/>
+          <a:chOff x="0" y="0"/>
+          <a:chExt cx="0" cy="0"/>
+        </a:xfrm>
+      </p:grpSpPr>
+      <p:sp>
+        <p:nvSpPr>
+          <p:cNvPr id="2" name="Text 0"/>
+          <p:cNvSpPr/>
+          <p:nvPr>
+            <p:ph idx="100" type="title" hasCustomPrompt="1"/>
+          </p:nvPr>
+        </p:nvSpPr>
+        <p:spPr>
+          <a:xfrm>
+            <a:off x="548640" y="320040"/>
+            <a:ext cx="11064240" cy="731520"/>
+          </a:xfrm>
+          <a:prstGeom prst="rect">
+            <a:avLst/>
+          </a:prstGeom>
+          <a:noFill/>
+          <a:ln/>
+        </p:spPr>
+        <p:txBody>
+          <a:bodyPr wrap="square" lIns="0" tIns="0" rIns="0" bIns="0" rtlCol="0" anchor="ctr"/>
+          <a:lstStyle/>
+          <a:p>
+            <a:pPr algn="l" indent="0" marL="0">
+              <a:buNone/>
+            </a:pPr>
+            <a:r>
+              <a:rPr lang="en-US" sz="3000" b="1" dirty="0">
+                <a:solidFill>
+                  <a:schemeClr val="tx2"/>
+                </a:solidFill>
+              </a:rPr>
               <a:t>oneM2M resource design and access control</a:t>
             </a:r>
             <a:endParaRPr lang="en-US" sz="3000" dirty="0"/>
@@ -12004,7 +14338,7 @@
                 <a:ea typeface="Courier New" pitchFamily="34" charset="-122"/>
                 <a:cs typeface="Courier New" pitchFamily="34" charset="-120"/>
               </a:rPr>
-              <a:t>/cse-in (MN-CSE on the MEC host)</a:t>
+              <a:t>/cse-mn-a (zone MN-CSE on the MEC host)</a:t>
             </a:r>
             <a:endParaRPr lang="en-US" sz="1300" dirty="0"/>
           </a:p>
@@ -12021,7 +14355,7 @@
                 <a:ea typeface="Courier New" pitchFamily="34" charset="-122"/>
                 <a:cs typeface="Courier New" pitchFamily="34" charset="-120"/>
               </a:rPr>
-              <a:t>├─ worker_01        AE, originator SWorker01</a:t>
+              <a:t>├─ worker_01      AE SWorker01, lbl egs:role/worker</a:t>
             </a:r>
             <a:endParaRPr lang="en-US" sz="1300" dirty="0"/>
           </a:p>
@@ -12038,7 +14372,7 @@
                 <a:ea typeface="Courier New" pitchFamily="34" charset="-122"/>
                 <a:cs typeface="Courier New" pitchFamily="34" charset="-120"/>
               </a:rPr>
-              <a:t>│   ├─ location     CNT → CIN {x, y, ts}</a:t>
+              <a:t>│   ├─ tag        flexContainer egs:wrkTg</a:t>
             </a:r>
             <a:endParaRPr lang="en-US" sz="1300" dirty="0"/>
           </a:p>
@@ -12055,7 +14389,7 @@
                 <a:ea typeface="Courier New" pitchFamily="34" charset="-122"/>
                 <a:cs typeface="Courier New" pitchFamily="34" charset="-120"/>
               </a:rPr>
-              <a:t>│   ├─ relay        CNT  (D2D relay)</a:t>
+              <a:t>│   │   ├─ kinematics  egs:kinSt (mni 100)</a:t>
             </a:r>
             <a:endParaRPr lang="en-US" sz="1300" dirty="0"/>
           </a:p>
@@ -12072,7 +14406,7 @@
                 <a:ea typeface="Courier New" pitchFamily="34" charset="-122"/>
                 <a:cs typeface="Courier New" pitchFamily="34" charset="-120"/>
               </a:rPr>
-              <a:t>│   ├─ status       CNT  (device acks)</a:t>
+              <a:t>│   │   ├─ cue · battery (cod:bat)</a:t>
             </a:r>
             <a:endParaRPr lang="en-US" sz="1300" dirty="0"/>
           </a:p>
@@ -12089,7 +14423,7 @@
                 <a:ea typeface="Courier New" pitchFamily="34" charset="-122"/>
                 <a:cs typeface="Courier New" pitchFamily="34" charset="-120"/>
               </a:rPr>
-              <a:t>│   └─ acp_worker_01  ACP</a:t>
+              <a:t>│   │   └─ smd    SAREF semanticDescriptor</a:t>
             </a:r>
             <a:endParaRPr lang="en-US" sz="1300" dirty="0"/>
           </a:p>
@@ -12106,7 +14440,7 @@
                 <a:ea typeface="Courier New" pitchFamily="34" charset="-122"/>
                 <a:cs typeface="Courier New" pitchFamily="34" charset="-120"/>
               </a:rPr>
-              <a:t>├─ forklift_01      AE, SForklift01</a:t>
+              <a:t>│   ├─ relay · status   CNT</a:t>
             </a:r>
             <a:endParaRPr lang="en-US" sz="1300" dirty="0"/>
           </a:p>
@@ -12123,7 +14457,7 @@
                 <a:ea typeface="Courier New" pitchFamily="34" charset="-122"/>
                 <a:cs typeface="Courier New" pitchFamily="34" charset="-120"/>
               </a:rPr>
-              <a:t>│   ├─ motion · relay · status   CNT</a:t>
+              <a:t>│   └─ acp_worker_01    ACP</a:t>
             </a:r>
             <a:endParaRPr lang="en-US" sz="1300" dirty="0"/>
           </a:p>
@@ -12140,7 +14474,7 @@
                 <a:ea typeface="Courier New" pitchFamily="34" charset="-122"/>
                 <a:cs typeface="Courier New" pitchFamily="34" charset="-120"/>
               </a:rPr>
-              <a:t>│   └─ acp_forklift_01  ACP</a:t>
+              <a:t>├─ forklift_01    AE: module egs:frkMe</a:t>
             </a:r>
             <a:endParaRPr lang="en-US" sz="1300" dirty="0"/>
           </a:p>
@@ -12157,7 +14491,7 @@
                 <a:ea typeface="Courier New" pitchFamily="34" charset="-122"/>
                 <a:cs typeface="Courier New" pitchFamily="34" charset="-120"/>
               </a:rPr>
-              <a:t>├─ camera_01        AE ─ detect CNT</a:t>
+              <a:t>│                 kinematics · speedLimit</a:t>
             </a:r>
             <a:endParaRPr lang="en-US" sz="1300" dirty="0"/>
           </a:p>
@@ -12174,7 +14508,7 @@
                 <a:ea typeface="Courier New" pitchFamily="34" charset="-122"/>
                 <a:cs typeface="Courier New" pitchFamily="34" charset="-120"/>
               </a:rPr>
-              <a:t>└─ EdgeGuard        AE (MEC app)</a:t>
+              <a:t>└─ EdgeGuard      AE (MEC app)</a:t>
             </a:r>
             <a:endParaRPr lang="en-US" sz="1300" dirty="0"/>
           </a:p>
@@ -12191,7 +14525,7 @@
                 <a:ea typeface="Courier New" pitchFamily="34" charset="-122"/>
                 <a:cs typeface="Courier New" pitchFamily="34" charset="-120"/>
               </a:rPr>
-              <a:t>    ├─ risk · alert · control   CNT</a:t>
+              <a:t>    ├─ risk · alert · control  CNT</a:t>
             </a:r>
             <a:endParaRPr lang="en-US" sz="1300" dirty="0"/>
           </a:p>
@@ -12208,7 +14542,7 @@
                 <a:ea typeface="Courier New" pitchFamily="34" charset="-122"/>
                 <a:cs typeface="Courier New" pitchFamily="34" charset="-120"/>
               </a:rPr>
-              <a:t>    ├─ nearmiss (mni 2000) · mec_lease</a:t>
+              <a:t>    └─ nearmiss (mni 2000) · mec_lease</a:t>
             </a:r>
             <a:endParaRPr lang="en-US" sz="1300" dirty="0"/>
           </a:p>
@@ -12225,7 +14559,7 @@
                 <a:ea typeface="Courier New" pitchFamily="34" charset="-122"/>
                 <a:cs typeface="Courier New" pitchFamily="34" charset="-120"/>
               </a:rPr>
-              <a:t>    └─ acp_alert … ACP</a:t>
+              <a:t>SUB kinematics (net=update) → MEC app</a:t>
             </a:r>
             <a:endParaRPr lang="en-US" sz="1300" dirty="0"/>
           </a:p>
@@ -12242,7 +14576,7 @@
                 <a:ea typeface="Courier New" pitchFamily="34" charset="-122"/>
                 <a:cs typeface="Courier New" pitchFamily="34" charset="-120"/>
               </a:rPr>
-              <a:t>SUB on every device container → MEC app</a:t>
+              <a:t>found by lbl egs:module/kinematics</a:t>
             </a:r>
             <a:endParaRPr lang="en-US" sz="1300" dirty="0"/>
           </a:p>
@@ -12250,7 +14584,7 @@
       </p:sp>
       <p:graphicFrame>
         <p:nvGraphicFramePr>
-          <p:cNvPr id="8" name="acp table"/>
+          <p:cNvPr id="9" name="acp table"/>
           <p:cNvGraphicFramePr>
             <a:graphicFrameLocks noGrp="1"/>
           </p:cNvGraphicFramePr>
@@ -12829,7 +15163,7 @@
                             <a:schemeClr val="tx1"/>
                           </a:solidFill>
                         </a:rPr>
-                        <a:t>retrieve, subscribe, notify</a:t>
+                        <a:t>retrieve, discover, create SUB only (chty 23)</a:t>
                       </a:r>
                       <a:endParaRPr lang="en-US" sz="1200" dirty="0"/>
                     </a:p>
@@ -13300,7 +15634,7 @@
                   <a:schemeClr val="accent2"/>
                 </a:solidFill>
               </a:rPr>
-              <a:t>Next (rubric gaps) </a:t>
+              <a:t>Data model (in use) </a:t>
             </a:r>
             <a:endParaRPr lang="en-US" sz="1400" dirty="0"/>
           </a:p>
@@ -13314,534 +15648,7 @@
                   <a:schemeClr val="tx1"/>
                 </a:solidFill>
               </a:rPr>
-              <a:t>FlexContainers with labels for device state, discovery-based onboarding, &lt;group&gt; fan-out of alerts, &lt;pollingChannel&gt; for sleeping tags, announcement of near misses to the IN-CSE.</a:t>
-            </a:r>
-            <a:endParaRPr lang="en-US" sz="1400" dirty="0"/>
-          </a:p>
-        </p:txBody>
-      </p:sp>
-      <p:sp>
-        <p:nvSpPr>
-          <p:cNvPr id="25" name="Slide Number Placeholder 0"/>
-          <p:cNvSpPr>
-            <a:spLocks noGrp="1"/>
-          </p:cNvSpPr>
-          <p:nvPr>
-            <p:ph type="sldNum" sz="quarter" idx="4294967295"/>
-          </p:nvPr>
-        </p:nvSpPr>
-        <p:spPr>
-          <a:xfrm>
-            <a:off x="11155680" y="6400800"/>
-            <a:ext cx="457200" cy="274320"/>
-          </a:xfrm>
-          <a:prstGeom prst="rect">
-            <a:avLst/>
-          </a:prstGeom>
-          <a:extLst>
-            <a:ext uri="{C572A759-6A51-4108-AA02-DFA0A04FC94B}">
-              <ma14:wrappingTextBoxFlag xmlns:ma14="http://schemas.microsoft.com/office/mac/drawingml/2011/main" val="0"/>
-            </a:ext>
-          </a:extLst>
-        </p:spPr>
-        <p:txBody>
-          <a:bodyPr/>
-          <a:lstStyle>
-            <a:lvl1pPr>
-              <a:defRPr sz="1000">
-                <a:solidFill>
-                  <a:schemeClr val="accent6"/>
-                </a:solidFill>
-              </a:defRPr>
-            </a:lvl1pPr>
-          </a:lstStyle>
-          <a:p>
-            <a:pPr algn="r"/>
-            <a:fld id="{F7021451-1387-4CA6-816F-3879F97B5CBC}" type="slidenum">
-              <a:rPr b="0" lang="en-US"/>
-              <a:t>7</a:t>
-            </a:fld>
-            <a:endParaRPr lang="en-US"/>
-          </a:p>
-        </p:txBody>
-      </p:sp>
-    </p:spTree>
-  </p:cSld>
-  <p:clrMapOvr>
-    <a:masterClrMapping/>
-  </p:clrMapOvr>
-</p:sld>
-</file>
-
-<file path=ppt/slides/slide8.xml><?xml version="1.0" encoding="utf-8"?>
-<p:sld xmlns:a="http://schemas.openxmlformats.org/drawingml/2006/main" xmlns:r="http://schemas.openxmlformats.org/officeDocument/2006/relationships" xmlns:p="http://schemas.openxmlformats.org/presentationml/2006/main">
-  <p:cSld name="Slide 8">
-    <p:spTree>
-      <p:nvGrpSpPr>
-        <p:cNvPr id="1" name=""/>
-        <p:cNvGrpSpPr/>
-        <p:nvPr/>
-      </p:nvGrpSpPr>
-      <p:grpSpPr>
-        <a:xfrm>
-          <a:off x="0" y="0"/>
-          <a:ext cx="0" cy="0"/>
-          <a:chOff x="0" y="0"/>
-          <a:chExt cx="0" cy="0"/>
-        </a:xfrm>
-      </p:grpSpPr>
-      <p:sp>
-        <p:nvSpPr>
-          <p:cNvPr id="2" name="Text 0"/>
-          <p:cNvSpPr/>
-          <p:nvPr>
-            <p:ph idx="100" type="title" hasCustomPrompt="1"/>
-          </p:nvPr>
-        </p:nvSpPr>
-        <p:spPr>
-          <a:xfrm>
-            <a:off x="548640" y="320040"/>
-            <a:ext cx="11064240" cy="731520"/>
-          </a:xfrm>
-          <a:prstGeom prst="rect">
-            <a:avLst/>
-          </a:prstGeom>
-          <a:noFill/>
-          <a:ln/>
-        </p:spPr>
-        <p:txBody>
-          <a:bodyPr wrap="square" lIns="0" tIns="0" rIns="0" bIns="0" rtlCol="0" anchor="ctr"/>
-          <a:lstStyle/>
-          <a:p>
-            <a:pPr algn="l" indent="0" marL="0">
-              <a:buNone/>
-            </a:pPr>
-            <a:r>
-              <a:rPr lang="en-US" sz="3000" b="1" dirty="0">
-                <a:solidFill>
-                  <a:schemeClr val="tx2"/>
-                </a:solidFill>
-              </a:rPr>
-              <a:t>ETSI MEC integration</a:t>
-            </a:r>
-            <a:endParaRPr lang="en-US" sz="3000" dirty="0"/>
-          </a:p>
-        </p:txBody>
-      </p:sp>
-      <p:sp>
-        <p:nvSpPr>
-          <p:cNvPr id="3" name="mec row 0"/>
-          <p:cNvSpPr/>
-          <p:nvPr/>
-        </p:nvSpPr>
-        <p:spPr>
-          <a:xfrm>
-            <a:off x="548640" y="1280160"/>
-            <a:ext cx="11064240" cy="1463040"/>
-          </a:xfrm>
-          <a:prstGeom prst="roundRect">
-            <a:avLst>
-              <a:gd name="adj" fmla="val 5000"/>
-            </a:avLst>
-          </a:prstGeom>
-          <a:solidFill>
-            <a:schemeClr val="bg2"/>
-          </a:solidFill>
-          <a:ln w="12700">
-            <a:solidFill>
-              <a:schemeClr val="bg2"/>
-            </a:solidFill>
-            <a:prstDash val="solid"/>
-          </a:ln>
-        </p:spPr>
-      </p:sp>
-      <p:sp>
-        <p:nvSpPr>
-          <p:cNvPr id="4" name="mec head 0"/>
-          <p:cNvSpPr txBox="1"/>
-          <p:nvPr/>
-        </p:nvSpPr>
-        <p:spPr>
-          <a:xfrm>
-            <a:off x="822960" y="1463040"/>
-            <a:ext cx="2743200" cy="1097280"/>
-          </a:xfrm>
-          <a:prstGeom prst="rect">
-            <a:avLst/>
-          </a:prstGeom>
-          <a:noFill/>
-          <a:ln/>
-        </p:spPr>
-        <p:txBody>
-          <a:bodyPr wrap="square" lIns="0" tIns="0" rIns="0" bIns="0" rtlCol="0" anchor="t"/>
-          <a:lstStyle/>
-          <a:p>
-            <a:pPr indent="0" marL="0">
-              <a:buNone/>
-            </a:pPr>
-            <a:r>
-              <a:rPr lang="en-US" sz="1800" b="1" dirty="0">
-                <a:solidFill>
-                  <a:schemeClr val="tx2"/>
-                </a:solidFill>
-              </a:rPr>
-              <a:t>MEC services through oneM2M</a:t>
-            </a:r>
-            <a:endParaRPr lang="en-US" sz="1800" dirty="0"/>
-          </a:p>
-        </p:txBody>
-      </p:sp>
-      <p:sp>
-        <p:nvSpPr>
-          <p:cNvPr id="5" name="mec body 0"/>
-          <p:cNvSpPr txBox="1"/>
-          <p:nvPr/>
-        </p:nvSpPr>
-        <p:spPr>
-          <a:xfrm>
-            <a:off x="3657600" y="1463040"/>
-            <a:ext cx="4297680" cy="1097280"/>
-          </a:xfrm>
-          <a:prstGeom prst="rect">
-            <a:avLst/>
-          </a:prstGeom>
-          <a:noFill/>
-          <a:ln/>
-        </p:spPr>
-        <p:txBody>
-          <a:bodyPr wrap="square" lIns="0" tIns="0" rIns="0" bIns="0" rtlCol="0" anchor="t"/>
-          <a:lstStyle/>
-          <a:p>
-            <a:pPr indent="0" marL="0">
-              <a:buNone/>
-            </a:pPr>
-            <a:r>
-              <a:rPr lang="en-US" sz="1400" dirty="0">
-                <a:solidFill>
-                  <a:schemeClr val="tx1"/>
-                </a:solidFill>
-              </a:rPr>
-              <a:t>The MEC-IPE polls MEC 013 Location and MEC 012 RNIS and writes them as oneM2M resources (location/&lt;ue&gt;, rnis/&lt;cell&gt;), so the MEC app reads MEC data like any other device data.</a:t>
-            </a:r>
-            <a:endParaRPr lang="en-US" sz="1400" dirty="0"/>
-          </a:p>
-        </p:txBody>
-      </p:sp>
-      <p:sp>
-        <p:nvSpPr>
-          <p:cNvPr id="6" name="mec evidence 0"/>
-          <p:cNvSpPr txBox="1"/>
-          <p:nvPr/>
-        </p:nvSpPr>
-        <p:spPr>
-          <a:xfrm>
-            <a:off x="8138160" y="1463040"/>
-            <a:ext cx="3291840" cy="1097280"/>
-          </a:xfrm>
-          <a:prstGeom prst="rect">
-            <a:avLst/>
-          </a:prstGeom>
-          <a:noFill/>
-          <a:ln/>
-        </p:spPr>
-        <p:txBody>
-          <a:bodyPr wrap="square" lIns="0" tIns="0" rIns="0" bIns="0" rtlCol="0" anchor="t"/>
-          <a:lstStyle/>
-          <a:p>
-            <a:pPr indent="0" marL="0">
-              <a:buNone/>
-            </a:pPr>
-            <a:r>
-              <a:rPr lang="en-US" sz="1400" dirty="0">
-                <a:solidFill>
-                  <a:schemeClr val="accent2"/>
-                </a:solidFill>
-              </a:rPr>
-              <a:t>Location: positions for people without a UWB fix</a:t>
-            </a:r>
-            <a:endParaRPr lang="en-US" sz="1400" dirty="0"/>
-          </a:p>
-          <a:p>
-            <a:pPr indent="0" marL="0">
-              <a:buNone/>
-            </a:pPr>
-            <a:r>
-              <a:rPr lang="en-US" sz="1400" dirty="0">
-                <a:solidFill>
-                  <a:schemeClr val="accent2"/>
-                </a:solidFill>
-              </a:rPr>
-              <a:t>RNIS: cell load → adaptive reporting rate, alert priority</a:t>
-            </a:r>
-            <a:endParaRPr lang="en-US" sz="1400" dirty="0"/>
-          </a:p>
-        </p:txBody>
-      </p:sp>
-      <p:sp>
-        <p:nvSpPr>
-          <p:cNvPr id="7" name="mec row 1"/>
-          <p:cNvSpPr/>
-          <p:nvPr/>
-        </p:nvSpPr>
-        <p:spPr>
-          <a:xfrm>
-            <a:off x="548640" y="2926080"/>
-            <a:ext cx="11064240" cy="1463040"/>
-          </a:xfrm>
-          <a:prstGeom prst="roundRect">
-            <a:avLst>
-              <a:gd name="adj" fmla="val 5000"/>
-            </a:avLst>
-          </a:prstGeom>
-          <a:solidFill>
-            <a:schemeClr val="bg2"/>
-          </a:solidFill>
-          <a:ln w="12700">
-            <a:solidFill>
-              <a:schemeClr val="bg2"/>
-            </a:solidFill>
-            <a:prstDash val="solid"/>
-          </a:ln>
-        </p:spPr>
-      </p:sp>
-      <p:sp>
-        <p:nvSpPr>
-          <p:cNvPr id="8" name="mec head 1"/>
-          <p:cNvSpPr txBox="1"/>
-          <p:nvPr/>
-        </p:nvSpPr>
-        <p:spPr>
-          <a:xfrm>
-            <a:off x="822960" y="3108960"/>
-            <a:ext cx="2743200" cy="1097280"/>
-          </a:xfrm>
-          <a:prstGeom prst="rect">
-            <a:avLst/>
-          </a:prstGeom>
-          <a:noFill/>
-          <a:ln/>
-        </p:spPr>
-        <p:txBody>
-          <a:bodyPr wrap="square" lIns="0" tIns="0" rIns="0" bIns="0" rtlCol="0" anchor="t"/>
-          <a:lstStyle/>
-          <a:p>
-            <a:pPr indent="0" marL="0">
-              <a:buNone/>
-            </a:pPr>
-            <a:r>
-              <a:rPr lang="en-US" sz="1800" b="1" dirty="0">
-                <a:solidFill>
-                  <a:schemeClr val="tx2"/>
-                </a:solidFill>
-              </a:rPr>
-              <a:t>MEC application deployment</a:t>
-            </a:r>
-            <a:endParaRPr lang="en-US" sz="1800" dirty="0"/>
-          </a:p>
-        </p:txBody>
-      </p:sp>
-      <p:sp>
-        <p:nvSpPr>
-          <p:cNvPr id="9" name="mec body 1"/>
-          <p:cNvSpPr txBox="1"/>
-          <p:nvPr/>
-        </p:nvSpPr>
-        <p:spPr>
-          <a:xfrm>
-            <a:off x="3657600" y="3108960"/>
-            <a:ext cx="4297680" cy="1097280"/>
-          </a:xfrm>
-          <a:prstGeom prst="rect">
-            <a:avLst/>
-          </a:prstGeom>
-          <a:noFill/>
-          <a:ln/>
-        </p:spPr>
-        <p:txBody>
-          <a:bodyPr wrap="square" lIns="0" tIns="0" rIns="0" bIns="0" rtlCol="0" anchor="t"/>
-          <a:lstStyle/>
-          <a:p>
-            <a:pPr indent="0" marL="0">
-              <a:buNone/>
-            </a:pPr>
-            <a:r>
-              <a:rPr lang="en-US" sz="1400" dirty="0">
-                <a:solidFill>
-                  <a:schemeClr val="tx1"/>
-                </a:solidFill>
-              </a:rPr>
-              <a:t>The EdgeGuard MEC app runs as a Docker container on the MEC host, next to the edge CSE; an active-standby pair shares a lease container in oneM2M.</a:t>
-            </a:r>
-            <a:endParaRPr lang="en-US" sz="1400" dirty="0"/>
-          </a:p>
-        </p:txBody>
-      </p:sp>
-      <p:sp>
-        <p:nvSpPr>
-          <p:cNvPr id="10" name="mec evidence 1"/>
-          <p:cNvSpPr txBox="1"/>
-          <p:nvPr/>
-        </p:nvSpPr>
-        <p:spPr>
-          <a:xfrm>
-            <a:off x="8138160" y="3108960"/>
-            <a:ext cx="3291840" cy="1097280"/>
-          </a:xfrm>
-          <a:prstGeom prst="rect">
-            <a:avLst/>
-          </a:prstGeom>
-          <a:noFill/>
-          <a:ln/>
-        </p:spPr>
-        <p:txBody>
-          <a:bodyPr wrap="square" lIns="0" tIns="0" rIns="0" bIns="0" rtlCol="0" anchor="t"/>
-          <a:lstStyle/>
-          <a:p>
-            <a:pPr indent="0" marL="0">
-              <a:buNone/>
-            </a:pPr>
-            <a:r>
-              <a:rPr lang="en-US" sz="1400" dirty="0">
-                <a:solidFill>
-                  <a:schemeClr val="accent2"/>
-                </a:solidFill>
-              </a:rPr>
-              <a:t>Self-hosted AdvantEDGE with a custom warehouse scenario: 70 alerts in 2 minutes</a:t>
-            </a:r>
-            <a:endParaRPr lang="en-US" sz="1400" dirty="0"/>
-          </a:p>
-        </p:txBody>
-      </p:sp>
-      <p:sp>
-        <p:nvSpPr>
-          <p:cNvPr id="11" name="mec row 2"/>
-          <p:cNvSpPr/>
-          <p:nvPr/>
-        </p:nvSpPr>
-        <p:spPr>
-          <a:xfrm>
-            <a:off x="548640" y="4572000"/>
-            <a:ext cx="11064240" cy="1463040"/>
-          </a:xfrm>
-          <a:prstGeom prst="roundRect">
-            <a:avLst>
-              <a:gd name="adj" fmla="val 5000"/>
-            </a:avLst>
-          </a:prstGeom>
-          <a:solidFill>
-            <a:schemeClr val="bg2"/>
-          </a:solidFill>
-          <a:ln w="12700">
-            <a:solidFill>
-              <a:schemeClr val="bg2"/>
-            </a:solidFill>
-            <a:prstDash val="solid"/>
-          </a:ln>
-        </p:spPr>
-      </p:sp>
-      <p:sp>
-        <p:nvSpPr>
-          <p:cNvPr id="12" name="mec head 2"/>
-          <p:cNvSpPr txBox="1"/>
-          <p:nvPr/>
-        </p:nvSpPr>
-        <p:spPr>
-          <a:xfrm>
-            <a:off x="822960" y="4754880"/>
-            <a:ext cx="2743200" cy="1097280"/>
-          </a:xfrm>
-          <a:prstGeom prst="rect">
-            <a:avLst/>
-          </a:prstGeom>
-          <a:noFill/>
-          <a:ln/>
-        </p:spPr>
-        <p:txBody>
-          <a:bodyPr wrap="square" lIns="0" tIns="0" rIns="0" bIns="0" rtlCol="0" anchor="t"/>
-          <a:lstStyle/>
-          <a:p>
-            <a:pPr indent="0" marL="0">
-              <a:buNone/>
-            </a:pPr>
-            <a:r>
-              <a:rPr lang="en-US" sz="1800" b="1" dirty="0">
-                <a:solidFill>
-                  <a:schemeClr val="tx2"/>
-                </a:solidFill>
-              </a:rPr>
-              <a:t>Live ETSI MEC Sandbox</a:t>
-            </a:r>
-            <a:endParaRPr lang="en-US" sz="1800" dirty="0"/>
-          </a:p>
-        </p:txBody>
-      </p:sp>
-      <p:sp>
-        <p:nvSpPr>
-          <p:cNvPr id="13" name="mec body 2"/>
-          <p:cNvSpPr txBox="1"/>
-          <p:nvPr/>
-        </p:nvSpPr>
-        <p:spPr>
-          <a:xfrm>
-            <a:off x="3657600" y="4754880"/>
-            <a:ext cx="4297680" cy="1097280"/>
-          </a:xfrm>
-          <a:prstGeom prst="rect">
-            <a:avLst/>
-          </a:prstGeom>
-          <a:noFill/>
-          <a:ln/>
-        </p:spPr>
-        <p:txBody>
-          <a:bodyPr wrap="square" lIns="0" tIns="0" rIns="0" bIns="0" rtlCol="0" anchor="t"/>
-          <a:lstStyle/>
-          <a:p>
-            <a:pPr indent="0" marL="0">
-              <a:buNone/>
-            </a:pPr>
-            <a:r>
-              <a:rPr lang="en-US" sz="1400" dirty="0">
-                <a:solidFill>
-                  <a:schemeClr val="tx1"/>
-                </a:solidFill>
-              </a:rPr>
-              <a:t>Connected to the public Sandbox (try-mec.etsi.org): Location and RNIS queries feed the same pipeline as the local mock.</a:t>
-            </a:r>
-            <a:endParaRPr lang="en-US" sz="1400" dirty="0"/>
-          </a:p>
-        </p:txBody>
-      </p:sp>
-      <p:sp>
-        <p:nvSpPr>
-          <p:cNvPr id="14" name="mec evidence 2"/>
-          <p:cNvSpPr txBox="1"/>
-          <p:nvPr/>
-        </p:nvSpPr>
-        <p:spPr>
-          <a:xfrm>
-            <a:off x="8138160" y="4754880"/>
-            <a:ext cx="3291840" cy="1097280"/>
-          </a:xfrm>
-          <a:prstGeom prst="rect">
-            <a:avLst/>
-          </a:prstGeom>
-          <a:noFill/>
-          <a:ln/>
-        </p:spPr>
-        <p:txBody>
-          <a:bodyPr wrap="square" lIns="0" tIns="0" rIns="0" bIns="0" rtlCol="0" anchor="t"/>
-          <a:lstStyle/>
-          <a:p>
-            <a:pPr indent="0" marL="0">
-              <a:buNone/>
-            </a:pPr>
-            <a:r>
-              <a:rPr lang="en-US" sz="1400" dirty="0">
-                <a:solidFill>
-                  <a:schemeClr val="accent2"/>
-                </a:solidFill>
-              </a:rPr>
-              <a:t>Planned: Location zone subscriptions → geofencing events into oneM2M (bidirectional)</a:t>
+              <a:t>SDT flexContainers (own domain org.edgeguard.safety + standard cod:bat), labels for discovery-based onboarding, SAREF semantic query. Next: &lt;group&gt;, &lt;pollingChannel&gt;.</a:t>
             </a:r>
             <a:endParaRPr lang="en-US" sz="1400" dirty="0"/>
           </a:p>
@@ -13949,7 +15756,7 @@
                   <a:schemeClr val="tx2"/>
                 </a:solidFill>
               </a:rPr>
-              <a:t>End-to-end flow: from a position to a cue</a:t>
+              <a:t>ETSI MEC integration</a:t>
             </a:r>
             <a:endParaRPr lang="en-US" sz="3000" dirty="0"/>
           </a:p>
@@ -13957,931 +15764,18 @@
       </p:sp>
       <p:sp>
         <p:nvSpPr>
-          <p:cNvPr id="3" name="step dot 1"/>
+          <p:cNvPr id="3" name="mec row 0"/>
           <p:cNvSpPr/>
           <p:nvPr/>
         </p:nvSpPr>
         <p:spPr>
           <a:xfrm>
-            <a:off x="1143000" y="1417320"/>
-            <a:ext cx="548640" cy="548640"/>
-          </a:xfrm>
-          <a:prstGeom prst="ellipse">
-            <a:avLst/>
-          </a:prstGeom>
-          <a:solidFill>
-            <a:schemeClr val="tx2"/>
-          </a:solidFill>
-          <a:ln w="12700">
-            <a:solidFill>
-              <a:schemeClr val="tx2"/>
-            </a:solidFill>
-            <a:prstDash val="solid"/>
-          </a:ln>
-        </p:spPr>
-      </p:sp>
-      <p:sp>
-        <p:nvSpPr>
-          <p:cNvPr id="4" name="step num 1"/>
-          <p:cNvSpPr txBox="1"/>
-          <p:nvPr/>
-        </p:nvSpPr>
-        <p:spPr>
-          <a:xfrm>
-            <a:off x="1143000" y="1417320"/>
-            <a:ext cx="548640" cy="548640"/>
-          </a:xfrm>
-          <a:prstGeom prst="rect">
-            <a:avLst/>
-          </a:prstGeom>
-          <a:noFill/>
-          <a:ln/>
-        </p:spPr>
-        <p:txBody>
-          <a:bodyPr wrap="square" lIns="0" tIns="0" rIns="0" bIns="0" rtlCol="0" anchor="ctr"/>
-          <a:lstStyle/>
-          <a:p>
-            <a:pPr algn="ctr" indent="0" marL="0">
-              <a:buNone/>
-            </a:pPr>
-            <a:r>
-              <a:rPr lang="en-US" sz="1600" b="1" dirty="0">
-                <a:solidFill>
-                  <a:schemeClr val="bg1"/>
-                </a:solidFill>
-              </a:rPr>
-              <a:t>1</a:t>
-            </a:r>
-            <a:endParaRPr lang="en-US" sz="1600" dirty="0"/>
-          </a:p>
-        </p:txBody>
-      </p:sp>
-      <p:sp>
-        <p:nvSpPr>
-          <p:cNvPr id="5" name="step link 1"/>
-          <p:cNvSpPr/>
-          <p:nvPr/>
-        </p:nvSpPr>
-        <p:spPr>
-          <a:xfrm>
-            <a:off x="1783080" y="1691640"/>
-            <a:ext cx="1600200" cy="0"/>
-          </a:xfrm>
-          <a:prstGeom prst="line">
-            <a:avLst/>
-          </a:prstGeom>
-          <a:noFill/>
-          <a:ln w="19050">
-            <a:solidFill>
-              <a:srgbClr val="C9D0D8"/>
-            </a:solidFill>
-            <a:prstDash val="solid"/>
-          </a:ln>
-        </p:spPr>
-      </p:sp>
-      <p:sp>
-        <p:nvSpPr>
-          <p:cNvPr id="6" name="step head 1"/>
-          <p:cNvSpPr txBox="1"/>
-          <p:nvPr/>
-        </p:nvSpPr>
-        <p:spPr>
-          <a:xfrm>
-            <a:off x="548640" y="2148840"/>
-            <a:ext cx="1737360" cy="365760"/>
-          </a:xfrm>
-          <a:prstGeom prst="rect">
-            <a:avLst/>
-          </a:prstGeom>
-          <a:noFill/>
-          <a:ln/>
-        </p:spPr>
-        <p:txBody>
-          <a:bodyPr wrap="square" lIns="0" tIns="0" rIns="0" bIns="0" rtlCol="0" anchor="ctr"/>
-          <a:lstStyle/>
-          <a:p>
-            <a:pPr algn="ctr" indent="0" marL="0">
-              <a:buNone/>
-            </a:pPr>
-            <a:r>
-              <a:rPr lang="en-US" sz="1600" b="1" dirty="0">
-                <a:solidFill>
-                  <a:schemeClr val="tx2"/>
-                </a:solidFill>
-              </a:rPr>
-              <a:t>Sense</a:t>
-            </a:r>
-            <a:endParaRPr lang="en-US" sz="1600" dirty="0"/>
-          </a:p>
-        </p:txBody>
-      </p:sp>
-      <p:sp>
-        <p:nvSpPr>
-          <p:cNvPr id="7" name="step body 1"/>
-          <p:cNvSpPr txBox="1"/>
-          <p:nvPr/>
-        </p:nvSpPr>
-        <p:spPr>
-          <a:xfrm>
-            <a:off x="548640" y="2560320"/>
-            <a:ext cx="1737360" cy="1005840"/>
-          </a:xfrm>
-          <a:prstGeom prst="rect">
-            <a:avLst/>
-          </a:prstGeom>
-          <a:noFill/>
-          <a:ln/>
-        </p:spPr>
-        <p:txBody>
-          <a:bodyPr wrap="square" lIns="0" tIns="0" rIns="0" bIns="0" rtlCol="0" anchor="t"/>
-          <a:lstStyle/>
-          <a:p>
-            <a:pPr algn="ctr" indent="0" marL="0">
-              <a:buNone/>
-            </a:pPr>
-            <a:r>
-              <a:rPr lang="en-US" sz="1300" dirty="0">
-                <a:solidFill>
-                  <a:schemeClr val="tx1"/>
-                </a:solidFill>
-              </a:rPr>
-              <a:t>Tag / module creates a CIN in its own AE</a:t>
-            </a:r>
-            <a:endParaRPr lang="en-US" sz="1300" dirty="0"/>
-          </a:p>
-        </p:txBody>
-      </p:sp>
-      <p:sp>
-        <p:nvSpPr>
-          <p:cNvPr id="8" name="step dot 2"/>
-          <p:cNvSpPr/>
-          <p:nvPr/>
-        </p:nvSpPr>
-        <p:spPr>
-          <a:xfrm>
-            <a:off x="3017520" y="1417320"/>
-            <a:ext cx="548640" cy="548640"/>
-          </a:xfrm>
-          <a:prstGeom prst="ellipse">
-            <a:avLst/>
-          </a:prstGeom>
-          <a:solidFill>
-            <a:schemeClr val="tx2"/>
-          </a:solidFill>
-          <a:ln w="12700">
-            <a:solidFill>
-              <a:schemeClr val="tx2"/>
-            </a:solidFill>
-            <a:prstDash val="solid"/>
-          </a:ln>
-        </p:spPr>
-      </p:sp>
-      <p:sp>
-        <p:nvSpPr>
-          <p:cNvPr id="9" name="step num 2"/>
-          <p:cNvSpPr txBox="1"/>
-          <p:nvPr/>
-        </p:nvSpPr>
-        <p:spPr>
-          <a:xfrm>
-            <a:off x="3017520" y="1417320"/>
-            <a:ext cx="548640" cy="548640"/>
-          </a:xfrm>
-          <a:prstGeom prst="rect">
-            <a:avLst/>
-          </a:prstGeom>
-          <a:noFill/>
-          <a:ln/>
-        </p:spPr>
-        <p:txBody>
-          <a:bodyPr wrap="square" lIns="0" tIns="0" rIns="0" bIns="0" rtlCol="0" anchor="ctr"/>
-          <a:lstStyle/>
-          <a:p>
-            <a:pPr algn="ctr" indent="0" marL="0">
-              <a:buNone/>
-            </a:pPr>
-            <a:r>
-              <a:rPr lang="en-US" sz="1600" b="1" dirty="0">
-                <a:solidFill>
-                  <a:schemeClr val="bg1"/>
-                </a:solidFill>
-              </a:rPr>
-              <a:t>2</a:t>
-            </a:r>
-            <a:endParaRPr lang="en-US" sz="1600" dirty="0"/>
-          </a:p>
-        </p:txBody>
-      </p:sp>
-      <p:sp>
-        <p:nvSpPr>
-          <p:cNvPr id="10" name="step link 2"/>
-          <p:cNvSpPr/>
-          <p:nvPr/>
-        </p:nvSpPr>
-        <p:spPr>
-          <a:xfrm>
-            <a:off x="3657600" y="1691640"/>
-            <a:ext cx="1600200" cy="0"/>
-          </a:xfrm>
-          <a:prstGeom prst="line">
-            <a:avLst/>
-          </a:prstGeom>
-          <a:noFill/>
-          <a:ln w="19050">
-            <a:solidFill>
-              <a:srgbClr val="C9D0D8"/>
-            </a:solidFill>
-            <a:prstDash val="solid"/>
-          </a:ln>
-        </p:spPr>
-      </p:sp>
-      <p:sp>
-        <p:nvSpPr>
-          <p:cNvPr id="11" name="step head 2"/>
-          <p:cNvSpPr txBox="1"/>
-          <p:nvPr/>
-        </p:nvSpPr>
-        <p:spPr>
-          <a:xfrm>
-            <a:off x="2423160" y="2148840"/>
-            <a:ext cx="1737360" cy="365760"/>
-          </a:xfrm>
-          <a:prstGeom prst="rect">
-            <a:avLst/>
-          </a:prstGeom>
-          <a:noFill/>
-          <a:ln/>
-        </p:spPr>
-        <p:txBody>
-          <a:bodyPr wrap="square" lIns="0" tIns="0" rIns="0" bIns="0" rtlCol="0" anchor="ctr"/>
-          <a:lstStyle/>
-          <a:p>
-            <a:pPr algn="ctr" indent="0" marL="0">
-              <a:buNone/>
-            </a:pPr>
-            <a:r>
-              <a:rPr lang="en-US" sz="1600" b="1" dirty="0">
-                <a:solidFill>
-                  <a:schemeClr val="tx2"/>
-                </a:solidFill>
-              </a:rPr>
-              <a:t>Notify</a:t>
-            </a:r>
-            <a:endParaRPr lang="en-US" sz="1600" dirty="0"/>
-          </a:p>
-        </p:txBody>
-      </p:sp>
-      <p:sp>
-        <p:nvSpPr>
-          <p:cNvPr id="12" name="step body 2"/>
-          <p:cNvSpPr txBox="1"/>
-          <p:nvPr/>
-        </p:nvSpPr>
-        <p:spPr>
-          <a:xfrm>
-            <a:off x="2423160" y="2560320"/>
-            <a:ext cx="1737360" cy="1005840"/>
-          </a:xfrm>
-          <a:prstGeom prst="rect">
-            <a:avLst/>
-          </a:prstGeom>
-          <a:noFill/>
-          <a:ln/>
-        </p:spPr>
-        <p:txBody>
-          <a:bodyPr wrap="square" lIns="0" tIns="0" rIns="0" bIns="0" rtlCol="0" anchor="t"/>
-          <a:lstStyle/>
-          <a:p>
-            <a:pPr algn="ctr" indent="0" marL="0">
-              <a:buNone/>
-            </a:pPr>
-            <a:r>
-              <a:rPr lang="en-US" sz="1300" dirty="0">
-                <a:solidFill>
-                  <a:schemeClr val="tx1"/>
-                </a:solidFill>
-              </a:rPr>
-              <a:t>MN-CSE notifies the MEC app (subscription)</a:t>
-            </a:r>
-            <a:endParaRPr lang="en-US" sz="1300" dirty="0"/>
-          </a:p>
-        </p:txBody>
-      </p:sp>
-      <p:sp>
-        <p:nvSpPr>
-          <p:cNvPr id="13" name="step dot 3"/>
-          <p:cNvSpPr/>
-          <p:nvPr/>
-        </p:nvSpPr>
-        <p:spPr>
-          <a:xfrm>
-            <a:off x="4892040" y="1417320"/>
-            <a:ext cx="548640" cy="548640"/>
-          </a:xfrm>
-          <a:prstGeom prst="ellipse">
-            <a:avLst/>
-          </a:prstGeom>
-          <a:solidFill>
-            <a:schemeClr val="tx2"/>
-          </a:solidFill>
-          <a:ln w="12700">
-            <a:solidFill>
-              <a:schemeClr val="tx2"/>
-            </a:solidFill>
-            <a:prstDash val="solid"/>
-          </a:ln>
-        </p:spPr>
-      </p:sp>
-      <p:sp>
-        <p:nvSpPr>
-          <p:cNvPr id="14" name="step num 3"/>
-          <p:cNvSpPr txBox="1"/>
-          <p:nvPr/>
-        </p:nvSpPr>
-        <p:spPr>
-          <a:xfrm>
-            <a:off x="4892040" y="1417320"/>
-            <a:ext cx="548640" cy="548640"/>
-          </a:xfrm>
-          <a:prstGeom prst="rect">
-            <a:avLst/>
-          </a:prstGeom>
-          <a:noFill/>
-          <a:ln/>
-        </p:spPr>
-        <p:txBody>
-          <a:bodyPr wrap="square" lIns="0" tIns="0" rIns="0" bIns="0" rtlCol="0" anchor="ctr"/>
-          <a:lstStyle/>
-          <a:p>
-            <a:pPr algn="ctr" indent="0" marL="0">
-              <a:buNone/>
-            </a:pPr>
-            <a:r>
-              <a:rPr lang="en-US" sz="1600" b="1" dirty="0">
-                <a:solidFill>
-                  <a:schemeClr val="bg1"/>
-                </a:solidFill>
-              </a:rPr>
-              <a:t>3</a:t>
-            </a:r>
-            <a:endParaRPr lang="en-US" sz="1600" dirty="0"/>
-          </a:p>
-        </p:txBody>
-      </p:sp>
-      <p:sp>
-        <p:nvSpPr>
-          <p:cNvPr id="15" name="step link 3"/>
-          <p:cNvSpPr/>
-          <p:nvPr/>
-        </p:nvSpPr>
-        <p:spPr>
-          <a:xfrm>
-            <a:off x="5532120" y="1691640"/>
-            <a:ext cx="1600200" cy="0"/>
-          </a:xfrm>
-          <a:prstGeom prst="line">
-            <a:avLst/>
-          </a:prstGeom>
-          <a:noFill/>
-          <a:ln w="19050">
-            <a:solidFill>
-              <a:srgbClr val="C9D0D8"/>
-            </a:solidFill>
-            <a:prstDash val="solid"/>
-          </a:ln>
-        </p:spPr>
-      </p:sp>
-      <p:sp>
-        <p:nvSpPr>
-          <p:cNvPr id="16" name="step head 3"/>
-          <p:cNvSpPr txBox="1"/>
-          <p:nvPr/>
-        </p:nvSpPr>
-        <p:spPr>
-          <a:xfrm>
-            <a:off x="4297680" y="2148840"/>
-            <a:ext cx="1737360" cy="365760"/>
-          </a:xfrm>
-          <a:prstGeom prst="rect">
-            <a:avLst/>
-          </a:prstGeom>
-          <a:noFill/>
-          <a:ln/>
-        </p:spPr>
-        <p:txBody>
-          <a:bodyPr wrap="square" lIns="0" tIns="0" rIns="0" bIns="0" rtlCol="0" anchor="ctr"/>
-          <a:lstStyle/>
-          <a:p>
-            <a:pPr algn="ctr" indent="0" marL="0">
-              <a:buNone/>
-            </a:pPr>
-            <a:r>
-              <a:rPr lang="en-US" sz="1600" b="1" dirty="0">
-                <a:solidFill>
-                  <a:schemeClr val="tx2"/>
-                </a:solidFill>
-              </a:rPr>
-              <a:t>Predict</a:t>
-            </a:r>
-            <a:endParaRPr lang="en-US" sz="1600" dirty="0"/>
-          </a:p>
-        </p:txBody>
-      </p:sp>
-      <p:sp>
-        <p:nvSpPr>
-          <p:cNvPr id="17" name="step body 3"/>
-          <p:cNvSpPr txBox="1"/>
-          <p:nvPr/>
-        </p:nvSpPr>
-        <p:spPr>
-          <a:xfrm>
-            <a:off x="4297680" y="2560320"/>
-            <a:ext cx="1737360" cy="1005840"/>
-          </a:xfrm>
-          <a:prstGeom prst="rect">
-            <a:avLst/>
-          </a:prstGeom>
-          <a:noFill/>
-          <a:ln/>
-        </p:spPr>
-        <p:txBody>
-          <a:bodyPr wrap="square" lIns="0" tIns="0" rIns="0" bIns="0" rtlCol="0" anchor="t"/>
-          <a:lstStyle/>
-          <a:p>
-            <a:pPr algn="ctr" indent="0" marL="0">
-              <a:buNone/>
-            </a:pPr>
-            <a:r>
-              <a:rPr lang="en-US" sz="1300" dirty="0">
-                <a:solidFill>
-                  <a:schemeClr val="tx1"/>
-                </a:solidFill>
-              </a:rPr>
-              <a:t>Kalman tracking, forklift turn model or shared route</a:t>
-            </a:r>
-            <a:endParaRPr lang="en-US" sz="1300" dirty="0"/>
-          </a:p>
-        </p:txBody>
-      </p:sp>
-      <p:sp>
-        <p:nvSpPr>
-          <p:cNvPr id="18" name="step dot 4"/>
-          <p:cNvSpPr/>
-          <p:nvPr/>
-        </p:nvSpPr>
-        <p:spPr>
-          <a:xfrm>
-            <a:off x="6766560" y="1417320"/>
-            <a:ext cx="548640" cy="548640"/>
-          </a:xfrm>
-          <a:prstGeom prst="ellipse">
-            <a:avLst/>
-          </a:prstGeom>
-          <a:solidFill>
-            <a:schemeClr val="tx2"/>
-          </a:solidFill>
-          <a:ln w="12700">
-            <a:solidFill>
-              <a:schemeClr val="tx2"/>
-            </a:solidFill>
-            <a:prstDash val="solid"/>
-          </a:ln>
-        </p:spPr>
-      </p:sp>
-      <p:sp>
-        <p:nvSpPr>
-          <p:cNvPr id="19" name="step num 4"/>
-          <p:cNvSpPr txBox="1"/>
-          <p:nvPr/>
-        </p:nvSpPr>
-        <p:spPr>
-          <a:xfrm>
-            <a:off x="6766560" y="1417320"/>
-            <a:ext cx="548640" cy="548640"/>
-          </a:xfrm>
-          <a:prstGeom prst="rect">
-            <a:avLst/>
-          </a:prstGeom>
-          <a:noFill/>
-          <a:ln/>
-        </p:spPr>
-        <p:txBody>
-          <a:bodyPr wrap="square" lIns="0" tIns="0" rIns="0" bIns="0" rtlCol="0" anchor="ctr"/>
-          <a:lstStyle/>
-          <a:p>
-            <a:pPr algn="ctr" indent="0" marL="0">
-              <a:buNone/>
-            </a:pPr>
-            <a:r>
-              <a:rPr lang="en-US" sz="1600" b="1" dirty="0">
-                <a:solidFill>
-                  <a:schemeClr val="bg1"/>
-                </a:solidFill>
-              </a:rPr>
-              <a:t>4</a:t>
-            </a:r>
-            <a:endParaRPr lang="en-US" sz="1600" dirty="0"/>
-          </a:p>
-        </p:txBody>
-      </p:sp>
-      <p:sp>
-        <p:nvSpPr>
-          <p:cNvPr id="20" name="step link 4"/>
-          <p:cNvSpPr/>
-          <p:nvPr/>
-        </p:nvSpPr>
-        <p:spPr>
-          <a:xfrm>
-            <a:off x="7406640" y="1691640"/>
-            <a:ext cx="1600200" cy="0"/>
-          </a:xfrm>
-          <a:prstGeom prst="line">
-            <a:avLst/>
-          </a:prstGeom>
-          <a:noFill/>
-          <a:ln w="19050">
-            <a:solidFill>
-              <a:srgbClr val="C9D0D8"/>
-            </a:solidFill>
-            <a:prstDash val="solid"/>
-          </a:ln>
-        </p:spPr>
-      </p:sp>
-      <p:sp>
-        <p:nvSpPr>
-          <p:cNvPr id="21" name="step head 4"/>
-          <p:cNvSpPr txBox="1"/>
-          <p:nvPr/>
-        </p:nvSpPr>
-        <p:spPr>
-          <a:xfrm>
-            <a:off x="6172200" y="2148840"/>
-            <a:ext cx="1737360" cy="365760"/>
-          </a:xfrm>
-          <a:prstGeom prst="rect">
-            <a:avLst/>
-          </a:prstGeom>
-          <a:noFill/>
-          <a:ln/>
-        </p:spPr>
-        <p:txBody>
-          <a:bodyPr wrap="square" lIns="0" tIns="0" rIns="0" bIns="0" rtlCol="0" anchor="ctr"/>
-          <a:lstStyle/>
-          <a:p>
-            <a:pPr algn="ctr" indent="0" marL="0">
-              <a:buNone/>
-            </a:pPr>
-            <a:r>
-              <a:rPr lang="en-US" sz="1600" b="1" dirty="0">
-                <a:solidFill>
-                  <a:schemeClr val="tx2"/>
-                </a:solidFill>
-              </a:rPr>
-              <a:t>Decide</a:t>
-            </a:r>
-            <a:endParaRPr lang="en-US" sz="1600" dirty="0"/>
-          </a:p>
-        </p:txBody>
-      </p:sp>
-      <p:sp>
-        <p:nvSpPr>
-          <p:cNvPr id="22" name="step body 4"/>
-          <p:cNvSpPr txBox="1"/>
-          <p:nvPr/>
-        </p:nvSpPr>
-        <p:spPr>
-          <a:xfrm>
-            <a:off x="6172200" y="2560320"/>
-            <a:ext cx="1737360" cy="1005840"/>
-          </a:xfrm>
-          <a:prstGeom prst="rect">
-            <a:avLst/>
-          </a:prstGeom>
-          <a:noFill/>
-          <a:ln/>
-        </p:spPr>
-        <p:txBody>
-          <a:bodyPr wrap="square" lIns="0" tIns="0" rIns="0" bIns="0" rtlCol="0" anchor="t"/>
-          <a:lstStyle/>
-          <a:p>
-            <a:pPr algn="ctr" indent="0" marL="0">
-              <a:buNone/>
-            </a:pPr>
-            <a:r>
-              <a:rPr lang="en-US" sz="1300" dirty="0">
-                <a:solidFill>
-                  <a:schemeClr val="tx1"/>
-                </a:solidFill>
-              </a:rPr>
-              <a:t>Collision course: LOS rate + closest approach</a:t>
-            </a:r>
-            <a:endParaRPr lang="en-US" sz="1300" dirty="0"/>
-          </a:p>
-        </p:txBody>
-      </p:sp>
-      <p:sp>
-        <p:nvSpPr>
-          <p:cNvPr id="23" name="step dot 5"/>
-          <p:cNvSpPr/>
-          <p:nvPr/>
-        </p:nvSpPr>
-        <p:spPr>
-          <a:xfrm>
-            <a:off x="8641080" y="1417320"/>
-            <a:ext cx="548640" cy="548640"/>
-          </a:xfrm>
-          <a:prstGeom prst="ellipse">
-            <a:avLst/>
-          </a:prstGeom>
-          <a:solidFill>
-            <a:schemeClr val="accent1"/>
-          </a:solidFill>
-          <a:ln w="12700">
-            <a:solidFill>
-              <a:schemeClr val="accent1"/>
-            </a:solidFill>
-            <a:prstDash val="solid"/>
-          </a:ln>
-        </p:spPr>
-      </p:sp>
-      <p:sp>
-        <p:nvSpPr>
-          <p:cNvPr id="24" name="step num 5"/>
-          <p:cNvSpPr txBox="1"/>
-          <p:nvPr/>
-        </p:nvSpPr>
-        <p:spPr>
-          <a:xfrm>
-            <a:off x="8641080" y="1417320"/>
-            <a:ext cx="548640" cy="548640"/>
-          </a:xfrm>
-          <a:prstGeom prst="rect">
-            <a:avLst/>
-          </a:prstGeom>
-          <a:noFill/>
-          <a:ln/>
-        </p:spPr>
-        <p:txBody>
-          <a:bodyPr wrap="square" lIns="0" tIns="0" rIns="0" bIns="0" rtlCol="0" anchor="ctr"/>
-          <a:lstStyle/>
-          <a:p>
-            <a:pPr algn="ctr" indent="0" marL="0">
-              <a:buNone/>
-            </a:pPr>
-            <a:r>
-              <a:rPr lang="en-US" sz="1600" b="1" dirty="0">
-                <a:solidFill>
-                  <a:schemeClr val="tx2"/>
-                </a:solidFill>
-              </a:rPr>
-              <a:t>5</a:t>
-            </a:r>
-            <a:endParaRPr lang="en-US" sz="1600" dirty="0"/>
-          </a:p>
-        </p:txBody>
-      </p:sp>
-      <p:sp>
-        <p:nvSpPr>
-          <p:cNvPr id="25" name="step link 5"/>
-          <p:cNvSpPr/>
-          <p:nvPr/>
-        </p:nvSpPr>
-        <p:spPr>
-          <a:xfrm>
-            <a:off x="9281160" y="1691640"/>
-            <a:ext cx="1600200" cy="0"/>
-          </a:xfrm>
-          <a:prstGeom prst="line">
-            <a:avLst/>
-          </a:prstGeom>
-          <a:noFill/>
-          <a:ln w="19050">
-            <a:solidFill>
-              <a:srgbClr val="C9D0D8"/>
-            </a:solidFill>
-            <a:prstDash val="solid"/>
-          </a:ln>
-        </p:spPr>
-      </p:sp>
-      <p:sp>
-        <p:nvSpPr>
-          <p:cNvPr id="26" name="step head 5"/>
-          <p:cNvSpPr txBox="1"/>
-          <p:nvPr/>
-        </p:nvSpPr>
-        <p:spPr>
-          <a:xfrm>
-            <a:off x="8046720" y="2148840"/>
-            <a:ext cx="1737360" cy="365760"/>
-          </a:xfrm>
-          <a:prstGeom prst="rect">
-            <a:avLst/>
-          </a:prstGeom>
-          <a:noFill/>
-          <a:ln/>
-        </p:spPr>
-        <p:txBody>
-          <a:bodyPr wrap="square" lIns="0" tIns="0" rIns="0" bIns="0" rtlCol="0" anchor="ctr"/>
-          <a:lstStyle/>
-          <a:p>
-            <a:pPr algn="ctr" indent="0" marL="0">
-              <a:buNone/>
-            </a:pPr>
-            <a:r>
-              <a:rPr lang="en-US" sz="1600" b="1" dirty="0">
-                <a:solidFill>
-                  <a:schemeClr val="tx2"/>
-                </a:solidFill>
-              </a:rPr>
-              <a:t>Cue</a:t>
-            </a:r>
-            <a:endParaRPr lang="en-US" sz="1600" dirty="0"/>
-          </a:p>
-        </p:txBody>
-      </p:sp>
-      <p:sp>
-        <p:nvSpPr>
-          <p:cNvPr id="27" name="step body 5"/>
-          <p:cNvSpPr txBox="1"/>
-          <p:nvPr/>
-        </p:nvSpPr>
-        <p:spPr>
-          <a:xfrm>
-            <a:off x="8046720" y="2560320"/>
-            <a:ext cx="1737360" cy="1005840"/>
-          </a:xfrm>
-          <a:prstGeom prst="rect">
-            <a:avLst/>
-          </a:prstGeom>
-          <a:noFill/>
-          <a:ln/>
-        </p:spPr>
-        <p:txBody>
-          <a:bodyPr wrap="square" lIns="0" tIns="0" rIns="0" bIns="0" rtlCol="0" anchor="t"/>
-          <a:lstStyle/>
-          <a:p>
-            <a:pPr algn="ctr" indent="0" marL="0">
-              <a:buNone/>
-            </a:pPr>
-            <a:r>
-              <a:rPr lang="en-US" sz="1300" dirty="0">
-                <a:solidFill>
-                  <a:schemeClr val="tx1"/>
-                </a:solidFill>
-              </a:rPr>
-              <a:t>Alert CIN → tag WAIT / STEP ASIDE / GO, forklift limit</a:t>
-            </a:r>
-            <a:endParaRPr lang="en-US" sz="1300" dirty="0"/>
-          </a:p>
-        </p:txBody>
-      </p:sp>
-      <p:sp>
-        <p:nvSpPr>
-          <p:cNvPr id="28" name="step dot 6"/>
-          <p:cNvSpPr/>
-          <p:nvPr/>
-        </p:nvSpPr>
-        <p:spPr>
-          <a:xfrm>
-            <a:off x="10515600" y="1417320"/>
-            <a:ext cx="548640" cy="548640"/>
-          </a:xfrm>
-          <a:prstGeom prst="ellipse">
-            <a:avLst/>
-          </a:prstGeom>
-          <a:solidFill>
-            <a:schemeClr val="tx2"/>
-          </a:solidFill>
-          <a:ln w="12700">
-            <a:solidFill>
-              <a:schemeClr val="tx2"/>
-            </a:solidFill>
-            <a:prstDash val="solid"/>
-          </a:ln>
-        </p:spPr>
-      </p:sp>
-      <p:sp>
-        <p:nvSpPr>
-          <p:cNvPr id="29" name="step num 6"/>
-          <p:cNvSpPr txBox="1"/>
-          <p:nvPr/>
-        </p:nvSpPr>
-        <p:spPr>
-          <a:xfrm>
-            <a:off x="10515600" y="1417320"/>
-            <a:ext cx="548640" cy="548640"/>
-          </a:xfrm>
-          <a:prstGeom prst="rect">
-            <a:avLst/>
-          </a:prstGeom>
-          <a:noFill/>
-          <a:ln/>
-        </p:spPr>
-        <p:txBody>
-          <a:bodyPr wrap="square" lIns="0" tIns="0" rIns="0" bIns="0" rtlCol="0" anchor="ctr"/>
-          <a:lstStyle/>
-          <a:p>
-            <a:pPr algn="ctr" indent="0" marL="0">
-              <a:buNone/>
-            </a:pPr>
-            <a:r>
-              <a:rPr lang="en-US" sz="1600" b="1" dirty="0">
-                <a:solidFill>
-                  <a:schemeClr val="bg1"/>
-                </a:solidFill>
-              </a:rPr>
-              <a:t>6</a:t>
-            </a:r>
-            <a:endParaRPr lang="en-US" sz="1600" dirty="0"/>
-          </a:p>
-        </p:txBody>
-      </p:sp>
-      <p:sp>
-        <p:nvSpPr>
-          <p:cNvPr id="30" name="step head 6"/>
-          <p:cNvSpPr txBox="1"/>
-          <p:nvPr/>
-        </p:nvSpPr>
-        <p:spPr>
-          <a:xfrm>
-            <a:off x="9921240" y="2148840"/>
-            <a:ext cx="1737360" cy="365760"/>
-          </a:xfrm>
-          <a:prstGeom prst="rect">
-            <a:avLst/>
-          </a:prstGeom>
-          <a:noFill/>
-          <a:ln/>
-        </p:spPr>
-        <p:txBody>
-          <a:bodyPr wrap="square" lIns="0" tIns="0" rIns="0" bIns="0" rtlCol="0" anchor="ctr"/>
-          <a:lstStyle/>
-          <a:p>
-            <a:pPr algn="ctr" indent="0" marL="0">
-              <a:buNone/>
-            </a:pPr>
-            <a:r>
-              <a:rPr lang="en-US" sz="1600" b="1" dirty="0">
-                <a:solidFill>
-                  <a:schemeClr val="tx2"/>
-                </a:solidFill>
-              </a:rPr>
-              <a:t>Confirm</a:t>
-            </a:r>
-            <a:endParaRPr lang="en-US" sz="1600" dirty="0"/>
-          </a:p>
-        </p:txBody>
-      </p:sp>
-      <p:sp>
-        <p:nvSpPr>
-          <p:cNvPr id="31" name="step body 6"/>
-          <p:cNvSpPr txBox="1"/>
-          <p:nvPr/>
-        </p:nvSpPr>
-        <p:spPr>
-          <a:xfrm>
-            <a:off x="9921240" y="2560320"/>
-            <a:ext cx="1737360" cy="1005840"/>
-          </a:xfrm>
-          <a:prstGeom prst="rect">
-            <a:avLst/>
-          </a:prstGeom>
-          <a:noFill/>
-          <a:ln/>
-        </p:spPr>
-        <p:txBody>
-          <a:bodyPr wrap="square" lIns="0" tIns="0" rIns="0" bIns="0" rtlCol="0" anchor="t"/>
-          <a:lstStyle/>
-          <a:p>
-            <a:pPr algn="ctr" indent="0" marL="0">
-              <a:buNone/>
-            </a:pPr>
-            <a:r>
-              <a:rPr lang="en-US" sz="1300" dirty="0">
-                <a:solidFill>
-                  <a:schemeClr val="tx1"/>
-                </a:solidFill>
-              </a:rPr>
-              <a:t>Device writes what it did into its status CNT</a:t>
-            </a:r>
-            <a:endParaRPr lang="en-US" sz="1300" dirty="0"/>
-          </a:p>
-        </p:txBody>
-      </p:sp>
-      <p:sp>
-        <p:nvSpPr>
-          <p:cNvPr id="32" name="kpi 0"/>
-          <p:cNvSpPr/>
-          <p:nvPr/>
-        </p:nvSpPr>
-        <p:spPr>
-          <a:xfrm>
-            <a:off x="548640" y="3931920"/>
-            <a:ext cx="3566160" cy="1371600"/>
+            <a:off x="548640" y="1280160"/>
+            <a:ext cx="11064240" cy="1463040"/>
           </a:xfrm>
           <a:prstGeom prst="roundRect">
             <a:avLst>
-              <a:gd name="adj" fmla="val 5333"/>
+              <a:gd name="adj" fmla="val 5000"/>
             </a:avLst>
           </a:prstGeom>
           <a:solidFill>
@@ -14897,14 +15791,14 @@
       </p:sp>
       <p:sp>
         <p:nvSpPr>
-          <p:cNvPr id="33" name="kpi number 0"/>
+          <p:cNvPr id="4" name="mec head 0"/>
           <p:cNvSpPr txBox="1"/>
           <p:nvPr/>
         </p:nvSpPr>
         <p:spPr>
           <a:xfrm>
-            <a:off x="822960" y="4069080"/>
-            <a:ext cx="3017520" cy="594360"/>
+            <a:off x="822960" y="1463040"/>
+            <a:ext cx="2743200" cy="1097280"/>
           </a:xfrm>
           <a:prstGeom prst="rect">
             <a:avLst/>
@@ -14913,77 +15807,124 @@
           <a:ln/>
         </p:spPr>
         <p:txBody>
-          <a:bodyPr wrap="square" lIns="0" tIns="0" rIns="0" bIns="0" rtlCol="0" anchor="ctr"/>
+          <a:bodyPr wrap="square" lIns="0" tIns="0" rIns="0" bIns="0" rtlCol="0" anchor="t"/>
           <a:lstStyle/>
           <a:p>
             <a:pPr indent="0" marL="0">
               <a:buNone/>
             </a:pPr>
             <a:r>
-              <a:rPr lang="en-US" sz="3000" b="1" dirty="0">
+              <a:rPr lang="en-US" sz="1800" b="1" dirty="0">
+                <a:solidFill>
+                  <a:schemeClr val="tx2"/>
+                </a:solidFill>
+              </a:rPr>
+              <a:t>MEC services through oneM2M</a:t>
+            </a:r>
+            <a:endParaRPr lang="en-US" sz="1800" dirty="0"/>
+          </a:p>
+        </p:txBody>
+      </p:sp>
+      <p:sp>
+        <p:nvSpPr>
+          <p:cNvPr id="5" name="mec body 0"/>
+          <p:cNvSpPr txBox="1"/>
+          <p:nvPr/>
+        </p:nvSpPr>
+        <p:spPr>
+          <a:xfrm>
+            <a:off x="3657600" y="1463040"/>
+            <a:ext cx="4297680" cy="1097280"/>
+          </a:xfrm>
+          <a:prstGeom prst="rect">
+            <a:avLst/>
+          </a:prstGeom>
+          <a:noFill/>
+          <a:ln/>
+        </p:spPr>
+        <p:txBody>
+          <a:bodyPr wrap="square" lIns="0" tIns="0" rIns="0" bIns="0" rtlCol="0" anchor="t"/>
+          <a:lstStyle/>
+          <a:p>
+            <a:pPr indent="0" marL="0">
+              <a:buNone/>
+            </a:pPr>
+            <a:r>
+              <a:rPr lang="en-US" sz="1400" dirty="0">
+                <a:solidFill>
+                  <a:schemeClr val="tx1"/>
+                </a:solidFill>
+              </a:rPr>
+              <a:t>The MEC-IPE polls MEC 013 Location and MEC 012 RNIS and writes them as oneM2M resources (location/&lt;ue&gt;, rnis/&lt;cell&gt;), so the MEC app reads MEC data like any other device data.</a:t>
+            </a:r>
+            <a:endParaRPr lang="en-US" sz="1400" dirty="0"/>
+          </a:p>
+        </p:txBody>
+      </p:sp>
+      <p:sp>
+        <p:nvSpPr>
+          <p:cNvPr id="6" name="mec evidence 0"/>
+          <p:cNvSpPr txBox="1"/>
+          <p:nvPr/>
+        </p:nvSpPr>
+        <p:spPr>
+          <a:xfrm>
+            <a:off x="8138160" y="1463040"/>
+            <a:ext cx="3291840" cy="1097280"/>
+          </a:xfrm>
+          <a:prstGeom prst="rect">
+            <a:avLst/>
+          </a:prstGeom>
+          <a:noFill/>
+          <a:ln/>
+        </p:spPr>
+        <p:txBody>
+          <a:bodyPr wrap="square" lIns="0" tIns="0" rIns="0" bIns="0" rtlCol="0" anchor="t"/>
+          <a:lstStyle/>
+          <a:p>
+            <a:pPr indent="0" marL="0">
+              <a:buNone/>
+            </a:pPr>
+            <a:r>
+              <a:rPr lang="en-US" sz="1400" dirty="0">
                 <a:solidFill>
                   <a:schemeClr val="accent2"/>
                 </a:solidFill>
-                <a:latin typeface="Arial" pitchFamily="34" charset="0"/>
-                <a:ea typeface="Arial" pitchFamily="34" charset="-122"/>
-                <a:cs typeface="Arial" pitchFamily="34" charset="-120"/>
-              </a:rPr>
-              <a:t>25 ms</a:t>
-            </a:r>
-            <a:endParaRPr lang="en-US" sz="3000" dirty="0"/>
-          </a:p>
-        </p:txBody>
-      </p:sp>
-      <p:sp>
-        <p:nvSpPr>
-          <p:cNvPr id="34" name="kpi label 0"/>
-          <p:cNvSpPr txBox="1"/>
-          <p:nvPr/>
-        </p:nvSpPr>
-        <p:spPr>
-          <a:xfrm>
-            <a:off x="822960" y="4663440"/>
-            <a:ext cx="3017520" cy="548640"/>
-          </a:xfrm>
-          <a:prstGeom prst="rect">
-            <a:avLst/>
-          </a:prstGeom>
-          <a:noFill/>
-          <a:ln/>
-        </p:spPr>
-        <p:txBody>
-          <a:bodyPr wrap="square" lIns="0" tIns="0" rIns="0" bIns="0" rtlCol="0" anchor="t"/>
-          <a:lstStyle/>
+              </a:rPr>
+              <a:t>Location: positions for people without a UWB fix</a:t>
+            </a:r>
+            <a:endParaRPr lang="en-US" sz="1400" dirty="0"/>
+          </a:p>
           <a:p>
             <a:pPr indent="0" marL="0">
               <a:buNone/>
             </a:pPr>
             <a:r>
-              <a:rPr lang="en-US" sz="1300" dirty="0">
-                <a:solidFill>
-                  <a:schemeClr val="tx1"/>
-                </a:solidFill>
-              </a:rPr>
-              <a:t>median alert latency on the edge (cloud only: 85 ms)</a:t>
-            </a:r>
-            <a:endParaRPr lang="en-US" sz="1300" dirty="0"/>
-          </a:p>
-        </p:txBody>
-      </p:sp>
-      <p:sp>
-        <p:nvSpPr>
-          <p:cNvPr id="35" name="kpi 1"/>
+              <a:rPr lang="en-US" sz="1400" dirty="0">
+                <a:solidFill>
+                  <a:schemeClr val="accent2"/>
+                </a:solidFill>
+              </a:rPr>
+              <a:t>RNIS: cell load → adaptive reporting rate, alert priority</a:t>
+            </a:r>
+            <a:endParaRPr lang="en-US" sz="1400" dirty="0"/>
+          </a:p>
+        </p:txBody>
+      </p:sp>
+      <p:sp>
+        <p:nvSpPr>
+          <p:cNvPr id="7" name="mec row 1"/>
           <p:cNvSpPr/>
           <p:nvPr/>
         </p:nvSpPr>
         <p:spPr>
           <a:xfrm>
-            <a:off x="4297680" y="3931920"/>
-            <a:ext cx="3566160" cy="1371600"/>
+            <a:off x="548640" y="2926080"/>
+            <a:ext cx="11064240" cy="1463040"/>
           </a:xfrm>
           <a:prstGeom prst="roundRect">
             <a:avLst>
-              <a:gd name="adj" fmla="val 5333"/>
+              <a:gd name="adj" fmla="val 5000"/>
             </a:avLst>
           </a:prstGeom>
           <a:solidFill>
@@ -14999,14 +15940,14 @@
       </p:sp>
       <p:sp>
         <p:nvSpPr>
-          <p:cNvPr id="36" name="kpi number 1"/>
+          <p:cNvPr id="8" name="mec head 1"/>
           <p:cNvSpPr txBox="1"/>
           <p:nvPr/>
         </p:nvSpPr>
         <p:spPr>
           <a:xfrm>
-            <a:off x="4572000" y="4069080"/>
-            <a:ext cx="3017520" cy="594360"/>
+            <a:off x="822960" y="3108960"/>
+            <a:ext cx="2743200" cy="1097280"/>
           </a:xfrm>
           <a:prstGeom prst="rect">
             <a:avLst/>
@@ -15015,77 +15956,110 @@
           <a:ln/>
         </p:spPr>
         <p:txBody>
-          <a:bodyPr wrap="square" lIns="0" tIns="0" rIns="0" bIns="0" rtlCol="0" anchor="ctr"/>
+          <a:bodyPr wrap="square" lIns="0" tIns="0" rIns="0" bIns="0" rtlCol="0" anchor="t"/>
           <a:lstStyle/>
           <a:p>
             <a:pPr indent="0" marL="0">
               <a:buNone/>
             </a:pPr>
             <a:r>
-              <a:rPr lang="en-US" sz="3000" b="1" dirty="0">
+              <a:rPr lang="en-US" sz="1800" b="1" dirty="0">
+                <a:solidFill>
+                  <a:schemeClr val="tx2"/>
+                </a:solidFill>
+              </a:rPr>
+              <a:t>MEC application deployment</a:t>
+            </a:r>
+            <a:endParaRPr lang="en-US" sz="1800" dirty="0"/>
+          </a:p>
+        </p:txBody>
+      </p:sp>
+      <p:sp>
+        <p:nvSpPr>
+          <p:cNvPr id="9" name="mec body 1"/>
+          <p:cNvSpPr txBox="1"/>
+          <p:nvPr/>
+        </p:nvSpPr>
+        <p:spPr>
+          <a:xfrm>
+            <a:off x="3657600" y="3108960"/>
+            <a:ext cx="4297680" cy="1097280"/>
+          </a:xfrm>
+          <a:prstGeom prst="rect">
+            <a:avLst/>
+          </a:prstGeom>
+          <a:noFill/>
+          <a:ln/>
+        </p:spPr>
+        <p:txBody>
+          <a:bodyPr wrap="square" lIns="0" tIns="0" rIns="0" bIns="0" rtlCol="0" anchor="t"/>
+          <a:lstStyle/>
+          <a:p>
+            <a:pPr indent="0" marL="0">
+              <a:buNone/>
+            </a:pPr>
+            <a:r>
+              <a:rPr lang="en-US" sz="1400" dirty="0">
+                <a:solidFill>
+                  <a:schemeClr val="tx1"/>
+                </a:solidFill>
+              </a:rPr>
+              <a:t>The EdgeGuard MEC app runs as a Docker container on the MEC host, next to the edge CSE; an active-standby pair shares a lease container in oneM2M.</a:t>
+            </a:r>
+            <a:endParaRPr lang="en-US" sz="1400" dirty="0"/>
+          </a:p>
+        </p:txBody>
+      </p:sp>
+      <p:sp>
+        <p:nvSpPr>
+          <p:cNvPr id="10" name="mec evidence 1"/>
+          <p:cNvSpPr txBox="1"/>
+          <p:nvPr/>
+        </p:nvSpPr>
+        <p:spPr>
+          <a:xfrm>
+            <a:off x="8138160" y="3108960"/>
+            <a:ext cx="3291840" cy="1097280"/>
+          </a:xfrm>
+          <a:prstGeom prst="rect">
+            <a:avLst/>
+          </a:prstGeom>
+          <a:noFill/>
+          <a:ln/>
+        </p:spPr>
+        <p:txBody>
+          <a:bodyPr wrap="square" lIns="0" tIns="0" rIns="0" bIns="0" rtlCol="0" anchor="t"/>
+          <a:lstStyle/>
+          <a:p>
+            <a:pPr indent="0" marL="0">
+              <a:buNone/>
+            </a:pPr>
+            <a:r>
+              <a:rPr lang="en-US" sz="1400" dirty="0">
                 <a:solidFill>
                   <a:schemeClr val="accent2"/>
                 </a:solidFill>
-                <a:latin typeface="Arial" pitchFamily="34" charset="0"/>
-                <a:ea typeface="Arial" pitchFamily="34" charset="-122"/>
-                <a:cs typeface="Arial" pitchFamily="34" charset="-120"/>
-              </a:rPr>
-              <a:t>2.4 s</a:t>
-            </a:r>
-            <a:endParaRPr lang="en-US" sz="3000" dirty="0"/>
-          </a:p>
-        </p:txBody>
-      </p:sp>
-      <p:sp>
-        <p:nvSpPr>
-          <p:cNvPr id="37" name="kpi label 1"/>
-          <p:cNvSpPr txBox="1"/>
-          <p:nvPr/>
-        </p:nvSpPr>
-        <p:spPr>
-          <a:xfrm>
-            <a:off x="4572000" y="4663440"/>
-            <a:ext cx="3017520" cy="548640"/>
-          </a:xfrm>
-          <a:prstGeom prst="rect">
-            <a:avLst/>
-          </a:prstGeom>
-          <a:noFill/>
-          <a:ln/>
-        </p:spPr>
-        <p:txBody>
-          <a:bodyPr wrap="square" lIns="0" tIns="0" rIns="0" bIns="0" rtlCol="0" anchor="t"/>
-          <a:lstStyle/>
-          <a:p>
-            <a:pPr indent="0" marL="0">
-              <a:buNone/>
-            </a:pPr>
-            <a:r>
-              <a:rPr lang="en-US" sz="1300" dirty="0">
-                <a:solidFill>
-                  <a:schemeClr val="tx1"/>
-                </a:solidFill>
-              </a:rPr>
-              <a:t>median warning lead time; 100 % detected ≥ 1 s before contact</a:t>
-            </a:r>
-            <a:endParaRPr lang="en-US" sz="1300" dirty="0"/>
-          </a:p>
-        </p:txBody>
-      </p:sp>
-      <p:sp>
-        <p:nvSpPr>
-          <p:cNvPr id="38" name="kpi 2"/>
+              </a:rPr>
+              <a:t>Self-hosted AdvantEDGE with a custom warehouse scenario: 70 alerts in 2 minutes</a:t>
+            </a:r>
+            <a:endParaRPr lang="en-US" sz="1400" dirty="0"/>
+          </a:p>
+        </p:txBody>
+      </p:sp>
+      <p:sp>
+        <p:nvSpPr>
+          <p:cNvPr id="11" name="mec row 2"/>
           <p:cNvSpPr/>
           <p:nvPr/>
         </p:nvSpPr>
         <p:spPr>
           <a:xfrm>
-            <a:off x="8046720" y="3931920"/>
-            <a:ext cx="3566160" cy="1371600"/>
+            <a:off x="548640" y="4572000"/>
+            <a:ext cx="11064240" cy="1463040"/>
           </a:xfrm>
           <a:prstGeom prst="roundRect">
             <a:avLst>
-              <a:gd name="adj" fmla="val 5333"/>
+              <a:gd name="adj" fmla="val 5000"/>
             </a:avLst>
           </a:prstGeom>
           <a:solidFill>
@@ -15101,14 +16075,14 @@
       </p:sp>
       <p:sp>
         <p:nvSpPr>
-          <p:cNvPr id="39" name="kpi number 2"/>
+          <p:cNvPr id="12" name="mec head 2"/>
           <p:cNvSpPr txBox="1"/>
           <p:nvPr/>
         </p:nvSpPr>
         <p:spPr>
           <a:xfrm>
-            <a:off x="8321040" y="4069080"/>
-            <a:ext cx="3017520" cy="594360"/>
+            <a:off x="822960" y="4754880"/>
+            <a:ext cx="2743200" cy="1097280"/>
           </a:xfrm>
           <a:prstGeom prst="rect">
             <a:avLst/>
@@ -15117,105 +16091,91 @@
           <a:ln/>
         </p:spPr>
         <p:txBody>
-          <a:bodyPr wrap="square" lIns="0" tIns="0" rIns="0" bIns="0" rtlCol="0" anchor="ctr"/>
+          <a:bodyPr wrap="square" lIns="0" tIns="0" rIns="0" bIns="0" rtlCol="0" anchor="t"/>
           <a:lstStyle/>
           <a:p>
             <a:pPr indent="0" marL="0">
               <a:buNone/>
             </a:pPr>
             <a:r>
-              <a:rPr lang="en-US" sz="3000" b="1" dirty="0">
+              <a:rPr lang="en-US" sz="1800" b="1" dirty="0">
+                <a:solidFill>
+                  <a:schemeClr val="tx2"/>
+                </a:solidFill>
+              </a:rPr>
+              <a:t>Live ETSI MEC Sandbox</a:t>
+            </a:r>
+            <a:endParaRPr lang="en-US" sz="1800" dirty="0"/>
+          </a:p>
+        </p:txBody>
+      </p:sp>
+      <p:sp>
+        <p:nvSpPr>
+          <p:cNvPr id="13" name="mec body 2"/>
+          <p:cNvSpPr txBox="1"/>
+          <p:nvPr/>
+        </p:nvSpPr>
+        <p:spPr>
+          <a:xfrm>
+            <a:off x="3657600" y="4754880"/>
+            <a:ext cx="4297680" cy="1097280"/>
+          </a:xfrm>
+          <a:prstGeom prst="rect">
+            <a:avLst/>
+          </a:prstGeom>
+          <a:noFill/>
+          <a:ln/>
+        </p:spPr>
+        <p:txBody>
+          <a:bodyPr wrap="square" lIns="0" tIns="0" rIns="0" bIns="0" rtlCol="0" anchor="t"/>
+          <a:lstStyle/>
+          <a:p>
+            <a:pPr indent="0" marL="0">
+              <a:buNone/>
+            </a:pPr>
+            <a:r>
+              <a:rPr lang="en-US" sz="1400" dirty="0">
+                <a:solidFill>
+                  <a:schemeClr val="tx1"/>
+                </a:solidFill>
+              </a:rPr>
+              <a:t>Connected to the public Sandbox (try-mec.etsi.org): Location and RNIS queries feed the same pipeline as the local mock.</a:t>
+            </a:r>
+            <a:endParaRPr lang="en-US" sz="1400" dirty="0"/>
+          </a:p>
+        </p:txBody>
+      </p:sp>
+      <p:sp>
+        <p:nvSpPr>
+          <p:cNvPr id="14" name="mec evidence 2"/>
+          <p:cNvSpPr txBox="1"/>
+          <p:nvPr/>
+        </p:nvSpPr>
+        <p:spPr>
+          <a:xfrm>
+            <a:off x="8138160" y="4754880"/>
+            <a:ext cx="3291840" cy="1097280"/>
+          </a:xfrm>
+          <a:prstGeom prst="rect">
+            <a:avLst/>
+          </a:prstGeom>
+          <a:noFill/>
+          <a:ln/>
+        </p:spPr>
+        <p:txBody>
+          <a:bodyPr wrap="square" lIns="0" tIns="0" rIns="0" bIns="0" rtlCol="0" anchor="t"/>
+          <a:lstStyle/>
+          <a:p>
+            <a:pPr indent="0" marL="0">
+              <a:buNone/>
+            </a:pPr>
+            <a:r>
+              <a:rPr lang="en-US" sz="1400" dirty="0">
                 <a:solidFill>
                   <a:schemeClr val="accent2"/>
                 </a:solidFill>
-                <a:latin typeface="Arial" pitchFamily="34" charset="0"/>
-                <a:ea typeface="Arial" pitchFamily="34" charset="-122"/>
-                <a:cs typeface="Arial" pitchFamily="34" charset="-120"/>
-              </a:rPr>
-              <a:t>0.73 s</a:t>
-            </a:r>
-            <a:endParaRPr lang="en-US" sz="3000" dirty="0"/>
-          </a:p>
-        </p:txBody>
-      </p:sp>
-      <p:sp>
-        <p:nvSpPr>
-          <p:cNvPr id="40" name="kpi label 2"/>
-          <p:cNvSpPr txBox="1"/>
-          <p:nvPr/>
-        </p:nvSpPr>
-        <p:spPr>
-          <a:xfrm>
-            <a:off x="8321040" y="4663440"/>
-            <a:ext cx="3017520" cy="548640"/>
-          </a:xfrm>
-          <a:prstGeom prst="rect">
-            <a:avLst/>
-          </a:prstGeom>
-          <a:noFill/>
-          <a:ln/>
-        </p:spPr>
-        <p:txBody>
-          <a:bodyPr wrap="square" lIns="0" tIns="0" rIns="0" bIns="0" rtlCol="0" anchor="t"/>
-          <a:lstStyle/>
-          <a:p>
-            <a:pPr indent="0" marL="0">
-              <a:buNone/>
-            </a:pPr>
-            <a:r>
-              <a:rPr lang="en-US" sz="1300" dirty="0">
-                <a:solidFill>
-                  <a:schemeClr val="tx1"/>
-                </a:solidFill>
-              </a:rPr>
-              <a:t>standby MEC app takeover</a:t>
-            </a:r>
-            <a:endParaRPr lang="en-US" sz="1300" dirty="0"/>
-          </a:p>
-        </p:txBody>
-      </p:sp>
-      <p:sp>
-        <p:nvSpPr>
-          <p:cNvPr id="41" name="failure path"/>
-          <p:cNvSpPr txBox="1"/>
-          <p:nvPr/>
-        </p:nvSpPr>
-        <p:spPr>
-          <a:xfrm>
-            <a:off x="548640" y="5532120"/>
-            <a:ext cx="11064240" cy="640080"/>
-          </a:xfrm>
-          <a:prstGeom prst="rect">
-            <a:avLst/>
-          </a:prstGeom>
-          <a:noFill/>
-          <a:ln/>
-        </p:spPr>
-        <p:txBody>
-          <a:bodyPr wrap="square" lIns="0" tIns="0" rIns="0" bIns="0" rtlCol="0" anchor="t"/>
-          <a:lstStyle/>
-          <a:p>
-            <a:pPr indent="0" marL="0">
-              <a:buNone/>
-            </a:pPr>
-            <a:r>
-              <a:rPr lang="en-US" sz="1400" b="1" dirty="0">
-                <a:solidFill>
-                  <a:schemeClr val="accent3"/>
-                </a:solidFill>
-              </a:rPr>
-              <a:t>Failure path: </a:t>
-            </a:r>
-            <a:pPr indent="0" marL="0">
-              <a:buNone/>
-            </a:pPr>
-            <a:r>
-              <a:rPr lang="en-US" sz="1400" dirty="0">
-                <a:solidFill>
-                  <a:schemeClr val="tx1"/>
-                </a:solidFill>
-              </a:rPr>
-              <a:t>no heartbeat from the MEC app for 2 s → devices switch to UWB ranging and D2D state exchange; neighbours relay alerts to devices in coverage holes; stop only when nothing else is known.</a:t>
+              </a:rPr>
+              <a:t>Planned: Location zone subscriptions → geofencing events into oneM2M (bidirectional)</a:t>
             </a:r>
             <a:endParaRPr lang="en-US" sz="1400" dirty="0"/>
           </a:p>

--- a/docs/submissions/EdgeGuard_Interim_Report.pptx
+++ b/docs/submissions/EdgeGuard_Interim_Report.pptx
@@ -122,20 +122,20 @@
   <p:extLst>
     <p:ext uri="{521415D9-36F7-43E2-AB2F-B90AF26B5E84}">
       <p14:sectionLst xmlns:p14="http://schemas.microsoft.com/office/powerpoint/2010/main">
-        <p14:section name="Introduction" id="{0ed821e7-1c1a-71f1-d2b0-4db05531ac2e}">
+        <p14:section name="Introduction" id="{b4ce6049-7414-5596-a60e-1745c0466690}">
           <p14:sldIdLst>
             <p14:sldId id="256"/>
             <p14:sldId id="257"/>
           </p14:sldIdLst>
         </p14:section>
-        <p14:section name="Use case" id="{a568a412-942f-5242-435d-16a7c4ea2011}">
+        <p14:section name="Use case" id="{e0795979-85a0-fae5-78f4-8e977187a0a2}">
           <p14:sldIdLst>
             <p14:sldId id="258"/>
             <p14:sldId id="259"/>
             <p14:sldId id="260"/>
           </p14:sldIdLst>
         </p14:section>
-        <p14:section name="Architecture" id="{93568bcc-abda-86f6-8699-cc0498c7a657}">
+        <p14:section name="Architecture" id="{feea18c1-b1dc-cb46-1f04-f7b679b202a5}">
           <p14:sldIdLst>
             <p14:sldId id="261"/>
             <p14:sldId id="262"/>
@@ -144,7 +144,7 @@
             <p14:sldId id="265"/>
           </p14:sldIdLst>
         </p14:section>
-        <p14:section name="Status and plan" id="{c57fa3dc-2eae-fd5a-a37b-ddb0b4a43977}">
+        <p14:section name="Status and plan" id="{bb645876-4624-ca01-c31b-b11b317d56c8}">
           <p14:sldIdLst>
             <p14:sldId id="266"/>
             <p14:sldId id="267"/>
@@ -5397,7 +5397,7 @@
                   <a:schemeClr val="accent2"/>
                 </a:solidFill>
               </a:rPr>
-              <a:t>3–9 ms interruption, 0 samples lost · failover ≈ 0.3 s</a:t>
+              <a:t>3–11 ms interruption, 0 samples lost · failover ≈ 0.3 s</a:t>
             </a:r>
             <a:endParaRPr lang="en-US" sz="1400" dirty="0"/>
           </a:p>
@@ -5667,7 +5667,7 @@
                   <a:schemeClr val="accent2"/>
                 </a:solidFill>
               </a:rPr>
-              <a:t>shift report in 16 tool calls, validated · 9/9 checks</a:t>
+              <a:t>shift report in 15 tool calls, validated · 9/9 checks</a:t>
             </a:r>
             <a:endParaRPr lang="en-US" sz="1400" dirty="0"/>
           </a:p>
@@ -7181,7 +7181,7 @@
                             <a:schemeClr val="tx1"/>
                           </a:solidFill>
                         </a:rPr>
-                        <a:t>SDT flexContainers + SAREF; CSE handover (3–9 ms, 0 lost); FL through oneM2M (2 s error 0.60 → 0.49 m); safety agent over 4 MCP servers</a:t>
+                        <a:t>SDT flexContainers + SAREF; CSE handover (3–11 ms, 0 lost); FL through oneM2M (2 s error 0.60 → 0.49 m); safety agent over 4 MCP servers</a:t>
                       </a:r>
                       <a:endParaRPr lang="en-US" sz="1200" dirty="0"/>
                     </a:p>
@@ -9474,7 +9474,7 @@
                   <a:schemeClr val="tx1"/>
                 </a:solidFill>
               </a:rPr>
-              <a:t>Working end to end on Mobius and ACME. Already built: SDT flexContainer data model with SAREF semantics, CSE handover between zone MN-CSEs (3–9 ms interruption), federated learning through oneM2M, an AI safety agent over MCP. Collisions 100 → 4 in simulation.</a:t>
+              <a:t>Working end to end on Mobius and ACME. Already built: SDT flexContainer data model with SAREF semantics, CSE handover between zone MN-CSEs (3–11 ms interruption), federated learning through oneM2M, an AI safety agent over MCP. Collisions 100 → 4 in simulation.</a:t>
             </a:r>
             <a:endParaRPr lang="en-US" sz="1500" dirty="0"/>
           </a:p>
@@ -11888,7 +11888,7 @@
                           <a:ea typeface="Calibri" pitchFamily="34" charset="-122"/>
                           <a:cs typeface="Calibri" pitchFamily="34" charset="-120"/>
                         </a:rPr>
-                        <a:t>CSE handover between zone MN-CSEs (3–9 ms, 0 lost), active-standby MEC app (0.73 s), D2D fallback</a:t>
+                        <a:t>CSE handover between zone MN-CSEs (3–11 ms, 0 lost), active-standby MEC app (0.73 s), D2D fallback</a:t>
                       </a:r>
                       <a:endParaRPr lang="en-US" sz="1400" dirty="0">
                         <a:latin typeface="Calibri" charset="0"/>

--- a/docs/submissions/EdgeGuard_Interim_Report.pptx
+++ b/docs/submissions/EdgeGuard_Interim_Report.pptx
@@ -21,9 +21,11 @@
     <p:sldId id="269" r:id="rId15"/>
     <p:sldId id="270" r:id="rId16"/>
     <p:sldId id="271" r:id="rId17"/>
+    <p:sldId id="272" r:id="rId18"/>
+    <p:sldId id="273" r:id="rId19"/>
   </p:sldIdLst>
   <p:notesMasterIdLst>
-    <p:notesMasterId r:id="rId18"/>
+    <p:notesMasterId r:id="rId20"/>
   </p:notesMasterIdLst>
   <p:sldSz cx="12192000" cy="6858000"/>
   <p:notesSz cx="6858000" cy="12192000"/>
@@ -122,36 +124,38 @@
   <p:extLst>
     <p:ext uri="{521415D9-36F7-43E2-AB2F-B90AF26B5E84}">
       <p14:sectionLst xmlns:p14="http://schemas.microsoft.com/office/powerpoint/2010/main">
-        <p14:section name="Introduction" id="{b4ce6049-7414-5596-a60e-1745c0466690}">
+        <p14:section name="Introduction" id="{2b70b6ab-6800-af14-522e-8ae59b2de156}">
           <p14:sldIdLst>
             <p14:sldId id="256"/>
             <p14:sldId id="257"/>
           </p14:sldIdLst>
         </p14:section>
-        <p14:section name="Use case" id="{e0795979-85a0-fae5-78f4-8e977187a0a2}">
+        <p14:section name="Use case" id="{a7b35ba3-32c3-f3d0-4122-73c20cdec208}">
           <p14:sldIdLst>
             <p14:sldId id="258"/>
             <p14:sldId id="259"/>
             <p14:sldId id="260"/>
           </p14:sldIdLst>
         </p14:section>
-        <p14:section name="Architecture" id="{feea18c1-b1dc-cb46-1f04-f7b679b202a5}">
+        <p14:section name="Architecture" id="{b5bd2da9-d697-d5f6-31d7-e9f566840e7e}">
           <p14:sldIdLst>
             <p14:sldId id="261"/>
             <p14:sldId id="262"/>
             <p14:sldId id="263"/>
             <p14:sldId id="264"/>
             <p14:sldId id="265"/>
+            <p14:sldId id="266"/>
+            <p14:sldId id="267"/>
           </p14:sldIdLst>
         </p14:section>
-        <p14:section name="Status and plan" id="{bb645876-4624-ca01-c31b-b11b317d56c8}">
+        <p14:section name="Status and plan" id="{32deb244-a910-1755-49ef-825c3370d96e}">
           <p14:sldIdLst>
-            <p14:sldId id="266"/>
-            <p14:sldId id="267"/>
             <p14:sldId id="268"/>
             <p14:sldId id="269"/>
             <p14:sldId id="270"/>
             <p14:sldId id="271"/>
+            <p14:sldId id="272"/>
+            <p14:sldId id="273"/>
           </p14:sldIdLst>
         </p14:section>
       </p14:sectionLst>
@@ -646,7 +650,7 @@
           <a:p>
             <a:r>
               <a:rPr lang="en-US" dirty="0"/>
-              <a:t>Six steps from a position to a confirmed cue, all through oneM2M resources and subscriptions. If the MEC app goes silent, devices degrade gracefully to local decisions.</a:t>
+              <a:t>How each TR-0077 clause 7 gap maps to a working EdgeGuard feature, with its CI evidence. EdgeGuard is deployment option C per zone with an IN-CSE in the cloud.</a:t>
             </a:r>
             <a:endParaRPr lang="en-US" dirty="0"/>
           </a:p>
@@ -734,7 +738,7 @@
           <a:p>
             <a:r>
               <a:rPr lang="en-US" dirty="0"/>
-              <a:t>What already works, with evidence. Numbers are from closed-loop simulation against our own first version.</a:t>
+              <a:t>The PoC's mobility slide, for a warehouse: the forklift drives across two zones; the MEC platform detects the zone change; the MEC-IPE writes it into oneM2M; the forklift's twin moves to zone B's MN-CSE. Signal strength of both cells comes from RNIS through the same IPE. Interactive version: docs/img/mobility_map.html.</a:t>
             </a:r>
             <a:endParaRPr lang="en-US" dirty="0"/>
           </a:p>
@@ -822,7 +826,7 @@
           <a:p>
             <a:r>
               <a:rPr lang="en-US" dirty="0"/>
-              <a:t>Four items from the original plan are already built and verified in CI: the SDT data model, CSE handover, federated learning and the AI safety agent.</a:t>
+              <a:t>Six steps from a position to a confirmed cue, all through oneM2M resources and subscriptions. If the MEC app goes silent, devices degrade gracefully to local decisions.</a:t>
             </a:r>
             <a:endParaRPr lang="en-US" dirty="0"/>
           </a:p>
@@ -910,7 +914,7 @@
           <a:p>
             <a:r>
               <a:rPr lang="en-US" dirty="0"/>
-              <a:t>Five milestones to the November 20 code freeze, ordered by rubric impact. Hardware, user study and communication work run in parallel from Nov 10.</a:t>
+              <a:t>What already works, with evidence. Numbers are from closed-loop simulation against our own first version.</a:t>
             </a:r>
             <a:endParaRPr lang="en-US" dirty="0"/>
           </a:p>
@@ -998,7 +1002,7 @@
           <a:p>
             <a:r>
               <a:rPr lang="en-US" dirty="0"/>
-              <a:t>Each milestone names its deliverables, the rubric criteria it targets, and an acceptance check we can demonstrate.</a:t>
+              <a:t>Everything in the original technical plan is already built and verified in CI on every commit, including all four TR-0077 clause 7 features.</a:t>
             </a:r>
             <a:endParaRPr lang="en-US" dirty="0"/>
           </a:p>
@@ -1086,7 +1090,7 @@
           <a:p>
             <a:r>
               <a:rPr lang="en-US" dirty="0"/>
-              <a:t>Main risks and how we contain them.</a:t>
+              <a:t>Five milestones to the November 20 code freeze, ordered by rubric impact. Hardware, user study and communication work run in parallel from Nov 10.</a:t>
             </a:r>
             <a:endParaRPr lang="en-US" dirty="0"/>
           </a:p>
@@ -1174,7 +1178,7 @@
           <a:p>
             <a:r>
               <a:rPr lang="en-US" dirty="0"/>
-              <a:t>Thank you.</a:t>
+              <a:t>Each milestone names its deliverables, the rubric criteria it targets, and an acceptance check we can demonstrate.</a:t>
             </a:r>
             <a:endParaRPr lang="en-US" dirty="0"/>
           </a:p>
@@ -1198,6 +1202,182 @@
             <a:fld id="{F7021451-1387-4CA6-816F-3879F97B5CBC}" type="slidenum">
               <a:rPr lang="en-US"/>
               <a:t>16</a:t>
+            </a:fld>
+            <a:endParaRPr lang="en-US"/>
+          </a:p>
+        </p:txBody>
+      </p:sp>
+    </p:spTree>
+    <p:extLst>
+      <p:ext uri="{BB962C8B-B14F-4D97-AF65-F5344CB8AC3E}">
+        <p14:creationId xmlns:p14="http://schemas.microsoft.com/office/powerpoint/2010/main" val="1024086991"/>
+      </p:ext>
+    </p:extLst>
+  </p:cSld>
+  <p:clrMapOvr>
+    <a:masterClrMapping/>
+  </p:clrMapOvr>
+</p:notes>
+</file>
+
+<file path=ppt/notesSlides/notesSlide17.xml><?xml version="1.0" encoding="utf-8"?>
+<p:notes xmlns:a="http://schemas.openxmlformats.org/drawingml/2006/main" xmlns:r="http://schemas.openxmlformats.org/officeDocument/2006/relationships" xmlns:p="http://schemas.openxmlformats.org/presentationml/2006/main">
+  <p:cSld>
+    <p:spTree>
+      <p:nvGrpSpPr>
+        <p:cNvPr id="1" name=""/>
+        <p:cNvGrpSpPr/>
+        <p:nvPr/>
+      </p:nvGrpSpPr>
+      <p:grpSpPr>
+        <a:xfrm>
+          <a:off x="0" y="0"/>
+          <a:ext cx="0" cy="0"/>
+          <a:chOff x="0" y="0"/>
+          <a:chExt cx="0" cy="0"/>
+        </a:xfrm>
+      </p:grpSpPr>
+      <p:sp>
+        <p:nvSpPr>
+          <p:cNvPr id="2" name="Slide Image Placeholder 1"/>
+          <p:cNvSpPr>
+            <a:spLocks noGrp="1" noRot="1" noChangeAspect="1"/>
+          </p:cNvSpPr>
+          <p:nvPr>
+            <p:ph type="sldImg"/>
+          </p:nvPr>
+        </p:nvSpPr>
+        <p:spPr/>
+      </p:sp>
+      <p:sp>
+        <p:nvSpPr>
+          <p:cNvPr id="3" name="Notes Placeholder 2"/>
+          <p:cNvSpPr>
+            <a:spLocks noGrp="1"/>
+          </p:cNvSpPr>
+          <p:nvPr>
+            <p:ph type="body" idx="1"/>
+          </p:nvPr>
+        </p:nvSpPr>
+        <p:spPr/>
+        <p:txBody>
+          <a:bodyPr/>
+          <a:lstStyle/>
+          <a:p>
+            <a:r>
+              <a:rPr lang="en-US" dirty="0"/>
+              <a:t>Main risks and how we contain them.</a:t>
+            </a:r>
+            <a:endParaRPr lang="en-US" dirty="0"/>
+          </a:p>
+        </p:txBody>
+      </p:sp>
+      <p:sp>
+        <p:nvSpPr>
+          <p:cNvPr id="4" name="Slide Number Placeholder 3"/>
+          <p:cNvSpPr>
+            <a:spLocks noGrp="1"/>
+          </p:cNvSpPr>
+          <p:nvPr>
+            <p:ph type="sldNum" sz="quarter" idx="10"/>
+          </p:nvPr>
+        </p:nvSpPr>
+        <p:spPr/>
+        <p:txBody>
+          <a:bodyPr/>
+          <a:lstStyle/>
+          <a:p>
+            <a:fld id="{F7021451-1387-4CA6-816F-3879F97B5CBC}" type="slidenum">
+              <a:rPr lang="en-US"/>
+              <a:t>17</a:t>
+            </a:fld>
+            <a:endParaRPr lang="en-US"/>
+          </a:p>
+        </p:txBody>
+      </p:sp>
+    </p:spTree>
+    <p:extLst>
+      <p:ext uri="{BB962C8B-B14F-4D97-AF65-F5344CB8AC3E}">
+        <p14:creationId xmlns:p14="http://schemas.microsoft.com/office/powerpoint/2010/main" val="1024086991"/>
+      </p:ext>
+    </p:extLst>
+  </p:cSld>
+  <p:clrMapOvr>
+    <a:masterClrMapping/>
+  </p:clrMapOvr>
+</p:notes>
+</file>
+
+<file path=ppt/notesSlides/notesSlide18.xml><?xml version="1.0" encoding="utf-8"?>
+<p:notes xmlns:a="http://schemas.openxmlformats.org/drawingml/2006/main" xmlns:r="http://schemas.openxmlformats.org/officeDocument/2006/relationships" xmlns:p="http://schemas.openxmlformats.org/presentationml/2006/main">
+  <p:cSld>
+    <p:spTree>
+      <p:nvGrpSpPr>
+        <p:cNvPr id="1" name=""/>
+        <p:cNvGrpSpPr/>
+        <p:nvPr/>
+      </p:nvGrpSpPr>
+      <p:grpSpPr>
+        <a:xfrm>
+          <a:off x="0" y="0"/>
+          <a:ext cx="0" cy="0"/>
+          <a:chOff x="0" y="0"/>
+          <a:chExt cx="0" cy="0"/>
+        </a:xfrm>
+      </p:grpSpPr>
+      <p:sp>
+        <p:nvSpPr>
+          <p:cNvPr id="2" name="Slide Image Placeholder 1"/>
+          <p:cNvSpPr>
+            <a:spLocks noGrp="1" noRot="1" noChangeAspect="1"/>
+          </p:cNvSpPr>
+          <p:nvPr>
+            <p:ph type="sldImg"/>
+          </p:nvPr>
+        </p:nvSpPr>
+        <p:spPr/>
+      </p:sp>
+      <p:sp>
+        <p:nvSpPr>
+          <p:cNvPr id="3" name="Notes Placeholder 2"/>
+          <p:cNvSpPr>
+            <a:spLocks noGrp="1"/>
+          </p:cNvSpPr>
+          <p:nvPr>
+            <p:ph type="body" idx="1"/>
+          </p:nvPr>
+        </p:nvSpPr>
+        <p:spPr/>
+        <p:txBody>
+          <a:bodyPr/>
+          <a:lstStyle/>
+          <a:p>
+            <a:r>
+              <a:rPr lang="en-US" dirty="0"/>
+              <a:t>Thank you.</a:t>
+            </a:r>
+            <a:endParaRPr lang="en-US" dirty="0"/>
+          </a:p>
+        </p:txBody>
+      </p:sp>
+      <p:sp>
+        <p:nvSpPr>
+          <p:cNvPr id="4" name="Slide Number Placeholder 3"/>
+          <p:cNvSpPr>
+            <a:spLocks noGrp="1"/>
+          </p:cNvSpPr>
+          <p:nvPr>
+            <p:ph type="sldNum" sz="quarter" idx="10"/>
+          </p:nvPr>
+        </p:nvSpPr>
+        <p:spPr/>
+        <p:txBody>
+          <a:bodyPr/>
+          <a:lstStyle/>
+          <a:p>
+            <a:fld id="{F7021451-1387-4CA6-816F-3879F97B5CBC}" type="slidenum">
+              <a:rPr lang="en-US"/>
+              <a:t>18</a:t>
             </a:fld>
             <a:endParaRPr lang="en-US"/>
           </a:p>
@@ -2943,47 +3123,1236 @@
                   <a:schemeClr val="tx2"/>
                 </a:solidFill>
               </a:rPr>
-              <a:t>End-to-end flow: from a position to a cue</a:t>
+              <a:t>TR-0077 clause 7 in EdgeGuard (ESTIMED option C)</a:t>
             </a:r>
             <a:endParaRPr lang="en-US" sz="3000" dirty="0"/>
           </a:p>
         </p:txBody>
       </p:sp>
-      <p:sp>
-        <p:nvSpPr>
-          <p:cNvPr id="3" name="step dot 1"/>
-          <p:cNvSpPr/>
-          <p:nvPr/>
-        </p:nvSpPr>
-        <p:spPr>
-          <a:xfrm>
-            <a:off x="1143000" y="1417320"/>
-            <a:ext cx="548640" cy="548640"/>
-          </a:xfrm>
-          <a:prstGeom prst="ellipse">
-            <a:avLst/>
-          </a:prstGeom>
-          <a:solidFill>
-            <a:schemeClr val="tx2"/>
-          </a:solidFill>
-          <a:ln w="12700">
-            <a:solidFill>
-              <a:schemeClr val="tx2"/>
-            </a:solidFill>
-            <a:prstDash val="solid"/>
-          </a:ln>
-        </p:spPr>
-      </p:sp>
-      <p:sp>
-        <p:nvSpPr>
-          <p:cNvPr id="4" name="step num 1"/>
+      <p:graphicFrame>
+        <p:nvGraphicFramePr>
+          <p:cNvPr id="11" name="tr0077 table"/>
+          <p:cNvGraphicFramePr>
+            <a:graphicFrameLocks noGrp="1"/>
+          </p:cNvGraphicFramePr>
+          <p:nvPr>
+            <p:extLst>
+              <p:ext uri="{D42A27DB-BD31-4B8C-83A1-F6EECF244321}">
+                <p14:modId xmlns:p14="http://schemas.microsoft.com/office/powerpoint/2010/main" val="1579011935"/>
+              </p:ext>
+            </p:extLst>
+          </p:nvPr>
+        </p:nvGraphicFramePr>
+        <p:xfrm>
+          <a:off x="548640" y="1234440"/>
+          <a:ext cx="11064240" cy="914400"/>
+        </p:xfrm>
+        <a:graphic>
+          <a:graphicData uri="http://schemas.openxmlformats.org/drawingml/2006/table">
+            <a:tbl>
+              <a:tblPr/>
+              <a:tblGrid>
+                <a:gridCol w="1554480"/>
+                <a:gridCol w="3291840"/>
+                <a:gridCol w="4114800"/>
+                <a:gridCol w="2103120"/>
+              </a:tblGrid>
+              <a:tr h="0">
+                <a:tc>
+                  <a:txBody>
+                    <a:bodyPr/>
+                    <a:lstStyle/>
+                    <a:p>
+                      <a:pPr indent="0" marL="0">
+                        <a:buNone/>
+                      </a:pPr>
+                      <a:r>
+                        <a:rPr lang="en-US" sz="1200" b="1" dirty="0">
+                          <a:solidFill>
+                            <a:schemeClr val="bg1"/>
+                          </a:solidFill>
+                        </a:rPr>
+                        <a:t>Clause</a:t>
+                      </a:r>
+                      <a:endParaRPr lang="en-US" sz="1200" dirty="0"/>
+                    </a:p>
+                  </a:txBody>
+                  <a:tcPr marL="91440" marR="91440" marT="54864" marB="54864" anchor="ctr">
+                    <a:lnL w="9525" cap="flat" cmpd="sng" algn="ctr">
+                      <a:solidFill>
+                        <a:srgbClr val="D5DAE0"/>
+                      </a:solidFill>
+                      <a:prstDash val="solid"/>
+                      <a:round/>
+                      <a:headEnd type="none" w="med" len="med"/>
+                      <a:tailEnd type="none" w="med" len="med"/>
+                    </a:lnL>
+                    <a:lnR w="9525" cap="flat" cmpd="sng" algn="ctr">
+                      <a:solidFill>
+                        <a:srgbClr val="D5DAE0"/>
+                      </a:solidFill>
+                      <a:prstDash val="solid"/>
+                      <a:round/>
+                      <a:headEnd type="none" w="med" len="med"/>
+                      <a:tailEnd type="none" w="med" len="med"/>
+                    </a:lnR>
+                    <a:lnT w="9525" cap="flat" cmpd="sng" algn="ctr">
+                      <a:solidFill>
+                        <a:srgbClr val="D5DAE0"/>
+                      </a:solidFill>
+                      <a:prstDash val="solid"/>
+                      <a:round/>
+                      <a:headEnd type="none" w="med" len="med"/>
+                      <a:tailEnd type="none" w="med" len="med"/>
+                    </a:lnT>
+                    <a:lnB w="9525" cap="flat" cmpd="sng" algn="ctr">
+                      <a:solidFill>
+                        <a:srgbClr val="D5DAE0"/>
+                      </a:solidFill>
+                      <a:prstDash val="solid"/>
+                      <a:round/>
+                      <a:headEnd type="none" w="med" len="med"/>
+                      <a:tailEnd type="none" w="med" len="med"/>
+                    </a:lnB>
+                    <a:solidFill>
+                      <a:schemeClr val="tx2"/>
+                    </a:solidFill>
+                  </a:tcPr>
+                </a:tc>
+                <a:tc>
+                  <a:txBody>
+                    <a:bodyPr/>
+                    <a:lstStyle/>
+                    <a:p>
+                      <a:pPr indent="0" marL="0">
+                        <a:buNone/>
+                      </a:pPr>
+                      <a:r>
+                        <a:rPr lang="en-US" sz="1200" b="1" dirty="0">
+                          <a:solidFill>
+                            <a:schemeClr val="bg1"/>
+                          </a:solidFill>
+                        </a:rPr>
+                        <a:t>ESTIMED feature</a:t>
+                      </a:r>
+                      <a:endParaRPr lang="en-US" sz="1200" dirty="0"/>
+                    </a:p>
+                  </a:txBody>
+                  <a:tcPr marL="91440" marR="91440" marT="54864" marB="54864" anchor="ctr">
+                    <a:lnL w="9525" cap="flat" cmpd="sng" algn="ctr">
+                      <a:solidFill>
+                        <a:srgbClr val="D5DAE0"/>
+                      </a:solidFill>
+                      <a:prstDash val="solid"/>
+                      <a:round/>
+                      <a:headEnd type="none" w="med" len="med"/>
+                      <a:tailEnd type="none" w="med" len="med"/>
+                    </a:lnL>
+                    <a:lnR w="9525" cap="flat" cmpd="sng" algn="ctr">
+                      <a:solidFill>
+                        <a:srgbClr val="D5DAE0"/>
+                      </a:solidFill>
+                      <a:prstDash val="solid"/>
+                      <a:round/>
+                      <a:headEnd type="none" w="med" len="med"/>
+                      <a:tailEnd type="none" w="med" len="med"/>
+                    </a:lnR>
+                    <a:lnT w="9525" cap="flat" cmpd="sng" algn="ctr">
+                      <a:solidFill>
+                        <a:srgbClr val="D5DAE0"/>
+                      </a:solidFill>
+                      <a:prstDash val="solid"/>
+                      <a:round/>
+                      <a:headEnd type="none" w="med" len="med"/>
+                      <a:tailEnd type="none" w="med" len="med"/>
+                    </a:lnT>
+                    <a:lnB w="9525" cap="flat" cmpd="sng" algn="ctr">
+                      <a:solidFill>
+                        <a:srgbClr val="D5DAE0"/>
+                      </a:solidFill>
+                      <a:prstDash val="solid"/>
+                      <a:round/>
+                      <a:headEnd type="none" w="med" len="med"/>
+                      <a:tailEnd type="none" w="med" len="med"/>
+                    </a:lnB>
+                    <a:solidFill>
+                      <a:schemeClr val="tx2"/>
+                    </a:solidFill>
+                  </a:tcPr>
+                </a:tc>
+                <a:tc>
+                  <a:txBody>
+                    <a:bodyPr/>
+                    <a:lstStyle/>
+                    <a:p>
+                      <a:pPr indent="0" marL="0">
+                        <a:buNone/>
+                      </a:pPr>
+                      <a:r>
+                        <a:rPr lang="en-US" sz="1200" b="1" dirty="0">
+                          <a:solidFill>
+                            <a:schemeClr val="bg1"/>
+                          </a:solidFill>
+                        </a:rPr>
+                        <a:t>EdgeGuard</a:t>
+                      </a:r>
+                      <a:endParaRPr lang="en-US" sz="1200" dirty="0"/>
+                    </a:p>
+                  </a:txBody>
+                  <a:tcPr marL="91440" marR="91440" marT="54864" marB="54864" anchor="ctr">
+                    <a:lnL w="9525" cap="flat" cmpd="sng" algn="ctr">
+                      <a:solidFill>
+                        <a:srgbClr val="D5DAE0"/>
+                      </a:solidFill>
+                      <a:prstDash val="solid"/>
+                      <a:round/>
+                      <a:headEnd type="none" w="med" len="med"/>
+                      <a:tailEnd type="none" w="med" len="med"/>
+                    </a:lnL>
+                    <a:lnR w="9525" cap="flat" cmpd="sng" algn="ctr">
+                      <a:solidFill>
+                        <a:srgbClr val="D5DAE0"/>
+                      </a:solidFill>
+                      <a:prstDash val="solid"/>
+                      <a:round/>
+                      <a:headEnd type="none" w="med" len="med"/>
+                      <a:tailEnd type="none" w="med" len="med"/>
+                    </a:lnR>
+                    <a:lnT w="9525" cap="flat" cmpd="sng" algn="ctr">
+                      <a:solidFill>
+                        <a:srgbClr val="D5DAE0"/>
+                      </a:solidFill>
+                      <a:prstDash val="solid"/>
+                      <a:round/>
+                      <a:headEnd type="none" w="med" len="med"/>
+                      <a:tailEnd type="none" w="med" len="med"/>
+                    </a:lnT>
+                    <a:lnB w="9525" cap="flat" cmpd="sng" algn="ctr">
+                      <a:solidFill>
+                        <a:srgbClr val="D5DAE0"/>
+                      </a:solidFill>
+                      <a:prstDash val="solid"/>
+                      <a:round/>
+                      <a:headEnd type="none" w="med" len="med"/>
+                      <a:tailEnd type="none" w="med" len="med"/>
+                    </a:lnB>
+                    <a:solidFill>
+                      <a:schemeClr val="tx2"/>
+                    </a:solidFill>
+                  </a:tcPr>
+                </a:tc>
+                <a:tc>
+                  <a:txBody>
+                    <a:bodyPr/>
+                    <a:lstStyle/>
+                    <a:p>
+                      <a:pPr indent="0" marL="0">
+                        <a:buNone/>
+                      </a:pPr>
+                      <a:r>
+                        <a:rPr lang="en-US" sz="1200" b="1" dirty="0">
+                          <a:solidFill>
+                            <a:schemeClr val="bg1"/>
+                          </a:solidFill>
+                        </a:rPr>
+                        <a:t>CI evidence</a:t>
+                      </a:r>
+                      <a:endParaRPr lang="en-US" sz="1200" dirty="0"/>
+                    </a:p>
+                  </a:txBody>
+                  <a:tcPr marL="91440" marR="91440" marT="54864" marB="54864" anchor="ctr">
+                    <a:lnL w="9525" cap="flat" cmpd="sng" algn="ctr">
+                      <a:solidFill>
+                        <a:srgbClr val="D5DAE0"/>
+                      </a:solidFill>
+                      <a:prstDash val="solid"/>
+                      <a:round/>
+                      <a:headEnd type="none" w="med" len="med"/>
+                      <a:tailEnd type="none" w="med" len="med"/>
+                    </a:lnL>
+                    <a:lnR w="9525" cap="flat" cmpd="sng" algn="ctr">
+                      <a:solidFill>
+                        <a:srgbClr val="D5DAE0"/>
+                      </a:solidFill>
+                      <a:prstDash val="solid"/>
+                      <a:round/>
+                      <a:headEnd type="none" w="med" len="med"/>
+                      <a:tailEnd type="none" w="med" len="med"/>
+                    </a:lnR>
+                    <a:lnT w="9525" cap="flat" cmpd="sng" algn="ctr">
+                      <a:solidFill>
+                        <a:srgbClr val="D5DAE0"/>
+                      </a:solidFill>
+                      <a:prstDash val="solid"/>
+                      <a:round/>
+                      <a:headEnd type="none" w="med" len="med"/>
+                      <a:tailEnd type="none" w="med" len="med"/>
+                    </a:lnT>
+                    <a:lnB w="9525" cap="flat" cmpd="sng" algn="ctr">
+                      <a:solidFill>
+                        <a:srgbClr val="D5DAE0"/>
+                      </a:solidFill>
+                      <a:prstDash val="solid"/>
+                      <a:round/>
+                      <a:headEnd type="none" w="med" len="med"/>
+                      <a:tailEnd type="none" w="med" len="med"/>
+                    </a:lnB>
+                    <a:solidFill>
+                      <a:schemeClr val="tx2"/>
+                    </a:solidFill>
+                  </a:tcPr>
+                </a:tc>
+              </a:tr>
+              <a:tr h="0">
+                <a:tc>
+                  <a:txBody>
+                    <a:bodyPr/>
+                    <a:lstStyle/>
+                    <a:p>
+                      <a:pPr indent="0" marL="0">
+                        <a:buNone/>
+                      </a:pPr>
+                      <a:r>
+                        <a:rPr lang="en-US" sz="1200" dirty="0">
+                          <a:solidFill>
+                            <a:schemeClr val="tx1"/>
+                          </a:solidFill>
+                        </a:rPr>
+                        <a:t>7.1 Interworking</a:t>
+                      </a:r>
+                      <a:endParaRPr lang="en-US" sz="1200" dirty="0"/>
+                    </a:p>
+                  </a:txBody>
+                  <a:tcPr marL="91440" marR="91440" marT="54864" marB="54864" anchor="ctr">
+                    <a:lnL w="9525" cap="flat" cmpd="sng" algn="ctr">
+                      <a:solidFill>
+                        <a:srgbClr val="D5DAE0"/>
+                      </a:solidFill>
+                      <a:prstDash val="solid"/>
+                      <a:round/>
+                      <a:headEnd type="none" w="med" len="med"/>
+                      <a:tailEnd type="none" w="med" len="med"/>
+                    </a:lnL>
+                    <a:lnR w="9525" cap="flat" cmpd="sng" algn="ctr">
+                      <a:solidFill>
+                        <a:srgbClr val="D5DAE0"/>
+                      </a:solidFill>
+                      <a:prstDash val="solid"/>
+                      <a:round/>
+                      <a:headEnd type="none" w="med" len="med"/>
+                      <a:tailEnd type="none" w="med" len="med"/>
+                    </a:lnR>
+                    <a:lnT w="9525" cap="flat" cmpd="sng" algn="ctr">
+                      <a:solidFill>
+                        <a:srgbClr val="D5DAE0"/>
+                      </a:solidFill>
+                      <a:prstDash val="solid"/>
+                      <a:round/>
+                      <a:headEnd type="none" w="med" len="med"/>
+                      <a:tailEnd type="none" w="med" len="med"/>
+                    </a:lnT>
+                    <a:lnB w="9525" cap="flat" cmpd="sng" algn="ctr">
+                      <a:solidFill>
+                        <a:srgbClr val="D5DAE0"/>
+                      </a:solidFill>
+                      <a:prstDash val="solid"/>
+                      <a:round/>
+                      <a:headEnd type="none" w="med" len="med"/>
+                      <a:tailEnd type="none" w="med" len="med"/>
+                    </a:lnB>
+                  </a:tcPr>
+                </a:tc>
+                <a:tc>
+                  <a:txBody>
+                    <a:bodyPr/>
+                    <a:lstStyle/>
+                    <a:p>
+                      <a:pPr indent="0" marL="0">
+                        <a:buNone/>
+                      </a:pPr>
+                      <a:r>
+                        <a:rPr lang="en-US" sz="1200" dirty="0">
+                          <a:solidFill>
+                            <a:schemeClr val="tx1"/>
+                          </a:solidFill>
+                        </a:rPr>
+                        <a:t>MEC services in oneM2M, SDT models for MEC APIs; orchestration discover → select → deploy → register → provision</a:t>
+                      </a:r>
+                      <a:endParaRPr lang="en-US" sz="1200" dirty="0"/>
+                    </a:p>
+                  </a:txBody>
+                  <a:tcPr marL="91440" marR="91440" marT="54864" marB="54864" anchor="ctr">
+                    <a:lnL w="9525" cap="flat" cmpd="sng" algn="ctr">
+                      <a:solidFill>
+                        <a:srgbClr val="D5DAE0"/>
+                      </a:solidFill>
+                      <a:prstDash val="solid"/>
+                      <a:round/>
+                      <a:headEnd type="none" w="med" len="med"/>
+                      <a:tailEnd type="none" w="med" len="med"/>
+                    </a:lnL>
+                    <a:lnR w="9525" cap="flat" cmpd="sng" algn="ctr">
+                      <a:solidFill>
+                        <a:srgbClr val="D5DAE0"/>
+                      </a:solidFill>
+                      <a:prstDash val="solid"/>
+                      <a:round/>
+                      <a:headEnd type="none" w="med" len="med"/>
+                      <a:tailEnd type="none" w="med" len="med"/>
+                    </a:lnR>
+                    <a:lnT w="9525" cap="flat" cmpd="sng" algn="ctr">
+                      <a:solidFill>
+                        <a:srgbClr val="D5DAE0"/>
+                      </a:solidFill>
+                      <a:prstDash val="solid"/>
+                      <a:round/>
+                      <a:headEnd type="none" w="med" len="med"/>
+                      <a:tailEnd type="none" w="med" len="med"/>
+                    </a:lnT>
+                    <a:lnB w="9525" cap="flat" cmpd="sng" algn="ctr">
+                      <a:solidFill>
+                        <a:srgbClr val="D5DAE0"/>
+                      </a:solidFill>
+                      <a:prstDash val="solid"/>
+                      <a:round/>
+                      <a:headEnd type="none" w="med" len="med"/>
+                      <a:tailEnd type="none" w="med" len="med"/>
+                    </a:lnB>
+                  </a:tcPr>
+                </a:tc>
+                <a:tc>
+                  <a:txBody>
+                    <a:bodyPr/>
+                    <a:lstStyle/>
+                    <a:p>
+                      <a:pPr indent="0" marL="0">
+                        <a:buNone/>
+                      </a:pPr>
+                      <a:r>
+                        <a:rPr lang="en-US" sz="1200" dirty="0">
+                          <a:solidFill>
+                            <a:schemeClr val="tx1"/>
+                          </a:solidFill>
+                        </a:rPr>
+                        <a:t>Event-driven, bidirectional MEC-IPE; MEC SDT classes; orchestrator driven by one intent resource</a:t>
+                      </a:r>
+                      <a:endParaRPr lang="en-US" sz="1200" dirty="0"/>
+                    </a:p>
+                  </a:txBody>
+                  <a:tcPr marL="91440" marR="91440" marT="54864" marB="54864" anchor="ctr">
+                    <a:lnL w="9525" cap="flat" cmpd="sng" algn="ctr">
+                      <a:solidFill>
+                        <a:srgbClr val="D5DAE0"/>
+                      </a:solidFill>
+                      <a:prstDash val="solid"/>
+                      <a:round/>
+                      <a:headEnd type="none" w="med" len="med"/>
+                      <a:tailEnd type="none" w="med" len="med"/>
+                    </a:lnL>
+                    <a:lnR w="9525" cap="flat" cmpd="sng" algn="ctr">
+                      <a:solidFill>
+                        <a:srgbClr val="D5DAE0"/>
+                      </a:solidFill>
+                      <a:prstDash val="solid"/>
+                      <a:round/>
+                      <a:headEnd type="none" w="med" len="med"/>
+                      <a:tailEnd type="none" w="med" len="med"/>
+                    </a:lnR>
+                    <a:lnT w="9525" cap="flat" cmpd="sng" algn="ctr">
+                      <a:solidFill>
+                        <a:srgbClr val="D5DAE0"/>
+                      </a:solidFill>
+                      <a:prstDash val="solid"/>
+                      <a:round/>
+                      <a:headEnd type="none" w="med" len="med"/>
+                      <a:tailEnd type="none" w="med" len="med"/>
+                    </a:lnT>
+                    <a:lnB w="9525" cap="flat" cmpd="sng" algn="ctr">
+                      <a:solidFill>
+                        <a:srgbClr val="D5DAE0"/>
+                      </a:solidFill>
+                      <a:prstDash val="solid"/>
+                      <a:round/>
+                      <a:headEnd type="none" w="med" len="med"/>
+                      <a:tailEnd type="none" w="med" len="med"/>
+                    </a:lnB>
+                  </a:tcPr>
+                </a:tc>
+                <a:tc>
+                  <a:txBody>
+                    <a:bodyPr/>
+                    <a:lstStyle/>
+                    <a:p>
+                      <a:pPr indent="0" marL="0">
+                        <a:buNone/>
+                      </a:pPr>
+                      <a:r>
+                        <a:rPr lang="en-US" sz="1200" dirty="0">
+                          <a:solidFill>
+                            <a:schemeClr val="tx1"/>
+                          </a:solidFill>
+                        </a:rPr>
+                        <a:t>mobility 10/10 · orchestration 11/11</a:t>
+                      </a:r>
+                      <a:endParaRPr lang="en-US" sz="1200" dirty="0"/>
+                    </a:p>
+                  </a:txBody>
+                  <a:tcPr marL="91440" marR="91440" marT="54864" marB="54864" anchor="ctr">
+                    <a:lnL w="9525" cap="flat" cmpd="sng" algn="ctr">
+                      <a:solidFill>
+                        <a:srgbClr val="D5DAE0"/>
+                      </a:solidFill>
+                      <a:prstDash val="solid"/>
+                      <a:round/>
+                      <a:headEnd type="none" w="med" len="med"/>
+                      <a:tailEnd type="none" w="med" len="med"/>
+                    </a:lnL>
+                    <a:lnR w="9525" cap="flat" cmpd="sng" algn="ctr">
+                      <a:solidFill>
+                        <a:srgbClr val="D5DAE0"/>
+                      </a:solidFill>
+                      <a:prstDash val="solid"/>
+                      <a:round/>
+                      <a:headEnd type="none" w="med" len="med"/>
+                      <a:tailEnd type="none" w="med" len="med"/>
+                    </a:lnR>
+                    <a:lnT w="9525" cap="flat" cmpd="sng" algn="ctr">
+                      <a:solidFill>
+                        <a:srgbClr val="D5DAE0"/>
+                      </a:solidFill>
+                      <a:prstDash val="solid"/>
+                      <a:round/>
+                      <a:headEnd type="none" w="med" len="med"/>
+                      <a:tailEnd type="none" w="med" len="med"/>
+                    </a:lnT>
+                    <a:lnB w="9525" cap="flat" cmpd="sng" algn="ctr">
+                      <a:solidFill>
+                        <a:srgbClr val="D5DAE0"/>
+                      </a:solidFill>
+                      <a:prstDash val="solid"/>
+                      <a:round/>
+                      <a:headEnd type="none" w="med" len="med"/>
+                      <a:tailEnd type="none" w="med" len="med"/>
+                    </a:lnB>
+                  </a:tcPr>
+                </a:tc>
+              </a:tr>
+              <a:tr h="0">
+                <a:tc>
+                  <a:txBody>
+                    <a:bodyPr/>
+                    <a:lstStyle/>
+                    <a:p>
+                      <a:pPr indent="0" marL="0">
+                        <a:buNone/>
+                      </a:pPr>
+                      <a:r>
+                        <a:rPr lang="en-US" sz="1200" dirty="0">
+                          <a:solidFill>
+                            <a:schemeClr val="tx1"/>
+                          </a:solidFill>
+                        </a:rPr>
+                        <a:t>7.2 Handover</a:t>
+                      </a:r>
+                      <a:endParaRPr lang="en-US" sz="1200" dirty="0"/>
+                    </a:p>
+                  </a:txBody>
+                  <a:tcPr marL="91440" marR="91440" marT="54864" marB="54864" anchor="ctr">
+                    <a:lnL w="9525" cap="flat" cmpd="sng" algn="ctr">
+                      <a:solidFill>
+                        <a:srgbClr val="D5DAE0"/>
+                      </a:solidFill>
+                      <a:prstDash val="solid"/>
+                      <a:round/>
+                      <a:headEnd type="none" w="med" len="med"/>
+                      <a:tailEnd type="none" w="med" len="med"/>
+                    </a:lnL>
+                    <a:lnR w="9525" cap="flat" cmpd="sng" algn="ctr">
+                      <a:solidFill>
+                        <a:srgbClr val="D5DAE0"/>
+                      </a:solidFill>
+                      <a:prstDash val="solid"/>
+                      <a:round/>
+                      <a:headEnd type="none" w="med" len="med"/>
+                      <a:tailEnd type="none" w="med" len="med"/>
+                    </a:lnR>
+                    <a:lnT w="9525" cap="flat" cmpd="sng" algn="ctr">
+                      <a:solidFill>
+                        <a:srgbClr val="D5DAE0"/>
+                      </a:solidFill>
+                      <a:prstDash val="solid"/>
+                      <a:round/>
+                      <a:headEnd type="none" w="med" len="med"/>
+                      <a:tailEnd type="none" w="med" len="med"/>
+                    </a:lnT>
+                    <a:lnB w="9525" cap="flat" cmpd="sng" algn="ctr">
+                      <a:solidFill>
+                        <a:srgbClr val="D5DAE0"/>
+                      </a:solidFill>
+                      <a:prstDash val="solid"/>
+                      <a:round/>
+                      <a:headEnd type="none" w="med" len="med"/>
+                      <a:tailEnd type="none" w="med" len="med"/>
+                    </a:lnB>
+                  </a:tcPr>
+                </a:tc>
+                <a:tc>
+                  <a:txBody>
+                    <a:bodyPr/>
+                    <a:lstStyle/>
+                    <a:p>
+                      <a:pPr indent="0" marL="0">
+                        <a:buNone/>
+                      </a:pPr>
+                      <a:r>
+                        <a:rPr lang="en-US" sz="1200" dirty="0">
+                          <a:solidFill>
+                            <a:schemeClr val="tx1"/>
+                          </a:solidFill>
+                        </a:rPr>
+                        <a:t>Continuity bundle; trigger by the MEC network / radio system</a:t>
+                      </a:r>
+                      <a:endParaRPr lang="en-US" sz="1200" dirty="0"/>
+                    </a:p>
+                  </a:txBody>
+                  <a:tcPr marL="91440" marR="91440" marT="54864" marB="54864" anchor="ctr">
+                    <a:lnL w="9525" cap="flat" cmpd="sng" algn="ctr">
+                      <a:solidFill>
+                        <a:srgbClr val="D5DAE0"/>
+                      </a:solidFill>
+                      <a:prstDash val="solid"/>
+                      <a:round/>
+                      <a:headEnd type="none" w="med" len="med"/>
+                      <a:tailEnd type="none" w="med" len="med"/>
+                    </a:lnL>
+                    <a:lnR w="9525" cap="flat" cmpd="sng" algn="ctr">
+                      <a:solidFill>
+                        <a:srgbClr val="D5DAE0"/>
+                      </a:solidFill>
+                      <a:prstDash val="solid"/>
+                      <a:round/>
+                      <a:headEnd type="none" w="med" len="med"/>
+                      <a:tailEnd type="none" w="med" len="med"/>
+                    </a:lnR>
+                    <a:lnT w="9525" cap="flat" cmpd="sng" algn="ctr">
+                      <a:solidFill>
+                        <a:srgbClr val="D5DAE0"/>
+                      </a:solidFill>
+                      <a:prstDash val="solid"/>
+                      <a:round/>
+                      <a:headEnd type="none" w="med" len="med"/>
+                      <a:tailEnd type="none" w="med" len="med"/>
+                    </a:lnT>
+                    <a:lnB w="9525" cap="flat" cmpd="sng" algn="ctr">
+                      <a:solidFill>
+                        <a:srgbClr val="D5DAE0"/>
+                      </a:solidFill>
+                      <a:prstDash val="solid"/>
+                      <a:round/>
+                      <a:headEnd type="none" w="med" len="med"/>
+                      <a:tailEnd type="none" w="med" len="med"/>
+                    </a:lnB>
+                  </a:tcPr>
+                </a:tc>
+                <a:tc>
+                  <a:txBody>
+                    <a:bodyPr/>
+                    <a:lstStyle/>
+                    <a:p>
+                      <a:pPr indent="0" marL="0">
+                        <a:buNone/>
+                      </a:pPr>
+                      <a:r>
+                        <a:rPr lang="en-US" sz="1200" dirty="0">
+                          <a:solidFill>
+                            <a:schemeClr val="tx1"/>
+                          </a:solidFill>
+                        </a:rPr>
+                        <a:t>Make-before-break twin migration (state, ACP, subscriptions, announcement, home record); triggers: location, availability, MEC zone event</a:t>
+                      </a:r>
+                      <a:endParaRPr lang="en-US" sz="1200" dirty="0"/>
+                    </a:p>
+                  </a:txBody>
+                  <a:tcPr marL="91440" marR="91440" marT="54864" marB="54864" anchor="ctr">
+                    <a:lnL w="9525" cap="flat" cmpd="sng" algn="ctr">
+                      <a:solidFill>
+                        <a:srgbClr val="D5DAE0"/>
+                      </a:solidFill>
+                      <a:prstDash val="solid"/>
+                      <a:round/>
+                      <a:headEnd type="none" w="med" len="med"/>
+                      <a:tailEnd type="none" w="med" len="med"/>
+                    </a:lnL>
+                    <a:lnR w="9525" cap="flat" cmpd="sng" algn="ctr">
+                      <a:solidFill>
+                        <a:srgbClr val="D5DAE0"/>
+                      </a:solidFill>
+                      <a:prstDash val="solid"/>
+                      <a:round/>
+                      <a:headEnd type="none" w="med" len="med"/>
+                      <a:tailEnd type="none" w="med" len="med"/>
+                    </a:lnR>
+                    <a:lnT w="9525" cap="flat" cmpd="sng" algn="ctr">
+                      <a:solidFill>
+                        <a:srgbClr val="D5DAE0"/>
+                      </a:solidFill>
+                      <a:prstDash val="solid"/>
+                      <a:round/>
+                      <a:headEnd type="none" w="med" len="med"/>
+                      <a:tailEnd type="none" w="med" len="med"/>
+                    </a:lnT>
+                    <a:lnB w="9525" cap="flat" cmpd="sng" algn="ctr">
+                      <a:solidFill>
+                        <a:srgbClr val="D5DAE0"/>
+                      </a:solidFill>
+                      <a:prstDash val="solid"/>
+                      <a:round/>
+                      <a:headEnd type="none" w="med" len="med"/>
+                      <a:tailEnd type="none" w="med" len="med"/>
+                    </a:lnB>
+                  </a:tcPr>
+                </a:tc>
+                <a:tc>
+                  <a:txBody>
+                    <a:bodyPr/>
+                    <a:lstStyle/>
+                    <a:p>
+                      <a:pPr indent="0" marL="0">
+                        <a:buNone/>
+                      </a:pPr>
+                      <a:r>
+                        <a:rPr lang="en-US" sz="1200" dirty="0">
+                          <a:solidFill>
+                            <a:schemeClr val="tx1"/>
+                          </a:solidFill>
+                        </a:rPr>
+                        <a:t>handover 10/10 + 8/8 · 1.5–11 ms, 0 lost</a:t>
+                      </a:r>
+                      <a:endParaRPr lang="en-US" sz="1200" dirty="0"/>
+                    </a:p>
+                  </a:txBody>
+                  <a:tcPr marL="91440" marR="91440" marT="54864" marB="54864" anchor="ctr">
+                    <a:lnL w="9525" cap="flat" cmpd="sng" algn="ctr">
+                      <a:solidFill>
+                        <a:srgbClr val="D5DAE0"/>
+                      </a:solidFill>
+                      <a:prstDash val="solid"/>
+                      <a:round/>
+                      <a:headEnd type="none" w="med" len="med"/>
+                      <a:tailEnd type="none" w="med" len="med"/>
+                    </a:lnL>
+                    <a:lnR w="9525" cap="flat" cmpd="sng" algn="ctr">
+                      <a:solidFill>
+                        <a:srgbClr val="D5DAE0"/>
+                      </a:solidFill>
+                      <a:prstDash val="solid"/>
+                      <a:round/>
+                      <a:headEnd type="none" w="med" len="med"/>
+                      <a:tailEnd type="none" w="med" len="med"/>
+                    </a:lnR>
+                    <a:lnT w="9525" cap="flat" cmpd="sng" algn="ctr">
+                      <a:solidFill>
+                        <a:srgbClr val="D5DAE0"/>
+                      </a:solidFill>
+                      <a:prstDash val="solid"/>
+                      <a:round/>
+                      <a:headEnd type="none" w="med" len="med"/>
+                      <a:tailEnd type="none" w="med" len="med"/>
+                    </a:lnT>
+                    <a:lnB w="9525" cap="flat" cmpd="sng" algn="ctr">
+                      <a:solidFill>
+                        <a:srgbClr val="D5DAE0"/>
+                      </a:solidFill>
+                      <a:prstDash val="solid"/>
+                      <a:round/>
+                      <a:headEnd type="none" w="med" len="med"/>
+                      <a:tailEnd type="none" w="med" len="med"/>
+                    </a:lnB>
+                  </a:tcPr>
+                </a:tc>
+              </a:tr>
+              <a:tr h="0">
+                <a:tc>
+                  <a:txBody>
+                    <a:bodyPr/>
+                    <a:lstStyle/>
+                    <a:p>
+                      <a:pPr indent="0" marL="0">
+                        <a:buNone/>
+                      </a:pPr>
+                      <a:r>
+                        <a:rPr lang="en-US" sz="1200" dirty="0">
+                          <a:solidFill>
+                            <a:schemeClr val="tx1"/>
+                          </a:solidFill>
+                        </a:rPr>
+                        <a:t>7.3 Federated learning</a:t>
+                      </a:r>
+                      <a:endParaRPr lang="en-US" sz="1200" dirty="0"/>
+                    </a:p>
+                  </a:txBody>
+                  <a:tcPr marL="91440" marR="91440" marT="54864" marB="54864" anchor="ctr">
+                    <a:lnL w="9525" cap="flat" cmpd="sng" algn="ctr">
+                      <a:solidFill>
+                        <a:srgbClr val="D5DAE0"/>
+                      </a:solidFill>
+                      <a:prstDash val="solid"/>
+                      <a:round/>
+                      <a:headEnd type="none" w="med" len="med"/>
+                      <a:tailEnd type="none" w="med" len="med"/>
+                    </a:lnL>
+                    <a:lnR w="9525" cap="flat" cmpd="sng" algn="ctr">
+                      <a:solidFill>
+                        <a:srgbClr val="D5DAE0"/>
+                      </a:solidFill>
+                      <a:prstDash val="solid"/>
+                      <a:round/>
+                      <a:headEnd type="none" w="med" len="med"/>
+                      <a:tailEnd type="none" w="med" len="med"/>
+                    </a:lnR>
+                    <a:lnT w="9525" cap="flat" cmpd="sng" algn="ctr">
+                      <a:solidFill>
+                        <a:srgbClr val="D5DAE0"/>
+                      </a:solidFill>
+                      <a:prstDash val="solid"/>
+                      <a:round/>
+                      <a:headEnd type="none" w="med" len="med"/>
+                      <a:tailEnd type="none" w="med" len="med"/>
+                    </a:lnT>
+                    <a:lnB w="9525" cap="flat" cmpd="sng" algn="ctr">
+                      <a:solidFill>
+                        <a:srgbClr val="D5DAE0"/>
+                      </a:solidFill>
+                      <a:prstDash val="solid"/>
+                      <a:round/>
+                      <a:headEnd type="none" w="med" len="med"/>
+                      <a:tailEnd type="none" w="med" len="med"/>
+                    </a:lnB>
+                  </a:tcPr>
+                </a:tc>
+                <a:tc>
+                  <a:txBody>
+                    <a:bodyPr/>
+                    <a:lstStyle/>
+                    <a:p>
+                      <a:pPr indent="0" marL="0">
+                        <a:buNone/>
+                      </a:pPr>
+                      <a:r>
+                        <a:rPr lang="en-US" sz="1200" dirty="0">
+                          <a:solidFill>
+                            <a:schemeClr val="tx1"/>
+                          </a:solidFill>
+                        </a:rPr>
+                        <a:t>Lifecycle from intent to inference; model lineage, activation, rollback</a:t>
+                      </a:r>
+                      <a:endParaRPr lang="en-US" sz="1200" dirty="0"/>
+                    </a:p>
+                  </a:txBody>
+                  <a:tcPr marL="91440" marR="91440" marT="54864" marB="54864" anchor="ctr">
+                    <a:lnL w="9525" cap="flat" cmpd="sng" algn="ctr">
+                      <a:solidFill>
+                        <a:srgbClr val="D5DAE0"/>
+                      </a:solidFill>
+                      <a:prstDash val="solid"/>
+                      <a:round/>
+                      <a:headEnd type="none" w="med" len="med"/>
+                      <a:tailEnd type="none" w="med" len="med"/>
+                    </a:lnL>
+                    <a:lnR w="9525" cap="flat" cmpd="sng" algn="ctr">
+                      <a:solidFill>
+                        <a:srgbClr val="D5DAE0"/>
+                      </a:solidFill>
+                      <a:prstDash val="solid"/>
+                      <a:round/>
+                      <a:headEnd type="none" w="med" len="med"/>
+                      <a:tailEnd type="none" w="med" len="med"/>
+                    </a:lnR>
+                    <a:lnT w="9525" cap="flat" cmpd="sng" algn="ctr">
+                      <a:solidFill>
+                        <a:srgbClr val="D5DAE0"/>
+                      </a:solidFill>
+                      <a:prstDash val="solid"/>
+                      <a:round/>
+                      <a:headEnd type="none" w="med" len="med"/>
+                      <a:tailEnd type="none" w="med" len="med"/>
+                    </a:lnT>
+                    <a:lnB w="9525" cap="flat" cmpd="sng" algn="ctr">
+                      <a:solidFill>
+                        <a:srgbClr val="D5DAE0"/>
+                      </a:solidFill>
+                      <a:prstDash val="solid"/>
+                      <a:round/>
+                      <a:headEnd type="none" w="med" len="med"/>
+                      <a:tailEnd type="none" w="med" len="med"/>
+                    </a:lnB>
+                  </a:tcPr>
+                </a:tc>
+                <a:tc>
+                  <a:txBody>
+                    <a:bodyPr/>
+                    <a:lstStyle/>
+                    <a:p>
+                      <a:pPr indent="0" marL="0">
+                        <a:buNone/>
+                      </a:pPr>
+                      <a:r>
+                        <a:rPr lang="en-US" sz="1200" dirty="0">
+                          <a:solidFill>
+                            <a:schemeClr val="tx1"/>
+                          </a:solidFill>
+                        </a:rPr>
+                        <a:t>TR-0084 roles as oneM2M resources; canary → activate in the risk engine → shadow monitoring → rollback (egs:mdlDp)</a:t>
+                      </a:r>
+                      <a:endParaRPr lang="en-US" sz="1200" dirty="0"/>
+                    </a:p>
+                  </a:txBody>
+                  <a:tcPr marL="91440" marR="91440" marT="54864" marB="54864" anchor="ctr">
+                    <a:lnL w="9525" cap="flat" cmpd="sng" algn="ctr">
+                      <a:solidFill>
+                        <a:srgbClr val="D5DAE0"/>
+                      </a:solidFill>
+                      <a:prstDash val="solid"/>
+                      <a:round/>
+                      <a:headEnd type="none" w="med" len="med"/>
+                      <a:tailEnd type="none" w="med" len="med"/>
+                    </a:lnL>
+                    <a:lnR w="9525" cap="flat" cmpd="sng" algn="ctr">
+                      <a:solidFill>
+                        <a:srgbClr val="D5DAE0"/>
+                      </a:solidFill>
+                      <a:prstDash val="solid"/>
+                      <a:round/>
+                      <a:headEnd type="none" w="med" len="med"/>
+                      <a:tailEnd type="none" w="med" len="med"/>
+                    </a:lnR>
+                    <a:lnT w="9525" cap="flat" cmpd="sng" algn="ctr">
+                      <a:solidFill>
+                        <a:srgbClr val="D5DAE0"/>
+                      </a:solidFill>
+                      <a:prstDash val="solid"/>
+                      <a:round/>
+                      <a:headEnd type="none" w="med" len="med"/>
+                      <a:tailEnd type="none" w="med" len="med"/>
+                    </a:lnT>
+                    <a:lnB w="9525" cap="flat" cmpd="sng" algn="ctr">
+                      <a:solidFill>
+                        <a:srgbClr val="D5DAE0"/>
+                      </a:solidFill>
+                      <a:prstDash val="solid"/>
+                      <a:round/>
+                      <a:headEnd type="none" w="med" len="med"/>
+                      <a:tailEnd type="none" w="med" len="med"/>
+                    </a:lnB>
+                  </a:tcPr>
+                </a:tc>
+                <a:tc>
+                  <a:txBody>
+                    <a:bodyPr/>
+                    <a:lstStyle/>
+                    <a:p>
+                      <a:pPr indent="0" marL="0">
+                        <a:buNone/>
+                      </a:pPr>
+                      <a:r>
+                        <a:rPr lang="en-US" sz="1200" dirty="0">
+                          <a:solidFill>
+                            <a:schemeClr val="tx1"/>
+                          </a:solidFill>
+                        </a:rPr>
+                        <a:t>FL 8/8 · delivery 8/8</a:t>
+                      </a:r>
+                      <a:endParaRPr lang="en-US" sz="1200" dirty="0"/>
+                    </a:p>
+                  </a:txBody>
+                  <a:tcPr marL="91440" marR="91440" marT="54864" marB="54864" anchor="ctr">
+                    <a:lnL w="9525" cap="flat" cmpd="sng" algn="ctr">
+                      <a:solidFill>
+                        <a:srgbClr val="D5DAE0"/>
+                      </a:solidFill>
+                      <a:prstDash val="solid"/>
+                      <a:round/>
+                      <a:headEnd type="none" w="med" len="med"/>
+                      <a:tailEnd type="none" w="med" len="med"/>
+                    </a:lnL>
+                    <a:lnR w="9525" cap="flat" cmpd="sng" algn="ctr">
+                      <a:solidFill>
+                        <a:srgbClr val="D5DAE0"/>
+                      </a:solidFill>
+                      <a:prstDash val="solid"/>
+                      <a:round/>
+                      <a:headEnd type="none" w="med" len="med"/>
+                      <a:tailEnd type="none" w="med" len="med"/>
+                    </a:lnR>
+                    <a:lnT w="9525" cap="flat" cmpd="sng" algn="ctr">
+                      <a:solidFill>
+                        <a:srgbClr val="D5DAE0"/>
+                      </a:solidFill>
+                      <a:prstDash val="solid"/>
+                      <a:round/>
+                      <a:headEnd type="none" w="med" len="med"/>
+                      <a:tailEnd type="none" w="med" len="med"/>
+                    </a:lnT>
+                    <a:lnB w="9525" cap="flat" cmpd="sng" algn="ctr">
+                      <a:solidFill>
+                        <a:srgbClr val="D5DAE0"/>
+                      </a:solidFill>
+                      <a:prstDash val="solid"/>
+                      <a:round/>
+                      <a:headEnd type="none" w="med" len="med"/>
+                      <a:tailEnd type="none" w="med" len="med"/>
+                    </a:lnB>
+                  </a:tcPr>
+                </a:tc>
+              </a:tr>
+              <a:tr h="0">
+                <a:tc>
+                  <a:txBody>
+                    <a:bodyPr/>
+                    <a:lstStyle/>
+                    <a:p>
+                      <a:pPr indent="0" marL="0">
+                        <a:buNone/>
+                      </a:pPr>
+                      <a:r>
+                        <a:rPr lang="en-US" sz="1200" dirty="0">
+                          <a:solidFill>
+                            <a:schemeClr val="tx1"/>
+                          </a:solidFill>
+                        </a:rPr>
+                        <a:t>7.4 Swarm computing</a:t>
+                      </a:r>
+                      <a:endParaRPr lang="en-US" sz="1200" dirty="0"/>
+                    </a:p>
+                  </a:txBody>
+                  <a:tcPr marL="91440" marR="91440" marT="54864" marB="54864" anchor="ctr">
+                    <a:lnL w="9525" cap="flat" cmpd="sng" algn="ctr">
+                      <a:solidFill>
+                        <a:srgbClr val="D5DAE0"/>
+                      </a:solidFill>
+                      <a:prstDash val="solid"/>
+                      <a:round/>
+                      <a:headEnd type="none" w="med" len="med"/>
+                      <a:tailEnd type="none" w="med" len="med"/>
+                    </a:lnL>
+                    <a:lnR w="9525" cap="flat" cmpd="sng" algn="ctr">
+                      <a:solidFill>
+                        <a:srgbClr val="D5DAE0"/>
+                      </a:solidFill>
+                      <a:prstDash val="solid"/>
+                      <a:round/>
+                      <a:headEnd type="none" w="med" len="med"/>
+                      <a:tailEnd type="none" w="med" len="med"/>
+                    </a:lnR>
+                    <a:lnT w="9525" cap="flat" cmpd="sng" algn="ctr">
+                      <a:solidFill>
+                        <a:srgbClr val="D5DAE0"/>
+                      </a:solidFill>
+                      <a:prstDash val="solid"/>
+                      <a:round/>
+                      <a:headEnd type="none" w="med" len="med"/>
+                      <a:tailEnd type="none" w="med" len="med"/>
+                    </a:lnT>
+                    <a:lnB w="9525" cap="flat" cmpd="sng" algn="ctr">
+                      <a:solidFill>
+                        <a:srgbClr val="D5DAE0"/>
+                      </a:solidFill>
+                      <a:prstDash val="solid"/>
+                      <a:round/>
+                      <a:headEnd type="none" w="med" len="med"/>
+                      <a:tailEnd type="none" w="med" len="med"/>
+                    </a:lnB>
+                  </a:tcPr>
+                </a:tc>
+                <a:tc>
+                  <a:txBody>
+                    <a:bodyPr/>
+                    <a:lstStyle/>
+                    <a:p>
+                      <a:pPr indent="0" marL="0">
+                        <a:buNone/>
+                      </a:pPr>
+                      <a:r>
+                        <a:rPr lang="en-US" sz="1200" dirty="0">
+                          <a:solidFill>
+                            <a:schemeClr val="tx1"/>
+                          </a:solidFill>
+                        </a:rPr>
+                        <a:t>Membership, context, coordination; participants keep local authority</a:t>
+                      </a:r>
+                      <a:endParaRPr lang="en-US" sz="1200" dirty="0"/>
+                    </a:p>
+                  </a:txBody>
+                  <a:tcPr marL="91440" marR="91440" marT="54864" marB="54864" anchor="ctr">
+                    <a:lnL w="9525" cap="flat" cmpd="sng" algn="ctr">
+                      <a:solidFill>
+                        <a:srgbClr val="D5DAE0"/>
+                      </a:solidFill>
+                      <a:prstDash val="solid"/>
+                      <a:round/>
+                      <a:headEnd type="none" w="med" len="med"/>
+                      <a:tailEnd type="none" w="med" len="med"/>
+                    </a:lnL>
+                    <a:lnR w="9525" cap="flat" cmpd="sng" algn="ctr">
+                      <a:solidFill>
+                        <a:srgbClr val="D5DAE0"/>
+                      </a:solidFill>
+                      <a:prstDash val="solid"/>
+                      <a:round/>
+                      <a:headEnd type="none" w="med" len="med"/>
+                      <a:tailEnd type="none" w="med" len="med"/>
+                    </a:lnR>
+                    <a:lnT w="9525" cap="flat" cmpd="sng" algn="ctr">
+                      <a:solidFill>
+                        <a:srgbClr val="D5DAE0"/>
+                      </a:solidFill>
+                      <a:prstDash val="solid"/>
+                      <a:round/>
+                      <a:headEnd type="none" w="med" len="med"/>
+                      <a:tailEnd type="none" w="med" len="med"/>
+                    </a:lnT>
+                    <a:lnB w="9525" cap="flat" cmpd="sng" algn="ctr">
+                      <a:solidFill>
+                        <a:srgbClr val="D5DAE0"/>
+                      </a:solidFill>
+                      <a:prstDash val="solid"/>
+                      <a:round/>
+                      <a:headEnd type="none" w="med" len="med"/>
+                      <a:tailEnd type="none" w="med" len="med"/>
+                    </a:lnB>
+                  </a:tcPr>
+                </a:tc>
+                <a:tc>
+                  <a:txBody>
+                    <a:bodyPr/>
+                    <a:lstStyle/>
+                    <a:p>
+                      <a:pPr indent="0" marL="0">
+                        <a:buNone/>
+                      </a:pPr>
+                      <a:r>
+                        <a:rPr lang="en-US" sz="1200" dirty="0">
+                          <a:solidFill>
+                            <a:schemeClr val="tx1"/>
+                          </a:solidFill>
+                        </a:rPr>
+                        <a:t>&lt;group&gt; of forklift plans; context in one request; every member computes the same conflict-free schedule</a:t>
+                      </a:r>
+                      <a:endParaRPr lang="en-US" sz="1200" dirty="0"/>
+                    </a:p>
+                  </a:txBody>
+                  <a:tcPr marL="91440" marR="91440" marT="54864" marB="54864" anchor="ctr">
+                    <a:lnL w="9525" cap="flat" cmpd="sng" algn="ctr">
+                      <a:solidFill>
+                        <a:srgbClr val="D5DAE0"/>
+                      </a:solidFill>
+                      <a:prstDash val="solid"/>
+                      <a:round/>
+                      <a:headEnd type="none" w="med" len="med"/>
+                      <a:tailEnd type="none" w="med" len="med"/>
+                    </a:lnL>
+                    <a:lnR w="9525" cap="flat" cmpd="sng" algn="ctr">
+                      <a:solidFill>
+                        <a:srgbClr val="D5DAE0"/>
+                      </a:solidFill>
+                      <a:prstDash val="solid"/>
+                      <a:round/>
+                      <a:headEnd type="none" w="med" len="med"/>
+                      <a:tailEnd type="none" w="med" len="med"/>
+                    </a:lnR>
+                    <a:lnT w="9525" cap="flat" cmpd="sng" algn="ctr">
+                      <a:solidFill>
+                        <a:srgbClr val="D5DAE0"/>
+                      </a:solidFill>
+                      <a:prstDash val="solid"/>
+                      <a:round/>
+                      <a:headEnd type="none" w="med" len="med"/>
+                      <a:tailEnd type="none" w="med" len="med"/>
+                    </a:lnT>
+                    <a:lnB w="9525" cap="flat" cmpd="sng" algn="ctr">
+                      <a:solidFill>
+                        <a:srgbClr val="D5DAE0"/>
+                      </a:solidFill>
+                      <a:prstDash val="solid"/>
+                      <a:round/>
+                      <a:headEnd type="none" w="med" len="med"/>
+                      <a:tailEnd type="none" w="med" len="med"/>
+                    </a:lnB>
+                  </a:tcPr>
+                </a:tc>
+                <a:tc>
+                  <a:txBody>
+                    <a:bodyPr/>
+                    <a:lstStyle/>
+                    <a:p>
+                      <a:pPr indent="0" marL="0">
+                        <a:buNone/>
+                      </a:pPr>
+                      <a:r>
+                        <a:rPr lang="en-US" sz="1200" dirty="0">
+                          <a:solidFill>
+                            <a:schemeClr val="tx1"/>
+                          </a:solidFill>
+                        </a:rPr>
+                        <a:t>swarm 9/9 · conflicts 4 → 0</a:t>
+                      </a:r>
+                      <a:endParaRPr lang="en-US" sz="1200" dirty="0"/>
+                    </a:p>
+                  </a:txBody>
+                  <a:tcPr marL="91440" marR="91440" marT="54864" marB="54864" anchor="ctr">
+                    <a:lnL w="9525" cap="flat" cmpd="sng" algn="ctr">
+                      <a:solidFill>
+                        <a:srgbClr val="D5DAE0"/>
+                      </a:solidFill>
+                      <a:prstDash val="solid"/>
+                      <a:round/>
+                      <a:headEnd type="none" w="med" len="med"/>
+                      <a:tailEnd type="none" w="med" len="med"/>
+                    </a:lnL>
+                    <a:lnR w="9525" cap="flat" cmpd="sng" algn="ctr">
+                      <a:solidFill>
+                        <a:srgbClr val="D5DAE0"/>
+                      </a:solidFill>
+                      <a:prstDash val="solid"/>
+                      <a:round/>
+                      <a:headEnd type="none" w="med" len="med"/>
+                      <a:tailEnd type="none" w="med" len="med"/>
+                    </a:lnR>
+                    <a:lnT w="9525" cap="flat" cmpd="sng" algn="ctr">
+                      <a:solidFill>
+                        <a:srgbClr val="D5DAE0"/>
+                      </a:solidFill>
+                      <a:prstDash val="solid"/>
+                      <a:round/>
+                      <a:headEnd type="none" w="med" len="med"/>
+                      <a:tailEnd type="none" w="med" len="med"/>
+                    </a:lnT>
+                    <a:lnB w="9525" cap="flat" cmpd="sng" algn="ctr">
+                      <a:solidFill>
+                        <a:srgbClr val="D5DAE0"/>
+                      </a:solidFill>
+                      <a:prstDash val="solid"/>
+                      <a:round/>
+                      <a:headEnd type="none" w="med" len="med"/>
+                      <a:tailEnd type="none" w="med" len="med"/>
+                    </a:lnB>
+                  </a:tcPr>
+                </a:tc>
+              </a:tr>
+            </a:tbl>
+          </a:graphicData>
+        </a:graphic>
+      </p:graphicFrame>
+      <p:sp>
+        <p:nvSpPr>
+          <p:cNvPr id="4" name="continuum note"/>
           <p:cNvSpPr txBox="1"/>
           <p:nvPr/>
         </p:nvSpPr>
         <p:spPr>
           <a:xfrm>
-            <a:off x="1143000" y="1417320"/>
-            <a:ext cx="548640" cy="548640"/>
+            <a:off x="548640" y="5257800"/>
+            <a:ext cx="11064240" cy="822960"/>
           </a:xfrm>
           <a:prstGeom prst="rect">
             <a:avLst/>
@@ -2992,1224 +4361,30 @@
           <a:ln/>
         </p:spPr>
         <p:txBody>
-          <a:bodyPr wrap="square" lIns="0" tIns="0" rIns="0" bIns="0" rtlCol="0" anchor="ctr"/>
-          <a:lstStyle/>
-          <a:p>
-            <a:pPr algn="ctr" indent="0" marL="0">
-              <a:buNone/>
-            </a:pPr>
-            <a:r>
-              <a:rPr lang="en-US" sz="1600" b="1" dirty="0">
-                <a:solidFill>
-                  <a:schemeClr val="bg1"/>
-                </a:solidFill>
-              </a:rPr>
-              <a:t>1</a:t>
-            </a:r>
-            <a:endParaRPr lang="en-US" sz="1600" dirty="0"/>
-          </a:p>
-        </p:txBody>
-      </p:sp>
-      <p:sp>
-        <p:nvSpPr>
-          <p:cNvPr id="5" name="step link 1"/>
-          <p:cNvSpPr/>
-          <p:nvPr/>
-        </p:nvSpPr>
-        <p:spPr>
-          <a:xfrm>
-            <a:off x="1783080" y="1691640"/>
-            <a:ext cx="1600200" cy="0"/>
-          </a:xfrm>
-          <a:prstGeom prst="line">
-            <a:avLst/>
-          </a:prstGeom>
-          <a:noFill/>
-          <a:ln w="19050">
-            <a:solidFill>
-              <a:srgbClr val="C9D0D8"/>
-            </a:solidFill>
-            <a:prstDash val="solid"/>
-          </a:ln>
-        </p:spPr>
-      </p:sp>
-      <p:sp>
-        <p:nvSpPr>
-          <p:cNvPr id="6" name="step head 1"/>
-          <p:cNvSpPr txBox="1"/>
-          <p:nvPr/>
-        </p:nvSpPr>
-        <p:spPr>
-          <a:xfrm>
-            <a:off x="548640" y="2148840"/>
-            <a:ext cx="1737360" cy="365760"/>
-          </a:xfrm>
-          <a:prstGeom prst="rect">
-            <a:avLst/>
-          </a:prstGeom>
-          <a:noFill/>
-          <a:ln/>
-        </p:spPr>
-        <p:txBody>
-          <a:bodyPr wrap="square" lIns="0" tIns="0" rIns="0" bIns="0" rtlCol="0" anchor="ctr"/>
-          <a:lstStyle/>
-          <a:p>
-            <a:pPr algn="ctr" indent="0" marL="0">
-              <a:buNone/>
-            </a:pPr>
-            <a:r>
-              <a:rPr lang="en-US" sz="1600" b="1" dirty="0">
+          <a:bodyPr wrap="square" lIns="0" tIns="0" rIns="0" bIns="0" rtlCol="0" anchor="t"/>
+          <a:lstStyle/>
+          <a:p>
+            <a:pPr indent="0" marL="0">
+              <a:buNone/>
+            </a:pPr>
+            <a:r>
+              <a:rPr lang="en-US" sz="1400" b="1" dirty="0">
                 <a:solidFill>
                   <a:schemeClr val="tx2"/>
                 </a:solidFill>
               </a:rPr>
-              <a:t>Sense</a:t>
-            </a:r>
-            <a:endParaRPr lang="en-US" sz="1600" dirty="0"/>
-          </a:p>
-        </p:txBody>
-      </p:sp>
-      <p:sp>
-        <p:nvSpPr>
-          <p:cNvPr id="7" name="step body 1"/>
-          <p:cNvSpPr txBox="1"/>
-          <p:nvPr/>
-        </p:nvSpPr>
-        <p:spPr>
-          <a:xfrm>
-            <a:off x="548640" y="2560320"/>
-            <a:ext cx="1737360" cy="1005840"/>
-          </a:xfrm>
-          <a:prstGeom prst="rect">
-            <a:avLst/>
-          </a:prstGeom>
-          <a:noFill/>
-          <a:ln/>
-        </p:spPr>
-        <p:txBody>
-          <a:bodyPr wrap="square" lIns="0" tIns="0" rIns="0" bIns="0" rtlCol="0" anchor="t"/>
-          <a:lstStyle/>
-          <a:p>
-            <a:pPr algn="ctr" indent="0" marL="0">
-              <a:buNone/>
-            </a:pPr>
-            <a:r>
-              <a:rPr lang="en-US" sz="1300" dirty="0">
+              <a:t>Deployment continuum: </a:t>
+            </a:r>
+            <a:pPr indent="0" marL="0">
+              <a:buNone/>
+            </a:pPr>
+            <a:r>
+              <a:rPr lang="en-US" sz="1400" dirty="0">
                 <a:solidFill>
                   <a:schemeClr val="tx1"/>
                 </a:solidFill>
               </a:rPr>
-              <a:t>Tag / module updates its kinematics flexContainer</a:t>
-            </a:r>
-            <a:endParaRPr lang="en-US" sz="1300" dirty="0"/>
-          </a:p>
-        </p:txBody>
-      </p:sp>
-      <p:sp>
-        <p:nvSpPr>
-          <p:cNvPr id="8" name="step dot 2"/>
-          <p:cNvSpPr/>
-          <p:nvPr/>
-        </p:nvSpPr>
-        <p:spPr>
-          <a:xfrm>
-            <a:off x="3017520" y="1417320"/>
-            <a:ext cx="548640" cy="548640"/>
-          </a:xfrm>
-          <a:prstGeom prst="ellipse">
-            <a:avLst/>
-          </a:prstGeom>
-          <a:solidFill>
-            <a:schemeClr val="tx2"/>
-          </a:solidFill>
-          <a:ln w="12700">
-            <a:solidFill>
-              <a:schemeClr val="tx2"/>
-            </a:solidFill>
-            <a:prstDash val="solid"/>
-          </a:ln>
-        </p:spPr>
-      </p:sp>
-      <p:sp>
-        <p:nvSpPr>
-          <p:cNvPr id="9" name="step num 2"/>
-          <p:cNvSpPr txBox="1"/>
-          <p:nvPr/>
-        </p:nvSpPr>
-        <p:spPr>
-          <a:xfrm>
-            <a:off x="3017520" y="1417320"/>
-            <a:ext cx="548640" cy="548640"/>
-          </a:xfrm>
-          <a:prstGeom prst="rect">
-            <a:avLst/>
-          </a:prstGeom>
-          <a:noFill/>
-          <a:ln/>
-        </p:spPr>
-        <p:txBody>
-          <a:bodyPr wrap="square" lIns="0" tIns="0" rIns="0" bIns="0" rtlCol="0" anchor="ctr"/>
-          <a:lstStyle/>
-          <a:p>
-            <a:pPr algn="ctr" indent="0" marL="0">
-              <a:buNone/>
-            </a:pPr>
-            <a:r>
-              <a:rPr lang="en-US" sz="1600" b="1" dirty="0">
-                <a:solidFill>
-                  <a:schemeClr val="bg1"/>
-                </a:solidFill>
-              </a:rPr>
-              <a:t>2</a:t>
-            </a:r>
-            <a:endParaRPr lang="en-US" sz="1600" dirty="0"/>
-          </a:p>
-        </p:txBody>
-      </p:sp>
-      <p:sp>
-        <p:nvSpPr>
-          <p:cNvPr id="10" name="step link 2"/>
-          <p:cNvSpPr/>
-          <p:nvPr/>
-        </p:nvSpPr>
-        <p:spPr>
-          <a:xfrm>
-            <a:off x="3657600" y="1691640"/>
-            <a:ext cx="1600200" cy="0"/>
-          </a:xfrm>
-          <a:prstGeom prst="line">
-            <a:avLst/>
-          </a:prstGeom>
-          <a:noFill/>
-          <a:ln w="19050">
-            <a:solidFill>
-              <a:srgbClr val="C9D0D8"/>
-            </a:solidFill>
-            <a:prstDash val="solid"/>
-          </a:ln>
-        </p:spPr>
-      </p:sp>
-      <p:sp>
-        <p:nvSpPr>
-          <p:cNvPr id="11" name="step head 2"/>
-          <p:cNvSpPr txBox="1"/>
-          <p:nvPr/>
-        </p:nvSpPr>
-        <p:spPr>
-          <a:xfrm>
-            <a:off x="2423160" y="2148840"/>
-            <a:ext cx="1737360" cy="365760"/>
-          </a:xfrm>
-          <a:prstGeom prst="rect">
-            <a:avLst/>
-          </a:prstGeom>
-          <a:noFill/>
-          <a:ln/>
-        </p:spPr>
-        <p:txBody>
-          <a:bodyPr wrap="square" lIns="0" tIns="0" rIns="0" bIns="0" rtlCol="0" anchor="ctr"/>
-          <a:lstStyle/>
-          <a:p>
-            <a:pPr algn="ctr" indent="0" marL="0">
-              <a:buNone/>
-            </a:pPr>
-            <a:r>
-              <a:rPr lang="en-US" sz="1600" b="1" dirty="0">
-                <a:solidFill>
-                  <a:schemeClr val="tx2"/>
-                </a:solidFill>
-              </a:rPr>
-              <a:t>Notify</a:t>
-            </a:r>
-            <a:endParaRPr lang="en-US" sz="1600" dirty="0"/>
-          </a:p>
-        </p:txBody>
-      </p:sp>
-      <p:sp>
-        <p:nvSpPr>
-          <p:cNvPr id="12" name="step body 2"/>
-          <p:cNvSpPr txBox="1"/>
-          <p:nvPr/>
-        </p:nvSpPr>
-        <p:spPr>
-          <a:xfrm>
-            <a:off x="2423160" y="2560320"/>
-            <a:ext cx="1737360" cy="1005840"/>
-          </a:xfrm>
-          <a:prstGeom prst="rect">
-            <a:avLst/>
-          </a:prstGeom>
-          <a:noFill/>
-          <a:ln/>
-        </p:spPr>
-        <p:txBody>
-          <a:bodyPr wrap="square" lIns="0" tIns="0" rIns="0" bIns="0" rtlCol="0" anchor="t"/>
-          <a:lstStyle/>
-          <a:p>
-            <a:pPr algn="ctr" indent="0" marL="0">
-              <a:buNone/>
-            </a:pPr>
-            <a:r>
-              <a:rPr lang="en-US" sz="1300" dirty="0">
-                <a:solidFill>
-                  <a:schemeClr val="tx1"/>
-                </a:solidFill>
-              </a:rPr>
-              <a:t>zone MN-CSE notifies the MEC app (subscription)</a:t>
-            </a:r>
-            <a:endParaRPr lang="en-US" sz="1300" dirty="0"/>
-          </a:p>
-        </p:txBody>
-      </p:sp>
-      <p:sp>
-        <p:nvSpPr>
-          <p:cNvPr id="13" name="step dot 3"/>
-          <p:cNvSpPr/>
-          <p:nvPr/>
-        </p:nvSpPr>
-        <p:spPr>
-          <a:xfrm>
-            <a:off x="4892040" y="1417320"/>
-            <a:ext cx="548640" cy="548640"/>
-          </a:xfrm>
-          <a:prstGeom prst="ellipse">
-            <a:avLst/>
-          </a:prstGeom>
-          <a:solidFill>
-            <a:schemeClr val="tx2"/>
-          </a:solidFill>
-          <a:ln w="12700">
-            <a:solidFill>
-              <a:schemeClr val="tx2"/>
-            </a:solidFill>
-            <a:prstDash val="solid"/>
-          </a:ln>
-        </p:spPr>
-      </p:sp>
-      <p:sp>
-        <p:nvSpPr>
-          <p:cNvPr id="14" name="step num 3"/>
-          <p:cNvSpPr txBox="1"/>
-          <p:nvPr/>
-        </p:nvSpPr>
-        <p:spPr>
-          <a:xfrm>
-            <a:off x="4892040" y="1417320"/>
-            <a:ext cx="548640" cy="548640"/>
-          </a:xfrm>
-          <a:prstGeom prst="rect">
-            <a:avLst/>
-          </a:prstGeom>
-          <a:noFill/>
-          <a:ln/>
-        </p:spPr>
-        <p:txBody>
-          <a:bodyPr wrap="square" lIns="0" tIns="0" rIns="0" bIns="0" rtlCol="0" anchor="ctr"/>
-          <a:lstStyle/>
-          <a:p>
-            <a:pPr algn="ctr" indent="0" marL="0">
-              <a:buNone/>
-            </a:pPr>
-            <a:r>
-              <a:rPr lang="en-US" sz="1600" b="1" dirty="0">
-                <a:solidFill>
-                  <a:schemeClr val="bg1"/>
-                </a:solidFill>
-              </a:rPr>
-              <a:t>3</a:t>
-            </a:r>
-            <a:endParaRPr lang="en-US" sz="1600" dirty="0"/>
-          </a:p>
-        </p:txBody>
-      </p:sp>
-      <p:sp>
-        <p:nvSpPr>
-          <p:cNvPr id="15" name="step link 3"/>
-          <p:cNvSpPr/>
-          <p:nvPr/>
-        </p:nvSpPr>
-        <p:spPr>
-          <a:xfrm>
-            <a:off x="5532120" y="1691640"/>
-            <a:ext cx="1600200" cy="0"/>
-          </a:xfrm>
-          <a:prstGeom prst="line">
-            <a:avLst/>
-          </a:prstGeom>
-          <a:noFill/>
-          <a:ln w="19050">
-            <a:solidFill>
-              <a:srgbClr val="C9D0D8"/>
-            </a:solidFill>
-            <a:prstDash val="solid"/>
-          </a:ln>
-        </p:spPr>
-      </p:sp>
-      <p:sp>
-        <p:nvSpPr>
-          <p:cNvPr id="16" name="step head 3"/>
-          <p:cNvSpPr txBox="1"/>
-          <p:nvPr/>
-        </p:nvSpPr>
-        <p:spPr>
-          <a:xfrm>
-            <a:off x="4297680" y="2148840"/>
-            <a:ext cx="1737360" cy="365760"/>
-          </a:xfrm>
-          <a:prstGeom prst="rect">
-            <a:avLst/>
-          </a:prstGeom>
-          <a:noFill/>
-          <a:ln/>
-        </p:spPr>
-        <p:txBody>
-          <a:bodyPr wrap="square" lIns="0" tIns="0" rIns="0" bIns="0" rtlCol="0" anchor="ctr"/>
-          <a:lstStyle/>
-          <a:p>
-            <a:pPr algn="ctr" indent="0" marL="0">
-              <a:buNone/>
-            </a:pPr>
-            <a:r>
-              <a:rPr lang="en-US" sz="1600" b="1" dirty="0">
-                <a:solidFill>
-                  <a:schemeClr val="tx2"/>
-                </a:solidFill>
-              </a:rPr>
-              <a:t>Predict</a:t>
-            </a:r>
-            <a:endParaRPr lang="en-US" sz="1600" dirty="0"/>
-          </a:p>
-        </p:txBody>
-      </p:sp>
-      <p:sp>
-        <p:nvSpPr>
-          <p:cNvPr id="17" name="step body 3"/>
-          <p:cNvSpPr txBox="1"/>
-          <p:nvPr/>
-        </p:nvSpPr>
-        <p:spPr>
-          <a:xfrm>
-            <a:off x="4297680" y="2560320"/>
-            <a:ext cx="1737360" cy="1005840"/>
-          </a:xfrm>
-          <a:prstGeom prst="rect">
-            <a:avLst/>
-          </a:prstGeom>
-          <a:noFill/>
-          <a:ln/>
-        </p:spPr>
-        <p:txBody>
-          <a:bodyPr wrap="square" lIns="0" tIns="0" rIns="0" bIns="0" rtlCol="0" anchor="t"/>
-          <a:lstStyle/>
-          <a:p>
-            <a:pPr algn="ctr" indent="0" marL="0">
-              <a:buNone/>
-            </a:pPr>
-            <a:r>
-              <a:rPr lang="en-US" sz="1300" dirty="0">
-                <a:solidFill>
-                  <a:schemeClr val="tx1"/>
-                </a:solidFill>
-              </a:rPr>
-              <a:t>Kalman tracking, forklift turn model or shared route</a:t>
-            </a:r>
-            <a:endParaRPr lang="en-US" sz="1300" dirty="0"/>
-          </a:p>
-        </p:txBody>
-      </p:sp>
-      <p:sp>
-        <p:nvSpPr>
-          <p:cNvPr id="18" name="step dot 4"/>
-          <p:cNvSpPr/>
-          <p:nvPr/>
-        </p:nvSpPr>
-        <p:spPr>
-          <a:xfrm>
-            <a:off x="6766560" y="1417320"/>
-            <a:ext cx="548640" cy="548640"/>
-          </a:xfrm>
-          <a:prstGeom prst="ellipse">
-            <a:avLst/>
-          </a:prstGeom>
-          <a:solidFill>
-            <a:schemeClr val="tx2"/>
-          </a:solidFill>
-          <a:ln w="12700">
-            <a:solidFill>
-              <a:schemeClr val="tx2"/>
-            </a:solidFill>
-            <a:prstDash val="solid"/>
-          </a:ln>
-        </p:spPr>
-      </p:sp>
-      <p:sp>
-        <p:nvSpPr>
-          <p:cNvPr id="19" name="step num 4"/>
-          <p:cNvSpPr txBox="1"/>
-          <p:nvPr/>
-        </p:nvSpPr>
-        <p:spPr>
-          <a:xfrm>
-            <a:off x="6766560" y="1417320"/>
-            <a:ext cx="548640" cy="548640"/>
-          </a:xfrm>
-          <a:prstGeom prst="rect">
-            <a:avLst/>
-          </a:prstGeom>
-          <a:noFill/>
-          <a:ln/>
-        </p:spPr>
-        <p:txBody>
-          <a:bodyPr wrap="square" lIns="0" tIns="0" rIns="0" bIns="0" rtlCol="0" anchor="ctr"/>
-          <a:lstStyle/>
-          <a:p>
-            <a:pPr algn="ctr" indent="0" marL="0">
-              <a:buNone/>
-            </a:pPr>
-            <a:r>
-              <a:rPr lang="en-US" sz="1600" b="1" dirty="0">
-                <a:solidFill>
-                  <a:schemeClr val="bg1"/>
-                </a:solidFill>
-              </a:rPr>
-              <a:t>4</a:t>
-            </a:r>
-            <a:endParaRPr lang="en-US" sz="1600" dirty="0"/>
-          </a:p>
-        </p:txBody>
-      </p:sp>
-      <p:sp>
-        <p:nvSpPr>
-          <p:cNvPr id="20" name="step link 4"/>
-          <p:cNvSpPr/>
-          <p:nvPr/>
-        </p:nvSpPr>
-        <p:spPr>
-          <a:xfrm>
-            <a:off x="7406640" y="1691640"/>
-            <a:ext cx="1600200" cy="0"/>
-          </a:xfrm>
-          <a:prstGeom prst="line">
-            <a:avLst/>
-          </a:prstGeom>
-          <a:noFill/>
-          <a:ln w="19050">
-            <a:solidFill>
-              <a:srgbClr val="C9D0D8"/>
-            </a:solidFill>
-            <a:prstDash val="solid"/>
-          </a:ln>
-        </p:spPr>
-      </p:sp>
-      <p:sp>
-        <p:nvSpPr>
-          <p:cNvPr id="21" name="step head 4"/>
-          <p:cNvSpPr txBox="1"/>
-          <p:nvPr/>
-        </p:nvSpPr>
-        <p:spPr>
-          <a:xfrm>
-            <a:off x="6172200" y="2148840"/>
-            <a:ext cx="1737360" cy="365760"/>
-          </a:xfrm>
-          <a:prstGeom prst="rect">
-            <a:avLst/>
-          </a:prstGeom>
-          <a:noFill/>
-          <a:ln/>
-        </p:spPr>
-        <p:txBody>
-          <a:bodyPr wrap="square" lIns="0" tIns="0" rIns="0" bIns="0" rtlCol="0" anchor="ctr"/>
-          <a:lstStyle/>
-          <a:p>
-            <a:pPr algn="ctr" indent="0" marL="0">
-              <a:buNone/>
-            </a:pPr>
-            <a:r>
-              <a:rPr lang="en-US" sz="1600" b="1" dirty="0">
-                <a:solidFill>
-                  <a:schemeClr val="tx2"/>
-                </a:solidFill>
-              </a:rPr>
-              <a:t>Decide</a:t>
-            </a:r>
-            <a:endParaRPr lang="en-US" sz="1600" dirty="0"/>
-          </a:p>
-        </p:txBody>
-      </p:sp>
-      <p:sp>
-        <p:nvSpPr>
-          <p:cNvPr id="22" name="step body 4"/>
-          <p:cNvSpPr txBox="1"/>
-          <p:nvPr/>
-        </p:nvSpPr>
-        <p:spPr>
-          <a:xfrm>
-            <a:off x="6172200" y="2560320"/>
-            <a:ext cx="1737360" cy="1005840"/>
-          </a:xfrm>
-          <a:prstGeom prst="rect">
-            <a:avLst/>
-          </a:prstGeom>
-          <a:noFill/>
-          <a:ln/>
-        </p:spPr>
-        <p:txBody>
-          <a:bodyPr wrap="square" lIns="0" tIns="0" rIns="0" bIns="0" rtlCol="0" anchor="t"/>
-          <a:lstStyle/>
-          <a:p>
-            <a:pPr algn="ctr" indent="0" marL="0">
-              <a:buNone/>
-            </a:pPr>
-            <a:r>
-              <a:rPr lang="en-US" sz="1300" dirty="0">
-                <a:solidFill>
-                  <a:schemeClr val="tx1"/>
-                </a:solidFill>
-              </a:rPr>
-              <a:t>Collision course: LOS rate + closest approach</a:t>
-            </a:r>
-            <a:endParaRPr lang="en-US" sz="1300" dirty="0"/>
-          </a:p>
-        </p:txBody>
-      </p:sp>
-      <p:sp>
-        <p:nvSpPr>
-          <p:cNvPr id="23" name="step dot 5"/>
-          <p:cNvSpPr/>
-          <p:nvPr/>
-        </p:nvSpPr>
-        <p:spPr>
-          <a:xfrm>
-            <a:off x="8641080" y="1417320"/>
-            <a:ext cx="548640" cy="548640"/>
-          </a:xfrm>
-          <a:prstGeom prst="ellipse">
-            <a:avLst/>
-          </a:prstGeom>
-          <a:solidFill>
-            <a:schemeClr val="accent1"/>
-          </a:solidFill>
-          <a:ln w="12700">
-            <a:solidFill>
-              <a:schemeClr val="accent1"/>
-            </a:solidFill>
-            <a:prstDash val="solid"/>
-          </a:ln>
-        </p:spPr>
-      </p:sp>
-      <p:sp>
-        <p:nvSpPr>
-          <p:cNvPr id="24" name="step num 5"/>
-          <p:cNvSpPr txBox="1"/>
-          <p:nvPr/>
-        </p:nvSpPr>
-        <p:spPr>
-          <a:xfrm>
-            <a:off x="8641080" y="1417320"/>
-            <a:ext cx="548640" cy="548640"/>
-          </a:xfrm>
-          <a:prstGeom prst="rect">
-            <a:avLst/>
-          </a:prstGeom>
-          <a:noFill/>
-          <a:ln/>
-        </p:spPr>
-        <p:txBody>
-          <a:bodyPr wrap="square" lIns="0" tIns="0" rIns="0" bIns="0" rtlCol="0" anchor="ctr"/>
-          <a:lstStyle/>
-          <a:p>
-            <a:pPr algn="ctr" indent="0" marL="0">
-              <a:buNone/>
-            </a:pPr>
-            <a:r>
-              <a:rPr lang="en-US" sz="1600" b="1" dirty="0">
-                <a:solidFill>
-                  <a:schemeClr val="tx2"/>
-                </a:solidFill>
-              </a:rPr>
-              <a:t>5</a:t>
-            </a:r>
-            <a:endParaRPr lang="en-US" sz="1600" dirty="0"/>
-          </a:p>
-        </p:txBody>
-      </p:sp>
-      <p:sp>
-        <p:nvSpPr>
-          <p:cNvPr id="25" name="step link 5"/>
-          <p:cNvSpPr/>
-          <p:nvPr/>
-        </p:nvSpPr>
-        <p:spPr>
-          <a:xfrm>
-            <a:off x="9281160" y="1691640"/>
-            <a:ext cx="1600200" cy="0"/>
-          </a:xfrm>
-          <a:prstGeom prst="line">
-            <a:avLst/>
-          </a:prstGeom>
-          <a:noFill/>
-          <a:ln w="19050">
-            <a:solidFill>
-              <a:srgbClr val="C9D0D8"/>
-            </a:solidFill>
-            <a:prstDash val="solid"/>
-          </a:ln>
-        </p:spPr>
-      </p:sp>
-      <p:sp>
-        <p:nvSpPr>
-          <p:cNvPr id="26" name="step head 5"/>
-          <p:cNvSpPr txBox="1"/>
-          <p:nvPr/>
-        </p:nvSpPr>
-        <p:spPr>
-          <a:xfrm>
-            <a:off x="8046720" y="2148840"/>
-            <a:ext cx="1737360" cy="365760"/>
-          </a:xfrm>
-          <a:prstGeom prst="rect">
-            <a:avLst/>
-          </a:prstGeom>
-          <a:noFill/>
-          <a:ln/>
-        </p:spPr>
-        <p:txBody>
-          <a:bodyPr wrap="square" lIns="0" tIns="0" rIns="0" bIns="0" rtlCol="0" anchor="ctr"/>
-          <a:lstStyle/>
-          <a:p>
-            <a:pPr algn="ctr" indent="0" marL="0">
-              <a:buNone/>
-            </a:pPr>
-            <a:r>
-              <a:rPr lang="en-US" sz="1600" b="1" dirty="0">
-                <a:solidFill>
-                  <a:schemeClr val="tx2"/>
-                </a:solidFill>
-              </a:rPr>
-              <a:t>Cue</a:t>
-            </a:r>
-            <a:endParaRPr lang="en-US" sz="1600" dirty="0"/>
-          </a:p>
-        </p:txBody>
-      </p:sp>
-      <p:sp>
-        <p:nvSpPr>
-          <p:cNvPr id="27" name="step body 5"/>
-          <p:cNvSpPr txBox="1"/>
-          <p:nvPr/>
-        </p:nvSpPr>
-        <p:spPr>
-          <a:xfrm>
-            <a:off x="8046720" y="2560320"/>
-            <a:ext cx="1737360" cy="1005840"/>
-          </a:xfrm>
-          <a:prstGeom prst="rect">
-            <a:avLst/>
-          </a:prstGeom>
-          <a:noFill/>
-          <a:ln/>
-        </p:spPr>
-        <p:txBody>
-          <a:bodyPr wrap="square" lIns="0" tIns="0" rIns="0" bIns="0" rtlCol="0" anchor="t"/>
-          <a:lstStyle/>
-          <a:p>
-            <a:pPr algn="ctr" indent="0" marL="0">
-              <a:buNone/>
-            </a:pPr>
-            <a:r>
-              <a:rPr lang="en-US" sz="1300" dirty="0">
-                <a:solidFill>
-                  <a:schemeClr val="tx1"/>
-                </a:solidFill>
-              </a:rPr>
-              <a:t>Alert CIN → tag WAIT / STEP ASIDE / GO, forklift limit</a:t>
-            </a:r>
-            <a:endParaRPr lang="en-US" sz="1300" dirty="0"/>
-          </a:p>
-        </p:txBody>
-      </p:sp>
-      <p:sp>
-        <p:nvSpPr>
-          <p:cNvPr id="28" name="step dot 6"/>
-          <p:cNvSpPr/>
-          <p:nvPr/>
-        </p:nvSpPr>
-        <p:spPr>
-          <a:xfrm>
-            <a:off x="10515600" y="1417320"/>
-            <a:ext cx="548640" cy="548640"/>
-          </a:xfrm>
-          <a:prstGeom prst="ellipse">
-            <a:avLst/>
-          </a:prstGeom>
-          <a:solidFill>
-            <a:schemeClr val="tx2"/>
-          </a:solidFill>
-          <a:ln w="12700">
-            <a:solidFill>
-              <a:schemeClr val="tx2"/>
-            </a:solidFill>
-            <a:prstDash val="solid"/>
-          </a:ln>
-        </p:spPr>
-      </p:sp>
-      <p:sp>
-        <p:nvSpPr>
-          <p:cNvPr id="29" name="step num 6"/>
-          <p:cNvSpPr txBox="1"/>
-          <p:nvPr/>
-        </p:nvSpPr>
-        <p:spPr>
-          <a:xfrm>
-            <a:off x="10515600" y="1417320"/>
-            <a:ext cx="548640" cy="548640"/>
-          </a:xfrm>
-          <a:prstGeom prst="rect">
-            <a:avLst/>
-          </a:prstGeom>
-          <a:noFill/>
-          <a:ln/>
-        </p:spPr>
-        <p:txBody>
-          <a:bodyPr wrap="square" lIns="0" tIns="0" rIns="0" bIns="0" rtlCol="0" anchor="ctr"/>
-          <a:lstStyle/>
-          <a:p>
-            <a:pPr algn="ctr" indent="0" marL="0">
-              <a:buNone/>
-            </a:pPr>
-            <a:r>
-              <a:rPr lang="en-US" sz="1600" b="1" dirty="0">
-                <a:solidFill>
-                  <a:schemeClr val="bg1"/>
-                </a:solidFill>
-              </a:rPr>
-              <a:t>6</a:t>
-            </a:r>
-            <a:endParaRPr lang="en-US" sz="1600" dirty="0"/>
-          </a:p>
-        </p:txBody>
-      </p:sp>
-      <p:sp>
-        <p:nvSpPr>
-          <p:cNvPr id="30" name="step head 6"/>
-          <p:cNvSpPr txBox="1"/>
-          <p:nvPr/>
-        </p:nvSpPr>
-        <p:spPr>
-          <a:xfrm>
-            <a:off x="9921240" y="2148840"/>
-            <a:ext cx="1737360" cy="365760"/>
-          </a:xfrm>
-          <a:prstGeom prst="rect">
-            <a:avLst/>
-          </a:prstGeom>
-          <a:noFill/>
-          <a:ln/>
-        </p:spPr>
-        <p:txBody>
-          <a:bodyPr wrap="square" lIns="0" tIns="0" rIns="0" bIns="0" rtlCol="0" anchor="ctr"/>
-          <a:lstStyle/>
-          <a:p>
-            <a:pPr algn="ctr" indent="0" marL="0">
-              <a:buNone/>
-            </a:pPr>
-            <a:r>
-              <a:rPr lang="en-US" sz="1600" b="1" dirty="0">
-                <a:solidFill>
-                  <a:schemeClr val="tx2"/>
-                </a:solidFill>
-              </a:rPr>
-              <a:t>Confirm</a:t>
-            </a:r>
-            <a:endParaRPr lang="en-US" sz="1600" dirty="0"/>
-          </a:p>
-        </p:txBody>
-      </p:sp>
-      <p:sp>
-        <p:nvSpPr>
-          <p:cNvPr id="31" name="step body 6"/>
-          <p:cNvSpPr txBox="1"/>
-          <p:nvPr/>
-        </p:nvSpPr>
-        <p:spPr>
-          <a:xfrm>
-            <a:off x="9921240" y="2560320"/>
-            <a:ext cx="1737360" cy="1005840"/>
-          </a:xfrm>
-          <a:prstGeom prst="rect">
-            <a:avLst/>
-          </a:prstGeom>
-          <a:noFill/>
-          <a:ln/>
-        </p:spPr>
-        <p:txBody>
-          <a:bodyPr wrap="square" lIns="0" tIns="0" rIns="0" bIns="0" rtlCol="0" anchor="t"/>
-          <a:lstStyle/>
-          <a:p>
-            <a:pPr algn="ctr" indent="0" marL="0">
-              <a:buNone/>
-            </a:pPr>
-            <a:r>
-              <a:rPr lang="en-US" sz="1300" dirty="0">
-                <a:solidFill>
-                  <a:schemeClr val="tx1"/>
-                </a:solidFill>
-              </a:rPr>
-              <a:t>Device reports its cue / speed limit in its twin</a:t>
-            </a:r>
-            <a:endParaRPr lang="en-US" sz="1300" dirty="0"/>
-          </a:p>
-        </p:txBody>
-      </p:sp>
-      <p:sp>
-        <p:nvSpPr>
-          <p:cNvPr id="32" name="kpi 0"/>
-          <p:cNvSpPr/>
-          <p:nvPr/>
-        </p:nvSpPr>
-        <p:spPr>
-          <a:xfrm>
-            <a:off x="548640" y="3931920"/>
-            <a:ext cx="3566160" cy="1371600"/>
-          </a:xfrm>
-          <a:prstGeom prst="roundRect">
-            <a:avLst>
-              <a:gd name="adj" fmla="val 5333"/>
-            </a:avLst>
-          </a:prstGeom>
-          <a:solidFill>
-            <a:schemeClr val="bg2"/>
-          </a:solidFill>
-          <a:ln w="12700">
-            <a:solidFill>
-              <a:schemeClr val="bg2"/>
-            </a:solidFill>
-            <a:prstDash val="solid"/>
-          </a:ln>
-        </p:spPr>
-      </p:sp>
-      <p:sp>
-        <p:nvSpPr>
-          <p:cNvPr id="33" name="kpi number 0"/>
-          <p:cNvSpPr txBox="1"/>
-          <p:nvPr/>
-        </p:nvSpPr>
-        <p:spPr>
-          <a:xfrm>
-            <a:off x="822960" y="4069080"/>
-            <a:ext cx="3017520" cy="594360"/>
-          </a:xfrm>
-          <a:prstGeom prst="rect">
-            <a:avLst/>
-          </a:prstGeom>
-          <a:noFill/>
-          <a:ln/>
-        </p:spPr>
-        <p:txBody>
-          <a:bodyPr wrap="square" lIns="0" tIns="0" rIns="0" bIns="0" rtlCol="0" anchor="ctr"/>
-          <a:lstStyle/>
-          <a:p>
-            <a:pPr indent="0" marL="0">
-              <a:buNone/>
-            </a:pPr>
-            <a:r>
-              <a:rPr lang="en-US" sz="3000" b="1" dirty="0">
-                <a:solidFill>
-                  <a:schemeClr val="accent2"/>
-                </a:solidFill>
-                <a:latin typeface="Arial" pitchFamily="34" charset="0"/>
-                <a:ea typeface="Arial" pitchFamily="34" charset="-122"/>
-                <a:cs typeface="Arial" pitchFamily="34" charset="-120"/>
-              </a:rPr>
-              <a:t>25 ms</a:t>
-            </a:r>
-            <a:endParaRPr lang="en-US" sz="3000" dirty="0"/>
-          </a:p>
-        </p:txBody>
-      </p:sp>
-      <p:sp>
-        <p:nvSpPr>
-          <p:cNvPr id="34" name="kpi label 0"/>
-          <p:cNvSpPr txBox="1"/>
-          <p:nvPr/>
-        </p:nvSpPr>
-        <p:spPr>
-          <a:xfrm>
-            <a:off x="822960" y="4663440"/>
-            <a:ext cx="3017520" cy="548640"/>
-          </a:xfrm>
-          <a:prstGeom prst="rect">
-            <a:avLst/>
-          </a:prstGeom>
-          <a:noFill/>
-          <a:ln/>
-        </p:spPr>
-        <p:txBody>
-          <a:bodyPr wrap="square" lIns="0" tIns="0" rIns="0" bIns="0" rtlCol="0" anchor="t"/>
-          <a:lstStyle/>
-          <a:p>
-            <a:pPr indent="0" marL="0">
-              <a:buNone/>
-            </a:pPr>
-            <a:r>
-              <a:rPr lang="en-US" sz="1300" dirty="0">
-                <a:solidFill>
-                  <a:schemeClr val="tx1"/>
-                </a:solidFill>
-              </a:rPr>
-              <a:t>median alert latency on the edge (cloud only: 85 ms)</a:t>
-            </a:r>
-            <a:endParaRPr lang="en-US" sz="1300" dirty="0"/>
-          </a:p>
-        </p:txBody>
-      </p:sp>
-      <p:sp>
-        <p:nvSpPr>
-          <p:cNvPr id="35" name="kpi 1"/>
-          <p:cNvSpPr/>
-          <p:nvPr/>
-        </p:nvSpPr>
-        <p:spPr>
-          <a:xfrm>
-            <a:off x="4297680" y="3931920"/>
-            <a:ext cx="3566160" cy="1371600"/>
-          </a:xfrm>
-          <a:prstGeom prst="roundRect">
-            <a:avLst>
-              <a:gd name="adj" fmla="val 5333"/>
-            </a:avLst>
-          </a:prstGeom>
-          <a:solidFill>
-            <a:schemeClr val="bg2"/>
-          </a:solidFill>
-          <a:ln w="12700">
-            <a:solidFill>
-              <a:schemeClr val="bg2"/>
-            </a:solidFill>
-            <a:prstDash val="solid"/>
-          </a:ln>
-        </p:spPr>
-      </p:sp>
-      <p:sp>
-        <p:nvSpPr>
-          <p:cNvPr id="36" name="kpi number 1"/>
-          <p:cNvSpPr txBox="1"/>
-          <p:nvPr/>
-        </p:nvSpPr>
-        <p:spPr>
-          <a:xfrm>
-            <a:off x="4572000" y="4069080"/>
-            <a:ext cx="3017520" cy="594360"/>
-          </a:xfrm>
-          <a:prstGeom prst="rect">
-            <a:avLst/>
-          </a:prstGeom>
-          <a:noFill/>
-          <a:ln/>
-        </p:spPr>
-        <p:txBody>
-          <a:bodyPr wrap="square" lIns="0" tIns="0" rIns="0" bIns="0" rtlCol="0" anchor="ctr"/>
-          <a:lstStyle/>
-          <a:p>
-            <a:pPr indent="0" marL="0">
-              <a:buNone/>
-            </a:pPr>
-            <a:r>
-              <a:rPr lang="en-US" sz="3000" b="1" dirty="0">
-                <a:solidFill>
-                  <a:schemeClr val="accent2"/>
-                </a:solidFill>
-                <a:latin typeface="Arial" pitchFamily="34" charset="0"/>
-                <a:ea typeface="Arial" pitchFamily="34" charset="-122"/>
-                <a:cs typeface="Arial" pitchFamily="34" charset="-120"/>
-              </a:rPr>
-              <a:t>2.4 s</a:t>
-            </a:r>
-            <a:endParaRPr lang="en-US" sz="3000" dirty="0"/>
-          </a:p>
-        </p:txBody>
-      </p:sp>
-      <p:sp>
-        <p:nvSpPr>
-          <p:cNvPr id="37" name="kpi label 1"/>
-          <p:cNvSpPr txBox="1"/>
-          <p:nvPr/>
-        </p:nvSpPr>
-        <p:spPr>
-          <a:xfrm>
-            <a:off x="4572000" y="4663440"/>
-            <a:ext cx="3017520" cy="548640"/>
-          </a:xfrm>
-          <a:prstGeom prst="rect">
-            <a:avLst/>
-          </a:prstGeom>
-          <a:noFill/>
-          <a:ln/>
-        </p:spPr>
-        <p:txBody>
-          <a:bodyPr wrap="square" lIns="0" tIns="0" rIns="0" bIns="0" rtlCol="0" anchor="t"/>
-          <a:lstStyle/>
-          <a:p>
-            <a:pPr indent="0" marL="0">
-              <a:buNone/>
-            </a:pPr>
-            <a:r>
-              <a:rPr lang="en-US" sz="1300" dirty="0">
-                <a:solidFill>
-                  <a:schemeClr val="tx1"/>
-                </a:solidFill>
-              </a:rPr>
-              <a:t>median warning lead time; 100 % detected ≥ 1 s before contact</a:t>
-            </a:r>
-            <a:endParaRPr lang="en-US" sz="1300" dirty="0"/>
-          </a:p>
-        </p:txBody>
-      </p:sp>
-      <p:sp>
-        <p:nvSpPr>
-          <p:cNvPr id="38" name="kpi 2"/>
-          <p:cNvSpPr/>
-          <p:nvPr/>
-        </p:nvSpPr>
-        <p:spPr>
-          <a:xfrm>
-            <a:off x="8046720" y="3931920"/>
-            <a:ext cx="3566160" cy="1371600"/>
-          </a:xfrm>
-          <a:prstGeom prst="roundRect">
-            <a:avLst>
-              <a:gd name="adj" fmla="val 5333"/>
-            </a:avLst>
-          </a:prstGeom>
-          <a:solidFill>
-            <a:schemeClr val="bg2"/>
-          </a:solidFill>
-          <a:ln w="12700">
-            <a:solidFill>
-              <a:schemeClr val="bg2"/>
-            </a:solidFill>
-            <a:prstDash val="solid"/>
-          </a:ln>
-        </p:spPr>
-      </p:sp>
-      <p:sp>
-        <p:nvSpPr>
-          <p:cNvPr id="39" name="kpi number 2"/>
-          <p:cNvSpPr txBox="1"/>
-          <p:nvPr/>
-        </p:nvSpPr>
-        <p:spPr>
-          <a:xfrm>
-            <a:off x="8321040" y="4069080"/>
-            <a:ext cx="3017520" cy="594360"/>
-          </a:xfrm>
-          <a:prstGeom prst="rect">
-            <a:avLst/>
-          </a:prstGeom>
-          <a:noFill/>
-          <a:ln/>
-        </p:spPr>
-        <p:txBody>
-          <a:bodyPr wrap="square" lIns="0" tIns="0" rIns="0" bIns="0" rtlCol="0" anchor="ctr"/>
-          <a:lstStyle/>
-          <a:p>
-            <a:pPr indent="0" marL="0">
-              <a:buNone/>
-            </a:pPr>
-            <a:r>
-              <a:rPr lang="en-US" sz="3000" b="1" dirty="0">
-                <a:solidFill>
-                  <a:schemeClr val="accent2"/>
-                </a:solidFill>
-                <a:latin typeface="Arial" pitchFamily="34" charset="0"/>
-                <a:ea typeface="Arial" pitchFamily="34" charset="-122"/>
-                <a:cs typeface="Arial" pitchFamily="34" charset="-120"/>
-              </a:rPr>
-              <a:t>0.73 s</a:t>
-            </a:r>
-            <a:endParaRPr lang="en-US" sz="3000" dirty="0"/>
-          </a:p>
-        </p:txBody>
-      </p:sp>
-      <p:sp>
-        <p:nvSpPr>
-          <p:cNvPr id="40" name="kpi label 2"/>
-          <p:cNvSpPr txBox="1"/>
-          <p:nvPr/>
-        </p:nvSpPr>
-        <p:spPr>
-          <a:xfrm>
-            <a:off x="8321040" y="4663440"/>
-            <a:ext cx="3017520" cy="548640"/>
-          </a:xfrm>
-          <a:prstGeom prst="rect">
-            <a:avLst/>
-          </a:prstGeom>
-          <a:noFill/>
-          <a:ln/>
-        </p:spPr>
-        <p:txBody>
-          <a:bodyPr wrap="square" lIns="0" tIns="0" rIns="0" bIns="0" rtlCol="0" anchor="t"/>
-          <a:lstStyle/>
-          <a:p>
-            <a:pPr indent="0" marL="0">
-              <a:buNone/>
-            </a:pPr>
-            <a:r>
-              <a:rPr lang="en-US" sz="1300" dirty="0">
-                <a:solidFill>
-                  <a:schemeClr val="tx1"/>
-                </a:solidFill>
-              </a:rPr>
-              <a:t>standby MEC app takeover</a:t>
-            </a:r>
-            <a:endParaRPr lang="en-US" sz="1300" dirty="0"/>
-          </a:p>
-        </p:txBody>
-      </p:sp>
-      <p:sp>
-        <p:nvSpPr>
-          <p:cNvPr id="41" name="failure path"/>
-          <p:cNvSpPr txBox="1"/>
-          <p:nvPr/>
-        </p:nvSpPr>
-        <p:spPr>
-          <a:xfrm>
-            <a:off x="548640" y="5532120"/>
-            <a:ext cx="11064240" cy="640080"/>
-          </a:xfrm>
-          <a:prstGeom prst="rect">
-            <a:avLst/>
-          </a:prstGeom>
-          <a:noFill/>
-          <a:ln/>
-        </p:spPr>
-        <p:txBody>
-          <a:bodyPr wrap="square" lIns="0" tIns="0" rIns="0" bIns="0" rtlCol="0" anchor="t"/>
-          <a:lstStyle/>
-          <a:p>
-            <a:pPr indent="0" marL="0">
-              <a:buNone/>
-            </a:pPr>
-            <a:r>
-              <a:rPr lang="en-US" sz="1400" b="1" dirty="0">
-                <a:solidFill>
-                  <a:schemeClr val="accent3"/>
-                </a:solidFill>
-              </a:rPr>
-              <a:t>Failure path: </a:t>
-            </a:r>
-            <a:pPr indent="0" marL="0">
-              <a:buNone/>
-            </a:pPr>
-            <a:r>
-              <a:rPr lang="en-US" sz="1400" dirty="0">
-                <a:solidFill>
-                  <a:schemeClr val="tx1"/>
-                </a:solidFill>
-              </a:rPr>
-              <a:t>no heartbeat from the MEC app for 2 s → devices switch to UWB ranging and D2D state exchange; neighbours relay alerts to devices in coverage holes; stop only when nothing else is known.</a:t>
+              <a:t>option C per zone (MN-CSE, MEC app and MEC-IPE on the zone's MEC host), with an IN-CSE in the cloud for home records, announcements, the FL coordinator, the orchestrator and the AI agent. Option B also runs (MEC app against a CSE on another node).</a:t>
             </a:r>
             <a:endParaRPr lang="en-US" sz="1400" dirty="0"/>
           </a:p>
@@ -4317,7 +4492,7 @@
                   <a:schemeClr val="tx2"/>
                 </a:solidFill>
               </a:rPr>
-              <a:t>Status today: working end to end</a:t>
+              <a:t>Mobility: moving across zones, handover, signal strength</a:t>
             </a:r>
             <a:endParaRPr lang="en-US" sz="3000" dirty="0"/>
           </a:p>
@@ -4325,7 +4500,7 @@
       </p:sp>
       <p:pic>
         <p:nvPicPr>
-          <p:cNvPr id="3" name="done icon 0" descr="preencoded.png">    </p:cNvPr>
+          <p:cNvPr id="3" name="mobility map" descr="Forklift moving from zone A to zone B on a floor plan, serving CSE, MEC zone event, RSRP of both cells and handover markers">    </p:cNvPr>
           <p:cNvPicPr>
             <a:picLocks noChangeAspect="1"/>
           </p:cNvPicPr>
@@ -4339,8 +4514,8 @@
         </p:blipFill>
         <p:spPr>
           <a:xfrm>
-            <a:off x="548640" y="1399032"/>
-            <a:ext cx="329184" cy="329184"/>
+            <a:off x="548640" y="1188720"/>
+            <a:ext cx="7470648" cy="5010912"/>
           </a:xfrm>
           <a:prstGeom prst="rect">
             <a:avLst/>
@@ -4349,354 +4524,18 @@
       </p:pic>
       <p:sp>
         <p:nvSpPr>
-          <p:cNvPr id="4" name="done item 0"/>
-          <p:cNvSpPr txBox="1"/>
-          <p:nvPr/>
-        </p:nvSpPr>
-        <p:spPr>
-          <a:xfrm>
-            <a:off x="1005840" y="1325880"/>
-            <a:ext cx="5120640" cy="594360"/>
-          </a:xfrm>
-          <a:prstGeom prst="rect">
-            <a:avLst/>
-          </a:prstGeom>
-          <a:noFill/>
-          <a:ln/>
-        </p:spPr>
-        <p:txBody>
-          <a:bodyPr wrap="square" lIns="0" tIns="0" rIns="0" bIns="0" rtlCol="0" anchor="ctr"/>
-          <a:lstStyle/>
-          <a:p>
-            <a:pPr indent="0" marL="0">
-              <a:buNone/>
-            </a:pPr>
-            <a:r>
-              <a:rPr lang="en-US" sz="1400" dirty="0">
-                <a:solidFill>
-                  <a:schemeClr val="tx1"/>
-                </a:solidFill>
-              </a:rPr>
-              <a:t>Per-device AEs and ACPs (CREATE limited to subscriptions); access checks in CI</a:t>
-            </a:r>
-            <a:endParaRPr lang="en-US" sz="1400" dirty="0"/>
-          </a:p>
-        </p:txBody>
-      </p:sp>
-      <p:pic>
-        <p:nvPicPr>
-          <p:cNvPr id="5" name="done icon 1" descr="preencoded.png">    </p:cNvPr>
-          <p:cNvPicPr>
-            <a:picLocks noChangeAspect="1"/>
-          </p:cNvPicPr>
-          <p:nvPr/>
-        </p:nvPicPr>
-        <p:blipFill>
-          <a:blip r:embed="rId2"/>
-          <a:stretch>
-            <a:fillRect/>
-          </a:stretch>
-        </p:blipFill>
-        <p:spPr>
-          <a:xfrm>
-            <a:off x="548640" y="2148840"/>
-            <a:ext cx="329184" cy="329184"/>
-          </a:xfrm>
-          <a:prstGeom prst="rect">
-            <a:avLst/>
-          </a:prstGeom>
-        </p:spPr>
-      </p:pic>
-      <p:sp>
-        <p:nvSpPr>
-          <p:cNvPr id="6" name="done item 1"/>
-          <p:cNvSpPr txBox="1"/>
-          <p:nvPr/>
-        </p:nvSpPr>
-        <p:spPr>
-          <a:xfrm>
-            <a:off x="1005840" y="2075688"/>
-            <a:ext cx="5120640" cy="594360"/>
-          </a:xfrm>
-          <a:prstGeom prst="rect">
-            <a:avLst/>
-          </a:prstGeom>
-          <a:noFill/>
-          <a:ln/>
-        </p:spPr>
-        <p:txBody>
-          <a:bodyPr wrap="square" lIns="0" tIns="0" rIns="0" bIns="0" rtlCol="0" anchor="ctr"/>
-          <a:lstStyle/>
-          <a:p>
-            <a:pPr indent="0" marL="0">
-              <a:buNone/>
-            </a:pPr>
-            <a:r>
-              <a:rPr lang="en-US" sz="1400" dirty="0">
-                <a:solidFill>
-                  <a:schemeClr val="tx1"/>
-                </a:solidFill>
-              </a:rPr>
-              <a:t>SDT flexContainer twins, labels, discovery onboarding, SAREF semantic query</a:t>
-            </a:r>
-            <a:endParaRPr lang="en-US" sz="1400" dirty="0"/>
-          </a:p>
-        </p:txBody>
-      </p:sp>
-      <p:pic>
-        <p:nvPicPr>
-          <p:cNvPr id="7" name="done icon 2" descr="preencoded.png">    </p:cNvPr>
-          <p:cNvPicPr>
-            <a:picLocks noChangeAspect="1"/>
-          </p:cNvPicPr>
-          <p:nvPr/>
-        </p:nvPicPr>
-        <p:blipFill>
-          <a:blip r:embed="rId3"/>
-          <a:stretch>
-            <a:fillRect/>
-          </a:stretch>
-        </p:blipFill>
-        <p:spPr>
-          <a:xfrm>
-            <a:off x="548640" y="2898648"/>
-            <a:ext cx="329184" cy="329184"/>
-          </a:xfrm>
-          <a:prstGeom prst="rect">
-            <a:avLst/>
-          </a:prstGeom>
-        </p:spPr>
-      </p:pic>
-      <p:sp>
-        <p:nvSpPr>
-          <p:cNvPr id="8" name="done item 2"/>
-          <p:cNvSpPr txBox="1"/>
-          <p:nvPr/>
-        </p:nvSpPr>
-        <p:spPr>
-          <a:xfrm>
-            <a:off x="1005840" y="2825496"/>
-            <a:ext cx="5120640" cy="594360"/>
-          </a:xfrm>
-          <a:prstGeom prst="rect">
-            <a:avLst/>
-          </a:prstGeom>
-          <a:noFill/>
-          <a:ln/>
-        </p:spPr>
-        <p:txBody>
-          <a:bodyPr wrap="square" lIns="0" tIns="0" rIns="0" bIns="0" rtlCol="0" anchor="ctr"/>
-          <a:lstStyle/>
-          <a:p>
-            <a:pPr indent="0" marL="0">
-              <a:buNone/>
-            </a:pPr>
-            <a:r>
-              <a:rPr lang="en-US" sz="1400" dirty="0">
-                <a:solidFill>
-                  <a:schemeClr val="tx1"/>
-                </a:solidFill>
-              </a:rPr>
-              <a:t>CSE handover between zone MN-CSEs with announcement and home records</a:t>
-            </a:r>
-            <a:endParaRPr lang="en-US" sz="1400" dirty="0"/>
-          </a:p>
-        </p:txBody>
-      </p:sp>
-      <p:pic>
-        <p:nvPicPr>
-          <p:cNvPr id="9" name="done icon 3" descr="preencoded.png">    </p:cNvPr>
-          <p:cNvPicPr>
-            <a:picLocks noChangeAspect="1"/>
-          </p:cNvPicPr>
-          <p:nvPr/>
-        </p:nvPicPr>
-        <p:blipFill>
-          <a:blip r:embed="rId4"/>
-          <a:stretch>
-            <a:fillRect/>
-          </a:stretch>
-        </p:blipFill>
-        <p:spPr>
-          <a:xfrm>
-            <a:off x="548640" y="3648456"/>
-            <a:ext cx="329184" cy="329184"/>
-          </a:xfrm>
-          <a:prstGeom prst="rect">
-            <a:avLst/>
-          </a:prstGeom>
-        </p:spPr>
-      </p:pic>
-      <p:sp>
-        <p:nvSpPr>
-          <p:cNvPr id="10" name="done item 3"/>
-          <p:cNvSpPr txBox="1"/>
-          <p:nvPr/>
-        </p:nvSpPr>
-        <p:spPr>
-          <a:xfrm>
-            <a:off x="1005840" y="3575304"/>
-            <a:ext cx="5120640" cy="594360"/>
-          </a:xfrm>
-          <a:prstGeom prst="rect">
-            <a:avLst/>
-          </a:prstGeom>
-          <a:noFill/>
-          <a:ln/>
-        </p:spPr>
-        <p:txBody>
-          <a:bodyPr wrap="square" lIns="0" tIns="0" rIns="0" bIns="0" rtlCol="0" anchor="ctr"/>
-          <a:lstStyle/>
-          <a:p>
-            <a:pPr indent="0" marL="0">
-              <a:buNone/>
-            </a:pPr>
-            <a:r>
-              <a:rPr lang="en-US" sz="1400" dirty="0">
-                <a:solidFill>
-                  <a:schemeClr val="tx1"/>
-                </a:solidFill>
-              </a:rPr>
-              <a:t>Federated learning through oneM2M; AI safety agent over 4 MCP servers</a:t>
-            </a:r>
-            <a:endParaRPr lang="en-US" sz="1400" dirty="0"/>
-          </a:p>
-        </p:txBody>
-      </p:sp>
-      <p:pic>
-        <p:nvPicPr>
-          <p:cNvPr id="11" name="done icon 4" descr="preencoded.png">    </p:cNvPr>
-          <p:cNvPicPr>
-            <a:picLocks noChangeAspect="1"/>
-          </p:cNvPicPr>
-          <p:nvPr/>
-        </p:nvPicPr>
-        <p:blipFill>
-          <a:blip r:embed="rId5"/>
-          <a:stretch>
-            <a:fillRect/>
-          </a:stretch>
-        </p:blipFill>
-        <p:spPr>
-          <a:xfrm>
-            <a:off x="548640" y="4398264"/>
-            <a:ext cx="329184" cy="329184"/>
-          </a:xfrm>
-          <a:prstGeom prst="rect">
-            <a:avLst/>
-          </a:prstGeom>
-        </p:spPr>
-      </p:pic>
-      <p:sp>
-        <p:nvSpPr>
-          <p:cNvPr id="12" name="done item 4"/>
-          <p:cNvSpPr txBox="1"/>
-          <p:nvPr/>
-        </p:nvSpPr>
-        <p:spPr>
-          <a:xfrm>
-            <a:off x="1005840" y="4325112"/>
-            <a:ext cx="5120640" cy="594360"/>
-          </a:xfrm>
-          <a:prstGeom prst="rect">
-            <a:avLst/>
-          </a:prstGeom>
-          <a:noFill/>
-          <a:ln/>
-        </p:spPr>
-        <p:txBody>
-          <a:bodyPr wrap="square" lIns="0" tIns="0" rIns="0" bIns="0" rtlCol="0" anchor="ctr"/>
-          <a:lstStyle/>
-          <a:p>
-            <a:pPr indent="0" marL="0">
-              <a:buNone/>
-            </a:pPr>
-            <a:r>
-              <a:rPr lang="en-US" sz="1400" dirty="0">
-                <a:solidFill>
-                  <a:schemeClr val="tx1"/>
-                </a:solidFill>
-              </a:rPr>
-              <a:t>ETSI MEC Sandbox and AdvantEDGE; MEC app with HA, monitoring, dashboard</a:t>
-            </a:r>
-            <a:endParaRPr lang="en-US" sz="1400" dirty="0"/>
-          </a:p>
-        </p:txBody>
-      </p:sp>
-      <p:pic>
-        <p:nvPicPr>
-          <p:cNvPr id="13" name="done icon 5" descr="preencoded.png">    </p:cNvPr>
-          <p:cNvPicPr>
-            <a:picLocks noChangeAspect="1"/>
-          </p:cNvPicPr>
-          <p:nvPr/>
-        </p:nvPicPr>
-        <p:blipFill>
-          <a:blip r:embed="rId6"/>
-          <a:stretch>
-            <a:fillRect/>
-          </a:stretch>
-        </p:blipFill>
-        <p:spPr>
-          <a:xfrm>
-            <a:off x="548640" y="5148072"/>
-            <a:ext cx="329184" cy="329184"/>
-          </a:xfrm>
-          <a:prstGeom prst="rect">
-            <a:avLst/>
-          </a:prstGeom>
-        </p:spPr>
-      </p:pic>
-      <p:sp>
-        <p:nvSpPr>
-          <p:cNvPr id="14" name="done item 5"/>
-          <p:cNvSpPr txBox="1"/>
-          <p:nvPr/>
-        </p:nvSpPr>
-        <p:spPr>
-          <a:xfrm>
-            <a:off x="1005840" y="5074920"/>
-            <a:ext cx="5120640" cy="594360"/>
-          </a:xfrm>
-          <a:prstGeom prst="rect">
-            <a:avLst/>
-          </a:prstGeom>
-          <a:noFill/>
-          <a:ln/>
-        </p:spPr>
-        <p:txBody>
-          <a:bodyPr wrap="square" lIns="0" tIns="0" rIns="0" bIns="0" rtlCol="0" anchor="ctr"/>
-          <a:lstStyle/>
-          <a:p>
-            <a:pPr indent="0" marL="0">
-              <a:buNone/>
-            </a:pPr>
-            <a:r>
-              <a:rPr lang="en-US" sz="1400" dirty="0">
-                <a:solidFill>
-                  <a:schemeClr val="tx1"/>
-                </a:solidFill>
-              </a:rPr>
-              <a:t>ESP32 firmware run unmodified against a real CSE in CI; hackster.io draft</a:t>
-            </a:r>
-            <a:endParaRPr lang="en-US" sz="1400" dirty="0"/>
-          </a:p>
-        </p:txBody>
-      </p:sp>
-      <p:sp>
-        <p:nvSpPr>
-          <p:cNvPr id="15" name="result 0"/>
+          <p:cNvPr id="4" name="mobility card 0"/>
           <p:cNvSpPr/>
           <p:nvPr/>
         </p:nvSpPr>
         <p:spPr>
           <a:xfrm>
-            <a:off x="6583680" y="1325880"/>
-            <a:ext cx="5029200" cy="1325880"/>
+            <a:off x="8229600" y="1188720"/>
+            <a:ext cx="3410712" cy="1554480"/>
           </a:xfrm>
           <a:prstGeom prst="roundRect">
             <a:avLst>
-              <a:gd name="adj" fmla="val 5517"/>
+              <a:gd name="adj" fmla="val 4706"/>
             </a:avLst>
           </a:prstGeom>
           <a:solidFill>
@@ -4712,14 +4551,14 @@
       </p:sp>
       <p:sp>
         <p:nvSpPr>
-          <p:cNvPr id="16" name="result number 0"/>
+          <p:cNvPr id="5" name="mobility head 0"/>
           <p:cNvSpPr txBox="1"/>
           <p:nvPr/>
         </p:nvSpPr>
         <p:spPr>
           <a:xfrm>
-            <a:off x="6858000" y="1463040"/>
-            <a:ext cx="4480560" cy="594360"/>
+            <a:off x="8412480" y="1325880"/>
+            <a:ext cx="3063240" cy="365760"/>
           </a:xfrm>
           <a:prstGeom prst="rect">
             <a:avLst/>
@@ -4735,30 +4574,27 @@
               <a:buNone/>
             </a:pPr>
             <a:r>
-              <a:rPr lang="en-US" sz="3000" b="1" dirty="0">
+              <a:rPr lang="en-US" sz="1600" b="1" dirty="0">
                 <a:solidFill>
                   <a:schemeClr val="tx2"/>
                 </a:solidFill>
-                <a:latin typeface="Arial" pitchFamily="34" charset="0"/>
-                <a:ea typeface="Arial" pitchFamily="34" charset="-122"/>
-                <a:cs typeface="Arial" pitchFamily="34" charset="-120"/>
-              </a:rPr>
-              <a:t>100 → 4</a:t>
-            </a:r>
-            <a:endParaRPr lang="en-US" sz="3000" dirty="0"/>
-          </a:p>
-        </p:txBody>
-      </p:sp>
-      <p:sp>
-        <p:nvSpPr>
-          <p:cNvPr id="17" name="result label 0"/>
+              </a:rPr>
+              <a:t>Trigger</a:t>
+            </a:r>
+            <a:endParaRPr lang="en-US" sz="1600" dirty="0"/>
+          </a:p>
+        </p:txBody>
+      </p:sp>
+      <p:sp>
+        <p:nvSpPr>
+          <p:cNvPr id="6" name="mobility body 0"/>
           <p:cNvSpPr txBox="1"/>
           <p:nvPr/>
         </p:nvSpPr>
         <p:spPr>
           <a:xfrm>
-            <a:off x="6858000" y="2057400"/>
-            <a:ext cx="4480560" cy="457200"/>
+            <a:off x="8412480" y="1737360"/>
+            <a:ext cx="3063240" cy="914400"/>
           </a:xfrm>
           <a:prstGeom prst="rect">
             <a:avLst/>
@@ -4767,7 +4603,7 @@
           <a:ln/>
         </p:spPr>
         <p:txBody>
-          <a:bodyPr wrap="square" lIns="0" tIns="0" rIns="0" bIns="0" rtlCol="0" anchor="ctr"/>
+          <a:bodyPr wrap="square" lIns="0" tIns="0" rIns="0" bIns="0" rtlCol="0" anchor="t"/>
           <a:lstStyle/>
           <a:p>
             <a:pPr indent="0" marL="0">
@@ -4776,10 +4612,10 @@
             <a:r>
               <a:rPr lang="en-US" sz="1300" dirty="0">
                 <a:solidFill>
-                  <a:schemeClr val="accent6"/>
-                </a:solidFill>
-              </a:rPr>
-              <a:t>collisions, many-to-many site (8 workers, 4 forklifts, 750 conflicts)</a:t>
+                  <a:schemeClr val="tx1"/>
+                </a:solidFill>
+              </a:rPr>
+              <a:t>MEC zone event ENTERING zoneB → MEC-IPE → oneM2M → device starts the handover</a:t>
             </a:r>
             <a:endParaRPr lang="en-US" sz="1300" dirty="0"/>
           </a:p>
@@ -4787,18 +4623,18 @@
       </p:sp>
       <p:sp>
         <p:nvSpPr>
-          <p:cNvPr id="18" name="result 1"/>
+          <p:cNvPr id="7" name="mobility card 1"/>
           <p:cNvSpPr/>
           <p:nvPr/>
         </p:nvSpPr>
         <p:spPr>
           <a:xfrm>
-            <a:off x="6583680" y="2834640"/>
-            <a:ext cx="5029200" cy="1325880"/>
+            <a:off x="8229600" y="2880360"/>
+            <a:ext cx="3410712" cy="1554480"/>
           </a:xfrm>
           <a:prstGeom prst="roundRect">
             <a:avLst>
-              <a:gd name="adj" fmla="val 5517"/>
+              <a:gd name="adj" fmla="val 4706"/>
             </a:avLst>
           </a:prstGeom>
           <a:solidFill>
@@ -4814,14 +4650,14 @@
       </p:sp>
       <p:sp>
         <p:nvSpPr>
-          <p:cNvPr id="19" name="result number 1"/>
+          <p:cNvPr id="8" name="mobility head 1"/>
           <p:cNvSpPr txBox="1"/>
           <p:nvPr/>
         </p:nvSpPr>
         <p:spPr>
           <a:xfrm>
-            <a:off x="6858000" y="2971800"/>
-            <a:ext cx="4480560" cy="594360"/>
+            <a:off x="8412480" y="3017520"/>
+            <a:ext cx="3063240" cy="365760"/>
           </a:xfrm>
           <a:prstGeom prst="rect">
             <a:avLst/>
@@ -4837,30 +4673,27 @@
               <a:buNone/>
             </a:pPr>
             <a:r>
-              <a:rPr lang="en-US" sz="3000" b="1" dirty="0">
+              <a:rPr lang="en-US" sz="1600" b="1" dirty="0">
                 <a:solidFill>
                   <a:schemeClr val="tx2"/>
                 </a:solidFill>
-                <a:latin typeface="Arial" pitchFamily="34" charset="0"/>
-                <a:ea typeface="Arial" pitchFamily="34" charset="-122"/>
-                <a:cs typeface="Arial" pitchFamily="34" charset="-120"/>
-              </a:rPr>
-              <a:t>61.7 → 86.0 %</a:t>
-            </a:r>
-            <a:endParaRPr lang="en-US" sz="3000" dirty="0"/>
-          </a:p>
-        </p:txBody>
-      </p:sp>
-      <p:sp>
-        <p:nvSpPr>
-          <p:cNvPr id="20" name="result label 1"/>
+              </a:rPr>
+              <a:t>Continuity</a:t>
+            </a:r>
+            <a:endParaRPr lang="en-US" sz="1600" dirty="0"/>
+          </a:p>
+        </p:txBody>
+      </p:sp>
+      <p:sp>
+        <p:nvSpPr>
+          <p:cNvPr id="9" name="mobility body 1"/>
           <p:cNvSpPr txBox="1"/>
           <p:nvPr/>
         </p:nvSpPr>
         <p:spPr>
           <a:xfrm>
-            <a:off x="6858000" y="3566160"/>
-            <a:ext cx="4480560" cy="457200"/>
+            <a:off x="8412480" y="3429000"/>
+            <a:ext cx="3063240" cy="914400"/>
           </a:xfrm>
           <a:prstGeom prst="rect">
             <a:avLst/>
@@ -4869,7 +4702,7 @@
           <a:ln/>
         </p:spPr>
         <p:txBody>
-          <a:bodyPr wrap="square" lIns="0" tIns="0" rIns="0" bIns="0" rtlCol="0" anchor="ctr"/>
+          <a:bodyPr wrap="square" lIns="0" tIns="0" rIns="0" bIns="0" rtlCol="0" anchor="t"/>
           <a:lstStyle/>
           <a:p>
             <a:pPr indent="0" marL="0">
@@ -4878,10 +4711,10 @@
             <a:r>
               <a:rPr lang="en-US" sz="1300" dirty="0">
                 <a:solidFill>
-                  <a:schemeClr val="accent6"/>
-                </a:solidFill>
-              </a:rPr>
-              <a:t>forklift throughput on the same site</a:t>
+                  <a:schemeClr val="tx1"/>
+                </a:solidFill>
+              </a:rPr>
+              <a:t>A → B → A: 1.5–8 ms interruption, 0 samples lost</a:t>
             </a:r>
             <a:endParaRPr lang="en-US" sz="1300" dirty="0"/>
           </a:p>
@@ -4889,18 +4722,18 @@
       </p:sp>
       <p:sp>
         <p:nvSpPr>
-          <p:cNvPr id="21" name="result 2"/>
+          <p:cNvPr id="10" name="mobility card 2"/>
           <p:cNvSpPr/>
           <p:nvPr/>
         </p:nvSpPr>
         <p:spPr>
           <a:xfrm>
-            <a:off x="6583680" y="4343400"/>
-            <a:ext cx="5029200" cy="1325880"/>
+            <a:off x="8229600" y="4572000"/>
+            <a:ext cx="3410712" cy="1554480"/>
           </a:xfrm>
           <a:prstGeom prst="roundRect">
             <a:avLst>
-              <a:gd name="adj" fmla="val 5517"/>
+              <a:gd name="adj" fmla="val 4706"/>
             </a:avLst>
           </a:prstGeom>
           <a:solidFill>
@@ -4916,14 +4749,14 @@
       </p:sp>
       <p:sp>
         <p:nvSpPr>
-          <p:cNvPr id="22" name="result number 2"/>
+          <p:cNvPr id="11" name="mobility head 2"/>
           <p:cNvSpPr txBox="1"/>
           <p:nvPr/>
         </p:nvSpPr>
         <p:spPr>
           <a:xfrm>
-            <a:off x="6858000" y="4480560"/>
-            <a:ext cx="4480560" cy="594360"/>
+            <a:off x="8412480" y="4709160"/>
+            <a:ext cx="3063240" cy="365760"/>
           </a:xfrm>
           <a:prstGeom prst="rect">
             <a:avLst/>
@@ -4939,30 +4772,27 @@
               <a:buNone/>
             </a:pPr>
             <a:r>
-              <a:rPr lang="en-US" sz="3000" b="1" dirty="0">
+              <a:rPr lang="en-US" sz="1600" b="1" dirty="0">
                 <a:solidFill>
                   <a:schemeClr val="tx2"/>
                 </a:solidFill>
-                <a:latin typeface="Arial" pitchFamily="34" charset="0"/>
-                <a:ea typeface="Arial" pitchFamily="34" charset="-122"/>
-                <a:cs typeface="Arial" pitchFamily="34" charset="-120"/>
-              </a:rPr>
-              <a:t>180 → 2</a:t>
-            </a:r>
-            <a:endParaRPr lang="en-US" sz="3000" dirty="0"/>
-          </a:p>
-        </p:txBody>
-      </p:sp>
-      <p:sp>
-        <p:nvSpPr>
-          <p:cNvPr id="23" name="result label 2"/>
+              </a:rPr>
+              <a:t>Other MEC service</a:t>
+            </a:r>
+            <a:endParaRPr lang="en-US" sz="1600" dirty="0"/>
+          </a:p>
+        </p:txBody>
+      </p:sp>
+      <p:sp>
+        <p:nvSpPr>
+          <p:cNvPr id="12" name="mobility body 2"/>
           <p:cNvSpPr txBox="1"/>
           <p:nvPr/>
         </p:nvSpPr>
         <p:spPr>
           <a:xfrm>
-            <a:off x="6858000" y="5074920"/>
-            <a:ext cx="4480560" cy="457200"/>
+            <a:off x="8412480" y="5120640"/>
+            <a:ext cx="3063240" cy="914400"/>
           </a:xfrm>
           <a:prstGeom prst="rect">
             <a:avLst/>
@@ -4971,7 +4801,7 @@
           <a:ln/>
         </p:spPr>
         <p:txBody>
-          <a:bodyPr wrap="square" lIns="0" tIns="0" rIns="0" bIns="0" rtlCol="0" anchor="ctr"/>
+          <a:bodyPr wrap="square" lIns="0" tIns="0" rIns="0" bIns="0" rtlCol="0" anchor="t"/>
           <a:lstStyle/>
           <a:p>
             <a:pPr indent="0" marL="0">
@@ -4980,48 +4810,12 @@
             <a:r>
               <a:rPr lang="en-US" sz="1300" dirty="0">
                 <a:solidFill>
-                  <a:schemeClr val="accent6"/>
-                </a:solidFill>
-              </a:rPr>
-              <a:t>collisions during a total network outage</a:t>
+                  <a:schemeClr val="tx1"/>
+                </a:solidFill>
+              </a:rPr>
+              <a:t>RNIS signal strength per UE in egs:rdLnk; cells cross at ≈ −90 dBm at the boundary</a:t>
             </a:r>
             <a:endParaRPr lang="en-US" sz="1300" dirty="0"/>
-          </a:p>
-        </p:txBody>
-      </p:sp>
-      <p:sp>
-        <p:nvSpPr>
-          <p:cNvPr id="24" name="result note"/>
-          <p:cNvSpPr txBox="1"/>
-          <p:nvPr/>
-        </p:nvSpPr>
-        <p:spPr>
-          <a:xfrm>
-            <a:off x="6583680" y="5897880"/>
-            <a:ext cx="5029200" cy="320040"/>
-          </a:xfrm>
-          <a:prstGeom prst="rect">
-            <a:avLst/>
-          </a:prstGeom>
-          <a:noFill/>
-          <a:ln/>
-        </p:spPr>
-        <p:txBody>
-          <a:bodyPr wrap="square" lIns="0" tIns="0" rIns="0" bIns="0" rtlCol="0" anchor="ctr"/>
-          <a:lstStyle/>
-          <a:p>
-            <a:pPr indent="0" marL="0">
-              <a:buNone/>
-            </a:pPr>
-            <a:r>
-              <a:rPr lang="en-US" sz="1100" dirty="0">
-                <a:solidFill>
-                  <a:schemeClr val="accent6"/>
-                </a:solidFill>
-              </a:rPr>
-              <a:t>Closed-loop simulation; baseline = our v1.0 vibration-only alert, same simulator.</a:t>
-            </a:r>
-            <a:endParaRPr lang="en-US" sz="1100" dirty="0"/>
           </a:p>
         </p:txBody>
       </p:sp>
@@ -5127,7 +4921,7 @@
                   <a:schemeClr val="tx2"/>
                 </a:solidFill>
               </a:rPr>
-              <a:t>Built ahead of plan: measured in CI on every commit</a:t>
+              <a:t>End-to-end flow: from a position to a cue</a:t>
             </a:r>
             <a:endParaRPr lang="en-US" sz="3000" dirty="0"/>
           </a:p>
@@ -5135,18 +4929,931 @@
       </p:sp>
       <p:sp>
         <p:nvSpPr>
-          <p:cNvPr id="3" name="ahead card Data model"/>
+          <p:cNvPr id="3" name="step dot 1"/>
           <p:cNvSpPr/>
           <p:nvPr/>
         </p:nvSpPr>
         <p:spPr>
           <a:xfrm>
-            <a:off x="548640" y="1325880"/>
-            <a:ext cx="5440680" cy="2286000"/>
+            <a:off x="1143000" y="1417320"/>
+            <a:ext cx="548640" cy="548640"/>
+          </a:xfrm>
+          <a:prstGeom prst="ellipse">
+            <a:avLst/>
+          </a:prstGeom>
+          <a:solidFill>
+            <a:schemeClr val="tx2"/>
+          </a:solidFill>
+          <a:ln w="12700">
+            <a:solidFill>
+              <a:schemeClr val="tx2"/>
+            </a:solidFill>
+            <a:prstDash val="solid"/>
+          </a:ln>
+        </p:spPr>
+      </p:sp>
+      <p:sp>
+        <p:nvSpPr>
+          <p:cNvPr id="4" name="step num 1"/>
+          <p:cNvSpPr txBox="1"/>
+          <p:nvPr/>
+        </p:nvSpPr>
+        <p:spPr>
+          <a:xfrm>
+            <a:off x="1143000" y="1417320"/>
+            <a:ext cx="548640" cy="548640"/>
+          </a:xfrm>
+          <a:prstGeom prst="rect">
+            <a:avLst/>
+          </a:prstGeom>
+          <a:noFill/>
+          <a:ln/>
+        </p:spPr>
+        <p:txBody>
+          <a:bodyPr wrap="square" lIns="0" tIns="0" rIns="0" bIns="0" rtlCol="0" anchor="ctr"/>
+          <a:lstStyle/>
+          <a:p>
+            <a:pPr algn="ctr" indent="0" marL="0">
+              <a:buNone/>
+            </a:pPr>
+            <a:r>
+              <a:rPr lang="en-US" sz="1600" b="1" dirty="0">
+                <a:solidFill>
+                  <a:schemeClr val="bg1"/>
+                </a:solidFill>
+              </a:rPr>
+              <a:t>1</a:t>
+            </a:r>
+            <a:endParaRPr lang="en-US" sz="1600" dirty="0"/>
+          </a:p>
+        </p:txBody>
+      </p:sp>
+      <p:sp>
+        <p:nvSpPr>
+          <p:cNvPr id="5" name="step link 1"/>
+          <p:cNvSpPr/>
+          <p:nvPr/>
+        </p:nvSpPr>
+        <p:spPr>
+          <a:xfrm>
+            <a:off x="1783080" y="1691640"/>
+            <a:ext cx="1600200" cy="0"/>
+          </a:xfrm>
+          <a:prstGeom prst="line">
+            <a:avLst/>
+          </a:prstGeom>
+          <a:noFill/>
+          <a:ln w="19050">
+            <a:solidFill>
+              <a:srgbClr val="C9D0D8"/>
+            </a:solidFill>
+            <a:prstDash val="solid"/>
+          </a:ln>
+        </p:spPr>
+      </p:sp>
+      <p:sp>
+        <p:nvSpPr>
+          <p:cNvPr id="6" name="step head 1"/>
+          <p:cNvSpPr txBox="1"/>
+          <p:nvPr/>
+        </p:nvSpPr>
+        <p:spPr>
+          <a:xfrm>
+            <a:off x="548640" y="2148840"/>
+            <a:ext cx="1737360" cy="365760"/>
+          </a:xfrm>
+          <a:prstGeom prst="rect">
+            <a:avLst/>
+          </a:prstGeom>
+          <a:noFill/>
+          <a:ln/>
+        </p:spPr>
+        <p:txBody>
+          <a:bodyPr wrap="square" lIns="0" tIns="0" rIns="0" bIns="0" rtlCol="0" anchor="ctr"/>
+          <a:lstStyle/>
+          <a:p>
+            <a:pPr algn="ctr" indent="0" marL="0">
+              <a:buNone/>
+            </a:pPr>
+            <a:r>
+              <a:rPr lang="en-US" sz="1600" b="1" dirty="0">
+                <a:solidFill>
+                  <a:schemeClr val="tx2"/>
+                </a:solidFill>
+              </a:rPr>
+              <a:t>Sense</a:t>
+            </a:r>
+            <a:endParaRPr lang="en-US" sz="1600" dirty="0"/>
+          </a:p>
+        </p:txBody>
+      </p:sp>
+      <p:sp>
+        <p:nvSpPr>
+          <p:cNvPr id="7" name="step body 1"/>
+          <p:cNvSpPr txBox="1"/>
+          <p:nvPr/>
+        </p:nvSpPr>
+        <p:spPr>
+          <a:xfrm>
+            <a:off x="548640" y="2560320"/>
+            <a:ext cx="1737360" cy="1005840"/>
+          </a:xfrm>
+          <a:prstGeom prst="rect">
+            <a:avLst/>
+          </a:prstGeom>
+          <a:noFill/>
+          <a:ln/>
+        </p:spPr>
+        <p:txBody>
+          <a:bodyPr wrap="square" lIns="0" tIns="0" rIns="0" bIns="0" rtlCol="0" anchor="t"/>
+          <a:lstStyle/>
+          <a:p>
+            <a:pPr algn="ctr" indent="0" marL="0">
+              <a:buNone/>
+            </a:pPr>
+            <a:r>
+              <a:rPr lang="en-US" sz="1300" dirty="0">
+                <a:solidFill>
+                  <a:schemeClr val="tx1"/>
+                </a:solidFill>
+              </a:rPr>
+              <a:t>Tag / module updates its kinematics flexContainer</a:t>
+            </a:r>
+            <a:endParaRPr lang="en-US" sz="1300" dirty="0"/>
+          </a:p>
+        </p:txBody>
+      </p:sp>
+      <p:sp>
+        <p:nvSpPr>
+          <p:cNvPr id="8" name="step dot 2"/>
+          <p:cNvSpPr/>
+          <p:nvPr/>
+        </p:nvSpPr>
+        <p:spPr>
+          <a:xfrm>
+            <a:off x="3017520" y="1417320"/>
+            <a:ext cx="548640" cy="548640"/>
+          </a:xfrm>
+          <a:prstGeom prst="ellipse">
+            <a:avLst/>
+          </a:prstGeom>
+          <a:solidFill>
+            <a:schemeClr val="tx2"/>
+          </a:solidFill>
+          <a:ln w="12700">
+            <a:solidFill>
+              <a:schemeClr val="tx2"/>
+            </a:solidFill>
+            <a:prstDash val="solid"/>
+          </a:ln>
+        </p:spPr>
+      </p:sp>
+      <p:sp>
+        <p:nvSpPr>
+          <p:cNvPr id="9" name="step num 2"/>
+          <p:cNvSpPr txBox="1"/>
+          <p:nvPr/>
+        </p:nvSpPr>
+        <p:spPr>
+          <a:xfrm>
+            <a:off x="3017520" y="1417320"/>
+            <a:ext cx="548640" cy="548640"/>
+          </a:xfrm>
+          <a:prstGeom prst="rect">
+            <a:avLst/>
+          </a:prstGeom>
+          <a:noFill/>
+          <a:ln/>
+        </p:spPr>
+        <p:txBody>
+          <a:bodyPr wrap="square" lIns="0" tIns="0" rIns="0" bIns="0" rtlCol="0" anchor="ctr"/>
+          <a:lstStyle/>
+          <a:p>
+            <a:pPr algn="ctr" indent="0" marL="0">
+              <a:buNone/>
+            </a:pPr>
+            <a:r>
+              <a:rPr lang="en-US" sz="1600" b="1" dirty="0">
+                <a:solidFill>
+                  <a:schemeClr val="bg1"/>
+                </a:solidFill>
+              </a:rPr>
+              <a:t>2</a:t>
+            </a:r>
+            <a:endParaRPr lang="en-US" sz="1600" dirty="0"/>
+          </a:p>
+        </p:txBody>
+      </p:sp>
+      <p:sp>
+        <p:nvSpPr>
+          <p:cNvPr id="10" name="step link 2"/>
+          <p:cNvSpPr/>
+          <p:nvPr/>
+        </p:nvSpPr>
+        <p:spPr>
+          <a:xfrm>
+            <a:off x="3657600" y="1691640"/>
+            <a:ext cx="1600200" cy="0"/>
+          </a:xfrm>
+          <a:prstGeom prst="line">
+            <a:avLst/>
+          </a:prstGeom>
+          <a:noFill/>
+          <a:ln w="19050">
+            <a:solidFill>
+              <a:srgbClr val="C9D0D8"/>
+            </a:solidFill>
+            <a:prstDash val="solid"/>
+          </a:ln>
+        </p:spPr>
+      </p:sp>
+      <p:sp>
+        <p:nvSpPr>
+          <p:cNvPr id="11" name="step head 2"/>
+          <p:cNvSpPr txBox="1"/>
+          <p:nvPr/>
+        </p:nvSpPr>
+        <p:spPr>
+          <a:xfrm>
+            <a:off x="2423160" y="2148840"/>
+            <a:ext cx="1737360" cy="365760"/>
+          </a:xfrm>
+          <a:prstGeom prst="rect">
+            <a:avLst/>
+          </a:prstGeom>
+          <a:noFill/>
+          <a:ln/>
+        </p:spPr>
+        <p:txBody>
+          <a:bodyPr wrap="square" lIns="0" tIns="0" rIns="0" bIns="0" rtlCol="0" anchor="ctr"/>
+          <a:lstStyle/>
+          <a:p>
+            <a:pPr algn="ctr" indent="0" marL="0">
+              <a:buNone/>
+            </a:pPr>
+            <a:r>
+              <a:rPr lang="en-US" sz="1600" b="1" dirty="0">
+                <a:solidFill>
+                  <a:schemeClr val="tx2"/>
+                </a:solidFill>
+              </a:rPr>
+              <a:t>Notify</a:t>
+            </a:r>
+            <a:endParaRPr lang="en-US" sz="1600" dirty="0"/>
+          </a:p>
+        </p:txBody>
+      </p:sp>
+      <p:sp>
+        <p:nvSpPr>
+          <p:cNvPr id="12" name="step body 2"/>
+          <p:cNvSpPr txBox="1"/>
+          <p:nvPr/>
+        </p:nvSpPr>
+        <p:spPr>
+          <a:xfrm>
+            <a:off x="2423160" y="2560320"/>
+            <a:ext cx="1737360" cy="1005840"/>
+          </a:xfrm>
+          <a:prstGeom prst="rect">
+            <a:avLst/>
+          </a:prstGeom>
+          <a:noFill/>
+          <a:ln/>
+        </p:spPr>
+        <p:txBody>
+          <a:bodyPr wrap="square" lIns="0" tIns="0" rIns="0" bIns="0" rtlCol="0" anchor="t"/>
+          <a:lstStyle/>
+          <a:p>
+            <a:pPr algn="ctr" indent="0" marL="0">
+              <a:buNone/>
+            </a:pPr>
+            <a:r>
+              <a:rPr lang="en-US" sz="1300" dirty="0">
+                <a:solidFill>
+                  <a:schemeClr val="tx1"/>
+                </a:solidFill>
+              </a:rPr>
+              <a:t>zone MN-CSE notifies the MEC app (subscription)</a:t>
+            </a:r>
+            <a:endParaRPr lang="en-US" sz="1300" dirty="0"/>
+          </a:p>
+        </p:txBody>
+      </p:sp>
+      <p:sp>
+        <p:nvSpPr>
+          <p:cNvPr id="13" name="step dot 3"/>
+          <p:cNvSpPr/>
+          <p:nvPr/>
+        </p:nvSpPr>
+        <p:spPr>
+          <a:xfrm>
+            <a:off x="4892040" y="1417320"/>
+            <a:ext cx="548640" cy="548640"/>
+          </a:xfrm>
+          <a:prstGeom prst="ellipse">
+            <a:avLst/>
+          </a:prstGeom>
+          <a:solidFill>
+            <a:schemeClr val="tx2"/>
+          </a:solidFill>
+          <a:ln w="12700">
+            <a:solidFill>
+              <a:schemeClr val="tx2"/>
+            </a:solidFill>
+            <a:prstDash val="solid"/>
+          </a:ln>
+        </p:spPr>
+      </p:sp>
+      <p:sp>
+        <p:nvSpPr>
+          <p:cNvPr id="14" name="step num 3"/>
+          <p:cNvSpPr txBox="1"/>
+          <p:nvPr/>
+        </p:nvSpPr>
+        <p:spPr>
+          <a:xfrm>
+            <a:off x="4892040" y="1417320"/>
+            <a:ext cx="548640" cy="548640"/>
+          </a:xfrm>
+          <a:prstGeom prst="rect">
+            <a:avLst/>
+          </a:prstGeom>
+          <a:noFill/>
+          <a:ln/>
+        </p:spPr>
+        <p:txBody>
+          <a:bodyPr wrap="square" lIns="0" tIns="0" rIns="0" bIns="0" rtlCol="0" anchor="ctr"/>
+          <a:lstStyle/>
+          <a:p>
+            <a:pPr algn="ctr" indent="0" marL="0">
+              <a:buNone/>
+            </a:pPr>
+            <a:r>
+              <a:rPr lang="en-US" sz="1600" b="1" dirty="0">
+                <a:solidFill>
+                  <a:schemeClr val="bg1"/>
+                </a:solidFill>
+              </a:rPr>
+              <a:t>3</a:t>
+            </a:r>
+            <a:endParaRPr lang="en-US" sz="1600" dirty="0"/>
+          </a:p>
+        </p:txBody>
+      </p:sp>
+      <p:sp>
+        <p:nvSpPr>
+          <p:cNvPr id="15" name="step link 3"/>
+          <p:cNvSpPr/>
+          <p:nvPr/>
+        </p:nvSpPr>
+        <p:spPr>
+          <a:xfrm>
+            <a:off x="5532120" y="1691640"/>
+            <a:ext cx="1600200" cy="0"/>
+          </a:xfrm>
+          <a:prstGeom prst="line">
+            <a:avLst/>
+          </a:prstGeom>
+          <a:noFill/>
+          <a:ln w="19050">
+            <a:solidFill>
+              <a:srgbClr val="C9D0D8"/>
+            </a:solidFill>
+            <a:prstDash val="solid"/>
+          </a:ln>
+        </p:spPr>
+      </p:sp>
+      <p:sp>
+        <p:nvSpPr>
+          <p:cNvPr id="16" name="step head 3"/>
+          <p:cNvSpPr txBox="1"/>
+          <p:nvPr/>
+        </p:nvSpPr>
+        <p:spPr>
+          <a:xfrm>
+            <a:off x="4297680" y="2148840"/>
+            <a:ext cx="1737360" cy="365760"/>
+          </a:xfrm>
+          <a:prstGeom prst="rect">
+            <a:avLst/>
+          </a:prstGeom>
+          <a:noFill/>
+          <a:ln/>
+        </p:spPr>
+        <p:txBody>
+          <a:bodyPr wrap="square" lIns="0" tIns="0" rIns="0" bIns="0" rtlCol="0" anchor="ctr"/>
+          <a:lstStyle/>
+          <a:p>
+            <a:pPr algn="ctr" indent="0" marL="0">
+              <a:buNone/>
+            </a:pPr>
+            <a:r>
+              <a:rPr lang="en-US" sz="1600" b="1" dirty="0">
+                <a:solidFill>
+                  <a:schemeClr val="tx2"/>
+                </a:solidFill>
+              </a:rPr>
+              <a:t>Predict</a:t>
+            </a:r>
+            <a:endParaRPr lang="en-US" sz="1600" dirty="0"/>
+          </a:p>
+        </p:txBody>
+      </p:sp>
+      <p:sp>
+        <p:nvSpPr>
+          <p:cNvPr id="17" name="step body 3"/>
+          <p:cNvSpPr txBox="1"/>
+          <p:nvPr/>
+        </p:nvSpPr>
+        <p:spPr>
+          <a:xfrm>
+            <a:off x="4297680" y="2560320"/>
+            <a:ext cx="1737360" cy="1005840"/>
+          </a:xfrm>
+          <a:prstGeom prst="rect">
+            <a:avLst/>
+          </a:prstGeom>
+          <a:noFill/>
+          <a:ln/>
+        </p:spPr>
+        <p:txBody>
+          <a:bodyPr wrap="square" lIns="0" tIns="0" rIns="0" bIns="0" rtlCol="0" anchor="t"/>
+          <a:lstStyle/>
+          <a:p>
+            <a:pPr algn="ctr" indent="0" marL="0">
+              <a:buNone/>
+            </a:pPr>
+            <a:r>
+              <a:rPr lang="en-US" sz="1300" dirty="0">
+                <a:solidFill>
+                  <a:schemeClr val="tx1"/>
+                </a:solidFill>
+              </a:rPr>
+              <a:t>Kalman tracking, forklift turn model or shared route</a:t>
+            </a:r>
+            <a:endParaRPr lang="en-US" sz="1300" dirty="0"/>
+          </a:p>
+        </p:txBody>
+      </p:sp>
+      <p:sp>
+        <p:nvSpPr>
+          <p:cNvPr id="18" name="step dot 4"/>
+          <p:cNvSpPr/>
+          <p:nvPr/>
+        </p:nvSpPr>
+        <p:spPr>
+          <a:xfrm>
+            <a:off x="6766560" y="1417320"/>
+            <a:ext cx="548640" cy="548640"/>
+          </a:xfrm>
+          <a:prstGeom prst="ellipse">
+            <a:avLst/>
+          </a:prstGeom>
+          <a:solidFill>
+            <a:schemeClr val="tx2"/>
+          </a:solidFill>
+          <a:ln w="12700">
+            <a:solidFill>
+              <a:schemeClr val="tx2"/>
+            </a:solidFill>
+            <a:prstDash val="solid"/>
+          </a:ln>
+        </p:spPr>
+      </p:sp>
+      <p:sp>
+        <p:nvSpPr>
+          <p:cNvPr id="19" name="step num 4"/>
+          <p:cNvSpPr txBox="1"/>
+          <p:nvPr/>
+        </p:nvSpPr>
+        <p:spPr>
+          <a:xfrm>
+            <a:off x="6766560" y="1417320"/>
+            <a:ext cx="548640" cy="548640"/>
+          </a:xfrm>
+          <a:prstGeom prst="rect">
+            <a:avLst/>
+          </a:prstGeom>
+          <a:noFill/>
+          <a:ln/>
+        </p:spPr>
+        <p:txBody>
+          <a:bodyPr wrap="square" lIns="0" tIns="0" rIns="0" bIns="0" rtlCol="0" anchor="ctr"/>
+          <a:lstStyle/>
+          <a:p>
+            <a:pPr algn="ctr" indent="0" marL="0">
+              <a:buNone/>
+            </a:pPr>
+            <a:r>
+              <a:rPr lang="en-US" sz="1600" b="1" dirty="0">
+                <a:solidFill>
+                  <a:schemeClr val="bg1"/>
+                </a:solidFill>
+              </a:rPr>
+              <a:t>4</a:t>
+            </a:r>
+            <a:endParaRPr lang="en-US" sz="1600" dirty="0"/>
+          </a:p>
+        </p:txBody>
+      </p:sp>
+      <p:sp>
+        <p:nvSpPr>
+          <p:cNvPr id="20" name="step link 4"/>
+          <p:cNvSpPr/>
+          <p:nvPr/>
+        </p:nvSpPr>
+        <p:spPr>
+          <a:xfrm>
+            <a:off x="7406640" y="1691640"/>
+            <a:ext cx="1600200" cy="0"/>
+          </a:xfrm>
+          <a:prstGeom prst="line">
+            <a:avLst/>
+          </a:prstGeom>
+          <a:noFill/>
+          <a:ln w="19050">
+            <a:solidFill>
+              <a:srgbClr val="C9D0D8"/>
+            </a:solidFill>
+            <a:prstDash val="solid"/>
+          </a:ln>
+        </p:spPr>
+      </p:sp>
+      <p:sp>
+        <p:nvSpPr>
+          <p:cNvPr id="21" name="step head 4"/>
+          <p:cNvSpPr txBox="1"/>
+          <p:nvPr/>
+        </p:nvSpPr>
+        <p:spPr>
+          <a:xfrm>
+            <a:off x="6172200" y="2148840"/>
+            <a:ext cx="1737360" cy="365760"/>
+          </a:xfrm>
+          <a:prstGeom prst="rect">
+            <a:avLst/>
+          </a:prstGeom>
+          <a:noFill/>
+          <a:ln/>
+        </p:spPr>
+        <p:txBody>
+          <a:bodyPr wrap="square" lIns="0" tIns="0" rIns="0" bIns="0" rtlCol="0" anchor="ctr"/>
+          <a:lstStyle/>
+          <a:p>
+            <a:pPr algn="ctr" indent="0" marL="0">
+              <a:buNone/>
+            </a:pPr>
+            <a:r>
+              <a:rPr lang="en-US" sz="1600" b="1" dirty="0">
+                <a:solidFill>
+                  <a:schemeClr val="tx2"/>
+                </a:solidFill>
+              </a:rPr>
+              <a:t>Decide</a:t>
+            </a:r>
+            <a:endParaRPr lang="en-US" sz="1600" dirty="0"/>
+          </a:p>
+        </p:txBody>
+      </p:sp>
+      <p:sp>
+        <p:nvSpPr>
+          <p:cNvPr id="22" name="step body 4"/>
+          <p:cNvSpPr txBox="1"/>
+          <p:nvPr/>
+        </p:nvSpPr>
+        <p:spPr>
+          <a:xfrm>
+            <a:off x="6172200" y="2560320"/>
+            <a:ext cx="1737360" cy="1005840"/>
+          </a:xfrm>
+          <a:prstGeom prst="rect">
+            <a:avLst/>
+          </a:prstGeom>
+          <a:noFill/>
+          <a:ln/>
+        </p:spPr>
+        <p:txBody>
+          <a:bodyPr wrap="square" lIns="0" tIns="0" rIns="0" bIns="0" rtlCol="0" anchor="t"/>
+          <a:lstStyle/>
+          <a:p>
+            <a:pPr algn="ctr" indent="0" marL="0">
+              <a:buNone/>
+            </a:pPr>
+            <a:r>
+              <a:rPr lang="en-US" sz="1300" dirty="0">
+                <a:solidFill>
+                  <a:schemeClr val="tx1"/>
+                </a:solidFill>
+              </a:rPr>
+              <a:t>Collision course: LOS rate + closest approach</a:t>
+            </a:r>
+            <a:endParaRPr lang="en-US" sz="1300" dirty="0"/>
+          </a:p>
+        </p:txBody>
+      </p:sp>
+      <p:sp>
+        <p:nvSpPr>
+          <p:cNvPr id="23" name="step dot 5"/>
+          <p:cNvSpPr/>
+          <p:nvPr/>
+        </p:nvSpPr>
+        <p:spPr>
+          <a:xfrm>
+            <a:off x="8641080" y="1417320"/>
+            <a:ext cx="548640" cy="548640"/>
+          </a:xfrm>
+          <a:prstGeom prst="ellipse">
+            <a:avLst/>
+          </a:prstGeom>
+          <a:solidFill>
+            <a:schemeClr val="accent1"/>
+          </a:solidFill>
+          <a:ln w="12700">
+            <a:solidFill>
+              <a:schemeClr val="accent1"/>
+            </a:solidFill>
+            <a:prstDash val="solid"/>
+          </a:ln>
+        </p:spPr>
+      </p:sp>
+      <p:sp>
+        <p:nvSpPr>
+          <p:cNvPr id="24" name="step num 5"/>
+          <p:cNvSpPr txBox="1"/>
+          <p:nvPr/>
+        </p:nvSpPr>
+        <p:spPr>
+          <a:xfrm>
+            <a:off x="8641080" y="1417320"/>
+            <a:ext cx="548640" cy="548640"/>
+          </a:xfrm>
+          <a:prstGeom prst="rect">
+            <a:avLst/>
+          </a:prstGeom>
+          <a:noFill/>
+          <a:ln/>
+        </p:spPr>
+        <p:txBody>
+          <a:bodyPr wrap="square" lIns="0" tIns="0" rIns="0" bIns="0" rtlCol="0" anchor="ctr"/>
+          <a:lstStyle/>
+          <a:p>
+            <a:pPr algn="ctr" indent="0" marL="0">
+              <a:buNone/>
+            </a:pPr>
+            <a:r>
+              <a:rPr lang="en-US" sz="1600" b="1" dirty="0">
+                <a:solidFill>
+                  <a:schemeClr val="tx2"/>
+                </a:solidFill>
+              </a:rPr>
+              <a:t>5</a:t>
+            </a:r>
+            <a:endParaRPr lang="en-US" sz="1600" dirty="0"/>
+          </a:p>
+        </p:txBody>
+      </p:sp>
+      <p:sp>
+        <p:nvSpPr>
+          <p:cNvPr id="25" name="step link 5"/>
+          <p:cNvSpPr/>
+          <p:nvPr/>
+        </p:nvSpPr>
+        <p:spPr>
+          <a:xfrm>
+            <a:off x="9281160" y="1691640"/>
+            <a:ext cx="1600200" cy="0"/>
+          </a:xfrm>
+          <a:prstGeom prst="line">
+            <a:avLst/>
+          </a:prstGeom>
+          <a:noFill/>
+          <a:ln w="19050">
+            <a:solidFill>
+              <a:srgbClr val="C9D0D8"/>
+            </a:solidFill>
+            <a:prstDash val="solid"/>
+          </a:ln>
+        </p:spPr>
+      </p:sp>
+      <p:sp>
+        <p:nvSpPr>
+          <p:cNvPr id="26" name="step head 5"/>
+          <p:cNvSpPr txBox="1"/>
+          <p:nvPr/>
+        </p:nvSpPr>
+        <p:spPr>
+          <a:xfrm>
+            <a:off x="8046720" y="2148840"/>
+            <a:ext cx="1737360" cy="365760"/>
+          </a:xfrm>
+          <a:prstGeom prst="rect">
+            <a:avLst/>
+          </a:prstGeom>
+          <a:noFill/>
+          <a:ln/>
+        </p:spPr>
+        <p:txBody>
+          <a:bodyPr wrap="square" lIns="0" tIns="0" rIns="0" bIns="0" rtlCol="0" anchor="ctr"/>
+          <a:lstStyle/>
+          <a:p>
+            <a:pPr algn="ctr" indent="0" marL="0">
+              <a:buNone/>
+            </a:pPr>
+            <a:r>
+              <a:rPr lang="en-US" sz="1600" b="1" dirty="0">
+                <a:solidFill>
+                  <a:schemeClr val="tx2"/>
+                </a:solidFill>
+              </a:rPr>
+              <a:t>Cue</a:t>
+            </a:r>
+            <a:endParaRPr lang="en-US" sz="1600" dirty="0"/>
+          </a:p>
+        </p:txBody>
+      </p:sp>
+      <p:sp>
+        <p:nvSpPr>
+          <p:cNvPr id="27" name="step body 5"/>
+          <p:cNvSpPr txBox="1"/>
+          <p:nvPr/>
+        </p:nvSpPr>
+        <p:spPr>
+          <a:xfrm>
+            <a:off x="8046720" y="2560320"/>
+            <a:ext cx="1737360" cy="1005840"/>
+          </a:xfrm>
+          <a:prstGeom prst="rect">
+            <a:avLst/>
+          </a:prstGeom>
+          <a:noFill/>
+          <a:ln/>
+        </p:spPr>
+        <p:txBody>
+          <a:bodyPr wrap="square" lIns="0" tIns="0" rIns="0" bIns="0" rtlCol="0" anchor="t"/>
+          <a:lstStyle/>
+          <a:p>
+            <a:pPr algn="ctr" indent="0" marL="0">
+              <a:buNone/>
+            </a:pPr>
+            <a:r>
+              <a:rPr lang="en-US" sz="1300" dirty="0">
+                <a:solidFill>
+                  <a:schemeClr val="tx1"/>
+                </a:solidFill>
+              </a:rPr>
+              <a:t>Alert CIN → tag WAIT / STEP ASIDE / GO, forklift limit</a:t>
+            </a:r>
+            <a:endParaRPr lang="en-US" sz="1300" dirty="0"/>
+          </a:p>
+        </p:txBody>
+      </p:sp>
+      <p:sp>
+        <p:nvSpPr>
+          <p:cNvPr id="28" name="step dot 6"/>
+          <p:cNvSpPr/>
+          <p:nvPr/>
+        </p:nvSpPr>
+        <p:spPr>
+          <a:xfrm>
+            <a:off x="10515600" y="1417320"/>
+            <a:ext cx="548640" cy="548640"/>
+          </a:xfrm>
+          <a:prstGeom prst="ellipse">
+            <a:avLst/>
+          </a:prstGeom>
+          <a:solidFill>
+            <a:schemeClr val="tx2"/>
+          </a:solidFill>
+          <a:ln w="12700">
+            <a:solidFill>
+              <a:schemeClr val="tx2"/>
+            </a:solidFill>
+            <a:prstDash val="solid"/>
+          </a:ln>
+        </p:spPr>
+      </p:sp>
+      <p:sp>
+        <p:nvSpPr>
+          <p:cNvPr id="29" name="step num 6"/>
+          <p:cNvSpPr txBox="1"/>
+          <p:nvPr/>
+        </p:nvSpPr>
+        <p:spPr>
+          <a:xfrm>
+            <a:off x="10515600" y="1417320"/>
+            <a:ext cx="548640" cy="548640"/>
+          </a:xfrm>
+          <a:prstGeom prst="rect">
+            <a:avLst/>
+          </a:prstGeom>
+          <a:noFill/>
+          <a:ln/>
+        </p:spPr>
+        <p:txBody>
+          <a:bodyPr wrap="square" lIns="0" tIns="0" rIns="0" bIns="0" rtlCol="0" anchor="ctr"/>
+          <a:lstStyle/>
+          <a:p>
+            <a:pPr algn="ctr" indent="0" marL="0">
+              <a:buNone/>
+            </a:pPr>
+            <a:r>
+              <a:rPr lang="en-US" sz="1600" b="1" dirty="0">
+                <a:solidFill>
+                  <a:schemeClr val="bg1"/>
+                </a:solidFill>
+              </a:rPr>
+              <a:t>6</a:t>
+            </a:r>
+            <a:endParaRPr lang="en-US" sz="1600" dirty="0"/>
+          </a:p>
+        </p:txBody>
+      </p:sp>
+      <p:sp>
+        <p:nvSpPr>
+          <p:cNvPr id="30" name="step head 6"/>
+          <p:cNvSpPr txBox="1"/>
+          <p:nvPr/>
+        </p:nvSpPr>
+        <p:spPr>
+          <a:xfrm>
+            <a:off x="9921240" y="2148840"/>
+            <a:ext cx="1737360" cy="365760"/>
+          </a:xfrm>
+          <a:prstGeom prst="rect">
+            <a:avLst/>
+          </a:prstGeom>
+          <a:noFill/>
+          <a:ln/>
+        </p:spPr>
+        <p:txBody>
+          <a:bodyPr wrap="square" lIns="0" tIns="0" rIns="0" bIns="0" rtlCol="0" anchor="ctr"/>
+          <a:lstStyle/>
+          <a:p>
+            <a:pPr algn="ctr" indent="0" marL="0">
+              <a:buNone/>
+            </a:pPr>
+            <a:r>
+              <a:rPr lang="en-US" sz="1600" b="1" dirty="0">
+                <a:solidFill>
+                  <a:schemeClr val="tx2"/>
+                </a:solidFill>
+              </a:rPr>
+              <a:t>Confirm</a:t>
+            </a:r>
+            <a:endParaRPr lang="en-US" sz="1600" dirty="0"/>
+          </a:p>
+        </p:txBody>
+      </p:sp>
+      <p:sp>
+        <p:nvSpPr>
+          <p:cNvPr id="31" name="step body 6"/>
+          <p:cNvSpPr txBox="1"/>
+          <p:nvPr/>
+        </p:nvSpPr>
+        <p:spPr>
+          <a:xfrm>
+            <a:off x="9921240" y="2560320"/>
+            <a:ext cx="1737360" cy="1005840"/>
+          </a:xfrm>
+          <a:prstGeom prst="rect">
+            <a:avLst/>
+          </a:prstGeom>
+          <a:noFill/>
+          <a:ln/>
+        </p:spPr>
+        <p:txBody>
+          <a:bodyPr wrap="square" lIns="0" tIns="0" rIns="0" bIns="0" rtlCol="0" anchor="t"/>
+          <a:lstStyle/>
+          <a:p>
+            <a:pPr algn="ctr" indent="0" marL="0">
+              <a:buNone/>
+            </a:pPr>
+            <a:r>
+              <a:rPr lang="en-US" sz="1300" dirty="0">
+                <a:solidFill>
+                  <a:schemeClr val="tx1"/>
+                </a:solidFill>
+              </a:rPr>
+              <a:t>Device reports its cue / speed limit in its twin</a:t>
+            </a:r>
+            <a:endParaRPr lang="en-US" sz="1300" dirty="0"/>
+          </a:p>
+        </p:txBody>
+      </p:sp>
+      <p:sp>
+        <p:nvSpPr>
+          <p:cNvPr id="32" name="kpi 0"/>
+          <p:cNvSpPr/>
+          <p:nvPr/>
+        </p:nvSpPr>
+        <p:spPr>
+          <a:xfrm>
+            <a:off x="548640" y="3931920"/>
+            <a:ext cx="3566160" cy="1371600"/>
           </a:xfrm>
           <a:prstGeom prst="roundRect">
             <a:avLst>
-              <a:gd name="adj" fmla="val 3200"/>
+              <a:gd name="adj" fmla="val 5333"/>
             </a:avLst>
           </a:prstGeom>
           <a:solidFill>
@@ -5162,14 +5869,14 @@
       </p:sp>
       <p:sp>
         <p:nvSpPr>
-          <p:cNvPr id="4" name="ahead head Data model"/>
+          <p:cNvPr id="33" name="kpi number 0"/>
           <p:cNvSpPr txBox="1"/>
           <p:nvPr/>
         </p:nvSpPr>
         <p:spPr>
           <a:xfrm>
-            <a:off x="822960" y="1554480"/>
-            <a:ext cx="4892040" cy="411480"/>
+            <a:off x="822960" y="4069080"/>
+            <a:ext cx="3017520" cy="594360"/>
           </a:xfrm>
           <a:prstGeom prst="rect">
             <a:avLst/>
@@ -5185,27 +5892,30 @@
               <a:buNone/>
             </a:pPr>
             <a:r>
-              <a:rPr lang="en-US" sz="2000" b="1" dirty="0">
-                <a:solidFill>
-                  <a:schemeClr val="tx2"/>
-                </a:solidFill>
-              </a:rPr>
-              <a:t>Data model</a:t>
-            </a:r>
-            <a:endParaRPr lang="en-US" sz="2000" dirty="0"/>
-          </a:p>
-        </p:txBody>
-      </p:sp>
-      <p:sp>
-        <p:nvSpPr>
-          <p:cNvPr id="5" name="ahead body Data model"/>
+              <a:rPr lang="en-US" sz="3000" b="1" dirty="0">
+                <a:solidFill>
+                  <a:schemeClr val="accent2"/>
+                </a:solidFill>
+                <a:latin typeface="Arial" pitchFamily="34" charset="0"/>
+                <a:ea typeface="Arial" pitchFamily="34" charset="-122"/>
+                <a:cs typeface="Arial" pitchFamily="34" charset="-120"/>
+              </a:rPr>
+              <a:t>25 ms</a:t>
+            </a:r>
+            <a:endParaRPr lang="en-US" sz="3000" dirty="0"/>
+          </a:p>
+        </p:txBody>
+      </p:sp>
+      <p:sp>
+        <p:nvSpPr>
+          <p:cNvPr id="34" name="kpi label 0"/>
           <p:cNvSpPr txBox="1"/>
           <p:nvPr/>
         </p:nvSpPr>
         <p:spPr>
           <a:xfrm>
-            <a:off x="822960" y="2057400"/>
-            <a:ext cx="4892040" cy="868680"/>
+            <a:off x="822960" y="4663440"/>
+            <a:ext cx="3017520" cy="548640"/>
           </a:xfrm>
           <a:prstGeom prst="rect">
             <a:avLst/>
@@ -5221,67 +5931,31 @@
               <a:buNone/>
             </a:pPr>
             <a:r>
-              <a:rPr lang="en-US" sz="1400" dirty="0">
+              <a:rPr lang="en-US" sz="1300" dirty="0">
                 <a:solidFill>
                   <a:schemeClr val="tx1"/>
                 </a:solidFill>
               </a:rPr>
-              <a:t>SDT flexContainer twins (own domain + standard cod:bat), labels, SAREF semantic query</a:t>
-            </a:r>
-            <a:endParaRPr lang="en-US" sz="1400" dirty="0"/>
-          </a:p>
-        </p:txBody>
-      </p:sp>
-      <p:sp>
-        <p:nvSpPr>
-          <p:cNvPr id="6" name="ahead metric Data model"/>
-          <p:cNvSpPr txBox="1"/>
-          <p:nvPr/>
-        </p:nvSpPr>
-        <p:spPr>
-          <a:xfrm>
-            <a:off x="822960" y="2971800"/>
-            <a:ext cx="4892040" cy="457200"/>
-          </a:xfrm>
-          <a:prstGeom prst="rect">
-            <a:avLst/>
-          </a:prstGeom>
-          <a:noFill/>
-          <a:ln/>
-        </p:spPr>
-        <p:txBody>
-          <a:bodyPr wrap="square" lIns="0" tIns="0" rIns="0" bIns="0" rtlCol="0" anchor="t"/>
-          <a:lstStyle/>
-          <a:p>
-            <a:pPr indent="0" marL="0">
-              <a:buNone/>
-            </a:pPr>
-            <a:r>
-              <a:rPr lang="en-US" sz="1400" b="1" dirty="0">
-                <a:solidFill>
-                  <a:schemeClr val="accent2"/>
-                </a:solidFill>
-              </a:rPr>
-              <a:t>self-registered device onboarded in ≈ 9 s · 6/6 checks</a:t>
-            </a:r>
-            <a:endParaRPr lang="en-US" sz="1400" dirty="0"/>
-          </a:p>
-        </p:txBody>
-      </p:sp>
-      <p:sp>
-        <p:nvSpPr>
-          <p:cNvPr id="7" name="ahead card CSE handover"/>
+              <a:t>median alert latency on the edge (cloud only: 85 ms)</a:t>
+            </a:r>
+            <a:endParaRPr lang="en-US" sz="1300" dirty="0"/>
+          </a:p>
+        </p:txBody>
+      </p:sp>
+      <p:sp>
+        <p:nvSpPr>
+          <p:cNvPr id="35" name="kpi 1"/>
           <p:cNvSpPr/>
           <p:nvPr/>
         </p:nvSpPr>
         <p:spPr>
           <a:xfrm>
-            <a:off x="6172200" y="1325880"/>
-            <a:ext cx="5440680" cy="2286000"/>
+            <a:off x="4297680" y="3931920"/>
+            <a:ext cx="3566160" cy="1371600"/>
           </a:xfrm>
           <a:prstGeom prst="roundRect">
             <a:avLst>
-              <a:gd name="adj" fmla="val 3200"/>
+              <a:gd name="adj" fmla="val 5333"/>
             </a:avLst>
           </a:prstGeom>
           <a:solidFill>
@@ -5297,14 +5971,14 @@
       </p:sp>
       <p:sp>
         <p:nvSpPr>
-          <p:cNvPr id="8" name="ahead head CSE handover"/>
+          <p:cNvPr id="36" name="kpi number 1"/>
           <p:cNvSpPr txBox="1"/>
           <p:nvPr/>
         </p:nvSpPr>
         <p:spPr>
           <a:xfrm>
-            <a:off x="6446520" y="1554480"/>
-            <a:ext cx="4892040" cy="411480"/>
+            <a:off x="4572000" y="4069080"/>
+            <a:ext cx="3017520" cy="594360"/>
           </a:xfrm>
           <a:prstGeom prst="rect">
             <a:avLst/>
@@ -5320,27 +5994,30 @@
               <a:buNone/>
             </a:pPr>
             <a:r>
-              <a:rPr lang="en-US" sz="2000" b="1" dirty="0">
-                <a:solidFill>
-                  <a:schemeClr val="tx2"/>
-                </a:solidFill>
-              </a:rPr>
-              <a:t>CSE handover</a:t>
-            </a:r>
-            <a:endParaRPr lang="en-US" sz="2000" dirty="0"/>
-          </a:p>
-        </p:txBody>
-      </p:sp>
-      <p:sp>
-        <p:nvSpPr>
-          <p:cNvPr id="9" name="ahead body CSE handover"/>
+              <a:rPr lang="en-US" sz="3000" b="1" dirty="0">
+                <a:solidFill>
+                  <a:schemeClr val="accent2"/>
+                </a:solidFill>
+                <a:latin typeface="Arial" pitchFamily="34" charset="0"/>
+                <a:ea typeface="Arial" pitchFamily="34" charset="-122"/>
+                <a:cs typeface="Arial" pitchFamily="34" charset="-120"/>
+              </a:rPr>
+              <a:t>2.4 s</a:t>
+            </a:r>
+            <a:endParaRPr lang="en-US" sz="3000" dirty="0"/>
+          </a:p>
+        </p:txBody>
+      </p:sp>
+      <p:sp>
+        <p:nvSpPr>
+          <p:cNvPr id="37" name="kpi label 1"/>
           <p:cNvSpPr txBox="1"/>
           <p:nvPr/>
         </p:nvSpPr>
         <p:spPr>
           <a:xfrm>
-            <a:off x="6446520" y="2057400"/>
-            <a:ext cx="4892040" cy="868680"/>
+            <a:off x="4572000" y="4663440"/>
+            <a:ext cx="3017520" cy="548640"/>
           </a:xfrm>
           <a:prstGeom prst="rect">
             <a:avLst/>
@@ -5356,67 +6033,31 @@
               <a:buNone/>
             </a:pPr>
             <a:r>
-              <a:rPr lang="en-US" sz="1400" dirty="0">
+              <a:rPr lang="en-US" sz="1300" dirty="0">
                 <a:solidFill>
                   <a:schemeClr val="tx1"/>
                 </a:solidFill>
               </a:rPr>
-              <a:t>forklift AE moves between zone MN-CSEs with state, ACP, subscriptions; announcement + home record</a:t>
-            </a:r>
-            <a:endParaRPr lang="en-US" sz="1400" dirty="0"/>
-          </a:p>
-        </p:txBody>
-      </p:sp>
-      <p:sp>
-        <p:nvSpPr>
-          <p:cNvPr id="10" name="ahead metric CSE handover"/>
-          <p:cNvSpPr txBox="1"/>
-          <p:nvPr/>
-        </p:nvSpPr>
-        <p:spPr>
-          <a:xfrm>
-            <a:off x="6446520" y="2971800"/>
-            <a:ext cx="4892040" cy="457200"/>
-          </a:xfrm>
-          <a:prstGeom prst="rect">
-            <a:avLst/>
-          </a:prstGeom>
-          <a:noFill/>
-          <a:ln/>
-        </p:spPr>
-        <p:txBody>
-          <a:bodyPr wrap="square" lIns="0" tIns="0" rIns="0" bIns="0" rtlCol="0" anchor="t"/>
-          <a:lstStyle/>
-          <a:p>
-            <a:pPr indent="0" marL="0">
-              <a:buNone/>
-            </a:pPr>
-            <a:r>
-              <a:rPr lang="en-US" sz="1400" b="1" dirty="0">
-                <a:solidFill>
-                  <a:schemeClr val="accent2"/>
-                </a:solidFill>
-              </a:rPr>
-              <a:t>3–11 ms interruption, 0 samples lost · failover ≈ 0.3 s</a:t>
-            </a:r>
-            <a:endParaRPr lang="en-US" sz="1400" dirty="0"/>
-          </a:p>
-        </p:txBody>
-      </p:sp>
-      <p:sp>
-        <p:nvSpPr>
-          <p:cNvPr id="11" name="ahead card Federated learning"/>
+              <a:t>median warning lead time; 100 % detected ≥ 1 s before contact</a:t>
+            </a:r>
+            <a:endParaRPr lang="en-US" sz="1300" dirty="0"/>
+          </a:p>
+        </p:txBody>
+      </p:sp>
+      <p:sp>
+        <p:nvSpPr>
+          <p:cNvPr id="38" name="kpi 2"/>
           <p:cNvSpPr/>
           <p:nvPr/>
         </p:nvSpPr>
         <p:spPr>
           <a:xfrm>
-            <a:off x="548640" y="3794760"/>
-            <a:ext cx="5440680" cy="2286000"/>
+            <a:off x="8046720" y="3931920"/>
+            <a:ext cx="3566160" cy="1371600"/>
           </a:xfrm>
           <a:prstGeom prst="roundRect">
             <a:avLst>
-              <a:gd name="adj" fmla="val 3200"/>
+              <a:gd name="adj" fmla="val 5333"/>
             </a:avLst>
           </a:prstGeom>
           <a:solidFill>
@@ -5432,14 +6073,14 @@
       </p:sp>
       <p:sp>
         <p:nvSpPr>
-          <p:cNvPr id="12" name="ahead head Federated learning"/>
+          <p:cNvPr id="39" name="kpi number 2"/>
           <p:cNvSpPr txBox="1"/>
           <p:nvPr/>
         </p:nvSpPr>
         <p:spPr>
           <a:xfrm>
-            <a:off x="822960" y="4023360"/>
-            <a:ext cx="4892040" cy="411480"/>
+            <a:off x="8321040" y="4069080"/>
+            <a:ext cx="3017520" cy="594360"/>
           </a:xfrm>
           <a:prstGeom prst="rect">
             <a:avLst/>
@@ -5455,27 +6096,30 @@
               <a:buNone/>
             </a:pPr>
             <a:r>
-              <a:rPr lang="en-US" sz="2000" b="1" dirty="0">
-                <a:solidFill>
-                  <a:schemeClr val="tx2"/>
-                </a:solidFill>
-              </a:rPr>
-              <a:t>Federated learning</a:t>
-            </a:r>
-            <a:endParaRPr lang="en-US" sz="2000" dirty="0"/>
-          </a:p>
-        </p:txBody>
-      </p:sp>
-      <p:sp>
-        <p:nvSpPr>
-          <p:cNvPr id="13" name="ahead body Federated learning"/>
+              <a:rPr lang="en-US" sz="3000" b="1" dirty="0">
+                <a:solidFill>
+                  <a:schemeClr val="accent2"/>
+                </a:solidFill>
+                <a:latin typeface="Arial" pitchFamily="34" charset="0"/>
+                <a:ea typeface="Arial" pitchFamily="34" charset="-122"/>
+                <a:cs typeface="Arial" pitchFamily="34" charset="-120"/>
+              </a:rPr>
+              <a:t>0.73 s</a:t>
+            </a:r>
+            <a:endParaRPr lang="en-US" sz="3000" dirty="0"/>
+          </a:p>
+        </p:txBody>
+      </p:sp>
+      <p:sp>
+        <p:nvSpPr>
+          <p:cNvPr id="40" name="kpi label 2"/>
           <p:cNvSpPr txBox="1"/>
           <p:nvPr/>
         </p:nvSpPr>
         <p:spPr>
           <a:xfrm>
-            <a:off x="822960" y="4526280"/>
-            <a:ext cx="4892040" cy="868680"/>
+            <a:off x="8321040" y="4663440"/>
+            <a:ext cx="3017520" cy="548640"/>
           </a:xfrm>
           <a:prstGeom prst="rect">
             <a:avLst/>
@@ -5491,183 +6135,59 @@
               <a:buNone/>
             </a:pPr>
             <a:r>
+              <a:rPr lang="en-US" sz="1300" dirty="0">
+                <a:solidFill>
+                  <a:schemeClr val="tx1"/>
+                </a:solidFill>
+              </a:rPr>
+              <a:t>standby MEC app takeover</a:t>
+            </a:r>
+            <a:endParaRPr lang="en-US" sz="1300" dirty="0"/>
+          </a:p>
+        </p:txBody>
+      </p:sp>
+      <p:sp>
+        <p:nvSpPr>
+          <p:cNvPr id="41" name="failure path"/>
+          <p:cNvSpPr txBox="1"/>
+          <p:nvPr/>
+        </p:nvSpPr>
+        <p:spPr>
+          <a:xfrm>
+            <a:off x="548640" y="5532120"/>
+            <a:ext cx="11064240" cy="640080"/>
+          </a:xfrm>
+          <a:prstGeom prst="rect">
+            <a:avLst/>
+          </a:prstGeom>
+          <a:noFill/>
+          <a:ln/>
+        </p:spPr>
+        <p:txBody>
+          <a:bodyPr wrap="square" lIns="0" tIns="0" rIns="0" bIns="0" rtlCol="0" anchor="t"/>
+          <a:lstStyle/>
+          <a:p>
+            <a:pPr indent="0" marL="0">
+              <a:buNone/>
+            </a:pPr>
+            <a:r>
+              <a:rPr lang="en-US" sz="1400" b="1" dirty="0">
+                <a:solidFill>
+                  <a:schemeClr val="accent3"/>
+                </a:solidFill>
+              </a:rPr>
+              <a:t>Failure path: </a:t>
+            </a:r>
+            <a:pPr indent="0" marL="0">
+              <a:buNone/>
+            </a:pPr>
+            <a:r>
               <a:rPr lang="en-US" sz="1400" dirty="0">
                 <a:solidFill>
                   <a:schemeClr val="tx1"/>
                 </a:solidFill>
               </a:rPr>
-              <a:t>TR-0084 roles as oneM2M resources: task, participants, rounds, model lineage; dropout, late join</a:t>
-            </a:r>
-            <a:endParaRPr lang="en-US" sz="1400" dirty="0"/>
-          </a:p>
-        </p:txBody>
-      </p:sp>
-      <p:sp>
-        <p:nvSpPr>
-          <p:cNvPr id="14" name="ahead metric Federated learning"/>
-          <p:cNvSpPr txBox="1"/>
-          <p:nvPr/>
-        </p:nvSpPr>
-        <p:spPr>
-          <a:xfrm>
-            <a:off x="822960" y="5440680"/>
-            <a:ext cx="4892040" cy="457200"/>
-          </a:xfrm>
-          <a:prstGeom prst="rect">
-            <a:avLst/>
-          </a:prstGeom>
-          <a:noFill/>
-          <a:ln/>
-        </p:spPr>
-        <p:txBody>
-          <a:bodyPr wrap="square" lIns="0" tIns="0" rIns="0" bIns="0" rtlCol="0" anchor="t"/>
-          <a:lstStyle/>
-          <a:p>
-            <a:pPr indent="0" marL="0">
-              <a:buNone/>
-            </a:pPr>
-            <a:r>
-              <a:rPr lang="en-US" sz="1400" b="1" dirty="0">
-                <a:solidFill>
-                  <a:schemeClr val="accent2"/>
-                </a:solidFill>
-              </a:rPr>
-              <a:t>2 s prediction error 0.604 → 0.486 m · 8/8 checks</a:t>
-            </a:r>
-            <a:endParaRPr lang="en-US" sz="1400" dirty="0"/>
-          </a:p>
-        </p:txBody>
-      </p:sp>
-      <p:sp>
-        <p:nvSpPr>
-          <p:cNvPr id="15" name="ahead card AI safety agent"/>
-          <p:cNvSpPr/>
-          <p:nvPr/>
-        </p:nvSpPr>
-        <p:spPr>
-          <a:xfrm>
-            <a:off x="6172200" y="3794760"/>
-            <a:ext cx="5440680" cy="2286000"/>
-          </a:xfrm>
-          <a:prstGeom prst="roundRect">
-            <a:avLst>
-              <a:gd name="adj" fmla="val 3200"/>
-            </a:avLst>
-          </a:prstGeom>
-          <a:solidFill>
-            <a:schemeClr val="bg2"/>
-          </a:solidFill>
-          <a:ln w="12700">
-            <a:solidFill>
-              <a:schemeClr val="bg2"/>
-            </a:solidFill>
-            <a:prstDash val="solid"/>
-          </a:ln>
-        </p:spPr>
-      </p:sp>
-      <p:sp>
-        <p:nvSpPr>
-          <p:cNvPr id="16" name="ahead head AI safety agent"/>
-          <p:cNvSpPr txBox="1"/>
-          <p:nvPr/>
-        </p:nvSpPr>
-        <p:spPr>
-          <a:xfrm>
-            <a:off x="6446520" y="4023360"/>
-            <a:ext cx="4892040" cy="411480"/>
-          </a:xfrm>
-          <a:prstGeom prst="rect">
-            <a:avLst/>
-          </a:prstGeom>
-          <a:noFill/>
-          <a:ln/>
-        </p:spPr>
-        <p:txBody>
-          <a:bodyPr wrap="square" lIns="0" tIns="0" rIns="0" bIns="0" rtlCol="0" anchor="ctr"/>
-          <a:lstStyle/>
-          <a:p>
-            <a:pPr indent="0" marL="0">
-              <a:buNone/>
-            </a:pPr>
-            <a:r>
-              <a:rPr lang="en-US" sz="2000" b="1" dirty="0">
-                <a:solidFill>
-                  <a:schemeClr val="tx2"/>
-                </a:solidFill>
-              </a:rPr>
-              <a:t>AI safety agent</a:t>
-            </a:r>
-            <a:endParaRPr lang="en-US" sz="2000" dirty="0"/>
-          </a:p>
-        </p:txBody>
-      </p:sp>
-      <p:sp>
-        <p:nvSpPr>
-          <p:cNvPr id="17" name="ahead body AI safety agent"/>
-          <p:cNvSpPr txBox="1"/>
-          <p:nvPr/>
-        </p:nvSpPr>
-        <p:spPr>
-          <a:xfrm>
-            <a:off x="6446520" y="4526280"/>
-            <a:ext cx="4892040" cy="868680"/>
-          </a:xfrm>
-          <a:prstGeom prst="rect">
-            <a:avLst/>
-          </a:prstGeom>
-          <a:noFill/>
-          <a:ln/>
-        </p:spPr>
-        <p:txBody>
-          <a:bodyPr wrap="square" lIns="0" tIns="0" rIns="0" bIns="0" rtlCol="0" anchor="t"/>
-          <a:lstStyle/>
-          <a:p>
-            <a:pPr indent="0" marL="0">
-              <a:buNone/>
-            </a:pPr>
-            <a:r>
-              <a:rPr lang="en-US" sz="1400" dirty="0">
-                <a:solidFill>
-                  <a:schemeClr val="tx1"/>
-                </a:solidFill>
-              </a:rPr>
-              <a:t>MCP servers for IN-CSE, zone A, zone B and ETSI MEC; state in oneM2M; routing to the serving CSE</a:t>
-            </a:r>
-            <a:endParaRPr lang="en-US" sz="1400" dirty="0"/>
-          </a:p>
-        </p:txBody>
-      </p:sp>
-      <p:sp>
-        <p:nvSpPr>
-          <p:cNvPr id="18" name="ahead metric AI safety agent"/>
-          <p:cNvSpPr txBox="1"/>
-          <p:nvPr/>
-        </p:nvSpPr>
-        <p:spPr>
-          <a:xfrm>
-            <a:off x="6446520" y="5440680"/>
-            <a:ext cx="4892040" cy="457200"/>
-          </a:xfrm>
-          <a:prstGeom prst="rect">
-            <a:avLst/>
-          </a:prstGeom>
-          <a:noFill/>
-          <a:ln/>
-        </p:spPr>
-        <p:txBody>
-          <a:bodyPr wrap="square" lIns="0" tIns="0" rIns="0" bIns="0" rtlCol="0" anchor="t"/>
-          <a:lstStyle/>
-          <a:p>
-            <a:pPr indent="0" marL="0">
-              <a:buNone/>
-            </a:pPr>
-            <a:r>
-              <a:rPr lang="en-US" sz="1400" b="1" dirty="0">
-                <a:solidFill>
-                  <a:schemeClr val="accent2"/>
-                </a:solidFill>
-              </a:rPr>
-              <a:t>shift report in 15 tool calls, validated · 9/9 checks</a:t>
+              <a:t>no heartbeat from the MEC app for 2 s → devices switch to UWB ranging and D2D state exchange; neighbours relay alerts to devices in coverage holes; stop only when nothing else is known.</a:t>
             </a:r>
             <a:endParaRPr lang="en-US" sz="1400" dirty="0"/>
           </a:p>
@@ -5775,30 +6295,394 @@
                   <a:schemeClr val="tx2"/>
                 </a:solidFill>
               </a:rPr>
-              <a:t>Development plan: Oct 12 – Nov 25</a:t>
+              <a:t>Status today: working end to end</a:t>
             </a:r>
             <a:endParaRPr lang="en-US" sz="3000" dirty="0"/>
           </a:p>
         </p:txBody>
       </p:sp>
-      <p:sp>
-        <p:nvSpPr>
-          <p:cNvPr id="3" name="week line 0"/>
+      <p:pic>
+        <p:nvPicPr>
+          <p:cNvPr id="3" name="done icon 0" descr="preencoded.png">    </p:cNvPr>
+          <p:cNvPicPr>
+            <a:picLocks noChangeAspect="1"/>
+          </p:cNvPicPr>
+          <p:nvPr/>
+        </p:nvPicPr>
+        <p:blipFill>
+          <a:blip r:embed="rId1"/>
+          <a:stretch>
+            <a:fillRect/>
+          </a:stretch>
+        </p:blipFill>
+        <p:spPr>
+          <a:xfrm>
+            <a:off x="548640" y="1399032"/>
+            <a:ext cx="329184" cy="329184"/>
+          </a:xfrm>
+          <a:prstGeom prst="rect">
+            <a:avLst/>
+          </a:prstGeom>
+        </p:spPr>
+      </p:pic>
+      <p:sp>
+        <p:nvSpPr>
+          <p:cNvPr id="4" name="done item 0"/>
+          <p:cNvSpPr txBox="1"/>
+          <p:nvPr/>
+        </p:nvSpPr>
+        <p:spPr>
+          <a:xfrm>
+            <a:off x="1005840" y="1325880"/>
+            <a:ext cx="5120640" cy="594360"/>
+          </a:xfrm>
+          <a:prstGeom prst="rect">
+            <a:avLst/>
+          </a:prstGeom>
+          <a:noFill/>
+          <a:ln/>
+        </p:spPr>
+        <p:txBody>
+          <a:bodyPr wrap="square" lIns="0" tIns="0" rIns="0" bIns="0" rtlCol="0" anchor="ctr"/>
+          <a:lstStyle/>
+          <a:p>
+            <a:pPr indent="0" marL="0">
+              <a:buNone/>
+            </a:pPr>
+            <a:r>
+              <a:rPr lang="en-US" sz="1400" dirty="0">
+                <a:solidFill>
+                  <a:schemeClr val="tx1"/>
+                </a:solidFill>
+              </a:rPr>
+              <a:t>Per-device AEs and ACPs (CREATE limited to subscriptions); access checks in CI</a:t>
+            </a:r>
+            <a:endParaRPr lang="en-US" sz="1400" dirty="0"/>
+          </a:p>
+        </p:txBody>
+      </p:sp>
+      <p:pic>
+        <p:nvPicPr>
+          <p:cNvPr id="5" name="done icon 1" descr="preencoded.png">    </p:cNvPr>
+          <p:cNvPicPr>
+            <a:picLocks noChangeAspect="1"/>
+          </p:cNvPicPr>
+          <p:nvPr/>
+        </p:nvPicPr>
+        <p:blipFill>
+          <a:blip r:embed="rId2"/>
+          <a:stretch>
+            <a:fillRect/>
+          </a:stretch>
+        </p:blipFill>
+        <p:spPr>
+          <a:xfrm>
+            <a:off x="548640" y="2148840"/>
+            <a:ext cx="329184" cy="329184"/>
+          </a:xfrm>
+          <a:prstGeom prst="rect">
+            <a:avLst/>
+          </a:prstGeom>
+        </p:spPr>
+      </p:pic>
+      <p:sp>
+        <p:nvSpPr>
+          <p:cNvPr id="6" name="done item 1"/>
+          <p:cNvSpPr txBox="1"/>
+          <p:nvPr/>
+        </p:nvSpPr>
+        <p:spPr>
+          <a:xfrm>
+            <a:off x="1005840" y="2075688"/>
+            <a:ext cx="5120640" cy="594360"/>
+          </a:xfrm>
+          <a:prstGeom prst="rect">
+            <a:avLst/>
+          </a:prstGeom>
+          <a:noFill/>
+          <a:ln/>
+        </p:spPr>
+        <p:txBody>
+          <a:bodyPr wrap="square" lIns="0" tIns="0" rIns="0" bIns="0" rtlCol="0" anchor="ctr"/>
+          <a:lstStyle/>
+          <a:p>
+            <a:pPr indent="0" marL="0">
+              <a:buNone/>
+            </a:pPr>
+            <a:r>
+              <a:rPr lang="en-US" sz="1400" dirty="0">
+                <a:solidFill>
+                  <a:schemeClr val="tx1"/>
+                </a:solidFill>
+              </a:rPr>
+              <a:t>SDT flexContainer twins, labels, discovery onboarding, SAREF semantic query</a:t>
+            </a:r>
+            <a:endParaRPr lang="en-US" sz="1400" dirty="0"/>
+          </a:p>
+        </p:txBody>
+      </p:sp>
+      <p:pic>
+        <p:nvPicPr>
+          <p:cNvPr id="7" name="done icon 2" descr="preencoded.png">    </p:cNvPr>
+          <p:cNvPicPr>
+            <a:picLocks noChangeAspect="1"/>
+          </p:cNvPicPr>
+          <p:nvPr/>
+        </p:nvPicPr>
+        <p:blipFill>
+          <a:blip r:embed="rId3"/>
+          <a:stretch>
+            <a:fillRect/>
+          </a:stretch>
+        </p:blipFill>
+        <p:spPr>
+          <a:xfrm>
+            <a:off x="548640" y="2898648"/>
+            <a:ext cx="329184" cy="329184"/>
+          </a:xfrm>
+          <a:prstGeom prst="rect">
+            <a:avLst/>
+          </a:prstGeom>
+        </p:spPr>
+      </p:pic>
+      <p:sp>
+        <p:nvSpPr>
+          <p:cNvPr id="8" name="done item 2"/>
+          <p:cNvSpPr txBox="1"/>
+          <p:nvPr/>
+        </p:nvSpPr>
+        <p:spPr>
+          <a:xfrm>
+            <a:off x="1005840" y="2825496"/>
+            <a:ext cx="5120640" cy="594360"/>
+          </a:xfrm>
+          <a:prstGeom prst="rect">
+            <a:avLst/>
+          </a:prstGeom>
+          <a:noFill/>
+          <a:ln/>
+        </p:spPr>
+        <p:txBody>
+          <a:bodyPr wrap="square" lIns="0" tIns="0" rIns="0" bIns="0" rtlCol="0" anchor="ctr"/>
+          <a:lstStyle/>
+          <a:p>
+            <a:pPr indent="0" marL="0">
+              <a:buNone/>
+            </a:pPr>
+            <a:r>
+              <a:rPr lang="en-US" sz="1400" dirty="0">
+                <a:solidFill>
+                  <a:schemeClr val="tx1"/>
+                </a:solidFill>
+              </a:rPr>
+              <a:t>CSE handover between zone MN-CSEs with announcement and home records</a:t>
+            </a:r>
+            <a:endParaRPr lang="en-US" sz="1400" dirty="0"/>
+          </a:p>
+        </p:txBody>
+      </p:sp>
+      <p:pic>
+        <p:nvPicPr>
+          <p:cNvPr id="9" name="done icon 3" descr="preencoded.png">    </p:cNvPr>
+          <p:cNvPicPr>
+            <a:picLocks noChangeAspect="1"/>
+          </p:cNvPicPr>
+          <p:nvPr/>
+        </p:nvPicPr>
+        <p:blipFill>
+          <a:blip r:embed="rId4"/>
+          <a:stretch>
+            <a:fillRect/>
+          </a:stretch>
+        </p:blipFill>
+        <p:spPr>
+          <a:xfrm>
+            <a:off x="548640" y="3648456"/>
+            <a:ext cx="329184" cy="329184"/>
+          </a:xfrm>
+          <a:prstGeom prst="rect">
+            <a:avLst/>
+          </a:prstGeom>
+        </p:spPr>
+      </p:pic>
+      <p:sp>
+        <p:nvSpPr>
+          <p:cNvPr id="10" name="done item 3"/>
+          <p:cNvSpPr txBox="1"/>
+          <p:nvPr/>
+        </p:nvSpPr>
+        <p:spPr>
+          <a:xfrm>
+            <a:off x="1005840" y="3575304"/>
+            <a:ext cx="5120640" cy="594360"/>
+          </a:xfrm>
+          <a:prstGeom prst="rect">
+            <a:avLst/>
+          </a:prstGeom>
+          <a:noFill/>
+          <a:ln/>
+        </p:spPr>
+        <p:txBody>
+          <a:bodyPr wrap="square" lIns="0" tIns="0" rIns="0" bIns="0" rtlCol="0" anchor="ctr"/>
+          <a:lstStyle/>
+          <a:p>
+            <a:pPr indent="0" marL="0">
+              <a:buNone/>
+            </a:pPr>
+            <a:r>
+              <a:rPr lang="en-US" sz="1400" dirty="0">
+                <a:solidFill>
+                  <a:schemeClr val="tx1"/>
+                </a:solidFill>
+              </a:rPr>
+              <a:t>Federated learning with model delivery and rollback; AI agent over 4 MCP servers</a:t>
+            </a:r>
+            <a:endParaRPr lang="en-US" sz="1400" dirty="0"/>
+          </a:p>
+        </p:txBody>
+      </p:sp>
+      <p:pic>
+        <p:nvPicPr>
+          <p:cNvPr id="11" name="done icon 4" descr="preencoded.png">    </p:cNvPr>
+          <p:cNvPicPr>
+            <a:picLocks noChangeAspect="1"/>
+          </p:cNvPicPr>
+          <p:nvPr/>
+        </p:nvPicPr>
+        <p:blipFill>
+          <a:blip r:embed="rId5"/>
+          <a:stretch>
+            <a:fillRect/>
+          </a:stretch>
+        </p:blipFill>
+        <p:spPr>
+          <a:xfrm>
+            <a:off x="548640" y="4398264"/>
+            <a:ext cx="329184" cy="329184"/>
+          </a:xfrm>
+          <a:prstGeom prst="rect">
+            <a:avLst/>
+          </a:prstGeom>
+        </p:spPr>
+      </p:pic>
+      <p:sp>
+        <p:nvSpPr>
+          <p:cNvPr id="12" name="done item 4"/>
+          <p:cNvSpPr txBox="1"/>
+          <p:nvPr/>
+        </p:nvSpPr>
+        <p:spPr>
+          <a:xfrm>
+            <a:off x="1005840" y="4325112"/>
+            <a:ext cx="5120640" cy="594360"/>
+          </a:xfrm>
+          <a:prstGeom prst="rect">
+            <a:avLst/>
+          </a:prstGeom>
+          <a:noFill/>
+          <a:ln/>
+        </p:spPr>
+        <p:txBody>
+          <a:bodyPr wrap="square" lIns="0" tIns="0" rIns="0" bIns="0" rtlCol="0" anchor="ctr"/>
+          <a:lstStyle/>
+          <a:p>
+            <a:pPr indent="0" marL="0">
+              <a:buNone/>
+            </a:pPr>
+            <a:r>
+              <a:rPr lang="en-US" sz="1400" dirty="0">
+                <a:solidFill>
+                  <a:schemeClr val="tx1"/>
+                </a:solidFill>
+              </a:rPr>
+              <a:t>MEC zone events and RSRP in oneM2M; orchestration across hosts; forklift swarm</a:t>
+            </a:r>
+            <a:endParaRPr lang="en-US" sz="1400" dirty="0"/>
+          </a:p>
+        </p:txBody>
+      </p:sp>
+      <p:pic>
+        <p:nvPicPr>
+          <p:cNvPr id="13" name="done icon 5" descr="preencoded.png">    </p:cNvPr>
+          <p:cNvPicPr>
+            <a:picLocks noChangeAspect="1"/>
+          </p:cNvPicPr>
+          <p:nvPr/>
+        </p:nvPicPr>
+        <p:blipFill>
+          <a:blip r:embed="rId6"/>
+          <a:stretch>
+            <a:fillRect/>
+          </a:stretch>
+        </p:blipFill>
+        <p:spPr>
+          <a:xfrm>
+            <a:off x="548640" y="5148072"/>
+            <a:ext cx="329184" cy="329184"/>
+          </a:xfrm>
+          <a:prstGeom prst="rect">
+            <a:avLst/>
+          </a:prstGeom>
+        </p:spPr>
+      </p:pic>
+      <p:sp>
+        <p:nvSpPr>
+          <p:cNvPr id="14" name="done item 5"/>
+          <p:cNvSpPr txBox="1"/>
+          <p:nvPr/>
+        </p:nvSpPr>
+        <p:spPr>
+          <a:xfrm>
+            <a:off x="1005840" y="5074920"/>
+            <a:ext cx="5120640" cy="594360"/>
+          </a:xfrm>
+          <a:prstGeom prst="rect">
+            <a:avLst/>
+          </a:prstGeom>
+          <a:noFill/>
+          <a:ln/>
+        </p:spPr>
+        <p:txBody>
+          <a:bodyPr wrap="square" lIns="0" tIns="0" rIns="0" bIns="0" rtlCol="0" anchor="ctr"/>
+          <a:lstStyle/>
+          <a:p>
+            <a:pPr indent="0" marL="0">
+              <a:buNone/>
+            </a:pPr>
+            <a:r>
+              <a:rPr lang="en-US" sz="1400" dirty="0">
+                <a:solidFill>
+                  <a:schemeClr val="tx1"/>
+                </a:solidFill>
+              </a:rPr>
+              <a:t>ESP32 firmware run unmodified against a real CSE in CI; hackster.io draft</a:t>
+            </a:r>
+            <a:endParaRPr lang="en-US" sz="1400" dirty="0"/>
+          </a:p>
+        </p:txBody>
+      </p:sp>
+      <p:sp>
+        <p:nvSpPr>
+          <p:cNvPr id="15" name="result 0"/>
           <p:cNvSpPr/>
           <p:nvPr/>
         </p:nvSpPr>
         <p:spPr>
           <a:xfrm>
-            <a:off x="3566160" y="1600200"/>
-            <a:ext cx="0" cy="4069080"/>
-          </a:xfrm>
-          <a:prstGeom prst="line">
-            <a:avLst/>
-          </a:prstGeom>
-          <a:noFill/>
-          <a:ln w="9525">
+            <a:off x="6583680" y="1325880"/>
+            <a:ext cx="5029200" cy="1325880"/>
+          </a:xfrm>
+          <a:prstGeom prst="roundRect">
+            <a:avLst>
+              <a:gd name="adj" fmla="val 5517"/>
+            </a:avLst>
+          </a:prstGeom>
+          <a:solidFill>
+            <a:schemeClr val="bg2"/>
+          </a:solidFill>
+          <a:ln w="12700">
             <a:solidFill>
-              <a:srgbClr val="D5DAE0"/>
+              <a:schemeClr val="bg2"/>
             </a:solidFill>
             <a:prstDash val="solid"/>
           </a:ln>
@@ -5806,14 +6690,14 @@
       </p:sp>
       <p:sp>
         <p:nvSpPr>
-          <p:cNvPr id="4" name="week label 0"/>
+          <p:cNvPr id="16" name="result number 0"/>
           <p:cNvSpPr txBox="1"/>
           <p:nvPr/>
         </p:nvSpPr>
         <p:spPr>
           <a:xfrm>
-            <a:off x="3200400" y="1234440"/>
-            <a:ext cx="731520" cy="274320"/>
+            <a:off x="6858000" y="1463040"/>
+            <a:ext cx="4480560" cy="594360"/>
           </a:xfrm>
           <a:prstGeom prst="rect">
             <a:avLst/>
@@ -5825,39 +6709,82 @@
           <a:bodyPr wrap="square" lIns="0" tIns="0" rIns="0" bIns="0" rtlCol="0" anchor="ctr"/>
           <a:lstStyle/>
           <a:p>
-            <a:pPr algn="ctr" indent="0" marL="0">
-              <a:buNone/>
-            </a:pPr>
-            <a:r>
-              <a:rPr lang="en-US" sz="1100" dirty="0">
+            <a:pPr indent="0" marL="0">
+              <a:buNone/>
+            </a:pPr>
+            <a:r>
+              <a:rPr lang="en-US" sz="3000" b="1" dirty="0">
+                <a:solidFill>
+                  <a:schemeClr val="tx2"/>
+                </a:solidFill>
+                <a:latin typeface="Arial" pitchFamily="34" charset="0"/>
+                <a:ea typeface="Arial" pitchFamily="34" charset="-122"/>
+                <a:cs typeface="Arial" pitchFamily="34" charset="-120"/>
+              </a:rPr>
+              <a:t>100 → 4</a:t>
+            </a:r>
+            <a:endParaRPr lang="en-US" sz="3000" dirty="0"/>
+          </a:p>
+        </p:txBody>
+      </p:sp>
+      <p:sp>
+        <p:nvSpPr>
+          <p:cNvPr id="17" name="result label 0"/>
+          <p:cNvSpPr txBox="1"/>
+          <p:nvPr/>
+        </p:nvSpPr>
+        <p:spPr>
+          <a:xfrm>
+            <a:off x="6858000" y="2057400"/>
+            <a:ext cx="4480560" cy="457200"/>
+          </a:xfrm>
+          <a:prstGeom prst="rect">
+            <a:avLst/>
+          </a:prstGeom>
+          <a:noFill/>
+          <a:ln/>
+        </p:spPr>
+        <p:txBody>
+          <a:bodyPr wrap="square" lIns="0" tIns="0" rIns="0" bIns="0" rtlCol="0" anchor="ctr"/>
+          <a:lstStyle/>
+          <a:p>
+            <a:pPr indent="0" marL="0">
+              <a:buNone/>
+            </a:pPr>
+            <a:r>
+              <a:rPr lang="en-US" sz="1300" dirty="0">
                 <a:solidFill>
                   <a:schemeClr val="accent6"/>
                 </a:solidFill>
               </a:rPr>
-              <a:t>Oct 12</a:t>
-            </a:r>
-            <a:endParaRPr lang="en-US" sz="1100" dirty="0"/>
-          </a:p>
-        </p:txBody>
-      </p:sp>
-      <p:sp>
-        <p:nvSpPr>
-          <p:cNvPr id="5" name="week line 1"/>
+              <a:t>collisions, many-to-many site (8 workers, 4 forklifts, 750 conflicts)</a:t>
+            </a:r>
+            <a:endParaRPr lang="en-US" sz="1300" dirty="0"/>
+          </a:p>
+        </p:txBody>
+      </p:sp>
+      <p:sp>
+        <p:nvSpPr>
+          <p:cNvPr id="18" name="result 1"/>
           <p:cNvSpPr/>
           <p:nvPr/>
         </p:nvSpPr>
         <p:spPr>
           <a:xfrm>
-            <a:off x="4817872" y="1600200"/>
-            <a:ext cx="0" cy="4069080"/>
-          </a:xfrm>
-          <a:prstGeom prst="line">
-            <a:avLst/>
-          </a:prstGeom>
-          <a:noFill/>
-          <a:ln w="9525">
+            <a:off x="6583680" y="2834640"/>
+            <a:ext cx="5029200" cy="1325880"/>
+          </a:xfrm>
+          <a:prstGeom prst="roundRect">
+            <a:avLst>
+              <a:gd name="adj" fmla="val 5517"/>
+            </a:avLst>
+          </a:prstGeom>
+          <a:solidFill>
+            <a:schemeClr val="bg2"/>
+          </a:solidFill>
+          <a:ln w="12700">
             <a:solidFill>
-              <a:srgbClr val="D5DAE0"/>
+              <a:schemeClr val="bg2"/>
             </a:solidFill>
             <a:prstDash val="solid"/>
           </a:ln>
@@ -5865,14 +6792,14 @@
       </p:sp>
       <p:sp>
         <p:nvSpPr>
-          <p:cNvPr id="6" name="week label 1"/>
+          <p:cNvPr id="19" name="result number 1"/>
           <p:cNvSpPr txBox="1"/>
           <p:nvPr/>
         </p:nvSpPr>
         <p:spPr>
           <a:xfrm>
-            <a:off x="4452112" y="1234440"/>
-            <a:ext cx="731520" cy="274320"/>
+            <a:off x="6858000" y="2971800"/>
+            <a:ext cx="4480560" cy="594360"/>
           </a:xfrm>
           <a:prstGeom prst="rect">
             <a:avLst/>
@@ -5884,39 +6811,82 @@
           <a:bodyPr wrap="square" lIns="0" tIns="0" rIns="0" bIns="0" rtlCol="0" anchor="ctr"/>
           <a:lstStyle/>
           <a:p>
-            <a:pPr algn="ctr" indent="0" marL="0">
-              <a:buNone/>
-            </a:pPr>
-            <a:r>
-              <a:rPr lang="en-US" sz="1100" dirty="0">
+            <a:pPr indent="0" marL="0">
+              <a:buNone/>
+            </a:pPr>
+            <a:r>
+              <a:rPr lang="en-US" sz="3000" b="1" dirty="0">
+                <a:solidFill>
+                  <a:schemeClr val="tx2"/>
+                </a:solidFill>
+                <a:latin typeface="Arial" pitchFamily="34" charset="0"/>
+                <a:ea typeface="Arial" pitchFamily="34" charset="-122"/>
+                <a:cs typeface="Arial" pitchFamily="34" charset="-120"/>
+              </a:rPr>
+              <a:t>61.7 → 86.0 %</a:t>
+            </a:r>
+            <a:endParaRPr lang="en-US" sz="3000" dirty="0"/>
+          </a:p>
+        </p:txBody>
+      </p:sp>
+      <p:sp>
+        <p:nvSpPr>
+          <p:cNvPr id="20" name="result label 1"/>
+          <p:cNvSpPr txBox="1"/>
+          <p:nvPr/>
+        </p:nvSpPr>
+        <p:spPr>
+          <a:xfrm>
+            <a:off x="6858000" y="3566160"/>
+            <a:ext cx="4480560" cy="457200"/>
+          </a:xfrm>
+          <a:prstGeom prst="rect">
+            <a:avLst/>
+          </a:prstGeom>
+          <a:noFill/>
+          <a:ln/>
+        </p:spPr>
+        <p:txBody>
+          <a:bodyPr wrap="square" lIns="0" tIns="0" rIns="0" bIns="0" rtlCol="0" anchor="ctr"/>
+          <a:lstStyle/>
+          <a:p>
+            <a:pPr indent="0" marL="0">
+              <a:buNone/>
+            </a:pPr>
+            <a:r>
+              <a:rPr lang="en-US" sz="1300" dirty="0">
                 <a:solidFill>
                   <a:schemeClr val="accent6"/>
                 </a:solidFill>
               </a:rPr>
-              <a:t>Oct 19</a:t>
-            </a:r>
-            <a:endParaRPr lang="en-US" sz="1100" dirty="0"/>
-          </a:p>
-        </p:txBody>
-      </p:sp>
-      <p:sp>
-        <p:nvSpPr>
-          <p:cNvPr id="7" name="week line 2"/>
+              <a:t>forklift throughput on the same site</a:t>
+            </a:r>
+            <a:endParaRPr lang="en-US" sz="1300" dirty="0"/>
+          </a:p>
+        </p:txBody>
+      </p:sp>
+      <p:sp>
+        <p:nvSpPr>
+          <p:cNvPr id="21" name="result 2"/>
           <p:cNvSpPr/>
           <p:nvPr/>
         </p:nvSpPr>
         <p:spPr>
           <a:xfrm>
-            <a:off x="6069584" y="1600200"/>
-            <a:ext cx="0" cy="4069080"/>
-          </a:xfrm>
-          <a:prstGeom prst="line">
-            <a:avLst/>
-          </a:prstGeom>
-          <a:noFill/>
-          <a:ln w="9525">
+            <a:off x="6583680" y="4343400"/>
+            <a:ext cx="5029200" cy="1325880"/>
+          </a:xfrm>
+          <a:prstGeom prst="roundRect">
+            <a:avLst>
+              <a:gd name="adj" fmla="val 5517"/>
+            </a:avLst>
+          </a:prstGeom>
+          <a:solidFill>
+            <a:schemeClr val="bg2"/>
+          </a:solidFill>
+          <a:ln w="12700">
             <a:solidFill>
-              <a:srgbClr val="D5DAE0"/>
+              <a:schemeClr val="bg2"/>
             </a:solidFill>
             <a:prstDash val="solid"/>
           </a:ln>
@@ -5924,14 +6894,14 @@
       </p:sp>
       <p:sp>
         <p:nvSpPr>
-          <p:cNvPr id="8" name="week label 2"/>
+          <p:cNvPr id="22" name="result number 2"/>
           <p:cNvSpPr txBox="1"/>
           <p:nvPr/>
         </p:nvSpPr>
         <p:spPr>
           <a:xfrm>
-            <a:off x="5703824" y="1234440"/>
-            <a:ext cx="731520" cy="274320"/>
+            <a:off x="6858000" y="4480560"/>
+            <a:ext cx="4480560" cy="594360"/>
           </a:xfrm>
           <a:prstGeom prst="rect">
             <a:avLst/>
@@ -5943,7 +6913,82 @@
           <a:bodyPr wrap="square" lIns="0" tIns="0" rIns="0" bIns="0" rtlCol="0" anchor="ctr"/>
           <a:lstStyle/>
           <a:p>
-            <a:pPr algn="ctr" indent="0" marL="0">
+            <a:pPr indent="0" marL="0">
+              <a:buNone/>
+            </a:pPr>
+            <a:r>
+              <a:rPr lang="en-US" sz="3000" b="1" dirty="0">
+                <a:solidFill>
+                  <a:schemeClr val="tx2"/>
+                </a:solidFill>
+                <a:latin typeface="Arial" pitchFamily="34" charset="0"/>
+                <a:ea typeface="Arial" pitchFamily="34" charset="-122"/>
+                <a:cs typeface="Arial" pitchFamily="34" charset="-120"/>
+              </a:rPr>
+              <a:t>180 → 2</a:t>
+            </a:r>
+            <a:endParaRPr lang="en-US" sz="3000" dirty="0"/>
+          </a:p>
+        </p:txBody>
+      </p:sp>
+      <p:sp>
+        <p:nvSpPr>
+          <p:cNvPr id="23" name="result label 2"/>
+          <p:cNvSpPr txBox="1"/>
+          <p:nvPr/>
+        </p:nvSpPr>
+        <p:spPr>
+          <a:xfrm>
+            <a:off x="6858000" y="5074920"/>
+            <a:ext cx="4480560" cy="457200"/>
+          </a:xfrm>
+          <a:prstGeom prst="rect">
+            <a:avLst/>
+          </a:prstGeom>
+          <a:noFill/>
+          <a:ln/>
+        </p:spPr>
+        <p:txBody>
+          <a:bodyPr wrap="square" lIns="0" tIns="0" rIns="0" bIns="0" rtlCol="0" anchor="ctr"/>
+          <a:lstStyle/>
+          <a:p>
+            <a:pPr indent="0" marL="0">
+              <a:buNone/>
+            </a:pPr>
+            <a:r>
+              <a:rPr lang="en-US" sz="1300" dirty="0">
+                <a:solidFill>
+                  <a:schemeClr val="accent6"/>
+                </a:solidFill>
+              </a:rPr>
+              <a:t>collisions during a total network outage</a:t>
+            </a:r>
+            <a:endParaRPr lang="en-US" sz="1300" dirty="0"/>
+          </a:p>
+        </p:txBody>
+      </p:sp>
+      <p:sp>
+        <p:nvSpPr>
+          <p:cNvPr id="24" name="result note"/>
+          <p:cNvSpPr txBox="1"/>
+          <p:nvPr/>
+        </p:nvSpPr>
+        <p:spPr>
+          <a:xfrm>
+            <a:off x="6583680" y="5897880"/>
+            <a:ext cx="5029200" cy="320040"/>
+          </a:xfrm>
+          <a:prstGeom prst="rect">
+            <a:avLst/>
+          </a:prstGeom>
+          <a:noFill/>
+          <a:ln/>
+        </p:spPr>
+        <p:txBody>
+          <a:bodyPr wrap="square" lIns="0" tIns="0" rIns="0" bIns="0" rtlCol="0" anchor="ctr"/>
+          <a:lstStyle/>
+          <a:p>
+            <a:pPr indent="0" marL="0">
               <a:buNone/>
             </a:pPr>
             <a:r>
@@ -5952,775 +6997,7 @@
                   <a:schemeClr val="accent6"/>
                 </a:solidFill>
               </a:rPr>
-              <a:t>Oct 26</a:t>
-            </a:r>
-            <a:endParaRPr lang="en-US" sz="1100" dirty="0"/>
-          </a:p>
-        </p:txBody>
-      </p:sp>
-      <p:sp>
-        <p:nvSpPr>
-          <p:cNvPr id="9" name="week line 3"/>
-          <p:cNvSpPr/>
-          <p:nvPr/>
-        </p:nvSpPr>
-        <p:spPr>
-          <a:xfrm>
-            <a:off x="7321296" y="1600200"/>
-            <a:ext cx="0" cy="4069080"/>
-          </a:xfrm>
-          <a:prstGeom prst="line">
-            <a:avLst/>
-          </a:prstGeom>
-          <a:noFill/>
-          <a:ln w="9525">
-            <a:solidFill>
-              <a:srgbClr val="D5DAE0"/>
-            </a:solidFill>
-            <a:prstDash val="solid"/>
-          </a:ln>
-        </p:spPr>
-      </p:sp>
-      <p:sp>
-        <p:nvSpPr>
-          <p:cNvPr id="10" name="week label 3"/>
-          <p:cNvSpPr txBox="1"/>
-          <p:nvPr/>
-        </p:nvSpPr>
-        <p:spPr>
-          <a:xfrm>
-            <a:off x="6955536" y="1234440"/>
-            <a:ext cx="731520" cy="274320"/>
-          </a:xfrm>
-          <a:prstGeom prst="rect">
-            <a:avLst/>
-          </a:prstGeom>
-          <a:noFill/>
-          <a:ln/>
-        </p:spPr>
-        <p:txBody>
-          <a:bodyPr wrap="square" lIns="0" tIns="0" rIns="0" bIns="0" rtlCol="0" anchor="ctr"/>
-          <a:lstStyle/>
-          <a:p>
-            <a:pPr algn="ctr" indent="0" marL="0">
-              <a:buNone/>
-            </a:pPr>
-            <a:r>
-              <a:rPr lang="en-US" sz="1100" dirty="0">
-                <a:solidFill>
-                  <a:schemeClr val="accent6"/>
-                </a:solidFill>
-              </a:rPr>
-              <a:t>Nov 2</a:t>
-            </a:r>
-            <a:endParaRPr lang="en-US" sz="1100" dirty="0"/>
-          </a:p>
-        </p:txBody>
-      </p:sp>
-      <p:sp>
-        <p:nvSpPr>
-          <p:cNvPr id="11" name="week line 4"/>
-          <p:cNvSpPr/>
-          <p:nvPr/>
-        </p:nvSpPr>
-        <p:spPr>
-          <a:xfrm>
-            <a:off x="8573008" y="1600200"/>
-            <a:ext cx="0" cy="4069080"/>
-          </a:xfrm>
-          <a:prstGeom prst="line">
-            <a:avLst/>
-          </a:prstGeom>
-          <a:noFill/>
-          <a:ln w="9525">
-            <a:solidFill>
-              <a:srgbClr val="D5DAE0"/>
-            </a:solidFill>
-            <a:prstDash val="solid"/>
-          </a:ln>
-        </p:spPr>
-      </p:sp>
-      <p:sp>
-        <p:nvSpPr>
-          <p:cNvPr id="12" name="week label 4"/>
-          <p:cNvSpPr txBox="1"/>
-          <p:nvPr/>
-        </p:nvSpPr>
-        <p:spPr>
-          <a:xfrm>
-            <a:off x="8207248" y="1234440"/>
-            <a:ext cx="731520" cy="274320"/>
-          </a:xfrm>
-          <a:prstGeom prst="rect">
-            <a:avLst/>
-          </a:prstGeom>
-          <a:noFill/>
-          <a:ln/>
-        </p:spPr>
-        <p:txBody>
-          <a:bodyPr wrap="square" lIns="0" tIns="0" rIns="0" bIns="0" rtlCol="0" anchor="ctr"/>
-          <a:lstStyle/>
-          <a:p>
-            <a:pPr algn="ctr" indent="0" marL="0">
-              <a:buNone/>
-            </a:pPr>
-            <a:r>
-              <a:rPr lang="en-US" sz="1100" dirty="0">
-                <a:solidFill>
-                  <a:schemeClr val="accent6"/>
-                </a:solidFill>
-              </a:rPr>
-              <a:t>Nov 9</a:t>
-            </a:r>
-            <a:endParaRPr lang="en-US" sz="1100" dirty="0"/>
-          </a:p>
-        </p:txBody>
-      </p:sp>
-      <p:sp>
-        <p:nvSpPr>
-          <p:cNvPr id="13" name="week line 5"/>
-          <p:cNvSpPr/>
-          <p:nvPr/>
-        </p:nvSpPr>
-        <p:spPr>
-          <a:xfrm>
-            <a:off x="9824720" y="1600200"/>
-            <a:ext cx="0" cy="4069080"/>
-          </a:xfrm>
-          <a:prstGeom prst="line">
-            <a:avLst/>
-          </a:prstGeom>
-          <a:noFill/>
-          <a:ln w="9525">
-            <a:solidFill>
-              <a:srgbClr val="D5DAE0"/>
-            </a:solidFill>
-            <a:prstDash val="solid"/>
-          </a:ln>
-        </p:spPr>
-      </p:sp>
-      <p:sp>
-        <p:nvSpPr>
-          <p:cNvPr id="14" name="week label 5"/>
-          <p:cNvSpPr txBox="1"/>
-          <p:nvPr/>
-        </p:nvSpPr>
-        <p:spPr>
-          <a:xfrm>
-            <a:off x="9458960" y="1234440"/>
-            <a:ext cx="731520" cy="274320"/>
-          </a:xfrm>
-          <a:prstGeom prst="rect">
-            <a:avLst/>
-          </a:prstGeom>
-          <a:noFill/>
-          <a:ln/>
-        </p:spPr>
-        <p:txBody>
-          <a:bodyPr wrap="square" lIns="0" tIns="0" rIns="0" bIns="0" rtlCol="0" anchor="ctr"/>
-          <a:lstStyle/>
-          <a:p>
-            <a:pPr algn="ctr" indent="0" marL="0">
-              <a:buNone/>
-            </a:pPr>
-            <a:r>
-              <a:rPr lang="en-US" sz="1100" dirty="0">
-                <a:solidFill>
-                  <a:schemeClr val="accent6"/>
-                </a:solidFill>
-              </a:rPr>
-              <a:t>Nov 16</a:t>
-            </a:r>
-            <a:endParaRPr lang="en-US" sz="1100" dirty="0"/>
-          </a:p>
-        </p:txBody>
-      </p:sp>
-      <p:sp>
-        <p:nvSpPr>
-          <p:cNvPr id="15" name="week line 6"/>
-          <p:cNvSpPr/>
-          <p:nvPr/>
-        </p:nvSpPr>
-        <p:spPr>
-          <a:xfrm>
-            <a:off x="11076432" y="1600200"/>
-            <a:ext cx="0" cy="4069080"/>
-          </a:xfrm>
-          <a:prstGeom prst="line">
-            <a:avLst/>
-          </a:prstGeom>
-          <a:noFill/>
-          <a:ln w="9525">
-            <a:solidFill>
-              <a:srgbClr val="D5DAE0"/>
-            </a:solidFill>
-            <a:prstDash val="solid"/>
-          </a:ln>
-        </p:spPr>
-      </p:sp>
-      <p:sp>
-        <p:nvSpPr>
-          <p:cNvPr id="16" name="week label 6"/>
-          <p:cNvSpPr txBox="1"/>
-          <p:nvPr/>
-        </p:nvSpPr>
-        <p:spPr>
-          <a:xfrm>
-            <a:off x="10710672" y="1234440"/>
-            <a:ext cx="731520" cy="274320"/>
-          </a:xfrm>
-          <a:prstGeom prst="rect">
-            <a:avLst/>
-          </a:prstGeom>
-          <a:noFill/>
-          <a:ln/>
-        </p:spPr>
-        <p:txBody>
-          <a:bodyPr wrap="square" lIns="0" tIns="0" rIns="0" bIns="0" rtlCol="0" anchor="ctr"/>
-          <a:lstStyle/>
-          <a:p>
-            <a:pPr algn="ctr" indent="0" marL="0">
-              <a:buNone/>
-            </a:pPr>
-            <a:r>
-              <a:rPr lang="en-US" sz="1100" dirty="0">
-                <a:solidFill>
-                  <a:schemeClr val="accent6"/>
-                </a:solidFill>
-              </a:rPr>
-              <a:t>Nov 23</a:t>
-            </a:r>
-            <a:endParaRPr lang="en-US" sz="1100" dirty="0"/>
-          </a:p>
-        </p:txBody>
-      </p:sp>
-      <p:sp>
-        <p:nvSpPr>
-          <p:cNvPr id="17" name="bar label 0"/>
-          <p:cNvSpPr txBox="1"/>
-          <p:nvPr/>
-        </p:nvSpPr>
-        <p:spPr>
-          <a:xfrm>
-            <a:off x="548640" y="1737360"/>
-            <a:ext cx="2926080" cy="502920"/>
-          </a:xfrm>
-          <a:prstGeom prst="rect">
-            <a:avLst/>
-          </a:prstGeom>
-          <a:noFill/>
-          <a:ln/>
-        </p:spPr>
-        <p:txBody>
-          <a:bodyPr wrap="square" lIns="0" tIns="0" rIns="0" bIns="0" rtlCol="0" anchor="ctr"/>
-          <a:lstStyle/>
-          <a:p>
-            <a:pPr indent="0" marL="0">
-              <a:buNone/>
-            </a:pPr>
-            <a:r>
-              <a:rPr lang="en-US" sz="1200" dirty="0">
-                <a:solidFill>
-                  <a:schemeClr val="tx1"/>
-                </a:solidFill>
-              </a:rPr>
-              <a:t>Done: data model, CSE handover, FL, MCP agent</a:t>
-            </a:r>
-            <a:endParaRPr lang="en-US" sz="1200" dirty="0"/>
-          </a:p>
-        </p:txBody>
-      </p:sp>
-      <p:sp>
-        <p:nvSpPr>
-          <p:cNvPr id="18" name="bar 0"/>
-          <p:cNvSpPr/>
-          <p:nvPr/>
-        </p:nvSpPr>
-        <p:spPr>
-          <a:xfrm>
-            <a:off x="3566160" y="1828800"/>
-            <a:ext cx="178816" cy="329184"/>
-          </a:xfrm>
-          <a:prstGeom prst="roundRect">
-            <a:avLst>
-              <a:gd name="adj" fmla="val 30682"/>
-            </a:avLst>
-          </a:prstGeom>
-          <a:solidFill>
-            <a:schemeClr val="accent6"/>
-          </a:solidFill>
-          <a:ln w="12700">
-            <a:solidFill>
-              <a:schemeClr val="accent6"/>
-            </a:solidFill>
-            <a:prstDash val="solid"/>
-          </a:ln>
-        </p:spPr>
-      </p:sp>
-      <p:sp>
-        <p:nvSpPr>
-          <p:cNvPr id="19" name="bar label 1"/>
-          <p:cNvSpPr txBox="1"/>
-          <p:nvPr/>
-        </p:nvSpPr>
-        <p:spPr>
-          <a:xfrm>
-            <a:off x="548640" y="2395728"/>
-            <a:ext cx="2926080" cy="502920"/>
-          </a:xfrm>
-          <a:prstGeom prst="rect">
-            <a:avLst/>
-          </a:prstGeom>
-          <a:noFill/>
-          <a:ln/>
-        </p:spPr>
-        <p:txBody>
-          <a:bodyPr wrap="square" lIns="0" tIns="0" rIns="0" bIns="0" rtlCol="0" anchor="ctr"/>
-          <a:lstStyle/>
-          <a:p>
-            <a:pPr indent="0" marL="0">
-              <a:buNone/>
-            </a:pPr>
-            <a:r>
-              <a:rPr lang="en-US" sz="1200" dirty="0">
-                <a:solidFill>
-                  <a:schemeClr val="tx1"/>
-                </a:solidFill>
-              </a:rPr>
-              <a:t>M2  group, pollingChannel, MQTT for devices, TLS</a:t>
-            </a:r>
-            <a:endParaRPr lang="en-US" sz="1200" dirty="0"/>
-          </a:p>
-        </p:txBody>
-      </p:sp>
-      <p:sp>
-        <p:nvSpPr>
-          <p:cNvPr id="20" name="bar 1"/>
-          <p:cNvSpPr/>
-          <p:nvPr/>
-        </p:nvSpPr>
-        <p:spPr>
-          <a:xfrm>
-            <a:off x="5175504" y="2487168"/>
-            <a:ext cx="1966976" cy="329184"/>
-          </a:xfrm>
-          <a:prstGeom prst="roundRect">
-            <a:avLst>
-              <a:gd name="adj" fmla="val 16667"/>
-            </a:avLst>
-          </a:prstGeom>
-          <a:solidFill>
-            <a:schemeClr val="accent2"/>
-          </a:solidFill>
-          <a:ln w="12700">
-            <a:solidFill>
-              <a:schemeClr val="accent2"/>
-            </a:solidFill>
-            <a:prstDash val="solid"/>
-          </a:ln>
-        </p:spPr>
-      </p:sp>
-      <p:sp>
-        <p:nvSpPr>
-          <p:cNvPr id="21" name="bar label 2"/>
-          <p:cNvSpPr txBox="1"/>
-          <p:nvPr/>
-        </p:nvSpPr>
-        <p:spPr>
-          <a:xfrm>
-            <a:off x="548640" y="3054096"/>
-            <a:ext cx="2926080" cy="502920"/>
-          </a:xfrm>
-          <a:prstGeom prst="rect">
-            <a:avLst/>
-          </a:prstGeom>
-          <a:noFill/>
-          <a:ln/>
-        </p:spPr>
-        <p:txBody>
-          <a:bodyPr wrap="square" lIns="0" tIns="0" rIns="0" bIns="0" rtlCol="0" anchor="ctr"/>
-          <a:lstStyle/>
-          <a:p>
-            <a:pPr indent="0" marL="0">
-              <a:buNone/>
-            </a:pPr>
-            <a:r>
-              <a:rPr lang="en-US" sz="1200" dirty="0">
-                <a:solidFill>
-                  <a:schemeClr val="tx1"/>
-                </a:solidFill>
-              </a:rPr>
-              <a:t>M3  MEC Location zones: geofencing, handover trigger, multi-host</a:t>
-            </a:r>
-            <a:endParaRPr lang="en-US" sz="1200" dirty="0"/>
-          </a:p>
-        </p:txBody>
-      </p:sp>
-      <p:sp>
-        <p:nvSpPr>
-          <p:cNvPr id="22" name="bar 2"/>
-          <p:cNvSpPr/>
-          <p:nvPr/>
-        </p:nvSpPr>
-        <p:spPr>
-          <a:xfrm>
-            <a:off x="7142480" y="3145536"/>
-            <a:ext cx="1788160" cy="329184"/>
-          </a:xfrm>
-          <a:prstGeom prst="roundRect">
-            <a:avLst>
-              <a:gd name="adj" fmla="val 16667"/>
-            </a:avLst>
-          </a:prstGeom>
-          <a:solidFill>
-            <a:schemeClr val="accent4"/>
-          </a:solidFill>
-          <a:ln w="12700">
-            <a:solidFill>
-              <a:schemeClr val="accent4"/>
-            </a:solidFill>
-            <a:prstDash val="solid"/>
-          </a:ln>
-        </p:spPr>
-      </p:sp>
-      <p:sp>
-        <p:nvSpPr>
-          <p:cNvPr id="23" name="bar label 3"/>
-          <p:cNvSpPr txBox="1"/>
-          <p:nvPr/>
-        </p:nvSpPr>
-        <p:spPr>
-          <a:xfrm>
-            <a:off x="548640" y="3712464"/>
-            <a:ext cx="2926080" cy="502920"/>
-          </a:xfrm>
-          <a:prstGeom prst="rect">
-            <a:avLst/>
-          </a:prstGeom>
-          <a:noFill/>
-          <a:ln/>
-        </p:spPr>
-        <p:txBody>
-          <a:bodyPr wrap="square" lIns="0" tIns="0" rIns="0" bIns="0" rtlCol="0" anchor="ctr"/>
-          <a:lstStyle/>
-          <a:p>
-            <a:pPr indent="0" marL="0">
-              <a:buNone/>
-            </a:pPr>
-            <a:r>
-              <a:rPr lang="en-US" sz="1200" dirty="0">
-                <a:solidFill>
-                  <a:schemeClr val="tx1"/>
-                </a:solidFill>
-              </a:rPr>
-              <a:t>M4  Agent and FL polish; FL model used by the risk engine</a:t>
-            </a:r>
-            <a:endParaRPr lang="en-US" sz="1200" dirty="0"/>
-          </a:p>
-        </p:txBody>
-      </p:sp>
-      <p:sp>
-        <p:nvSpPr>
-          <p:cNvPr id="24" name="bar 3"/>
-          <p:cNvSpPr/>
-          <p:nvPr/>
-        </p:nvSpPr>
-        <p:spPr>
-          <a:xfrm>
-            <a:off x="8036560" y="3803904"/>
-            <a:ext cx="2145792" cy="329184"/>
-          </a:xfrm>
-          <a:prstGeom prst="roundRect">
-            <a:avLst>
-              <a:gd name="adj" fmla="val 16667"/>
-            </a:avLst>
-          </a:prstGeom>
-          <a:solidFill>
-            <a:schemeClr val="accent5"/>
-          </a:solidFill>
-          <a:ln w="12700">
-            <a:solidFill>
-              <a:schemeClr val="accent5"/>
-            </a:solidFill>
-            <a:prstDash val="solid"/>
-          </a:ln>
-        </p:spPr>
-      </p:sp>
-      <p:sp>
-        <p:nvSpPr>
-          <p:cNvPr id="25" name="bar label 4"/>
-          <p:cNvSpPr txBox="1"/>
-          <p:nvPr/>
-        </p:nvSpPr>
-        <p:spPr>
-          <a:xfrm>
-            <a:off x="548640" y="4370832"/>
-            <a:ext cx="2926080" cy="502920"/>
-          </a:xfrm>
-          <a:prstGeom prst="rect">
-            <a:avLst/>
-          </a:prstGeom>
-          <a:noFill/>
-          <a:ln/>
-        </p:spPr>
-        <p:txBody>
-          <a:bodyPr wrap="square" lIns="0" tIns="0" rIns="0" bIns="0" rtlCol="0" anchor="ctr"/>
-          <a:lstStyle/>
-          <a:p>
-            <a:pPr indent="0" marL="0">
-              <a:buNone/>
-            </a:pPr>
-            <a:r>
-              <a:rPr lang="en-US" sz="1200" dirty="0">
-                <a:solidFill>
-                  <a:schemeClr val="tx1"/>
-                </a:solidFill>
-              </a:rPr>
-              <a:t>M5  ESP32 boards, user study, article, video, public repo</a:t>
-            </a:r>
-            <a:endParaRPr lang="en-US" sz="1200" dirty="0"/>
-          </a:p>
-        </p:txBody>
-      </p:sp>
-      <p:sp>
-        <p:nvSpPr>
-          <p:cNvPr id="26" name="bar 4"/>
-          <p:cNvSpPr/>
-          <p:nvPr/>
-        </p:nvSpPr>
-        <p:spPr>
-          <a:xfrm>
-            <a:off x="8751824" y="4462272"/>
-            <a:ext cx="1966976" cy="329184"/>
-          </a:xfrm>
-          <a:prstGeom prst="roundRect">
-            <a:avLst>
-              <a:gd name="adj" fmla="val 16667"/>
-            </a:avLst>
-          </a:prstGeom>
-          <a:solidFill>
-            <a:schemeClr val="accent3"/>
-          </a:solidFill>
-          <a:ln w="12700">
-            <a:solidFill>
-              <a:schemeClr val="accent3"/>
-            </a:solidFill>
-            <a:prstDash val="solid"/>
-          </a:ln>
-        </p:spPr>
-      </p:sp>
-      <p:sp>
-        <p:nvSpPr>
-          <p:cNvPr id="27" name="bar label 5"/>
-          <p:cNvSpPr txBox="1"/>
-          <p:nvPr/>
-        </p:nvSpPr>
-        <p:spPr>
-          <a:xfrm>
-            <a:off x="548640" y="5029200"/>
-            <a:ext cx="2926080" cy="502920"/>
-          </a:xfrm>
-          <a:prstGeom prst="rect">
-            <a:avLst/>
-          </a:prstGeom>
-          <a:noFill/>
-          <a:ln/>
-        </p:spPr>
-        <p:txBody>
-          <a:bodyPr wrap="square" lIns="0" tIns="0" rIns="0" bIns="0" rtlCol="0" anchor="ctr"/>
-          <a:lstStyle/>
-          <a:p>
-            <a:pPr indent="0" marL="0">
-              <a:buNone/>
-            </a:pPr>
-            <a:r>
-              <a:rPr lang="en-US" sz="1200" dirty="0">
-                <a:solidFill>
-                  <a:schemeClr val="tx1"/>
-                </a:solidFill>
-              </a:rPr>
-              <a:t>Finals</a:t>
-            </a:r>
-            <a:endParaRPr lang="en-US" sz="1200" dirty="0"/>
-          </a:p>
-        </p:txBody>
-      </p:sp>
-      <p:sp>
-        <p:nvSpPr>
-          <p:cNvPr id="28" name="bar 5"/>
-          <p:cNvSpPr/>
-          <p:nvPr/>
-        </p:nvSpPr>
-        <p:spPr>
-          <a:xfrm>
-            <a:off x="11076432" y="5120640"/>
-            <a:ext cx="536448" cy="329184"/>
-          </a:xfrm>
-          <a:prstGeom prst="roundRect">
-            <a:avLst>
-              <a:gd name="adj" fmla="val 16667"/>
-            </a:avLst>
-          </a:prstGeom>
-          <a:solidFill>
-            <a:schemeClr val="tx2"/>
-          </a:solidFill>
-          <a:ln w="12700">
-            <a:solidFill>
-              <a:schemeClr val="tx2"/>
-            </a:solidFill>
-            <a:prstDash val="solid"/>
-          </a:ln>
-        </p:spPr>
-      </p:sp>
-      <p:sp>
-        <p:nvSpPr>
-          <p:cNvPr id="29" name="deadline 0"/>
-          <p:cNvSpPr/>
-          <p:nvPr/>
-        </p:nvSpPr>
-        <p:spPr>
-          <a:xfrm>
-            <a:off x="5175504" y="1600200"/>
-            <a:ext cx="0" cy="4069080"/>
-          </a:xfrm>
-          <a:prstGeom prst="line">
-            <a:avLst/>
-          </a:prstGeom>
-          <a:noFill/>
-          <a:ln w="19050">
-            <a:solidFill>
-              <a:schemeClr val="accent3"/>
-            </a:solidFill>
-            <a:prstDash val="dash"/>
-          </a:ln>
-        </p:spPr>
-      </p:sp>
-      <p:sp>
-        <p:nvSpPr>
-          <p:cNvPr id="30" name="deadline label 0"/>
-          <p:cNvSpPr txBox="1"/>
-          <p:nvPr/>
-        </p:nvSpPr>
-        <p:spPr>
-          <a:xfrm>
-            <a:off x="4352544" y="5715000"/>
-            <a:ext cx="1645920" cy="274320"/>
-          </a:xfrm>
-          <a:prstGeom prst="rect">
-            <a:avLst/>
-          </a:prstGeom>
-          <a:noFill/>
-          <a:ln/>
-        </p:spPr>
-        <p:txBody>
-          <a:bodyPr wrap="square" lIns="0" tIns="0" rIns="0" bIns="0" rtlCol="0" anchor="ctr"/>
-          <a:lstStyle/>
-          <a:p>
-            <a:pPr algn="ctr" indent="0" marL="0">
-              <a:buNone/>
-            </a:pPr>
-            <a:r>
-              <a:rPr lang="en-US" sz="1100" b="1" dirty="0">
-                <a:solidFill>
-                  <a:schemeClr val="accent3"/>
-                </a:solidFill>
-              </a:rPr>
-              <a:t>Oct 20 interim</a:t>
-            </a:r>
-            <a:endParaRPr lang="en-US" sz="1100" dirty="0"/>
-          </a:p>
-        </p:txBody>
-      </p:sp>
-      <p:sp>
-        <p:nvSpPr>
-          <p:cNvPr id="31" name="deadline 1"/>
-          <p:cNvSpPr/>
-          <p:nvPr/>
-        </p:nvSpPr>
-        <p:spPr>
-          <a:xfrm>
-            <a:off x="10718800" y="1600200"/>
-            <a:ext cx="0" cy="4069080"/>
-          </a:xfrm>
-          <a:prstGeom prst="line">
-            <a:avLst/>
-          </a:prstGeom>
-          <a:noFill/>
-          <a:ln w="19050">
-            <a:solidFill>
-              <a:schemeClr val="accent3"/>
-            </a:solidFill>
-            <a:prstDash val="dash"/>
-          </a:ln>
-        </p:spPr>
-      </p:sp>
-      <p:sp>
-        <p:nvSpPr>
-          <p:cNvPr id="32" name="deadline label 1"/>
-          <p:cNvSpPr txBox="1"/>
-          <p:nvPr/>
-        </p:nvSpPr>
-        <p:spPr>
-          <a:xfrm>
-            <a:off x="9895840" y="5715000"/>
-            <a:ext cx="1645920" cy="274320"/>
-          </a:xfrm>
-          <a:prstGeom prst="rect">
-            <a:avLst/>
-          </a:prstGeom>
-          <a:noFill/>
-          <a:ln/>
-        </p:spPr>
-        <p:txBody>
-          <a:bodyPr wrap="square" lIns="0" tIns="0" rIns="0" bIns="0" rtlCol="0" anchor="ctr"/>
-          <a:lstStyle/>
-          <a:p>
-            <a:pPr algn="ctr" indent="0" marL="0">
-              <a:buNone/>
-            </a:pPr>
-            <a:r>
-              <a:rPr lang="en-US" sz="1100" b="1" dirty="0">
-                <a:solidFill>
-                  <a:schemeClr val="accent3"/>
-                </a:solidFill>
-              </a:rPr>
-              <a:t>Nov 20 code freeze</a:t>
-            </a:r>
-            <a:endParaRPr lang="en-US" sz="1100" dirty="0"/>
-          </a:p>
-        </p:txBody>
-      </p:sp>
-      <p:sp>
-        <p:nvSpPr>
-          <p:cNvPr id="33" name="legend"/>
-          <p:cNvSpPr txBox="1"/>
-          <p:nvPr/>
-        </p:nvSpPr>
-        <p:spPr>
-          <a:xfrm>
-            <a:off x="548640" y="6035040"/>
-            <a:ext cx="11064240" cy="274320"/>
-          </a:xfrm>
-          <a:prstGeom prst="rect">
-            <a:avLst/>
-          </a:prstGeom>
-          <a:noFill/>
-          <a:ln/>
-        </p:spPr>
-        <p:txBody>
-          <a:bodyPr wrap="square" lIns="0" tIns="0" rIns="0" bIns="0" rtlCol="0" anchor="ctr"/>
-          <a:lstStyle/>
-          <a:p>
-            <a:pPr indent="0" marL="0">
-              <a:buNone/>
-            </a:pPr>
-            <a:r>
-              <a:rPr lang="en-US" sz="1100" dirty="0">
-                <a:solidFill>
-                  <a:schemeClr val="accent6"/>
-                </a:solidFill>
-              </a:rPr>
-              <a:t>Built ahead of plan (Oct 11): SDT data model, CSE handover, federated learning, AI agent  ·  Blue: oneM2M depth  ·  Orange: MEC  ·  Green: AI  ·  Red: demo and communication</a:t>
+              <a:t>Closed-loop simulation; baseline = our v1.0 vibration-only alert, same simulator.</a:t>
             </a:r>
             <a:endParaRPr lang="en-US" sz="1100" dirty="0"/>
           </a:p>
@@ -6828,6 +7105,1977 @@
                   <a:schemeClr val="tx2"/>
                 </a:solidFill>
               </a:rPr>
+              <a:t>Built ahead of plan: measured in CI on every commit</a:t>
+            </a:r>
+            <a:endParaRPr lang="en-US" sz="3000" dirty="0"/>
+          </a:p>
+        </p:txBody>
+      </p:sp>
+      <p:sp>
+        <p:nvSpPr>
+          <p:cNvPr id="3" name="ahead card Data model"/>
+          <p:cNvSpPr/>
+          <p:nvPr/>
+        </p:nvSpPr>
+        <p:spPr>
+          <a:xfrm>
+            <a:off x="548640" y="1325880"/>
+            <a:ext cx="3566160" cy="2286000"/>
+          </a:xfrm>
+          <a:prstGeom prst="roundRect">
+            <a:avLst>
+              <a:gd name="adj" fmla="val 3200"/>
+            </a:avLst>
+          </a:prstGeom>
+          <a:solidFill>
+            <a:schemeClr val="bg2"/>
+          </a:solidFill>
+          <a:ln w="12700">
+            <a:solidFill>
+              <a:schemeClr val="bg2"/>
+            </a:solidFill>
+            <a:prstDash val="solid"/>
+          </a:ln>
+        </p:spPr>
+      </p:sp>
+      <p:sp>
+        <p:nvSpPr>
+          <p:cNvPr id="4" name="ahead head Data model"/>
+          <p:cNvSpPr txBox="1"/>
+          <p:nvPr/>
+        </p:nvSpPr>
+        <p:spPr>
+          <a:xfrm>
+            <a:off x="777240" y="1508760"/>
+            <a:ext cx="3108960" cy="411480"/>
+          </a:xfrm>
+          <a:prstGeom prst="rect">
+            <a:avLst/>
+          </a:prstGeom>
+          <a:noFill/>
+          <a:ln/>
+        </p:spPr>
+        <p:txBody>
+          <a:bodyPr wrap="square" lIns="0" tIns="0" rIns="0" bIns="0" rtlCol="0" anchor="ctr"/>
+          <a:lstStyle/>
+          <a:p>
+            <a:pPr indent="0" marL="0">
+              <a:buNone/>
+            </a:pPr>
+            <a:r>
+              <a:rPr lang="en-US" sz="1700" b="1" dirty="0">
+                <a:solidFill>
+                  <a:schemeClr val="tx2"/>
+                </a:solidFill>
+              </a:rPr>
+              <a:t>Data model</a:t>
+            </a:r>
+            <a:endParaRPr lang="en-US" sz="1700" dirty="0"/>
+          </a:p>
+        </p:txBody>
+      </p:sp>
+      <p:sp>
+        <p:nvSpPr>
+          <p:cNvPr id="5" name="ahead body Data model"/>
+          <p:cNvSpPr txBox="1"/>
+          <p:nvPr/>
+        </p:nvSpPr>
+        <p:spPr>
+          <a:xfrm>
+            <a:off x="777240" y="1965960"/>
+            <a:ext cx="3108960" cy="1005840"/>
+          </a:xfrm>
+          <a:prstGeom prst="rect">
+            <a:avLst/>
+          </a:prstGeom>
+          <a:noFill/>
+          <a:ln/>
+        </p:spPr>
+        <p:txBody>
+          <a:bodyPr wrap="square" lIns="0" tIns="0" rIns="0" bIns="0" rtlCol="0" anchor="t"/>
+          <a:lstStyle/>
+          <a:p>
+            <a:pPr indent="0" marL="0">
+              <a:buNone/>
+            </a:pPr>
+            <a:r>
+              <a:rPr lang="en-US" sz="1300" dirty="0">
+                <a:solidFill>
+                  <a:schemeClr val="tx1"/>
+                </a:solidFill>
+              </a:rPr>
+              <a:t>SDT flexContainer twins (own domain + standard cod:bat), labels, SAREF semantic query</a:t>
+            </a:r>
+            <a:endParaRPr lang="en-US" sz="1300" dirty="0"/>
+          </a:p>
+        </p:txBody>
+      </p:sp>
+      <p:sp>
+        <p:nvSpPr>
+          <p:cNvPr id="6" name="ahead metric Data model"/>
+          <p:cNvSpPr txBox="1"/>
+          <p:nvPr/>
+        </p:nvSpPr>
+        <p:spPr>
+          <a:xfrm>
+            <a:off x="777240" y="3017520"/>
+            <a:ext cx="3108960" cy="457200"/>
+          </a:xfrm>
+          <a:prstGeom prst="rect">
+            <a:avLst/>
+          </a:prstGeom>
+          <a:noFill/>
+          <a:ln/>
+        </p:spPr>
+        <p:txBody>
+          <a:bodyPr wrap="square" lIns="0" tIns="0" rIns="0" bIns="0" rtlCol="0" anchor="t"/>
+          <a:lstStyle/>
+          <a:p>
+            <a:pPr indent="0" marL="0">
+              <a:buNone/>
+            </a:pPr>
+            <a:r>
+              <a:rPr lang="en-US" sz="1300" b="1" dirty="0">
+                <a:solidFill>
+                  <a:schemeClr val="accent2"/>
+                </a:solidFill>
+              </a:rPr>
+              <a:t>self-registered device onboarded in ≈ 9 s · 6/6 checks</a:t>
+            </a:r>
+            <a:endParaRPr lang="en-US" sz="1300" dirty="0"/>
+          </a:p>
+        </p:txBody>
+      </p:sp>
+      <p:sp>
+        <p:nvSpPr>
+          <p:cNvPr id="7" name="ahead card CSE handover"/>
+          <p:cNvSpPr/>
+          <p:nvPr/>
+        </p:nvSpPr>
+        <p:spPr>
+          <a:xfrm>
+            <a:off x="4297680" y="1325880"/>
+            <a:ext cx="3566160" cy="2286000"/>
+          </a:xfrm>
+          <a:prstGeom prst="roundRect">
+            <a:avLst>
+              <a:gd name="adj" fmla="val 3200"/>
+            </a:avLst>
+          </a:prstGeom>
+          <a:solidFill>
+            <a:schemeClr val="bg2"/>
+          </a:solidFill>
+          <a:ln w="12700">
+            <a:solidFill>
+              <a:schemeClr val="bg2"/>
+            </a:solidFill>
+            <a:prstDash val="solid"/>
+          </a:ln>
+        </p:spPr>
+      </p:sp>
+      <p:sp>
+        <p:nvSpPr>
+          <p:cNvPr id="8" name="ahead head CSE handover"/>
+          <p:cNvSpPr txBox="1"/>
+          <p:nvPr/>
+        </p:nvSpPr>
+        <p:spPr>
+          <a:xfrm>
+            <a:off x="4526280" y="1508760"/>
+            <a:ext cx="3108960" cy="411480"/>
+          </a:xfrm>
+          <a:prstGeom prst="rect">
+            <a:avLst/>
+          </a:prstGeom>
+          <a:noFill/>
+          <a:ln/>
+        </p:spPr>
+        <p:txBody>
+          <a:bodyPr wrap="square" lIns="0" tIns="0" rIns="0" bIns="0" rtlCol="0" anchor="ctr"/>
+          <a:lstStyle/>
+          <a:p>
+            <a:pPr indent="0" marL="0">
+              <a:buNone/>
+            </a:pPr>
+            <a:r>
+              <a:rPr lang="en-US" sz="1700" b="1" dirty="0">
+                <a:solidFill>
+                  <a:schemeClr val="tx2"/>
+                </a:solidFill>
+              </a:rPr>
+              <a:t>CSE handover</a:t>
+            </a:r>
+            <a:endParaRPr lang="en-US" sz="1700" dirty="0"/>
+          </a:p>
+        </p:txBody>
+      </p:sp>
+      <p:sp>
+        <p:nvSpPr>
+          <p:cNvPr id="9" name="ahead body CSE handover"/>
+          <p:cNvSpPr txBox="1"/>
+          <p:nvPr/>
+        </p:nvSpPr>
+        <p:spPr>
+          <a:xfrm>
+            <a:off x="4526280" y="1965960"/>
+            <a:ext cx="3108960" cy="1005840"/>
+          </a:xfrm>
+          <a:prstGeom prst="rect">
+            <a:avLst/>
+          </a:prstGeom>
+          <a:noFill/>
+          <a:ln/>
+        </p:spPr>
+        <p:txBody>
+          <a:bodyPr wrap="square" lIns="0" tIns="0" rIns="0" bIns="0" rtlCol="0" anchor="t"/>
+          <a:lstStyle/>
+          <a:p>
+            <a:pPr indent="0" marL="0">
+              <a:buNone/>
+            </a:pPr>
+            <a:r>
+              <a:rPr lang="en-US" sz="1300" dirty="0">
+                <a:solidFill>
+                  <a:schemeClr val="tx1"/>
+                </a:solidFill>
+              </a:rPr>
+              <a:t>forklift AE moves between zone MN-CSEs with state, ACP, subscriptions; announcement + home record</a:t>
+            </a:r>
+            <a:endParaRPr lang="en-US" sz="1300" dirty="0"/>
+          </a:p>
+        </p:txBody>
+      </p:sp>
+      <p:sp>
+        <p:nvSpPr>
+          <p:cNvPr id="10" name="ahead metric CSE handover"/>
+          <p:cNvSpPr txBox="1"/>
+          <p:nvPr/>
+        </p:nvSpPr>
+        <p:spPr>
+          <a:xfrm>
+            <a:off x="4526280" y="3017520"/>
+            <a:ext cx="3108960" cy="457200"/>
+          </a:xfrm>
+          <a:prstGeom prst="rect">
+            <a:avLst/>
+          </a:prstGeom>
+          <a:noFill/>
+          <a:ln/>
+        </p:spPr>
+        <p:txBody>
+          <a:bodyPr wrap="square" lIns="0" tIns="0" rIns="0" bIns="0" rtlCol="0" anchor="t"/>
+          <a:lstStyle/>
+          <a:p>
+            <a:pPr indent="0" marL="0">
+              <a:buNone/>
+            </a:pPr>
+            <a:r>
+              <a:rPr lang="en-US" sz="1300" b="1" dirty="0">
+                <a:solidFill>
+                  <a:schemeClr val="accent2"/>
+                </a:solidFill>
+              </a:rPr>
+              <a:t>3–11 ms interruption, 0 samples lost · failover ≈ 0.3 s</a:t>
+            </a:r>
+            <a:endParaRPr lang="en-US" sz="1300" dirty="0"/>
+          </a:p>
+        </p:txBody>
+      </p:sp>
+      <p:sp>
+        <p:nvSpPr>
+          <p:cNvPr id="11" name="ahead card Federated learning"/>
+          <p:cNvSpPr/>
+          <p:nvPr/>
+        </p:nvSpPr>
+        <p:spPr>
+          <a:xfrm>
+            <a:off x="8046720" y="1325880"/>
+            <a:ext cx="3566160" cy="2286000"/>
+          </a:xfrm>
+          <a:prstGeom prst="roundRect">
+            <a:avLst>
+              <a:gd name="adj" fmla="val 3200"/>
+            </a:avLst>
+          </a:prstGeom>
+          <a:solidFill>
+            <a:schemeClr val="bg2"/>
+          </a:solidFill>
+          <a:ln w="12700">
+            <a:solidFill>
+              <a:schemeClr val="bg2"/>
+            </a:solidFill>
+            <a:prstDash val="solid"/>
+          </a:ln>
+        </p:spPr>
+      </p:sp>
+      <p:sp>
+        <p:nvSpPr>
+          <p:cNvPr id="12" name="ahead head Federated learning"/>
+          <p:cNvSpPr txBox="1"/>
+          <p:nvPr/>
+        </p:nvSpPr>
+        <p:spPr>
+          <a:xfrm>
+            <a:off x="8275320" y="1508760"/>
+            <a:ext cx="3108960" cy="411480"/>
+          </a:xfrm>
+          <a:prstGeom prst="rect">
+            <a:avLst/>
+          </a:prstGeom>
+          <a:noFill/>
+          <a:ln/>
+        </p:spPr>
+        <p:txBody>
+          <a:bodyPr wrap="square" lIns="0" tIns="0" rIns="0" bIns="0" rtlCol="0" anchor="ctr"/>
+          <a:lstStyle/>
+          <a:p>
+            <a:pPr indent="0" marL="0">
+              <a:buNone/>
+            </a:pPr>
+            <a:r>
+              <a:rPr lang="en-US" sz="1700" b="1" dirty="0">
+                <a:solidFill>
+                  <a:schemeClr val="tx2"/>
+                </a:solidFill>
+              </a:rPr>
+              <a:t>Federated learning</a:t>
+            </a:r>
+            <a:endParaRPr lang="en-US" sz="1700" dirty="0"/>
+          </a:p>
+        </p:txBody>
+      </p:sp>
+      <p:sp>
+        <p:nvSpPr>
+          <p:cNvPr id="13" name="ahead body Federated learning"/>
+          <p:cNvSpPr txBox="1"/>
+          <p:nvPr/>
+        </p:nvSpPr>
+        <p:spPr>
+          <a:xfrm>
+            <a:off x="8275320" y="1965960"/>
+            <a:ext cx="3108960" cy="1005840"/>
+          </a:xfrm>
+          <a:prstGeom prst="rect">
+            <a:avLst/>
+          </a:prstGeom>
+          <a:noFill/>
+          <a:ln/>
+        </p:spPr>
+        <p:txBody>
+          <a:bodyPr wrap="square" lIns="0" tIns="0" rIns="0" bIns="0" rtlCol="0" anchor="t"/>
+          <a:lstStyle/>
+          <a:p>
+            <a:pPr indent="0" marL="0">
+              <a:buNone/>
+            </a:pPr>
+            <a:r>
+              <a:rPr lang="en-US" sz="1300" dirty="0">
+                <a:solidFill>
+                  <a:schemeClr val="tx1"/>
+                </a:solidFill>
+              </a:rPr>
+              <a:t>TR-0084 roles as oneM2M resources: task, participants, rounds, model lineage; dropout, late join</a:t>
+            </a:r>
+            <a:endParaRPr lang="en-US" sz="1300" dirty="0"/>
+          </a:p>
+        </p:txBody>
+      </p:sp>
+      <p:sp>
+        <p:nvSpPr>
+          <p:cNvPr id="14" name="ahead metric Federated learning"/>
+          <p:cNvSpPr txBox="1"/>
+          <p:nvPr/>
+        </p:nvSpPr>
+        <p:spPr>
+          <a:xfrm>
+            <a:off x="8275320" y="3017520"/>
+            <a:ext cx="3108960" cy="457200"/>
+          </a:xfrm>
+          <a:prstGeom prst="rect">
+            <a:avLst/>
+          </a:prstGeom>
+          <a:noFill/>
+          <a:ln/>
+        </p:spPr>
+        <p:txBody>
+          <a:bodyPr wrap="square" lIns="0" tIns="0" rIns="0" bIns="0" rtlCol="0" anchor="t"/>
+          <a:lstStyle/>
+          <a:p>
+            <a:pPr indent="0" marL="0">
+              <a:buNone/>
+            </a:pPr>
+            <a:r>
+              <a:rPr lang="en-US" sz="1300" b="1" dirty="0">
+                <a:solidFill>
+                  <a:schemeClr val="accent2"/>
+                </a:solidFill>
+              </a:rPr>
+              <a:t>2 s prediction error 0.604 → 0.486 m · 8/8 checks</a:t>
+            </a:r>
+            <a:endParaRPr lang="en-US" sz="1300" dirty="0"/>
+          </a:p>
+        </p:txBody>
+      </p:sp>
+      <p:sp>
+        <p:nvSpPr>
+          <p:cNvPr id="15" name="ahead card AI safety agent"/>
+          <p:cNvSpPr/>
+          <p:nvPr/>
+        </p:nvSpPr>
+        <p:spPr>
+          <a:xfrm>
+            <a:off x="548640" y="3794760"/>
+            <a:ext cx="3566160" cy="2286000"/>
+          </a:xfrm>
+          <a:prstGeom prst="roundRect">
+            <a:avLst>
+              <a:gd name="adj" fmla="val 3200"/>
+            </a:avLst>
+          </a:prstGeom>
+          <a:solidFill>
+            <a:schemeClr val="bg2"/>
+          </a:solidFill>
+          <a:ln w="12700">
+            <a:solidFill>
+              <a:schemeClr val="bg2"/>
+            </a:solidFill>
+            <a:prstDash val="solid"/>
+          </a:ln>
+        </p:spPr>
+      </p:sp>
+      <p:sp>
+        <p:nvSpPr>
+          <p:cNvPr id="16" name="ahead head AI safety agent"/>
+          <p:cNvSpPr txBox="1"/>
+          <p:nvPr/>
+        </p:nvSpPr>
+        <p:spPr>
+          <a:xfrm>
+            <a:off x="777240" y="3977640"/>
+            <a:ext cx="3108960" cy="411480"/>
+          </a:xfrm>
+          <a:prstGeom prst="rect">
+            <a:avLst/>
+          </a:prstGeom>
+          <a:noFill/>
+          <a:ln/>
+        </p:spPr>
+        <p:txBody>
+          <a:bodyPr wrap="square" lIns="0" tIns="0" rIns="0" bIns="0" rtlCol="0" anchor="ctr"/>
+          <a:lstStyle/>
+          <a:p>
+            <a:pPr indent="0" marL="0">
+              <a:buNone/>
+            </a:pPr>
+            <a:r>
+              <a:rPr lang="en-US" sz="1700" b="1" dirty="0">
+                <a:solidFill>
+                  <a:schemeClr val="tx2"/>
+                </a:solidFill>
+              </a:rPr>
+              <a:t>AI safety agent</a:t>
+            </a:r>
+            <a:endParaRPr lang="en-US" sz="1700" dirty="0"/>
+          </a:p>
+        </p:txBody>
+      </p:sp>
+      <p:sp>
+        <p:nvSpPr>
+          <p:cNvPr id="17" name="ahead body AI safety agent"/>
+          <p:cNvSpPr txBox="1"/>
+          <p:nvPr/>
+        </p:nvSpPr>
+        <p:spPr>
+          <a:xfrm>
+            <a:off x="777240" y="4434840"/>
+            <a:ext cx="3108960" cy="1005840"/>
+          </a:xfrm>
+          <a:prstGeom prst="rect">
+            <a:avLst/>
+          </a:prstGeom>
+          <a:noFill/>
+          <a:ln/>
+        </p:spPr>
+        <p:txBody>
+          <a:bodyPr wrap="square" lIns="0" tIns="0" rIns="0" bIns="0" rtlCol="0" anchor="t"/>
+          <a:lstStyle/>
+          <a:p>
+            <a:pPr indent="0" marL="0">
+              <a:buNone/>
+            </a:pPr>
+            <a:r>
+              <a:rPr lang="en-US" sz="1300" dirty="0">
+                <a:solidFill>
+                  <a:schemeClr val="tx1"/>
+                </a:solidFill>
+              </a:rPr>
+              <a:t>MCP servers for IN-CSE, zone A, zone B and ETSI MEC; state in oneM2M; routing to the serving CSE</a:t>
+            </a:r>
+            <a:endParaRPr lang="en-US" sz="1300" dirty="0"/>
+          </a:p>
+        </p:txBody>
+      </p:sp>
+      <p:sp>
+        <p:nvSpPr>
+          <p:cNvPr id="18" name="ahead metric AI safety agent"/>
+          <p:cNvSpPr txBox="1"/>
+          <p:nvPr/>
+        </p:nvSpPr>
+        <p:spPr>
+          <a:xfrm>
+            <a:off x="777240" y="5486400"/>
+            <a:ext cx="3108960" cy="457200"/>
+          </a:xfrm>
+          <a:prstGeom prst="rect">
+            <a:avLst/>
+          </a:prstGeom>
+          <a:noFill/>
+          <a:ln/>
+        </p:spPr>
+        <p:txBody>
+          <a:bodyPr wrap="square" lIns="0" tIns="0" rIns="0" bIns="0" rtlCol="0" anchor="t"/>
+          <a:lstStyle/>
+          <a:p>
+            <a:pPr indent="0" marL="0">
+              <a:buNone/>
+            </a:pPr>
+            <a:r>
+              <a:rPr lang="en-US" sz="1300" b="1" dirty="0">
+                <a:solidFill>
+                  <a:schemeClr val="accent2"/>
+                </a:solidFill>
+              </a:rPr>
+              <a:t>15 tool calls, validated · 9/9</a:t>
+            </a:r>
+            <a:endParaRPr lang="en-US" sz="1300" dirty="0"/>
+          </a:p>
+        </p:txBody>
+      </p:sp>
+      <p:sp>
+        <p:nvSpPr>
+          <p:cNvPr id="19" name="ahead card Mobility · orchestration"/>
+          <p:cNvSpPr/>
+          <p:nvPr/>
+        </p:nvSpPr>
+        <p:spPr>
+          <a:xfrm>
+            <a:off x="4297680" y="3794760"/>
+            <a:ext cx="3566160" cy="2286000"/>
+          </a:xfrm>
+          <a:prstGeom prst="roundRect">
+            <a:avLst>
+              <a:gd name="adj" fmla="val 3200"/>
+            </a:avLst>
+          </a:prstGeom>
+          <a:solidFill>
+            <a:schemeClr val="bg2"/>
+          </a:solidFill>
+          <a:ln w="12700">
+            <a:solidFill>
+              <a:schemeClr val="bg2"/>
+            </a:solidFill>
+            <a:prstDash val="solid"/>
+          </a:ln>
+        </p:spPr>
+      </p:sp>
+      <p:sp>
+        <p:nvSpPr>
+          <p:cNvPr id="20" name="ahead head Mobility · orchestration"/>
+          <p:cNvSpPr txBox="1"/>
+          <p:nvPr/>
+        </p:nvSpPr>
+        <p:spPr>
+          <a:xfrm>
+            <a:off x="4526280" y="3977640"/>
+            <a:ext cx="3108960" cy="411480"/>
+          </a:xfrm>
+          <a:prstGeom prst="rect">
+            <a:avLst/>
+          </a:prstGeom>
+          <a:noFill/>
+          <a:ln/>
+        </p:spPr>
+        <p:txBody>
+          <a:bodyPr wrap="square" lIns="0" tIns="0" rIns="0" bIns="0" rtlCol="0" anchor="ctr"/>
+          <a:lstStyle/>
+          <a:p>
+            <a:pPr indent="0" marL="0">
+              <a:buNone/>
+            </a:pPr>
+            <a:r>
+              <a:rPr lang="en-US" sz="1700" b="1" dirty="0">
+                <a:solidFill>
+                  <a:schemeClr val="tx2"/>
+                </a:solidFill>
+              </a:rPr>
+              <a:t>Mobility · orchestration</a:t>
+            </a:r>
+            <a:endParaRPr lang="en-US" sz="1700" dirty="0"/>
+          </a:p>
+        </p:txBody>
+      </p:sp>
+      <p:sp>
+        <p:nvSpPr>
+          <p:cNvPr id="21" name="ahead body Mobility · orchestration"/>
+          <p:cNvSpPr txBox="1"/>
+          <p:nvPr/>
+        </p:nvSpPr>
+        <p:spPr>
+          <a:xfrm>
+            <a:off x="4526280" y="4434840"/>
+            <a:ext cx="3108960" cy="1005840"/>
+          </a:xfrm>
+          <a:prstGeom prst="rect">
+            <a:avLst/>
+          </a:prstGeom>
+          <a:noFill/>
+          <a:ln/>
+        </p:spPr>
+        <p:txBody>
+          <a:bodyPr wrap="square" lIns="0" tIns="0" rIns="0" bIns="0" rtlCol="0" anchor="t"/>
+          <a:lstStyle/>
+          <a:p>
+            <a:pPr indent="0" marL="0">
+              <a:buNone/>
+            </a:pPr>
+            <a:r>
+              <a:rPr lang="en-US" sz="1300" dirty="0">
+                <a:solidFill>
+                  <a:schemeClr val="tx1"/>
+                </a:solidFill>
+              </a:rPr>
+              <a:t>MEC zone events and RSRP into oneM2M; network-triggered handover; deploy by intent across MEC hosts</a:t>
+            </a:r>
+            <a:endParaRPr lang="en-US" sz="1300" dirty="0"/>
+          </a:p>
+        </p:txBody>
+      </p:sp>
+      <p:sp>
+        <p:nvSpPr>
+          <p:cNvPr id="22" name="ahead metric Mobility · orchestration"/>
+          <p:cNvSpPr txBox="1"/>
+          <p:nvPr/>
+        </p:nvSpPr>
+        <p:spPr>
+          <a:xfrm>
+            <a:off x="4526280" y="5486400"/>
+            <a:ext cx="3108960" cy="457200"/>
+          </a:xfrm>
+          <a:prstGeom prst="rect">
+            <a:avLst/>
+          </a:prstGeom>
+          <a:noFill/>
+          <a:ln/>
+        </p:spPr>
+        <p:txBody>
+          <a:bodyPr wrap="square" lIns="0" tIns="0" rIns="0" bIns="0" rtlCol="0" anchor="t"/>
+          <a:lstStyle/>
+          <a:p>
+            <a:pPr indent="0" marL="0">
+              <a:buNone/>
+            </a:pPr>
+            <a:r>
+              <a:rPr lang="en-US" sz="1300" b="1" dirty="0">
+                <a:solidFill>
+                  <a:schemeClr val="accent2"/>
+                </a:solidFill>
+              </a:rPr>
+              <a:t>1.5–8 ms, 0 lost · re-placed in ≈ 2.5 s</a:t>
+            </a:r>
+            <a:endParaRPr lang="en-US" sz="1300" dirty="0"/>
+          </a:p>
+        </p:txBody>
+      </p:sp>
+      <p:sp>
+        <p:nvSpPr>
+          <p:cNvPr id="23" name="ahead card Swarm · models · transport"/>
+          <p:cNvSpPr/>
+          <p:nvPr/>
+        </p:nvSpPr>
+        <p:spPr>
+          <a:xfrm>
+            <a:off x="8046720" y="3794760"/>
+            <a:ext cx="3566160" cy="2286000"/>
+          </a:xfrm>
+          <a:prstGeom prst="roundRect">
+            <a:avLst>
+              <a:gd name="adj" fmla="val 3200"/>
+            </a:avLst>
+          </a:prstGeom>
+          <a:solidFill>
+            <a:schemeClr val="bg2"/>
+          </a:solidFill>
+          <a:ln w="12700">
+            <a:solidFill>
+              <a:schemeClr val="bg2"/>
+            </a:solidFill>
+            <a:prstDash val="solid"/>
+          </a:ln>
+        </p:spPr>
+      </p:sp>
+      <p:sp>
+        <p:nvSpPr>
+          <p:cNvPr id="24" name="ahead head Swarm · models · transport"/>
+          <p:cNvSpPr txBox="1"/>
+          <p:nvPr/>
+        </p:nvSpPr>
+        <p:spPr>
+          <a:xfrm>
+            <a:off x="8275320" y="3977640"/>
+            <a:ext cx="3108960" cy="411480"/>
+          </a:xfrm>
+          <a:prstGeom prst="rect">
+            <a:avLst/>
+          </a:prstGeom>
+          <a:noFill/>
+          <a:ln/>
+        </p:spPr>
+        <p:txBody>
+          <a:bodyPr wrap="square" lIns="0" tIns="0" rIns="0" bIns="0" rtlCol="0" anchor="ctr"/>
+          <a:lstStyle/>
+          <a:p>
+            <a:pPr indent="0" marL="0">
+              <a:buNone/>
+            </a:pPr>
+            <a:r>
+              <a:rPr lang="en-US" sz="1700" b="1" dirty="0">
+                <a:solidFill>
+                  <a:schemeClr val="tx2"/>
+                </a:solidFill>
+              </a:rPr>
+              <a:t>Swarm · models · transport</a:t>
+            </a:r>
+            <a:endParaRPr lang="en-US" sz="1700" dirty="0"/>
+          </a:p>
+        </p:txBody>
+      </p:sp>
+      <p:sp>
+        <p:nvSpPr>
+          <p:cNvPr id="25" name="ahead body Swarm · models · transport"/>
+          <p:cNvSpPr txBox="1"/>
+          <p:nvPr/>
+        </p:nvSpPr>
+        <p:spPr>
+          <a:xfrm>
+            <a:off x="8275320" y="4434840"/>
+            <a:ext cx="3108960" cy="1005840"/>
+          </a:xfrm>
+          <a:prstGeom prst="rect">
+            <a:avLst/>
+          </a:prstGeom>
+          <a:noFill/>
+          <a:ln/>
+        </p:spPr>
+        <p:txBody>
+          <a:bodyPr wrap="square" lIns="0" tIns="0" rIns="0" bIns="0" rtlCol="0" anchor="t"/>
+          <a:lstStyle/>
+          <a:p>
+            <a:pPr indent="0" marL="0">
+              <a:buNone/>
+            </a:pPr>
+            <a:r>
+              <a:rPr lang="en-US" sz="1300" dirty="0">
+                <a:solidFill>
+                  <a:schemeClr val="tx1"/>
+                </a:solidFill>
+              </a:rPr>
+              <a:t>forklift swarm via &lt;group&gt;; canary / rollback of FL models; group + pollingChannel; MQTT/TLS, HTTPS</a:t>
+            </a:r>
+            <a:endParaRPr lang="en-US" sz="1300" dirty="0"/>
+          </a:p>
+        </p:txBody>
+      </p:sp>
+      <p:sp>
+        <p:nvSpPr>
+          <p:cNvPr id="26" name="ahead metric Swarm · models · transport"/>
+          <p:cNvSpPr txBox="1"/>
+          <p:nvPr/>
+        </p:nvSpPr>
+        <p:spPr>
+          <a:xfrm>
+            <a:off x="8275320" y="5486400"/>
+            <a:ext cx="3108960" cy="457200"/>
+          </a:xfrm>
+          <a:prstGeom prst="rect">
+            <a:avLst/>
+          </a:prstGeom>
+          <a:noFill/>
+          <a:ln/>
+        </p:spPr>
+        <p:txBody>
+          <a:bodyPr wrap="square" lIns="0" tIns="0" rIns="0" bIns="0" rtlCol="0" anchor="t"/>
+          <a:lstStyle/>
+          <a:p>
+            <a:pPr indent="0" marL="0">
+              <a:buNone/>
+            </a:pPr>
+            <a:r>
+              <a:rPr lang="en-US" sz="1300" b="1" dirty="0">
+                <a:solidFill>
+                  <a:schemeClr val="accent2"/>
+                </a:solidFill>
+              </a:rPr>
+              <a:t>conflicts 4 → 0 · 6 attacks refused</a:t>
+            </a:r>
+            <a:endParaRPr lang="en-US" sz="1300" dirty="0"/>
+          </a:p>
+        </p:txBody>
+      </p:sp>
+      <p:sp>
+        <p:nvSpPr>
+          <p:cNvPr id="25" name="Slide Number Placeholder 0"/>
+          <p:cNvSpPr>
+            <a:spLocks noGrp="1"/>
+          </p:cNvSpPr>
+          <p:nvPr>
+            <p:ph type="sldNum" sz="quarter" idx="4294967295"/>
+          </p:nvPr>
+        </p:nvSpPr>
+        <p:spPr>
+          <a:xfrm>
+            <a:off x="11155680" y="6400800"/>
+            <a:ext cx="457200" cy="274320"/>
+          </a:xfrm>
+          <a:prstGeom prst="rect">
+            <a:avLst/>
+          </a:prstGeom>
+          <a:extLst>
+            <a:ext uri="{C572A759-6A51-4108-AA02-DFA0A04FC94B}">
+              <ma14:wrappingTextBoxFlag xmlns:ma14="http://schemas.microsoft.com/office/mac/drawingml/2011/main" val="0"/>
+            </a:ext>
+          </a:extLst>
+        </p:spPr>
+        <p:txBody>
+          <a:bodyPr/>
+          <a:lstStyle>
+            <a:lvl1pPr>
+              <a:defRPr sz="1000">
+                <a:solidFill>
+                  <a:schemeClr val="accent6"/>
+                </a:solidFill>
+              </a:defRPr>
+            </a:lvl1pPr>
+          </a:lstStyle>
+          <a:p>
+            <a:pPr algn="r"/>
+            <a:fld id="{F7021451-1387-4CA6-816F-3879F97B5CBC}" type="slidenum">
+              <a:rPr b="0" lang="en-US"/>
+              <a:t>14</a:t>
+            </a:fld>
+            <a:endParaRPr lang="en-US"/>
+          </a:p>
+        </p:txBody>
+      </p:sp>
+    </p:spTree>
+  </p:cSld>
+  <p:clrMapOvr>
+    <a:masterClrMapping/>
+  </p:clrMapOvr>
+</p:sld>
+</file>
+
+<file path=ppt/slides/slide15.xml><?xml version="1.0" encoding="utf-8"?>
+<p:sld xmlns:a="http://schemas.openxmlformats.org/drawingml/2006/main" xmlns:r="http://schemas.openxmlformats.org/officeDocument/2006/relationships" xmlns:p="http://schemas.openxmlformats.org/presentationml/2006/main">
+  <p:cSld name="Slide 15">
+    <p:spTree>
+      <p:nvGrpSpPr>
+        <p:cNvPr id="1" name=""/>
+        <p:cNvGrpSpPr/>
+        <p:nvPr/>
+      </p:nvGrpSpPr>
+      <p:grpSpPr>
+        <a:xfrm>
+          <a:off x="0" y="0"/>
+          <a:ext cx="0" cy="0"/>
+          <a:chOff x="0" y="0"/>
+          <a:chExt cx="0" cy="0"/>
+        </a:xfrm>
+      </p:grpSpPr>
+      <p:sp>
+        <p:nvSpPr>
+          <p:cNvPr id="2" name="Text 0"/>
+          <p:cNvSpPr/>
+          <p:nvPr>
+            <p:ph idx="100" type="title" hasCustomPrompt="1"/>
+          </p:nvPr>
+        </p:nvSpPr>
+        <p:spPr>
+          <a:xfrm>
+            <a:off x="548640" y="320040"/>
+            <a:ext cx="11064240" cy="731520"/>
+          </a:xfrm>
+          <a:prstGeom prst="rect">
+            <a:avLst/>
+          </a:prstGeom>
+          <a:noFill/>
+          <a:ln/>
+        </p:spPr>
+        <p:txBody>
+          <a:bodyPr wrap="square" lIns="0" tIns="0" rIns="0" bIns="0" rtlCol="0" anchor="ctr"/>
+          <a:lstStyle/>
+          <a:p>
+            <a:pPr algn="l" indent="0" marL="0">
+              <a:buNone/>
+            </a:pPr>
+            <a:r>
+              <a:rPr lang="en-US" sz="3000" b="1" dirty="0">
+                <a:solidFill>
+                  <a:schemeClr val="tx2"/>
+                </a:solidFill>
+              </a:rPr>
+              <a:t>Development plan: Oct 12 – Nov 25</a:t>
+            </a:r>
+            <a:endParaRPr lang="en-US" sz="3000" dirty="0"/>
+          </a:p>
+        </p:txBody>
+      </p:sp>
+      <p:sp>
+        <p:nvSpPr>
+          <p:cNvPr id="3" name="week line 0"/>
+          <p:cNvSpPr/>
+          <p:nvPr/>
+        </p:nvSpPr>
+        <p:spPr>
+          <a:xfrm>
+            <a:off x="3566160" y="1600200"/>
+            <a:ext cx="0" cy="4069080"/>
+          </a:xfrm>
+          <a:prstGeom prst="line">
+            <a:avLst/>
+          </a:prstGeom>
+          <a:noFill/>
+          <a:ln w="9525">
+            <a:solidFill>
+              <a:srgbClr val="D5DAE0"/>
+            </a:solidFill>
+            <a:prstDash val="solid"/>
+          </a:ln>
+        </p:spPr>
+      </p:sp>
+      <p:sp>
+        <p:nvSpPr>
+          <p:cNvPr id="4" name="week label 0"/>
+          <p:cNvSpPr txBox="1"/>
+          <p:nvPr/>
+        </p:nvSpPr>
+        <p:spPr>
+          <a:xfrm>
+            <a:off x="3200400" y="1234440"/>
+            <a:ext cx="731520" cy="274320"/>
+          </a:xfrm>
+          <a:prstGeom prst="rect">
+            <a:avLst/>
+          </a:prstGeom>
+          <a:noFill/>
+          <a:ln/>
+        </p:spPr>
+        <p:txBody>
+          <a:bodyPr wrap="square" lIns="0" tIns="0" rIns="0" bIns="0" rtlCol="0" anchor="ctr"/>
+          <a:lstStyle/>
+          <a:p>
+            <a:pPr algn="ctr" indent="0" marL="0">
+              <a:buNone/>
+            </a:pPr>
+            <a:r>
+              <a:rPr lang="en-US" sz="1100" dirty="0">
+                <a:solidFill>
+                  <a:schemeClr val="accent6"/>
+                </a:solidFill>
+              </a:rPr>
+              <a:t>Oct 12</a:t>
+            </a:r>
+            <a:endParaRPr lang="en-US" sz="1100" dirty="0"/>
+          </a:p>
+        </p:txBody>
+      </p:sp>
+      <p:sp>
+        <p:nvSpPr>
+          <p:cNvPr id="5" name="week line 1"/>
+          <p:cNvSpPr/>
+          <p:nvPr/>
+        </p:nvSpPr>
+        <p:spPr>
+          <a:xfrm>
+            <a:off x="4817872" y="1600200"/>
+            <a:ext cx="0" cy="4069080"/>
+          </a:xfrm>
+          <a:prstGeom prst="line">
+            <a:avLst/>
+          </a:prstGeom>
+          <a:noFill/>
+          <a:ln w="9525">
+            <a:solidFill>
+              <a:srgbClr val="D5DAE0"/>
+            </a:solidFill>
+            <a:prstDash val="solid"/>
+          </a:ln>
+        </p:spPr>
+      </p:sp>
+      <p:sp>
+        <p:nvSpPr>
+          <p:cNvPr id="6" name="week label 1"/>
+          <p:cNvSpPr txBox="1"/>
+          <p:nvPr/>
+        </p:nvSpPr>
+        <p:spPr>
+          <a:xfrm>
+            <a:off x="4452112" y="1234440"/>
+            <a:ext cx="731520" cy="274320"/>
+          </a:xfrm>
+          <a:prstGeom prst="rect">
+            <a:avLst/>
+          </a:prstGeom>
+          <a:noFill/>
+          <a:ln/>
+        </p:spPr>
+        <p:txBody>
+          <a:bodyPr wrap="square" lIns="0" tIns="0" rIns="0" bIns="0" rtlCol="0" anchor="ctr"/>
+          <a:lstStyle/>
+          <a:p>
+            <a:pPr algn="ctr" indent="0" marL="0">
+              <a:buNone/>
+            </a:pPr>
+            <a:r>
+              <a:rPr lang="en-US" sz="1100" dirty="0">
+                <a:solidFill>
+                  <a:schemeClr val="accent6"/>
+                </a:solidFill>
+              </a:rPr>
+              <a:t>Oct 19</a:t>
+            </a:r>
+            <a:endParaRPr lang="en-US" sz="1100" dirty="0"/>
+          </a:p>
+        </p:txBody>
+      </p:sp>
+      <p:sp>
+        <p:nvSpPr>
+          <p:cNvPr id="7" name="week line 2"/>
+          <p:cNvSpPr/>
+          <p:nvPr/>
+        </p:nvSpPr>
+        <p:spPr>
+          <a:xfrm>
+            <a:off x="6069584" y="1600200"/>
+            <a:ext cx="0" cy="4069080"/>
+          </a:xfrm>
+          <a:prstGeom prst="line">
+            <a:avLst/>
+          </a:prstGeom>
+          <a:noFill/>
+          <a:ln w="9525">
+            <a:solidFill>
+              <a:srgbClr val="D5DAE0"/>
+            </a:solidFill>
+            <a:prstDash val="solid"/>
+          </a:ln>
+        </p:spPr>
+      </p:sp>
+      <p:sp>
+        <p:nvSpPr>
+          <p:cNvPr id="8" name="week label 2"/>
+          <p:cNvSpPr txBox="1"/>
+          <p:nvPr/>
+        </p:nvSpPr>
+        <p:spPr>
+          <a:xfrm>
+            <a:off x="5703824" y="1234440"/>
+            <a:ext cx="731520" cy="274320"/>
+          </a:xfrm>
+          <a:prstGeom prst="rect">
+            <a:avLst/>
+          </a:prstGeom>
+          <a:noFill/>
+          <a:ln/>
+        </p:spPr>
+        <p:txBody>
+          <a:bodyPr wrap="square" lIns="0" tIns="0" rIns="0" bIns="0" rtlCol="0" anchor="ctr"/>
+          <a:lstStyle/>
+          <a:p>
+            <a:pPr algn="ctr" indent="0" marL="0">
+              <a:buNone/>
+            </a:pPr>
+            <a:r>
+              <a:rPr lang="en-US" sz="1100" dirty="0">
+                <a:solidFill>
+                  <a:schemeClr val="accent6"/>
+                </a:solidFill>
+              </a:rPr>
+              <a:t>Oct 26</a:t>
+            </a:r>
+            <a:endParaRPr lang="en-US" sz="1100" dirty="0"/>
+          </a:p>
+        </p:txBody>
+      </p:sp>
+      <p:sp>
+        <p:nvSpPr>
+          <p:cNvPr id="9" name="week line 3"/>
+          <p:cNvSpPr/>
+          <p:nvPr/>
+        </p:nvSpPr>
+        <p:spPr>
+          <a:xfrm>
+            <a:off x="7321296" y="1600200"/>
+            <a:ext cx="0" cy="4069080"/>
+          </a:xfrm>
+          <a:prstGeom prst="line">
+            <a:avLst/>
+          </a:prstGeom>
+          <a:noFill/>
+          <a:ln w="9525">
+            <a:solidFill>
+              <a:srgbClr val="D5DAE0"/>
+            </a:solidFill>
+            <a:prstDash val="solid"/>
+          </a:ln>
+        </p:spPr>
+      </p:sp>
+      <p:sp>
+        <p:nvSpPr>
+          <p:cNvPr id="10" name="week label 3"/>
+          <p:cNvSpPr txBox="1"/>
+          <p:nvPr/>
+        </p:nvSpPr>
+        <p:spPr>
+          <a:xfrm>
+            <a:off x="6955536" y="1234440"/>
+            <a:ext cx="731520" cy="274320"/>
+          </a:xfrm>
+          <a:prstGeom prst="rect">
+            <a:avLst/>
+          </a:prstGeom>
+          <a:noFill/>
+          <a:ln/>
+        </p:spPr>
+        <p:txBody>
+          <a:bodyPr wrap="square" lIns="0" tIns="0" rIns="0" bIns="0" rtlCol="0" anchor="ctr"/>
+          <a:lstStyle/>
+          <a:p>
+            <a:pPr algn="ctr" indent="0" marL="0">
+              <a:buNone/>
+            </a:pPr>
+            <a:r>
+              <a:rPr lang="en-US" sz="1100" dirty="0">
+                <a:solidFill>
+                  <a:schemeClr val="accent6"/>
+                </a:solidFill>
+              </a:rPr>
+              <a:t>Nov 2</a:t>
+            </a:r>
+            <a:endParaRPr lang="en-US" sz="1100" dirty="0"/>
+          </a:p>
+        </p:txBody>
+      </p:sp>
+      <p:sp>
+        <p:nvSpPr>
+          <p:cNvPr id="11" name="week line 4"/>
+          <p:cNvSpPr/>
+          <p:nvPr/>
+        </p:nvSpPr>
+        <p:spPr>
+          <a:xfrm>
+            <a:off x="8573008" y="1600200"/>
+            <a:ext cx="0" cy="4069080"/>
+          </a:xfrm>
+          <a:prstGeom prst="line">
+            <a:avLst/>
+          </a:prstGeom>
+          <a:noFill/>
+          <a:ln w="9525">
+            <a:solidFill>
+              <a:srgbClr val="D5DAE0"/>
+            </a:solidFill>
+            <a:prstDash val="solid"/>
+          </a:ln>
+        </p:spPr>
+      </p:sp>
+      <p:sp>
+        <p:nvSpPr>
+          <p:cNvPr id="12" name="week label 4"/>
+          <p:cNvSpPr txBox="1"/>
+          <p:nvPr/>
+        </p:nvSpPr>
+        <p:spPr>
+          <a:xfrm>
+            <a:off x="8207248" y="1234440"/>
+            <a:ext cx="731520" cy="274320"/>
+          </a:xfrm>
+          <a:prstGeom prst="rect">
+            <a:avLst/>
+          </a:prstGeom>
+          <a:noFill/>
+          <a:ln/>
+        </p:spPr>
+        <p:txBody>
+          <a:bodyPr wrap="square" lIns="0" tIns="0" rIns="0" bIns="0" rtlCol="0" anchor="ctr"/>
+          <a:lstStyle/>
+          <a:p>
+            <a:pPr algn="ctr" indent="0" marL="0">
+              <a:buNone/>
+            </a:pPr>
+            <a:r>
+              <a:rPr lang="en-US" sz="1100" dirty="0">
+                <a:solidFill>
+                  <a:schemeClr val="accent6"/>
+                </a:solidFill>
+              </a:rPr>
+              <a:t>Nov 9</a:t>
+            </a:r>
+            <a:endParaRPr lang="en-US" sz="1100" dirty="0"/>
+          </a:p>
+        </p:txBody>
+      </p:sp>
+      <p:sp>
+        <p:nvSpPr>
+          <p:cNvPr id="13" name="week line 5"/>
+          <p:cNvSpPr/>
+          <p:nvPr/>
+        </p:nvSpPr>
+        <p:spPr>
+          <a:xfrm>
+            <a:off x="9824720" y="1600200"/>
+            <a:ext cx="0" cy="4069080"/>
+          </a:xfrm>
+          <a:prstGeom prst="line">
+            <a:avLst/>
+          </a:prstGeom>
+          <a:noFill/>
+          <a:ln w="9525">
+            <a:solidFill>
+              <a:srgbClr val="D5DAE0"/>
+            </a:solidFill>
+            <a:prstDash val="solid"/>
+          </a:ln>
+        </p:spPr>
+      </p:sp>
+      <p:sp>
+        <p:nvSpPr>
+          <p:cNvPr id="14" name="week label 5"/>
+          <p:cNvSpPr txBox="1"/>
+          <p:nvPr/>
+        </p:nvSpPr>
+        <p:spPr>
+          <a:xfrm>
+            <a:off x="9458960" y="1234440"/>
+            <a:ext cx="731520" cy="274320"/>
+          </a:xfrm>
+          <a:prstGeom prst="rect">
+            <a:avLst/>
+          </a:prstGeom>
+          <a:noFill/>
+          <a:ln/>
+        </p:spPr>
+        <p:txBody>
+          <a:bodyPr wrap="square" lIns="0" tIns="0" rIns="0" bIns="0" rtlCol="0" anchor="ctr"/>
+          <a:lstStyle/>
+          <a:p>
+            <a:pPr algn="ctr" indent="0" marL="0">
+              <a:buNone/>
+            </a:pPr>
+            <a:r>
+              <a:rPr lang="en-US" sz="1100" dirty="0">
+                <a:solidFill>
+                  <a:schemeClr val="accent6"/>
+                </a:solidFill>
+              </a:rPr>
+              <a:t>Nov 16</a:t>
+            </a:r>
+            <a:endParaRPr lang="en-US" sz="1100" dirty="0"/>
+          </a:p>
+        </p:txBody>
+      </p:sp>
+      <p:sp>
+        <p:nvSpPr>
+          <p:cNvPr id="15" name="week line 6"/>
+          <p:cNvSpPr/>
+          <p:nvPr/>
+        </p:nvSpPr>
+        <p:spPr>
+          <a:xfrm>
+            <a:off x="11076432" y="1600200"/>
+            <a:ext cx="0" cy="4069080"/>
+          </a:xfrm>
+          <a:prstGeom prst="line">
+            <a:avLst/>
+          </a:prstGeom>
+          <a:noFill/>
+          <a:ln w="9525">
+            <a:solidFill>
+              <a:srgbClr val="D5DAE0"/>
+            </a:solidFill>
+            <a:prstDash val="solid"/>
+          </a:ln>
+        </p:spPr>
+      </p:sp>
+      <p:sp>
+        <p:nvSpPr>
+          <p:cNvPr id="16" name="week label 6"/>
+          <p:cNvSpPr txBox="1"/>
+          <p:nvPr/>
+        </p:nvSpPr>
+        <p:spPr>
+          <a:xfrm>
+            <a:off x="10710672" y="1234440"/>
+            <a:ext cx="731520" cy="274320"/>
+          </a:xfrm>
+          <a:prstGeom prst="rect">
+            <a:avLst/>
+          </a:prstGeom>
+          <a:noFill/>
+          <a:ln/>
+        </p:spPr>
+        <p:txBody>
+          <a:bodyPr wrap="square" lIns="0" tIns="0" rIns="0" bIns="0" rtlCol="0" anchor="ctr"/>
+          <a:lstStyle/>
+          <a:p>
+            <a:pPr algn="ctr" indent="0" marL="0">
+              <a:buNone/>
+            </a:pPr>
+            <a:r>
+              <a:rPr lang="en-US" sz="1100" dirty="0">
+                <a:solidFill>
+                  <a:schemeClr val="accent6"/>
+                </a:solidFill>
+              </a:rPr>
+              <a:t>Nov 23</a:t>
+            </a:r>
+            <a:endParaRPr lang="en-US" sz="1100" dirty="0"/>
+          </a:p>
+        </p:txBody>
+      </p:sp>
+      <p:sp>
+        <p:nvSpPr>
+          <p:cNvPr id="17" name="bar label 0"/>
+          <p:cNvSpPr txBox="1"/>
+          <p:nvPr/>
+        </p:nvSpPr>
+        <p:spPr>
+          <a:xfrm>
+            <a:off x="548640" y="1737360"/>
+            <a:ext cx="2926080" cy="502920"/>
+          </a:xfrm>
+          <a:prstGeom prst="rect">
+            <a:avLst/>
+          </a:prstGeom>
+          <a:noFill/>
+          <a:ln/>
+        </p:spPr>
+        <p:txBody>
+          <a:bodyPr wrap="square" lIns="0" tIns="0" rIns="0" bIns="0" rtlCol="0" anchor="ctr"/>
+          <a:lstStyle/>
+          <a:p>
+            <a:pPr indent="0" marL="0">
+              <a:buNone/>
+            </a:pPr>
+            <a:r>
+              <a:rPr lang="en-US" sz="1200" dirty="0">
+                <a:solidFill>
+                  <a:schemeClr val="tx1"/>
+                </a:solidFill>
+              </a:rPr>
+              <a:t>Done (Oct 11): data model, handover, FL + delivery, agent, M2, M3</a:t>
+            </a:r>
+            <a:endParaRPr lang="en-US" sz="1200" dirty="0"/>
+          </a:p>
+        </p:txBody>
+      </p:sp>
+      <p:sp>
+        <p:nvSpPr>
+          <p:cNvPr id="18" name="bar 0"/>
+          <p:cNvSpPr/>
+          <p:nvPr/>
+        </p:nvSpPr>
+        <p:spPr>
+          <a:xfrm>
+            <a:off x="3566160" y="1828800"/>
+            <a:ext cx="178816" cy="329184"/>
+          </a:xfrm>
+          <a:prstGeom prst="roundRect">
+            <a:avLst>
+              <a:gd name="adj" fmla="val 30682"/>
+            </a:avLst>
+          </a:prstGeom>
+          <a:solidFill>
+            <a:schemeClr val="accent6"/>
+          </a:solidFill>
+          <a:ln w="12700">
+            <a:solidFill>
+              <a:schemeClr val="accent6"/>
+            </a:solidFill>
+            <a:prstDash val="solid"/>
+          </a:ln>
+        </p:spPr>
+      </p:sp>
+      <p:sp>
+        <p:nvSpPr>
+          <p:cNvPr id="19" name="bar label 1"/>
+          <p:cNvSpPr txBox="1"/>
+          <p:nvPr/>
+        </p:nvSpPr>
+        <p:spPr>
+          <a:xfrm>
+            <a:off x="548640" y="2395728"/>
+            <a:ext cx="2926080" cy="502920"/>
+          </a:xfrm>
+          <a:prstGeom prst="rect">
+            <a:avLst/>
+          </a:prstGeom>
+          <a:noFill/>
+          <a:ln/>
+        </p:spPr>
+        <p:txBody>
+          <a:bodyPr wrap="square" lIns="0" tIns="0" rIns="0" bIns="0" rtlCol="0" anchor="ctr"/>
+          <a:lstStyle/>
+          <a:p>
+            <a:pPr indent="0" marL="0">
+              <a:buNone/>
+            </a:pPr>
+            <a:r>
+              <a:rPr lang="en-US" sz="1200" dirty="0">
+                <a:solidFill>
+                  <a:schemeClr val="tx1"/>
+                </a:solidFill>
+              </a:rPr>
+              <a:t>Firmware on MQTT; ETSI Sandbox zone / RNIS subscriptions</a:t>
+            </a:r>
+            <a:endParaRPr lang="en-US" sz="1200" dirty="0"/>
+          </a:p>
+        </p:txBody>
+      </p:sp>
+      <p:sp>
+        <p:nvSpPr>
+          <p:cNvPr id="20" name="bar 1"/>
+          <p:cNvSpPr/>
+          <p:nvPr/>
+        </p:nvSpPr>
+        <p:spPr>
+          <a:xfrm>
+            <a:off x="5175504" y="2487168"/>
+            <a:ext cx="1966976" cy="329184"/>
+          </a:xfrm>
+          <a:prstGeom prst="roundRect">
+            <a:avLst>
+              <a:gd name="adj" fmla="val 16667"/>
+            </a:avLst>
+          </a:prstGeom>
+          <a:solidFill>
+            <a:schemeClr val="accent2"/>
+          </a:solidFill>
+          <a:ln w="12700">
+            <a:solidFill>
+              <a:schemeClr val="accent2"/>
+            </a:solidFill>
+            <a:prstDash val="solid"/>
+          </a:ln>
+        </p:spPr>
+      </p:sp>
+      <p:sp>
+        <p:nvSpPr>
+          <p:cNvPr id="21" name="bar label 2"/>
+          <p:cNvSpPr txBox="1"/>
+          <p:nvPr/>
+        </p:nvSpPr>
+        <p:spPr>
+          <a:xfrm>
+            <a:off x="548640" y="3054096"/>
+            <a:ext cx="2926080" cy="502920"/>
+          </a:xfrm>
+          <a:prstGeom prst="rect">
+            <a:avLst/>
+          </a:prstGeom>
+          <a:noFill/>
+          <a:ln/>
+        </p:spPr>
+        <p:txBody>
+          <a:bodyPr wrap="square" lIns="0" tIns="0" rIns="0" bIns="0" rtlCol="0" anchor="ctr"/>
+          <a:lstStyle/>
+          <a:p>
+            <a:pPr indent="0" marL="0">
+              <a:buNone/>
+            </a:pPr>
+            <a:r>
+              <a:rPr lang="en-US" sz="1200" dirty="0">
+                <a:solidFill>
+                  <a:schemeClr val="tx1"/>
+                </a:solidFill>
+              </a:rPr>
+              <a:t>Run on the ESTIMED VM; containers for orchestrated apps</a:t>
+            </a:r>
+            <a:endParaRPr lang="en-US" sz="1200" dirty="0"/>
+          </a:p>
+        </p:txBody>
+      </p:sp>
+      <p:sp>
+        <p:nvSpPr>
+          <p:cNvPr id="22" name="bar 2"/>
+          <p:cNvSpPr/>
+          <p:nvPr/>
+        </p:nvSpPr>
+        <p:spPr>
+          <a:xfrm>
+            <a:off x="6069584" y="3145536"/>
+            <a:ext cx="2861056" cy="329184"/>
+          </a:xfrm>
+          <a:prstGeom prst="roundRect">
+            <a:avLst>
+              <a:gd name="adj" fmla="val 16667"/>
+            </a:avLst>
+          </a:prstGeom>
+          <a:solidFill>
+            <a:schemeClr val="accent4"/>
+          </a:solidFill>
+          <a:ln w="12700">
+            <a:solidFill>
+              <a:schemeClr val="accent4"/>
+            </a:solidFill>
+            <a:prstDash val="solid"/>
+          </a:ln>
+        </p:spPr>
+      </p:sp>
+      <p:sp>
+        <p:nvSpPr>
+          <p:cNvPr id="23" name="bar label 3"/>
+          <p:cNvSpPr txBox="1"/>
+          <p:nvPr/>
+        </p:nvSpPr>
+        <p:spPr>
+          <a:xfrm>
+            <a:off x="548640" y="3712464"/>
+            <a:ext cx="2926080" cy="502920"/>
+          </a:xfrm>
+          <a:prstGeom prst="rect">
+            <a:avLst/>
+          </a:prstGeom>
+          <a:noFill/>
+          <a:ln/>
+        </p:spPr>
+        <p:txBody>
+          <a:bodyPr wrap="square" lIns="0" tIns="0" rIns="0" bIns="0" rtlCol="0" anchor="ctr"/>
+          <a:lstStyle/>
+          <a:p>
+            <a:pPr indent="0" marL="0">
+              <a:buNone/>
+            </a:pPr>
+            <a:r>
+              <a:rPr lang="en-US" sz="1200" dirty="0">
+                <a:solidFill>
+                  <a:schemeClr val="tx1"/>
+                </a:solidFill>
+              </a:rPr>
+              <a:t>Live demo on guidance_fl; agent questions with Claude</a:t>
+            </a:r>
+            <a:endParaRPr lang="en-US" sz="1200" dirty="0"/>
+          </a:p>
+        </p:txBody>
+      </p:sp>
+      <p:sp>
+        <p:nvSpPr>
+          <p:cNvPr id="24" name="bar 3"/>
+          <p:cNvSpPr/>
+          <p:nvPr/>
+        </p:nvSpPr>
+        <p:spPr>
+          <a:xfrm>
+            <a:off x="7142480" y="3803904"/>
+            <a:ext cx="3039872" cy="329184"/>
+          </a:xfrm>
+          <a:prstGeom prst="roundRect">
+            <a:avLst>
+              <a:gd name="adj" fmla="val 16667"/>
+            </a:avLst>
+          </a:prstGeom>
+          <a:solidFill>
+            <a:schemeClr val="accent5"/>
+          </a:solidFill>
+          <a:ln w="12700">
+            <a:solidFill>
+              <a:schemeClr val="accent5"/>
+            </a:solidFill>
+            <a:prstDash val="solid"/>
+          </a:ln>
+        </p:spPr>
+      </p:sp>
+      <p:sp>
+        <p:nvSpPr>
+          <p:cNvPr id="25" name="bar label 4"/>
+          <p:cNvSpPr txBox="1"/>
+          <p:nvPr/>
+        </p:nvSpPr>
+        <p:spPr>
+          <a:xfrm>
+            <a:off x="548640" y="4370832"/>
+            <a:ext cx="2926080" cy="502920"/>
+          </a:xfrm>
+          <a:prstGeom prst="rect">
+            <a:avLst/>
+          </a:prstGeom>
+          <a:noFill/>
+          <a:ln/>
+        </p:spPr>
+        <p:txBody>
+          <a:bodyPr wrap="square" lIns="0" tIns="0" rIns="0" bIns="0" rtlCol="0" anchor="ctr"/>
+          <a:lstStyle/>
+          <a:p>
+            <a:pPr indent="0" marL="0">
+              <a:buNone/>
+            </a:pPr>
+            <a:r>
+              <a:rPr lang="en-US" sz="1200" dirty="0">
+                <a:solidFill>
+                  <a:schemeClr val="tx1"/>
+                </a:solidFill>
+              </a:rPr>
+              <a:t>M5  ESP32 boards, user study, article, video, public repo</a:t>
+            </a:r>
+            <a:endParaRPr lang="en-US" sz="1200" dirty="0"/>
+          </a:p>
+        </p:txBody>
+      </p:sp>
+      <p:sp>
+        <p:nvSpPr>
+          <p:cNvPr id="26" name="bar 4"/>
+          <p:cNvSpPr/>
+          <p:nvPr/>
+        </p:nvSpPr>
+        <p:spPr>
+          <a:xfrm>
+            <a:off x="8751824" y="4462272"/>
+            <a:ext cx="1966976" cy="329184"/>
+          </a:xfrm>
+          <a:prstGeom prst="roundRect">
+            <a:avLst>
+              <a:gd name="adj" fmla="val 16667"/>
+            </a:avLst>
+          </a:prstGeom>
+          <a:solidFill>
+            <a:schemeClr val="accent3"/>
+          </a:solidFill>
+          <a:ln w="12700">
+            <a:solidFill>
+              <a:schemeClr val="accent3"/>
+            </a:solidFill>
+            <a:prstDash val="solid"/>
+          </a:ln>
+        </p:spPr>
+      </p:sp>
+      <p:sp>
+        <p:nvSpPr>
+          <p:cNvPr id="27" name="bar label 5"/>
+          <p:cNvSpPr txBox="1"/>
+          <p:nvPr/>
+        </p:nvSpPr>
+        <p:spPr>
+          <a:xfrm>
+            <a:off x="548640" y="5029200"/>
+            <a:ext cx="2926080" cy="502920"/>
+          </a:xfrm>
+          <a:prstGeom prst="rect">
+            <a:avLst/>
+          </a:prstGeom>
+          <a:noFill/>
+          <a:ln/>
+        </p:spPr>
+        <p:txBody>
+          <a:bodyPr wrap="square" lIns="0" tIns="0" rIns="0" bIns="0" rtlCol="0" anchor="ctr"/>
+          <a:lstStyle/>
+          <a:p>
+            <a:pPr indent="0" marL="0">
+              <a:buNone/>
+            </a:pPr>
+            <a:r>
+              <a:rPr lang="en-US" sz="1200" dirty="0">
+                <a:solidFill>
+                  <a:schemeClr val="tx1"/>
+                </a:solidFill>
+              </a:rPr>
+              <a:t>Finals</a:t>
+            </a:r>
+            <a:endParaRPr lang="en-US" sz="1200" dirty="0"/>
+          </a:p>
+        </p:txBody>
+      </p:sp>
+      <p:sp>
+        <p:nvSpPr>
+          <p:cNvPr id="28" name="bar 5"/>
+          <p:cNvSpPr/>
+          <p:nvPr/>
+        </p:nvSpPr>
+        <p:spPr>
+          <a:xfrm>
+            <a:off x="11076432" y="5120640"/>
+            <a:ext cx="536448" cy="329184"/>
+          </a:xfrm>
+          <a:prstGeom prst="roundRect">
+            <a:avLst>
+              <a:gd name="adj" fmla="val 16667"/>
+            </a:avLst>
+          </a:prstGeom>
+          <a:solidFill>
+            <a:schemeClr val="tx2"/>
+          </a:solidFill>
+          <a:ln w="12700">
+            <a:solidFill>
+              <a:schemeClr val="tx2"/>
+            </a:solidFill>
+            <a:prstDash val="solid"/>
+          </a:ln>
+        </p:spPr>
+      </p:sp>
+      <p:sp>
+        <p:nvSpPr>
+          <p:cNvPr id="29" name="deadline 0"/>
+          <p:cNvSpPr/>
+          <p:nvPr/>
+        </p:nvSpPr>
+        <p:spPr>
+          <a:xfrm>
+            <a:off x="5175504" y="1600200"/>
+            <a:ext cx="0" cy="4069080"/>
+          </a:xfrm>
+          <a:prstGeom prst="line">
+            <a:avLst/>
+          </a:prstGeom>
+          <a:noFill/>
+          <a:ln w="19050">
+            <a:solidFill>
+              <a:schemeClr val="accent3"/>
+            </a:solidFill>
+            <a:prstDash val="dash"/>
+          </a:ln>
+        </p:spPr>
+      </p:sp>
+      <p:sp>
+        <p:nvSpPr>
+          <p:cNvPr id="30" name="deadline label 0"/>
+          <p:cNvSpPr txBox="1"/>
+          <p:nvPr/>
+        </p:nvSpPr>
+        <p:spPr>
+          <a:xfrm>
+            <a:off x="4352544" y="5715000"/>
+            <a:ext cx="1645920" cy="274320"/>
+          </a:xfrm>
+          <a:prstGeom prst="rect">
+            <a:avLst/>
+          </a:prstGeom>
+          <a:noFill/>
+          <a:ln/>
+        </p:spPr>
+        <p:txBody>
+          <a:bodyPr wrap="square" lIns="0" tIns="0" rIns="0" bIns="0" rtlCol="0" anchor="ctr"/>
+          <a:lstStyle/>
+          <a:p>
+            <a:pPr algn="ctr" indent="0" marL="0">
+              <a:buNone/>
+            </a:pPr>
+            <a:r>
+              <a:rPr lang="en-US" sz="1100" b="1" dirty="0">
+                <a:solidFill>
+                  <a:schemeClr val="accent3"/>
+                </a:solidFill>
+              </a:rPr>
+              <a:t>Oct 20 interim</a:t>
+            </a:r>
+            <a:endParaRPr lang="en-US" sz="1100" dirty="0"/>
+          </a:p>
+        </p:txBody>
+      </p:sp>
+      <p:sp>
+        <p:nvSpPr>
+          <p:cNvPr id="31" name="deadline 1"/>
+          <p:cNvSpPr/>
+          <p:nvPr/>
+        </p:nvSpPr>
+        <p:spPr>
+          <a:xfrm>
+            <a:off x="10718800" y="1600200"/>
+            <a:ext cx="0" cy="4069080"/>
+          </a:xfrm>
+          <a:prstGeom prst="line">
+            <a:avLst/>
+          </a:prstGeom>
+          <a:noFill/>
+          <a:ln w="19050">
+            <a:solidFill>
+              <a:schemeClr val="accent3"/>
+            </a:solidFill>
+            <a:prstDash val="dash"/>
+          </a:ln>
+        </p:spPr>
+      </p:sp>
+      <p:sp>
+        <p:nvSpPr>
+          <p:cNvPr id="32" name="deadline label 1"/>
+          <p:cNvSpPr txBox="1"/>
+          <p:nvPr/>
+        </p:nvSpPr>
+        <p:spPr>
+          <a:xfrm>
+            <a:off x="9895840" y="5715000"/>
+            <a:ext cx="1645920" cy="274320"/>
+          </a:xfrm>
+          <a:prstGeom prst="rect">
+            <a:avLst/>
+          </a:prstGeom>
+          <a:noFill/>
+          <a:ln/>
+        </p:spPr>
+        <p:txBody>
+          <a:bodyPr wrap="square" lIns="0" tIns="0" rIns="0" bIns="0" rtlCol="0" anchor="ctr"/>
+          <a:lstStyle/>
+          <a:p>
+            <a:pPr algn="ctr" indent="0" marL="0">
+              <a:buNone/>
+            </a:pPr>
+            <a:r>
+              <a:rPr lang="en-US" sz="1100" b="1" dirty="0">
+                <a:solidFill>
+                  <a:schemeClr val="accent3"/>
+                </a:solidFill>
+              </a:rPr>
+              <a:t>Nov 20 code freeze</a:t>
+            </a:r>
+            <a:endParaRPr lang="en-US" sz="1100" dirty="0"/>
+          </a:p>
+        </p:txBody>
+      </p:sp>
+      <p:sp>
+        <p:nvSpPr>
+          <p:cNvPr id="33" name="legend"/>
+          <p:cNvSpPr txBox="1"/>
+          <p:nvPr/>
+        </p:nvSpPr>
+        <p:spPr>
+          <a:xfrm>
+            <a:off x="548640" y="6035040"/>
+            <a:ext cx="11064240" cy="274320"/>
+          </a:xfrm>
+          <a:prstGeom prst="rect">
+            <a:avLst/>
+          </a:prstGeom>
+          <a:noFill/>
+          <a:ln/>
+        </p:spPr>
+        <p:txBody>
+          <a:bodyPr wrap="square" lIns="0" tIns="0" rIns="0" bIns="0" rtlCol="0" anchor="ctr"/>
+          <a:lstStyle/>
+          <a:p>
+            <a:pPr indent="0" marL="0">
+              <a:buNone/>
+            </a:pPr>
+            <a:r>
+              <a:rPr lang="en-US" sz="1100" dirty="0">
+                <a:solidFill>
+                  <a:schemeClr val="accent6"/>
+                </a:solidFill>
+              </a:rPr>
+              <a:t>Built ahead of plan (Oct 11): all M1–M4 technical items  ·  Blue: protocols  ·  Orange: MEC / deployment  ·  Green: AI  ·  Red: demo and communication</a:t>
+            </a:r>
+            <a:endParaRPr lang="en-US" sz="1100" dirty="0"/>
+          </a:p>
+        </p:txBody>
+      </p:sp>
+      <p:sp>
+        <p:nvSpPr>
+          <p:cNvPr id="25" name="Slide Number Placeholder 0"/>
+          <p:cNvSpPr>
+            <a:spLocks noGrp="1"/>
+          </p:cNvSpPr>
+          <p:nvPr>
+            <p:ph type="sldNum" sz="quarter" idx="4294967295"/>
+          </p:nvPr>
+        </p:nvSpPr>
+        <p:spPr>
+          <a:xfrm>
+            <a:off x="11155680" y="6400800"/>
+            <a:ext cx="457200" cy="274320"/>
+          </a:xfrm>
+          <a:prstGeom prst="rect">
+            <a:avLst/>
+          </a:prstGeom>
+          <a:extLst>
+            <a:ext uri="{C572A759-6A51-4108-AA02-DFA0A04FC94B}">
+              <ma14:wrappingTextBoxFlag xmlns:ma14="http://schemas.microsoft.com/office/mac/drawingml/2011/main" val="0"/>
+            </a:ext>
+          </a:extLst>
+        </p:spPr>
+        <p:txBody>
+          <a:bodyPr/>
+          <a:lstStyle>
+            <a:lvl1pPr>
+              <a:defRPr sz="1000">
+                <a:solidFill>
+                  <a:schemeClr val="accent6"/>
+                </a:solidFill>
+              </a:defRPr>
+            </a:lvl1pPr>
+          </a:lstStyle>
+          <a:p>
+            <a:pPr algn="r"/>
+            <a:fld id="{F7021451-1387-4CA6-816F-3879F97B5CBC}" type="slidenum">
+              <a:rPr b="0" lang="en-US"/>
+              <a:t>15</a:t>
+            </a:fld>
+            <a:endParaRPr lang="en-US"/>
+          </a:p>
+        </p:txBody>
+      </p:sp>
+    </p:spTree>
+  </p:cSld>
+  <p:clrMapOvr>
+    <a:masterClrMapping/>
+  </p:clrMapOvr>
+</p:sld>
+</file>
+
+<file path=ppt/slides/slide16.xml><?xml version="1.0" encoding="utf-8"?>
+<p:sld xmlns:a="http://schemas.openxmlformats.org/drawingml/2006/main" xmlns:r="http://schemas.openxmlformats.org/officeDocument/2006/relationships" xmlns:p="http://schemas.openxmlformats.org/presentationml/2006/main">
+  <p:cSld name="Slide 16">
+    <p:spTree>
+      <p:nvGrpSpPr>
+        <p:cNvPr id="1" name=""/>
+        <p:cNvGrpSpPr/>
+        <p:nvPr/>
+      </p:nvGrpSpPr>
+      <p:grpSpPr>
+        <a:xfrm>
+          <a:off x="0" y="0"/>
+          <a:ext cx="0" cy="0"/>
+          <a:chOff x="0" y="0"/>
+          <a:chExt cx="0" cy="0"/>
+        </a:xfrm>
+      </p:grpSpPr>
+      <p:sp>
+        <p:nvSpPr>
+          <p:cNvPr id="2" name="Text 0"/>
+          <p:cNvSpPr/>
+          <p:nvPr>
+            <p:ph idx="100" type="title" hasCustomPrompt="1"/>
+          </p:nvPr>
+        </p:nvSpPr>
+        <p:spPr>
+          <a:xfrm>
+            <a:off x="548640" y="320040"/>
+            <a:ext cx="11064240" cy="731520"/>
+          </a:xfrm>
+          <a:prstGeom prst="rect">
+            <a:avLst/>
+          </a:prstGeom>
+          <a:noFill/>
+          <a:ln/>
+        </p:spPr>
+        <p:txBody>
+          <a:bodyPr wrap="square" lIns="0" tIns="0" rIns="0" bIns="0" rtlCol="0" anchor="ctr"/>
+          <a:lstStyle/>
+          <a:p>
+            <a:pPr algn="l" indent="0" marL="0">
+              <a:buNone/>
+            </a:pPr>
+            <a:r>
+              <a:rPr lang="en-US" sz="3000" b="1" dirty="0">
+                <a:solidFill>
+                  <a:schemeClr val="tx2"/>
+                </a:solidFill>
+              </a:rPr>
               <a:t>Milestones, rubric criteria and acceptance checks</a:t>
             </a:r>
             <a:endParaRPr lang="en-US" sz="3000" dirty="0"/>
@@ -6836,7 +9084,7 @@
       </p:sp>
       <p:graphicFrame>
         <p:nvGraphicFramePr>
-          <p:cNvPr id="15" name="milestone table"/>
+          <p:cNvPr id="17" name="milestone table"/>
           <p:cNvGraphicFramePr>
             <a:graphicFrameLocks noGrp="1"/>
           </p:cNvGraphicFramePr>
@@ -7357,7 +9605,7 @@
                             <a:schemeClr val="tx1"/>
                           </a:solidFill>
                         </a:rPr>
-                        <a:t>M2 · Oct 31</a:t>
+                        <a:t>M2 · done Oct 11</a:t>
                       </a:r>
                       <a:endParaRPr lang="en-US" sz="1200" dirty="0"/>
                     </a:p>
@@ -7415,7 +9663,7 @@
                             <a:schemeClr val="tx1"/>
                           </a:solidFill>
                         </a:rPr>
-                        <a:t>&lt;group&gt; fan-out of alerts per zone; &lt;pollingChannel&gt; for tags; MQTT for devices, HTTP for apps; TLS</a:t>
+                        <a:t>&lt;group&gt; fan-out per zone; &lt;pollingChannel&gt; for tags; MQTT/TLS for devices, HTTPS for apps</a:t>
                       </a:r>
                       <a:endParaRPr lang="en-US" sz="1200" dirty="0"/>
                     </a:p>
@@ -7531,7 +9779,7 @@
                             <a:schemeClr val="tx1"/>
                           </a:solidFill>
                         </a:rPr>
-                        <a:t>Same scenarios pass over MQTT; alerts reach tags behind NAT</a:t>
+                        <a:t>CI: zones 9/9, secure transport 10/10 (6 attacks refused)</a:t>
                       </a:r>
                       <a:endParaRPr lang="en-US" sz="1200" dirty="0"/>
                     </a:p>
@@ -7591,7 +9839,7 @@
                             <a:schemeClr val="tx1"/>
                           </a:solidFill>
                         </a:rPr>
-                        <a:t>M3 · Nov 10</a:t>
+                        <a:t>M3 · done Oct 11</a:t>
                       </a:r>
                       <a:endParaRPr lang="en-US" sz="1200" dirty="0"/>
                     </a:p>
@@ -7649,7 +9897,7 @@
                             <a:schemeClr val="tx1"/>
                           </a:solidFill>
                         </a:rPr>
-                        <a:t>MEC Location zone subscriptions → geofence events in oneM2M and handover trigger; bidirectional MEC–oneM2M; multi-host</a:t>
+                        <a:t>MEC zone events → oneM2M → handover trigger; bidirectional MEC–oneM2M; orchestration across hosts; swarm</a:t>
                       </a:r>
                       <a:endParaRPr lang="en-US" sz="1200" dirty="0"/>
                     </a:p>
@@ -7765,7 +10013,7 @@
                             <a:schemeClr val="tx1"/>
                           </a:solidFill>
                         </a:rPr>
-                        <a:t>Zone event triggers a handover in a scripted run</a:t>
+                        <a:t>CI: mobility 10/10, orchestration 11/11, swarm 9/9</a:t>
                       </a:r>
                       <a:endParaRPr lang="en-US" sz="1200" dirty="0"/>
                     </a:p>
@@ -7825,7 +10073,7 @@
                             <a:schemeClr val="tx1"/>
                           </a:solidFill>
                         </a:rPr>
-                        <a:t>M4 · Nov 17</a:t>
+                        <a:t>M4 · done Oct 11 (+ Nov 17)</a:t>
                       </a:r>
                       <a:endParaRPr lang="en-US" sz="1200" dirty="0"/>
                     </a:p>
@@ -7883,7 +10131,7 @@
                             <a:schemeClr val="tx1"/>
                           </a:solidFill>
                         </a:rPr>
-                        <a:t>Learned worker-motion model delivered to the MEC apps; agent questions with Claude</a:t>
+                        <a:t>FL model delivered to the MEC app: canary, activation, rollback; next: live demo on guidance_fl, Claude questions</a:t>
                       </a:r>
                       <a:endParaRPr lang="en-US" sz="1200" dirty="0"/>
                     </a:p>
@@ -7999,7 +10247,7 @@
                             <a:schemeClr val="tx1"/>
                           </a:solidFill>
                         </a:rPr>
-                        <a:t>Risk engine uses the federated model; agent answers validated</a:t>
+                        <a:t>CI: model delivery 8/8</a:t>
                       </a:r>
                       <a:endParaRPr lang="en-US" sz="1200" dirty="0"/>
                     </a:p>
@@ -8321,7 +10569,7 @@
             <a:pPr algn="r"/>
             <a:fld id="{F7021451-1387-4CA6-816F-3879F97B5CBC}" type="slidenum">
               <a:rPr b="0" lang="en-US"/>
-              <a:t>14</a:t>
+              <a:t>16</a:t>
             </a:fld>
             <a:endParaRPr lang="en-US"/>
           </a:p>
@@ -8335,9 +10583,9 @@
 </p:sld>
 </file>
 
-<file path=ppt/slides/slide15.xml><?xml version="1.0" encoding="utf-8"?>
+<file path=ppt/slides/slide17.xml><?xml version="1.0" encoding="utf-8"?>
 <p:sld xmlns:a="http://schemas.openxmlformats.org/drawingml/2006/main" xmlns:r="http://schemas.openxmlformats.org/officeDocument/2006/relationships" xmlns:p="http://schemas.openxmlformats.org/presentationml/2006/main">
-  <p:cSld name="Slide 15">
+  <p:cSld name="Slide 17">
     <p:spTree>
       <p:nvGrpSpPr>
         <p:cNvPr id="1" name=""/>
@@ -8924,7 +11172,7 @@
             <a:pPr algn="r"/>
             <a:fld id="{F7021451-1387-4CA6-816F-3879F97B5CBC}" type="slidenum">
               <a:rPr b="0" lang="en-US"/>
-              <a:t>15</a:t>
+              <a:t>17</a:t>
             </a:fld>
             <a:endParaRPr lang="en-US"/>
           </a:p>
@@ -8938,9 +11186,9 @@
 </p:sld>
 </file>
 
-<file path=ppt/slides/slide16.xml><?xml version="1.0" encoding="utf-8"?>
+<file path=ppt/slides/slide18.xml><?xml version="1.0" encoding="utf-8"?>
 <p:sld xmlns:a="http://schemas.openxmlformats.org/drawingml/2006/main" xmlns:r="http://schemas.openxmlformats.org/officeDocument/2006/relationships" xmlns:p="http://schemas.openxmlformats.org/presentationml/2006/main">
-  <p:cSld name="Slide 16">
+  <p:cSld name="Slide 18">
     <p:spTree>
       <p:nvGrpSpPr>
         <p:cNvPr id="1" name=""/>
@@ -9474,7 +11722,7 @@
                   <a:schemeClr val="tx1"/>
                 </a:solidFill>
               </a:rPr>
-              <a:t>Working end to end on Mobius and ACME. Already built: SDT flexContainer data model with SAREF semantics, CSE handover between zone MN-CSEs (3–11 ms interruption), federated learning through oneM2M, an AI safety agent over MCP. Collisions 100 → 4 in simulation.</a:t>
+              <a:t>Working end to end on Mobius and ACME, with all four TR-0077 clause 7 features demonstrated in CI: MEC interworking and app orchestration (7.1), handover triggered by MEC zone events (7.2), federated learning with model delivery and rollback (7.3), forklift swarm (7.4). Collisions 100 → 4 in simulation.</a:t>
             </a:r>
             <a:endParaRPr lang="en-US" sz="1500" dirty="0"/>
           </a:p>
@@ -9573,7 +11821,7 @@
                   <a:schemeClr val="tx1"/>
                 </a:solidFill>
               </a:rPr>
-              <a:t>group and pollingChannel, MQTT for devices and TLS; MEC Location zone events for geofencing and handover; multi-host deployment; ESP32 board demo, user study, hackster.io article, final video, public repository.</a:t>
+              <a:t>Run on the ESTIMED VM and the ETSI Sandbox subscription APIs; MQTT in the ESP32 firmware; ESP32 board demo, user study, hackster.io article, final video, public repository.</a:t>
             </a:r>
             <a:endParaRPr lang="en-US" sz="1500" dirty="0"/>
           </a:p>
@@ -12085,7 +14333,7 @@
                           <a:ea typeface="Calibri" pitchFamily="34" charset="-122"/>
                           <a:cs typeface="Calibri" pitchFamily="34" charset="-120"/>
                         </a:rPr>
-                        <a:t>MEC app per zone MEC host; AdvantEDGE and the ETSI MEC Sandbox; multi-host orchestration next</a:t>
+                        <a:t>One oneM2M intent → discover, select, deploy, register, provision across MEC hosts; re-placed on host crash</a:t>
                       </a:r>
                       <a:endParaRPr lang="en-US" sz="1400" dirty="0">
                         <a:latin typeface="Calibri" charset="0"/>
@@ -12282,7 +14530,7 @@
                           <a:ea typeface="Calibri" pitchFamily="34" charset="-122"/>
                           <a:cs typeface="Calibri" pitchFamily="34" charset="-120"/>
                         </a:rPr>
-                        <a:t>Local rules on each device, D2D state exchange, alert relay</a:t>
+                        <a:t>Local rules, D2D fallback; forklift swarm via &lt;group&gt;; federated model with canary and rollback</a:t>
                       </a:r>
                       <a:endParaRPr lang="en-US" sz="1400" dirty="0">
                         <a:latin typeface="Calibri" charset="0"/>
@@ -15648,7 +17896,7 @@
                   <a:schemeClr val="tx1"/>
                 </a:solidFill>
               </a:rPr>
-              <a:t>SDT flexContainers (own domain org.edgeguard.safety + standard cod:bat), labels for discovery-based onboarding, SAREF semantic query. Next: &lt;group&gt;, &lt;pollingChannel&gt;.</a:t>
+              <a:t>SDT flexContainers (own domain org.edgeguard.safety + cod:bat, plus MEC data, hosts, intents, model deployment), labels, SAREF semantic query, &lt;group&gt; fan-out per zone, &lt;pollingChannel&gt; for tags behind NAT.</a:t>
             </a:r>
             <a:endParaRPr lang="en-US" sz="1400" dirty="0"/>
           </a:p>
@@ -15855,7 +18103,7 @@
                   <a:schemeClr val="tx1"/>
                 </a:solidFill>
               </a:rPr>
-              <a:t>The MEC-IPE polls MEC 013 Location and MEC 012 RNIS and writes them as oneM2M resources (location/&lt;ue&gt;, rnis/&lt;cell&gt;), so the MEC app reads MEC data like any other device data.</a:t>
+              <a:t>MEC-IPE: MEC 013 Location and MEC 012 RNIS as oneM2M resources; event-driven: zone events and per-UE RSRP / RSRQ into SDT twins (egs:mecUe, egs:ueLoc, egs:rdLnk).</a:t>
             </a:r>
             <a:endParaRPr lang="en-US" sz="1400" dirty="0"/>
           </a:p>
@@ -15891,7 +18139,7 @@
                   <a:schemeClr val="accent2"/>
                 </a:solidFill>
               </a:rPr>
-              <a:t>Location: positions for people without a UWB fix</a:t>
+              <a:t>Bidirectional: oneM2M apps post MEC requests (zone / radio subscribe, location) into MEC-IPE/requests</a:t>
             </a:r>
             <a:endParaRPr lang="en-US" sz="1400" dirty="0"/>
           </a:p>
@@ -15905,7 +18153,7 @@
                   <a:schemeClr val="accent2"/>
                 </a:solidFill>
               </a:rPr>
-              <a:t>RNIS: cell load → adaptive reporting rate, alert priority</a:t>
+              <a:t>Zone event → oneM2M: 15–45 ms</a:t>
             </a:r>
             <a:endParaRPr lang="en-US" sz="1400" dirty="0"/>
           </a:p>
@@ -16103,7 +18351,7 @@
                   <a:schemeClr val="tx2"/>
                 </a:solidFill>
               </a:rPr>
-              <a:t>Live ETSI MEC Sandbox</a:t>
+              <a:t>Orchestration across MEC hosts</a:t>
             </a:r>
             <a:endParaRPr lang="en-US" sz="1800" dirty="0"/>
           </a:p>
@@ -16139,7 +18387,7 @@
                   <a:schemeClr val="tx1"/>
                 </a:solidFill>
               </a:rPr>
-              <a:t>Connected to the public Sandbox (try-mec.etsi.org): Location and RNIS queries feed the same pipeline as the local mock.</a:t>
+              <a:t>Hosts register as egs:mecHs; an operator creates one egs:depIn intent; the orchestrator selects, deploys via the host lifecycle API, provisions device ACPs, monitors and re-places.</a:t>
             </a:r>
             <a:endParaRPr lang="en-US" sz="1400" dirty="0"/>
           </a:p>
@@ -16175,7 +18423,7 @@
                   <a:schemeClr val="accent2"/>
                 </a:solidFill>
               </a:rPr>
-              <a:t>Planned: Location zone subscriptions → geofencing events into oneM2M (bidirectional)</a:t>
+              <a:t>Running ≈ 0.75 s after the intent; host crash → running on the next host in ≈ 2.5 s. Live public Sandbox for Location / RNIS queries</a:t>
             </a:r>
             <a:endParaRPr lang="en-US" sz="1400" dirty="0"/>
           </a:p>

--- a/docs/submissions/EdgeGuard_Interim_Report.pptx
+++ b/docs/submissions/EdgeGuard_Interim_Report.pptx
@@ -6655,7 +6655,7 @@
                   <a:schemeClr val="tx1"/>
                 </a:solidFill>
               </a:rPr>
-              <a:t>ESP32 firmware run unmodified against a real CSE in CI; hackster.io draft</a:t>
+              <a:t>ESP32 firmware run unmodified against a real CSE in CI; hackster.io article published</a:t>
             </a:r>
             <a:endParaRPr lang="en-US" sz="1400" dirty="0"/>
           </a:p>
@@ -8724,7 +8724,7 @@
                   <a:schemeClr val="tx1"/>
                 </a:solidFill>
               </a:rPr>
-              <a:t>M5  ESP32 boards, user study, article, video, public repo</a:t>
+              <a:t>M5  ESP32 boards, user study (article, video, repo: done)</a:t>
             </a:r>
             <a:endParaRPr lang="en-US" sz="1200" dirty="0"/>
           </a:p>
@@ -10365,7 +10365,7 @@
                             <a:schemeClr val="tx1"/>
                           </a:solidFill>
                         </a:rPr>
-                        <a:t>ESP32 board demo; user study (10+); hackster.io article; final video; public GitHub</a:t>
+                        <a:t>ESP32 board demo; user study (10+); done Oct 11: hackster.io article, final video, public GitHub</a:t>
                       </a:r>
                       <a:endParaRPr lang="en-US" sz="1200" dirty="0"/>
                     </a:p>
@@ -10481,7 +10481,7 @@
                             <a:schemeClr val="tx1"/>
                           </a:solidFill>
                         </a:rPr>
-                        <a:t>Article published; repo public; video under 3 min</a:t>
+                        <a:t>Done Oct 11: article published, repo public, video 2:34. Open: board demo, user study</a:t>
                       </a:r>
                       <a:endParaRPr lang="en-US" sz="1200" dirty="0"/>
                     </a:p>
@@ -11252,7 +11252,7 @@
         <p:spPr>
           <a:xfrm>
             <a:off x="731520" y="3657600"/>
-            <a:ext cx="8686800" cy="1097280"/>
+            <a:ext cx="8686800" cy="1463040"/>
           </a:xfrm>
           <a:prstGeom prst="rect">
             <a:avLst/>
@@ -11288,6 +11288,34 @@
                 </a:solidFill>
               </a:rPr>
               <a:t>Thank you</a:t>
+            </a:r>
+            <a:endParaRPr lang="en-US" sz="2000" dirty="0"/>
+          </a:p>
+          <a:p>
+            <a:pPr algn="l" indent="0" marL="0">
+              <a:buNone/>
+            </a:pPr>
+            <a:r>
+              <a:rPr lang="en-US" sz="1200" dirty="0">
+                <a:solidFill>
+                  <a:schemeClr val="bg2"/>
+                </a:solidFill>
+              </a:rPr>
+              <a:t>Code github.com/ljw22112/Edgeguard  ·  Video youtu.be/P2JI5ZG6PIg</a:t>
+            </a:r>
+            <a:endParaRPr lang="en-US" sz="2000" dirty="0"/>
+          </a:p>
+          <a:p>
+            <a:pPr algn="l" indent="0" marL="0">
+              <a:buNone/>
+            </a:pPr>
+            <a:r>
+              <a:rPr lang="en-US" sz="1200" dirty="0">
+                <a:solidFill>
+                  <a:schemeClr val="bg2"/>
+                </a:solidFill>
+              </a:rPr>
+              <a:t>Article hackster.io/ahind012/edgeguard-stop-forklift-accidents-before-they-happen-e07309</a:t>
             </a:r>
             <a:endParaRPr lang="en-US" sz="2000" dirty="0"/>
           </a:p>
@@ -11821,7 +11849,7 @@
                   <a:schemeClr val="tx1"/>
                 </a:solidFill>
               </a:rPr>
-              <a:t>Run on the ESTIMED VM and the ETSI Sandbox subscription APIs; MQTT in the ESP32 firmware; ESP32 board demo, user study, hackster.io article, final video, public repository.</a:t>
+              <a:t>Run on the ESTIMED VM and the ETSI Sandbox subscription APIs; MQTT in the ESP32 firmware; ESP32 board demo and user study. Done Oct 11: hackster.io article, final video, public repository.</a:t>
             </a:r>
             <a:endParaRPr lang="en-US" sz="1500" dirty="0"/>
           </a:p>
